--- a/lecons/F3/03_FORM4_LESSON02_Latitudes_and_Longitudes.pptx
+++ b/lecons/F3/03_FORM4_LESSON02_Latitudes_and_Longitudes.pptx
@@ -53,9 +53,22 @@
     <p:sldId id="301" r:id="rId47"/>
     <p:sldId id="302" r:id="rId48"/>
     <p:sldId id="303" r:id="rId49"/>
+    <p:sldId id="304" r:id="rId50"/>
+    <p:sldId id="305" r:id="rId51"/>
+    <p:sldId id="306" r:id="rId52"/>
+    <p:sldId id="307" r:id="rId53"/>
+    <p:sldId id="308" r:id="rId54"/>
+    <p:sldId id="309" r:id="rId55"/>
+    <p:sldId id="310" r:id="rId56"/>
+    <p:sldId id="311" r:id="rId57"/>
+    <p:sldId id="312" r:id="rId58"/>
+    <p:sldId id="313" r:id="rId59"/>
+    <p:sldId id="314" r:id="rId60"/>
+    <p:sldId id="315" r:id="rId61"/>
+    <p:sldId id="316" r:id="rId62"/>
   </p:sldIdLst>
   <p:notesMasterIdLst>
-    <p:notesMasterId r:id="rId50"/>
+    <p:notesMasterId r:id="rId63"/>
   </p:notesMasterIdLst>
   <p:sldSz cx="12192000" cy="6858000"/>
   <p:notesSz cx="6858000" cy="12192000"/>
@@ -637,7 +650,7 @@
           <a:p>
             <a:r>
               <a:rPr lang="en-US" dirty="0"/>
-              <a:t>Listen carefully to this situation from real life. Ibrahim's cousin in Douala sends a parcel to Japan. On his phone, he shows Tokyo: "35° N, 139° E". Ibrahim does not understand what these numbers mean. Think about it, because I am going to ask you some questions.</a:t>
+              <a:t>Listen carefully to this situation from real life. Ibrahim's cousin in Douala sends a parcel to Japan. On his phone, he shows the position of Tokyo: "35° N, 139° E". Ibrahim asks: "What do these numbers mean, and how can they show exactly where a town is?" Think about it, because I am going to ask you some questions.</a:t>
             </a:r>
             <a:endParaRPr lang="en-US" dirty="0"/>
           </a:p>
@@ -813,7 +826,7 @@
           <a:p>
             <a:r>
               <a:rPr lang="en-US" dirty="0"/>
-              <a:t>Good. Ibrahim does not understand the numbers that show a place.</a:t>
+              <a:t>Good. Ibrahim does not understand the numbers that give the position of a town.</a:t>
             </a:r>
             <a:endParaRPr lang="en-US" dirty="0"/>
           </a:p>
@@ -1165,7 +1178,7 @@
           <a:p>
             <a:r>
               <a:rPr lang="en-US" dirty="0"/>
-              <a:t>Good. The latitude and the longitude.</a:t>
+              <a:t>Good. The latitude and the longitude: the geographical coordinates.</a:t>
             </a:r>
             <a:endParaRPr lang="en-US" dirty="0"/>
           </a:p>
@@ -1429,7 +1442,7 @@
           <a:p>
             <a:r>
               <a:rPr lang="en-US" dirty="0"/>
-              <a:t>Activity 1. Look carefully at this diagram: the main lines of latitude. Observe every detail before I ask the question.</a:t>
+              <a:t>Activity 1. Look carefully at this diagram: the major lines of latitude. Observe every detail before I ask the question.</a:t>
             </a:r>
             <a:endParaRPr lang="en-US" dirty="0"/>
           </a:p>
@@ -1605,7 +1618,7 @@
           <a:p>
             <a:r>
               <a:rPr lang="en-US" dirty="0"/>
-              <a:t>Here is the question for Activity 1: Name the line in the middle of the Earth. What is its value? Take one minute to think and write your answer in your rough notebook.</a:t>
+              <a:t>Here is the question for Activity 1: Which line is in the middle of the Earth? Take one minute to think and write your answer in your rough notebook.</a:t>
             </a:r>
             <a:endParaRPr lang="en-US" dirty="0"/>
           </a:p>
@@ -1693,7 +1706,7 @@
           <a:p>
             <a:r>
               <a:rPr lang="en-US" dirty="0"/>
-              <a:t>Let us check the answer together. The Equator. Its value is 0°.</a:t>
+              <a:t>Let us check the answer together. The Equator.</a:t>
             </a:r>
             <a:endParaRPr lang="en-US" dirty="0"/>
           </a:p>
@@ -1781,7 +1794,7 @@
           <a:p>
             <a:r>
               <a:rPr lang="en-US" dirty="0"/>
-              <a:t>Activity 2. Look carefully at this diagram: lines of longitude. Observe every detail before I ask the question.</a:t>
+              <a:t>Here is the next question: What is its value? Take one minute to think and write your answer in your rough notebook.</a:t>
             </a:r>
             <a:endParaRPr lang="en-US" dirty="0"/>
           </a:p>
@@ -1869,7 +1882,7 @@
           <a:p>
             <a:r>
               <a:rPr lang="en-US" dirty="0"/>
-              <a:t>Here is the question for Activity 2: Where do the lines of longitude meet? Name the line of 0°. Take one minute to think and write your answer in your rough notebook.</a:t>
+              <a:t>Let us check the answer together. 0°.</a:t>
             </a:r>
             <a:endParaRPr lang="en-US" dirty="0"/>
           </a:p>
@@ -1957,7 +1970,7 @@
           <a:p>
             <a:r>
               <a:rPr lang="en-US" dirty="0"/>
-              <a:t>Let us check the answer together. They meet at the poles. The line of 0° is the Greenwich Meridian.</a:t>
+              <a:t>Activity 2. Look carefully at this diagram: lines of longitude. Observe every detail before I ask the question.</a:t>
             </a:r>
             <a:endParaRPr lang="en-US" dirty="0"/>
           </a:p>
@@ -2045,7 +2058,7 @@
           <a:p>
             <a:r>
               <a:rPr lang="en-US" dirty="0"/>
-              <a:t>Activity 3. Look carefully at this diagram: cameroon with lines of latitude and longitude. Observe every detail before I ask the question.</a:t>
+              <a:t>Here is the question for Activity 2: Where do the lines of longitude meet? Take one minute to think and write your answer in your rough notebook.</a:t>
             </a:r>
             <a:endParaRPr lang="en-US" dirty="0"/>
           </a:p>
@@ -2133,7 +2146,7 @@
           <a:p>
             <a:r>
               <a:rPr lang="en-US" dirty="0"/>
-              <a:t>Here is the question for Activity 3: Garoua is at about 9° N and 13° E. What do these numbers mean? Take one minute to think and write your answer in your rough notebook.</a:t>
+              <a:t>Let us check the answer together. At the poles.</a:t>
             </a:r>
             <a:endParaRPr lang="en-US" dirty="0"/>
           </a:p>
@@ -2221,7 +2234,7 @@
           <a:p>
             <a:r>
               <a:rPr lang="en-US" dirty="0"/>
-              <a:t>Let us check the answer together. 9° north of the Equator and 13° east of Greenwich.</a:t>
+              <a:t>Here is the next question: What is the name of the line of 0°? Take one minute to think and write your answer in your rough notebook.</a:t>
             </a:r>
             <a:endParaRPr lang="en-US" dirty="0"/>
           </a:p>
@@ -2309,7 +2322,7 @@
           <a:p>
             <a:r>
               <a:rPr lang="en-US" dirty="0"/>
-              <a:t>Now we are going to copy the board summary. Write the title and the headings neatly in your notebooks. I will give you enough time for each slide, so do not rush.</a:t>
+              <a:t>Let us check the answer together. The Greenwich Meridian.</a:t>
             </a:r>
             <a:endParaRPr lang="en-US" dirty="0"/>
           </a:p>
@@ -2397,7 +2410,7 @@
           <a:p>
             <a:r>
               <a:rPr lang="en-US" dirty="0"/>
-              <a:t>Let us copy Meaning and Major Lines. Latitudes are defined and named as follows. On this slide we have Latitude and Equator. Write each point on a new line, with the key term first, and explain it in your own words when we revise. When you finish, we go to the next slide.</a:t>
+              <a:t>Activity 3. Look carefully at this diagram: cameroon with lines of latitude and longitude. Observe every detail before I ask the question.</a:t>
             </a:r>
             <a:endParaRPr lang="en-US" dirty="0"/>
           </a:p>
@@ -2573,7 +2586,7 @@
           <a:p>
             <a:r>
               <a:rPr lang="en-US" dirty="0"/>
-              <a:t>We continue with Meaning and Major Lines. On this slide we have Tropics and Polar circles. Write each point on a new line, with the key term first, and explain it in your own words when we revise.</a:t>
+              <a:t>Here is the question for Activity 3: Garoua is at about 9° N, 13° E. What does each number tell us? Take one minute to think and write your answer in your rough notebook.</a:t>
             </a:r>
             <a:endParaRPr lang="en-US" dirty="0"/>
           </a:p>
@@ -2661,7 +2674,7 @@
           <a:p>
             <a:r>
               <a:rPr lang="en-US" dirty="0"/>
-              <a:t>Now draw this illustration in your notebook: the major lines of latitude. Give it a title and label it clearly.</a:t>
+              <a:t>Let us check the answer together. 9° N: 9 degrees north of the Equator; 13° E: 13 degrees east of Greenwich.</a:t>
             </a:r>
             <a:endParaRPr lang="en-US" dirty="0"/>
           </a:p>
@@ -2749,7 +2762,7 @@
           <a:p>
             <a:r>
               <a:rPr lang="en-US" dirty="0"/>
-              <a:t>Let us copy Characteristics. Lines of latitude have the following characteristics. On this slide we have Parallel lines and Unequal length. Write each point on a new line, with the key term first, and explain it in your own words when we revise.</a:t>
+              <a:t>Now we are going to copy the board summary. Write the title and the headings neatly in your notebooks. I will give you enough time for each slide, so do not rush.</a:t>
             </a:r>
             <a:endParaRPr lang="en-US" dirty="0"/>
           </a:p>
@@ -2837,7 +2850,7 @@
           <a:p>
             <a:r>
               <a:rPr lang="en-US" dirty="0"/>
-              <a:t>Let us copy Longitudes. Longitudes are defined and described as follows. On this slide we have Longitude. Write each point on a new line, with the key term first, and explain it in your own words when we revise. When you finish, we go to the next slide.</a:t>
+              <a:t>Let us copy the definitions. The key terms of this lesson are defined as follows. On this slide we have Latitude. Write each point on a new line, with the key term first, and explain it in your own words when we revise. When you finish, we go to the next slide.</a:t>
             </a:r>
             <a:endParaRPr lang="en-US" dirty="0"/>
           </a:p>
@@ -2925,7 +2938,7 @@
           <a:p>
             <a:r>
               <a:rPr lang="en-US" dirty="0"/>
-              <a:t>We continue with Longitudes. On this slide we have Greenwich Meridian and Characteristics. Write each point on a new line, with the key term first, and explain it in your own words when we revise.</a:t>
+              <a:t>We continue with the definitions. On this slide we have Longitude and Parallels. Write each point on a new line, with the key term first, and explain it in your own words when we revise. When you finish, we go to the next slide.</a:t>
             </a:r>
             <a:endParaRPr lang="en-US" dirty="0"/>
           </a:p>
@@ -3013,7 +3026,7 @@
           <a:p>
             <a:r>
               <a:rPr lang="en-US" dirty="0"/>
-              <a:t>Now draw this illustration in your notebook: lines of longitude. Give it a title and label it clearly.</a:t>
+              <a:t>We continue with the definitions. On this slide we have Meridians and Geographical coordinates. Write each point on a new line, with the key term first, and explain it in your own words when we revise.</a:t>
             </a:r>
             <a:endParaRPr lang="en-US" dirty="0"/>
           </a:p>
@@ -3101,7 +3114,7 @@
           <a:p>
             <a:r>
               <a:rPr lang="en-US" dirty="0"/>
-              <a:t>Let us copy Geographical Coordinates. Geographical coordinates are used as follows. On this slide we have Coordinates and Example. Write each point on a new line, with the key term first, and explain it in your own words when we revise.</a:t>
+              <a:t>Let us copy Major Lines of Latitude. The major lines of latitude are the following. Copy the point on The Equator (0°) on the left, then draw the diagram on the right: the major lines of latitude. Give it a title and label it clearly.</a:t>
             </a:r>
             <a:endParaRPr lang="en-US" dirty="0"/>
           </a:p>
@@ -3189,7 +3202,7 @@
           <a:p>
             <a:r>
               <a:rPr lang="en-US" dirty="0"/>
-              <a:t>Now let us check what you have understood. Question 1: What is the value of the Equator? Answer in your exercise book.</a:t>
+              <a:t>We continue with Major Lines of Latitude. On this slide we have The Tropic of Cancer (23½° N) and The Tropic of Capricorn (23½° S). Write each point on a new line, with the key term first, and explain it in your own words when we revise. When you finish, we go to the next slide.</a:t>
             </a:r>
             <a:endParaRPr lang="en-US" dirty="0"/>
           </a:p>
@@ -3277,7 +3290,7 @@
           <a:p>
             <a:r>
               <a:rPr lang="en-US" dirty="0"/>
-              <a:t>The expected answer is: 0°. If you got it right, well done.</a:t>
+              <a:t>We continue with Major Lines of Latitude. On this slide we have The Arctic Circle (66½° N) and The Antarctic Circle (66½° S). Write each point on a new line, with the key term first, and explain it in your own words when we revise. When you finish, we go to the next slide.</a:t>
             </a:r>
             <a:endParaRPr lang="en-US" dirty="0"/>
           </a:p>
@@ -3365,7 +3378,7 @@
           <a:p>
             <a:r>
               <a:rPr lang="en-US" dirty="0"/>
-              <a:t>Now let us check what you have understood. Question 2: Give one difference between latitudes and longitudes. Answer in your exercise book.</a:t>
+              <a:t>We continue with Major Lines of Latitude. On this slide we have The poles (90° N and 90° S). Write each point on a new line, with the key term first, and explain it in your own words when we revise.</a:t>
             </a:r>
             <a:endParaRPr lang="en-US" dirty="0"/>
           </a:p>
@@ -3541,7 +3554,7 @@
           <a:p>
             <a:r>
               <a:rPr lang="en-US" dirty="0"/>
-              <a:t>The expected answer is: latitudes never meet; longitudes meet at the poles. If you got it right, well done.</a:t>
+              <a:t>Let us copy Characteristics of Latitudes. Lines of latitude have the following characteristics. On this slide we have Parallel lines and Unequal length. Write each point on a new line, with the key term first, and explain it in your own words when we revise. When you finish, we go to the next slide.</a:t>
             </a:r>
             <a:endParaRPr lang="en-US" dirty="0"/>
           </a:p>
@@ -3629,7 +3642,7 @@
           <a:p>
             <a:r>
               <a:rPr lang="en-US" dirty="0"/>
-              <a:t>For those who need more practice, fill in the blanks in your exercise book. The answers are: number 1, Equator; number 2, Greenwich; number 3, latitude.</a:t>
+              <a:t>We continue with Characteristics of Latitudes. On this slide we have Values and Equal spacing. Write each point on a new line, with the key term first, and explain it in your own words when we revise.</a:t>
             </a:r>
             <a:endParaRPr lang="en-US" dirty="0"/>
           </a:p>
@@ -3717,7 +3730,7 @@
           <a:p>
             <a:r>
               <a:rPr lang="en-US" dirty="0"/>
-              <a:t>For your homework: Watch or listen to news about a flight from Douala to Paris or to Dubai. Write the name of the route and ask an adult why aeroplanes do not always fly in a straight line on a flat map. We shall correct it at the beginning of our next lesson.</a:t>
+              <a:t>Let us copy Major Lines of Longitude. The major lines of longitude are the following. Copy the point on The Greenwich (Prime) Meridian (0°) on the left, then draw the diagram on the right: lines of longitude. Give it a title and label it clearly.</a:t>
             </a:r>
             <a:endParaRPr lang="en-US" dirty="0"/>
           </a:p>
@@ -3805,7 +3818,7 @@
           <a:p>
             <a:r>
               <a:rPr lang="en-US" dirty="0"/>
-              <a:t>Our next lesson will be on Lesson 3: Great Circles and the International Date Line. Thank you for your attention, and see you next time.</a:t>
+              <a:t>We continue with Major Lines of Longitude. On this slide we have The 180° meridian. Write each point on a new line, with the key term first, and explain it in your own words when we revise.</a:t>
             </a:r>
             <a:endParaRPr lang="en-US" dirty="0"/>
           </a:p>
@@ -3893,7 +3906,7 @@
           <a:p>
             <a:r>
               <a:rPr lang="en-US" dirty="0"/>
-              <a:t>Let us play the bilingual game. I say a word in English, and you give me the French word. Then we do the reverse.</a:t>
+              <a:t>Let us copy Characteristics of Longitudes. Lines of longitude have the following characteristics. On this slide we have Semi-circles and Equal length. Write each point on a new line, with the key term first, and explain it in your own words when we revise. When you finish, we go to the next slide.</a:t>
             </a:r>
             <a:endParaRPr lang="en-US" dirty="0"/>
           </a:p>
@@ -3981,7 +3994,7 @@
           <a:p>
             <a:r>
               <a:rPr lang="en-US" dirty="0"/>
-              <a:t>I record this information in the official logbook of the class after the lesson.</a:t>
+              <a:t>We continue with Characteristics of Longitudes. On this slide we have Meeting at the poles and Values. Write each point on a new line, with the key term first, and explain it in your own words when we revise.</a:t>
             </a:r>
             <a:endParaRPr lang="en-US" dirty="0"/>
           </a:p>
@@ -4069,7 +4082,7 @@
           <a:p>
             <a:r>
               <a:rPr lang="en-US" dirty="0"/>
-              <a:t>I complete the second page of the logbook: the matter taught, the evaluation, the homework and the attendance.</a:t>
+              <a:t>Let us copy Differences between Latitudes and Longitudes. Latitudes and longitudes differ in the following ways. On this slide we have Direction and Meeting. Write each point on a new line, with the key term first, and explain it in your own words when we revise. When you finish, we go to the next slide.</a:t>
             </a:r>
             <a:endParaRPr lang="en-US" dirty="0"/>
           </a:p>
@@ -4157,7 +4170,7 @@
           <a:p>
             <a:r>
               <a:rPr lang="en-US" dirty="0"/>
-              <a:t>This slide is for me, the teacher: it gives the timing of the lesson and what to do if the projector is not available.</a:t>
+              <a:t>We continue with Differences between Latitudes and Longitudes. On this slide we have Length, Values and Use. Write each point on a new line, with the key term first, and explain it in your own words when we revise.</a:t>
             </a:r>
             <a:endParaRPr lang="en-US" dirty="0"/>
           </a:p>
@@ -4245,7 +4258,7 @@
           <a:p>
             <a:r>
               <a:rPr lang="en-US" dirty="0"/>
-              <a:t>These are the references and picture credits used to prepare this lesson.</a:t>
+              <a:t>Let us copy Geographical Coordinates. Geographical coordinates are written as follows. Copy the point on Order on the left, then draw the diagram on the right: cameroon with its grid. Give it a title and label it clearly.</a:t>
             </a:r>
             <a:endParaRPr lang="en-US" dirty="0"/>
           </a:p>
@@ -4269,6 +4282,94 @@
             <a:fld id="{F7021451-1387-4CA6-816F-3879F97B5CBC}" type="slidenum">
               <a:rPr lang="en-US"/>
               <a:t>48</a:t>
+            </a:fld>
+            <a:endParaRPr lang="en-US"/>
+          </a:p>
+        </p:txBody>
+      </p:sp>
+    </p:spTree>
+    <p:extLst>
+      <p:ext uri="{BB962C8B-B14F-4D97-AF65-F5344CB8AC3E}">
+        <p14:creationId xmlns:p14="http://schemas.microsoft.com/office/powerpoint/2010/main" val="1024086991"/>
+      </p:ext>
+    </p:extLst>
+  </p:cSld>
+  <p:clrMapOvr>
+    <a:masterClrMapping/>
+  </p:clrMapOvr>
+</p:notes>
+</file>
+
+<file path=ppt/notesSlides/notesSlide49.xml><?xml version="1.0" encoding="utf-8"?>
+<p:notes xmlns:a="http://schemas.openxmlformats.org/drawingml/2006/main" xmlns:r="http://schemas.openxmlformats.org/officeDocument/2006/relationships" xmlns:p="http://schemas.openxmlformats.org/presentationml/2006/main">
+  <p:cSld>
+    <p:spTree>
+      <p:nvGrpSpPr>
+        <p:cNvPr id="1" name=""/>
+        <p:cNvGrpSpPr/>
+        <p:nvPr/>
+      </p:nvGrpSpPr>
+      <p:grpSpPr>
+        <a:xfrm>
+          <a:off x="0" y="0"/>
+          <a:ext cx="0" cy="0"/>
+          <a:chOff x="0" y="0"/>
+          <a:chExt cx="0" cy="0"/>
+        </a:xfrm>
+      </p:grpSpPr>
+      <p:sp>
+        <p:nvSpPr>
+          <p:cNvPr id="2" name="Slide Image Placeholder 1"/>
+          <p:cNvSpPr>
+            <a:spLocks noGrp="1" noRot="1" noChangeAspect="1"/>
+          </p:cNvSpPr>
+          <p:nvPr>
+            <p:ph type="sldImg"/>
+          </p:nvPr>
+        </p:nvSpPr>
+        <p:spPr/>
+      </p:sp>
+      <p:sp>
+        <p:nvSpPr>
+          <p:cNvPr id="3" name="Notes Placeholder 2"/>
+          <p:cNvSpPr>
+            <a:spLocks noGrp="1"/>
+          </p:cNvSpPr>
+          <p:nvPr>
+            <p:ph type="body" idx="1"/>
+          </p:nvPr>
+        </p:nvSpPr>
+        <p:spPr/>
+        <p:txBody>
+          <a:bodyPr/>
+          <a:lstStyle/>
+          <a:p>
+            <a:r>
+              <a:rPr lang="en-US" dirty="0"/>
+              <a:t>We continue with Geographical Coordinates. On this slide we have Directions and Example. Write each point on a new line, with the key term first, and explain it in your own words when we revise.</a:t>
+            </a:r>
+            <a:endParaRPr lang="en-US" dirty="0"/>
+          </a:p>
+        </p:txBody>
+      </p:sp>
+      <p:sp>
+        <p:nvSpPr>
+          <p:cNvPr id="4" name="Slide Number Placeholder 3"/>
+          <p:cNvSpPr>
+            <a:spLocks noGrp="1"/>
+          </p:cNvSpPr>
+          <p:nvPr>
+            <p:ph type="sldNum" sz="quarter" idx="10"/>
+          </p:nvPr>
+        </p:nvSpPr>
+        <p:spPr/>
+        <p:txBody>
+          <a:bodyPr/>
+          <a:lstStyle/>
+          <a:p>
+            <a:fld id="{F7021451-1387-4CA6-816F-3879F97B5CBC}" type="slidenum">
+              <a:rPr lang="en-US"/>
+              <a:t>49</a:t>
             </a:fld>
             <a:endParaRPr lang="en-US"/>
           </a:p>
@@ -4375,6 +4476,886 @@
 </p:notes>
 </file>
 
+<file path=ppt/notesSlides/notesSlide50.xml><?xml version="1.0" encoding="utf-8"?>
+<p:notes xmlns:a="http://schemas.openxmlformats.org/drawingml/2006/main" xmlns:r="http://schemas.openxmlformats.org/officeDocument/2006/relationships" xmlns:p="http://schemas.openxmlformats.org/presentationml/2006/main">
+  <p:cSld>
+    <p:spTree>
+      <p:nvGrpSpPr>
+        <p:cNvPr id="1" name=""/>
+        <p:cNvGrpSpPr/>
+        <p:nvPr/>
+      </p:nvGrpSpPr>
+      <p:grpSpPr>
+        <a:xfrm>
+          <a:off x="0" y="0"/>
+          <a:ext cx="0" cy="0"/>
+          <a:chOff x="0" y="0"/>
+          <a:chExt cx="0" cy="0"/>
+        </a:xfrm>
+      </p:grpSpPr>
+      <p:sp>
+        <p:nvSpPr>
+          <p:cNvPr id="2" name="Slide Image Placeholder 1"/>
+          <p:cNvSpPr>
+            <a:spLocks noGrp="1" noRot="1" noChangeAspect="1"/>
+          </p:cNvSpPr>
+          <p:nvPr>
+            <p:ph type="sldImg"/>
+          </p:nvPr>
+        </p:nvSpPr>
+        <p:spPr/>
+      </p:sp>
+      <p:sp>
+        <p:nvSpPr>
+          <p:cNvPr id="3" name="Notes Placeholder 2"/>
+          <p:cNvSpPr>
+            <a:spLocks noGrp="1"/>
+          </p:cNvSpPr>
+          <p:nvPr>
+            <p:ph type="body" idx="1"/>
+          </p:nvPr>
+        </p:nvSpPr>
+        <p:spPr/>
+        <p:txBody>
+          <a:bodyPr/>
+          <a:lstStyle/>
+          <a:p>
+            <a:r>
+              <a:rPr lang="en-US" dirty="0"/>
+              <a:t>Now let us check what you have understood. Question 1: What is the value of the Equator? Answer in your exercise book.</a:t>
+            </a:r>
+            <a:endParaRPr lang="en-US" dirty="0"/>
+          </a:p>
+        </p:txBody>
+      </p:sp>
+      <p:sp>
+        <p:nvSpPr>
+          <p:cNvPr id="4" name="Slide Number Placeholder 3"/>
+          <p:cNvSpPr>
+            <a:spLocks noGrp="1"/>
+          </p:cNvSpPr>
+          <p:nvPr>
+            <p:ph type="sldNum" sz="quarter" idx="10"/>
+          </p:nvPr>
+        </p:nvSpPr>
+        <p:spPr/>
+        <p:txBody>
+          <a:bodyPr/>
+          <a:lstStyle/>
+          <a:p>
+            <a:fld id="{F7021451-1387-4CA6-816F-3879F97B5CBC}" type="slidenum">
+              <a:rPr lang="en-US"/>
+              <a:t>50</a:t>
+            </a:fld>
+            <a:endParaRPr lang="en-US"/>
+          </a:p>
+        </p:txBody>
+      </p:sp>
+    </p:spTree>
+    <p:extLst>
+      <p:ext uri="{BB962C8B-B14F-4D97-AF65-F5344CB8AC3E}">
+        <p14:creationId xmlns:p14="http://schemas.microsoft.com/office/powerpoint/2010/main" val="1024086991"/>
+      </p:ext>
+    </p:extLst>
+  </p:cSld>
+  <p:clrMapOvr>
+    <a:masterClrMapping/>
+  </p:clrMapOvr>
+</p:notes>
+</file>
+
+<file path=ppt/notesSlides/notesSlide51.xml><?xml version="1.0" encoding="utf-8"?>
+<p:notes xmlns:a="http://schemas.openxmlformats.org/drawingml/2006/main" xmlns:r="http://schemas.openxmlformats.org/officeDocument/2006/relationships" xmlns:p="http://schemas.openxmlformats.org/presentationml/2006/main">
+  <p:cSld>
+    <p:spTree>
+      <p:nvGrpSpPr>
+        <p:cNvPr id="1" name=""/>
+        <p:cNvGrpSpPr/>
+        <p:nvPr/>
+      </p:nvGrpSpPr>
+      <p:grpSpPr>
+        <a:xfrm>
+          <a:off x="0" y="0"/>
+          <a:ext cx="0" cy="0"/>
+          <a:chOff x="0" y="0"/>
+          <a:chExt cx="0" cy="0"/>
+        </a:xfrm>
+      </p:grpSpPr>
+      <p:sp>
+        <p:nvSpPr>
+          <p:cNvPr id="2" name="Slide Image Placeholder 1"/>
+          <p:cNvSpPr>
+            <a:spLocks noGrp="1" noRot="1" noChangeAspect="1"/>
+          </p:cNvSpPr>
+          <p:nvPr>
+            <p:ph type="sldImg"/>
+          </p:nvPr>
+        </p:nvSpPr>
+        <p:spPr/>
+      </p:sp>
+      <p:sp>
+        <p:nvSpPr>
+          <p:cNvPr id="3" name="Notes Placeholder 2"/>
+          <p:cNvSpPr>
+            <a:spLocks noGrp="1"/>
+          </p:cNvSpPr>
+          <p:nvPr>
+            <p:ph type="body" idx="1"/>
+          </p:nvPr>
+        </p:nvSpPr>
+        <p:spPr/>
+        <p:txBody>
+          <a:bodyPr/>
+          <a:lstStyle/>
+          <a:p>
+            <a:r>
+              <a:rPr lang="en-US" dirty="0"/>
+              <a:t>The expected answer is: 0°. If you got it right, well done.</a:t>
+            </a:r>
+            <a:endParaRPr lang="en-US" dirty="0"/>
+          </a:p>
+        </p:txBody>
+      </p:sp>
+      <p:sp>
+        <p:nvSpPr>
+          <p:cNvPr id="4" name="Slide Number Placeholder 3"/>
+          <p:cNvSpPr>
+            <a:spLocks noGrp="1"/>
+          </p:cNvSpPr>
+          <p:nvPr>
+            <p:ph type="sldNum" sz="quarter" idx="10"/>
+          </p:nvPr>
+        </p:nvSpPr>
+        <p:spPr/>
+        <p:txBody>
+          <a:bodyPr/>
+          <a:lstStyle/>
+          <a:p>
+            <a:fld id="{F7021451-1387-4CA6-816F-3879F97B5CBC}" type="slidenum">
+              <a:rPr lang="en-US"/>
+              <a:t>51</a:t>
+            </a:fld>
+            <a:endParaRPr lang="en-US"/>
+          </a:p>
+        </p:txBody>
+      </p:sp>
+    </p:spTree>
+    <p:extLst>
+      <p:ext uri="{BB962C8B-B14F-4D97-AF65-F5344CB8AC3E}">
+        <p14:creationId xmlns:p14="http://schemas.microsoft.com/office/powerpoint/2010/main" val="1024086991"/>
+      </p:ext>
+    </p:extLst>
+  </p:cSld>
+  <p:clrMapOvr>
+    <a:masterClrMapping/>
+  </p:clrMapOvr>
+</p:notes>
+</file>
+
+<file path=ppt/notesSlides/notesSlide52.xml><?xml version="1.0" encoding="utf-8"?>
+<p:notes xmlns:a="http://schemas.openxmlformats.org/drawingml/2006/main" xmlns:r="http://schemas.openxmlformats.org/officeDocument/2006/relationships" xmlns:p="http://schemas.openxmlformats.org/presentationml/2006/main">
+  <p:cSld>
+    <p:spTree>
+      <p:nvGrpSpPr>
+        <p:cNvPr id="1" name=""/>
+        <p:cNvGrpSpPr/>
+        <p:nvPr/>
+      </p:nvGrpSpPr>
+      <p:grpSpPr>
+        <a:xfrm>
+          <a:off x="0" y="0"/>
+          <a:ext cx="0" cy="0"/>
+          <a:chOff x="0" y="0"/>
+          <a:chExt cx="0" cy="0"/>
+        </a:xfrm>
+      </p:grpSpPr>
+      <p:sp>
+        <p:nvSpPr>
+          <p:cNvPr id="2" name="Slide Image Placeholder 1"/>
+          <p:cNvSpPr>
+            <a:spLocks noGrp="1" noRot="1" noChangeAspect="1"/>
+          </p:cNvSpPr>
+          <p:nvPr>
+            <p:ph type="sldImg"/>
+          </p:nvPr>
+        </p:nvSpPr>
+        <p:spPr/>
+      </p:sp>
+      <p:sp>
+        <p:nvSpPr>
+          <p:cNvPr id="3" name="Notes Placeholder 2"/>
+          <p:cNvSpPr>
+            <a:spLocks noGrp="1"/>
+          </p:cNvSpPr>
+          <p:nvPr>
+            <p:ph type="body" idx="1"/>
+          </p:nvPr>
+        </p:nvSpPr>
+        <p:spPr/>
+        <p:txBody>
+          <a:bodyPr/>
+          <a:lstStyle/>
+          <a:p>
+            <a:r>
+              <a:rPr lang="en-US" dirty="0"/>
+              <a:t>Now let us check what you have understood. Question 2: Give one difference between latitudes and longitudes. Answer in your exercise book.</a:t>
+            </a:r>
+            <a:endParaRPr lang="en-US" dirty="0"/>
+          </a:p>
+        </p:txBody>
+      </p:sp>
+      <p:sp>
+        <p:nvSpPr>
+          <p:cNvPr id="4" name="Slide Number Placeholder 3"/>
+          <p:cNvSpPr>
+            <a:spLocks noGrp="1"/>
+          </p:cNvSpPr>
+          <p:nvPr>
+            <p:ph type="sldNum" sz="quarter" idx="10"/>
+          </p:nvPr>
+        </p:nvSpPr>
+        <p:spPr/>
+        <p:txBody>
+          <a:bodyPr/>
+          <a:lstStyle/>
+          <a:p>
+            <a:fld id="{F7021451-1387-4CA6-816F-3879F97B5CBC}" type="slidenum">
+              <a:rPr lang="en-US"/>
+              <a:t>52</a:t>
+            </a:fld>
+            <a:endParaRPr lang="en-US"/>
+          </a:p>
+        </p:txBody>
+      </p:sp>
+    </p:spTree>
+    <p:extLst>
+      <p:ext uri="{BB962C8B-B14F-4D97-AF65-F5344CB8AC3E}">
+        <p14:creationId xmlns:p14="http://schemas.microsoft.com/office/powerpoint/2010/main" val="1024086991"/>
+      </p:ext>
+    </p:extLst>
+  </p:cSld>
+  <p:clrMapOvr>
+    <a:masterClrMapping/>
+  </p:clrMapOvr>
+</p:notes>
+</file>
+
+<file path=ppt/notesSlides/notesSlide53.xml><?xml version="1.0" encoding="utf-8"?>
+<p:notes xmlns:a="http://schemas.openxmlformats.org/drawingml/2006/main" xmlns:r="http://schemas.openxmlformats.org/officeDocument/2006/relationships" xmlns:p="http://schemas.openxmlformats.org/presentationml/2006/main">
+  <p:cSld>
+    <p:spTree>
+      <p:nvGrpSpPr>
+        <p:cNvPr id="1" name=""/>
+        <p:cNvGrpSpPr/>
+        <p:nvPr/>
+      </p:nvGrpSpPr>
+      <p:grpSpPr>
+        <a:xfrm>
+          <a:off x="0" y="0"/>
+          <a:ext cx="0" cy="0"/>
+          <a:chOff x="0" y="0"/>
+          <a:chExt cx="0" cy="0"/>
+        </a:xfrm>
+      </p:grpSpPr>
+      <p:sp>
+        <p:nvSpPr>
+          <p:cNvPr id="2" name="Slide Image Placeholder 1"/>
+          <p:cNvSpPr>
+            <a:spLocks noGrp="1" noRot="1" noChangeAspect="1"/>
+          </p:cNvSpPr>
+          <p:nvPr>
+            <p:ph type="sldImg"/>
+          </p:nvPr>
+        </p:nvSpPr>
+        <p:spPr/>
+      </p:sp>
+      <p:sp>
+        <p:nvSpPr>
+          <p:cNvPr id="3" name="Notes Placeholder 2"/>
+          <p:cNvSpPr>
+            <a:spLocks noGrp="1"/>
+          </p:cNvSpPr>
+          <p:nvPr>
+            <p:ph type="body" idx="1"/>
+          </p:nvPr>
+        </p:nvSpPr>
+        <p:spPr/>
+        <p:txBody>
+          <a:bodyPr/>
+          <a:lstStyle/>
+          <a:p>
+            <a:r>
+              <a:rPr lang="en-US" dirty="0"/>
+              <a:t>The expected answer is: latitudes never meet; longitudes meet at the poles. If you got it right, well done.</a:t>
+            </a:r>
+            <a:endParaRPr lang="en-US" dirty="0"/>
+          </a:p>
+        </p:txBody>
+      </p:sp>
+      <p:sp>
+        <p:nvSpPr>
+          <p:cNvPr id="4" name="Slide Number Placeholder 3"/>
+          <p:cNvSpPr>
+            <a:spLocks noGrp="1"/>
+          </p:cNvSpPr>
+          <p:nvPr>
+            <p:ph type="sldNum" sz="quarter" idx="10"/>
+          </p:nvPr>
+        </p:nvSpPr>
+        <p:spPr/>
+        <p:txBody>
+          <a:bodyPr/>
+          <a:lstStyle/>
+          <a:p>
+            <a:fld id="{F7021451-1387-4CA6-816F-3879F97B5CBC}" type="slidenum">
+              <a:rPr lang="en-US"/>
+              <a:t>53</a:t>
+            </a:fld>
+            <a:endParaRPr lang="en-US"/>
+          </a:p>
+        </p:txBody>
+      </p:sp>
+    </p:spTree>
+    <p:extLst>
+      <p:ext uri="{BB962C8B-B14F-4D97-AF65-F5344CB8AC3E}">
+        <p14:creationId xmlns:p14="http://schemas.microsoft.com/office/powerpoint/2010/main" val="1024086991"/>
+      </p:ext>
+    </p:extLst>
+  </p:cSld>
+  <p:clrMapOvr>
+    <a:masterClrMapping/>
+  </p:clrMapOvr>
+</p:notes>
+</file>
+
+<file path=ppt/notesSlides/notesSlide54.xml><?xml version="1.0" encoding="utf-8"?>
+<p:notes xmlns:a="http://schemas.openxmlformats.org/drawingml/2006/main" xmlns:r="http://schemas.openxmlformats.org/officeDocument/2006/relationships" xmlns:p="http://schemas.openxmlformats.org/presentationml/2006/main">
+  <p:cSld>
+    <p:spTree>
+      <p:nvGrpSpPr>
+        <p:cNvPr id="1" name=""/>
+        <p:cNvGrpSpPr/>
+        <p:nvPr/>
+      </p:nvGrpSpPr>
+      <p:grpSpPr>
+        <a:xfrm>
+          <a:off x="0" y="0"/>
+          <a:ext cx="0" cy="0"/>
+          <a:chOff x="0" y="0"/>
+          <a:chExt cx="0" cy="0"/>
+        </a:xfrm>
+      </p:grpSpPr>
+      <p:sp>
+        <p:nvSpPr>
+          <p:cNvPr id="2" name="Slide Image Placeholder 1"/>
+          <p:cNvSpPr>
+            <a:spLocks noGrp="1" noRot="1" noChangeAspect="1"/>
+          </p:cNvSpPr>
+          <p:nvPr>
+            <p:ph type="sldImg"/>
+          </p:nvPr>
+        </p:nvSpPr>
+        <p:spPr/>
+      </p:sp>
+      <p:sp>
+        <p:nvSpPr>
+          <p:cNvPr id="3" name="Notes Placeholder 2"/>
+          <p:cNvSpPr>
+            <a:spLocks noGrp="1"/>
+          </p:cNvSpPr>
+          <p:nvPr>
+            <p:ph type="body" idx="1"/>
+          </p:nvPr>
+        </p:nvSpPr>
+        <p:spPr/>
+        <p:txBody>
+          <a:bodyPr/>
+          <a:lstStyle/>
+          <a:p>
+            <a:r>
+              <a:rPr lang="en-US" dirty="0"/>
+              <a:t>For those who need more practice, fill in the blanks in your exercise book. The answers are: number 1, Equator; number 2, Greenwich; number 3, latitude.</a:t>
+            </a:r>
+            <a:endParaRPr lang="en-US" dirty="0"/>
+          </a:p>
+        </p:txBody>
+      </p:sp>
+      <p:sp>
+        <p:nvSpPr>
+          <p:cNvPr id="4" name="Slide Number Placeholder 3"/>
+          <p:cNvSpPr>
+            <a:spLocks noGrp="1"/>
+          </p:cNvSpPr>
+          <p:nvPr>
+            <p:ph type="sldNum" sz="quarter" idx="10"/>
+          </p:nvPr>
+        </p:nvSpPr>
+        <p:spPr/>
+        <p:txBody>
+          <a:bodyPr/>
+          <a:lstStyle/>
+          <a:p>
+            <a:fld id="{F7021451-1387-4CA6-816F-3879F97B5CBC}" type="slidenum">
+              <a:rPr lang="en-US"/>
+              <a:t>54</a:t>
+            </a:fld>
+            <a:endParaRPr lang="en-US"/>
+          </a:p>
+        </p:txBody>
+      </p:sp>
+    </p:spTree>
+    <p:extLst>
+      <p:ext uri="{BB962C8B-B14F-4D97-AF65-F5344CB8AC3E}">
+        <p14:creationId xmlns:p14="http://schemas.microsoft.com/office/powerpoint/2010/main" val="1024086991"/>
+      </p:ext>
+    </p:extLst>
+  </p:cSld>
+  <p:clrMapOvr>
+    <a:masterClrMapping/>
+  </p:clrMapOvr>
+</p:notes>
+</file>
+
+<file path=ppt/notesSlides/notesSlide55.xml><?xml version="1.0" encoding="utf-8"?>
+<p:notes xmlns:a="http://schemas.openxmlformats.org/drawingml/2006/main" xmlns:r="http://schemas.openxmlformats.org/officeDocument/2006/relationships" xmlns:p="http://schemas.openxmlformats.org/presentationml/2006/main">
+  <p:cSld>
+    <p:spTree>
+      <p:nvGrpSpPr>
+        <p:cNvPr id="1" name=""/>
+        <p:cNvGrpSpPr/>
+        <p:nvPr/>
+      </p:nvGrpSpPr>
+      <p:grpSpPr>
+        <a:xfrm>
+          <a:off x="0" y="0"/>
+          <a:ext cx="0" cy="0"/>
+          <a:chOff x="0" y="0"/>
+          <a:chExt cx="0" cy="0"/>
+        </a:xfrm>
+      </p:grpSpPr>
+      <p:sp>
+        <p:nvSpPr>
+          <p:cNvPr id="2" name="Slide Image Placeholder 1"/>
+          <p:cNvSpPr>
+            <a:spLocks noGrp="1" noRot="1" noChangeAspect="1"/>
+          </p:cNvSpPr>
+          <p:nvPr>
+            <p:ph type="sldImg"/>
+          </p:nvPr>
+        </p:nvSpPr>
+        <p:spPr/>
+      </p:sp>
+      <p:sp>
+        <p:nvSpPr>
+          <p:cNvPr id="3" name="Notes Placeholder 2"/>
+          <p:cNvSpPr>
+            <a:spLocks noGrp="1"/>
+          </p:cNvSpPr>
+          <p:nvPr>
+            <p:ph type="body" idx="1"/>
+          </p:nvPr>
+        </p:nvSpPr>
+        <p:spPr/>
+        <p:txBody>
+          <a:bodyPr/>
+          <a:lstStyle/>
+          <a:p>
+            <a:r>
+              <a:rPr lang="en-US" dirty="0"/>
+              <a:t>For your homework: Watch or listen to news about a flight from Douala to Paris or to Dubai. Write the name of the route and ask an adult why aeroplanes do not always fly in a straight line on a flat map. We shall correct it at the beginning of our next lesson.</a:t>
+            </a:r>
+            <a:endParaRPr lang="en-US" dirty="0"/>
+          </a:p>
+        </p:txBody>
+      </p:sp>
+      <p:sp>
+        <p:nvSpPr>
+          <p:cNvPr id="4" name="Slide Number Placeholder 3"/>
+          <p:cNvSpPr>
+            <a:spLocks noGrp="1"/>
+          </p:cNvSpPr>
+          <p:nvPr>
+            <p:ph type="sldNum" sz="quarter" idx="10"/>
+          </p:nvPr>
+        </p:nvSpPr>
+        <p:spPr/>
+        <p:txBody>
+          <a:bodyPr/>
+          <a:lstStyle/>
+          <a:p>
+            <a:fld id="{F7021451-1387-4CA6-816F-3879F97B5CBC}" type="slidenum">
+              <a:rPr lang="en-US"/>
+              <a:t>55</a:t>
+            </a:fld>
+            <a:endParaRPr lang="en-US"/>
+          </a:p>
+        </p:txBody>
+      </p:sp>
+    </p:spTree>
+    <p:extLst>
+      <p:ext uri="{BB962C8B-B14F-4D97-AF65-F5344CB8AC3E}">
+        <p14:creationId xmlns:p14="http://schemas.microsoft.com/office/powerpoint/2010/main" val="1024086991"/>
+      </p:ext>
+    </p:extLst>
+  </p:cSld>
+  <p:clrMapOvr>
+    <a:masterClrMapping/>
+  </p:clrMapOvr>
+</p:notes>
+</file>
+
+<file path=ppt/notesSlides/notesSlide56.xml><?xml version="1.0" encoding="utf-8"?>
+<p:notes xmlns:a="http://schemas.openxmlformats.org/drawingml/2006/main" xmlns:r="http://schemas.openxmlformats.org/officeDocument/2006/relationships" xmlns:p="http://schemas.openxmlformats.org/presentationml/2006/main">
+  <p:cSld>
+    <p:spTree>
+      <p:nvGrpSpPr>
+        <p:cNvPr id="1" name=""/>
+        <p:cNvGrpSpPr/>
+        <p:nvPr/>
+      </p:nvGrpSpPr>
+      <p:grpSpPr>
+        <a:xfrm>
+          <a:off x="0" y="0"/>
+          <a:ext cx="0" cy="0"/>
+          <a:chOff x="0" y="0"/>
+          <a:chExt cx="0" cy="0"/>
+        </a:xfrm>
+      </p:grpSpPr>
+      <p:sp>
+        <p:nvSpPr>
+          <p:cNvPr id="2" name="Slide Image Placeholder 1"/>
+          <p:cNvSpPr>
+            <a:spLocks noGrp="1" noRot="1" noChangeAspect="1"/>
+          </p:cNvSpPr>
+          <p:nvPr>
+            <p:ph type="sldImg"/>
+          </p:nvPr>
+        </p:nvSpPr>
+        <p:spPr/>
+      </p:sp>
+      <p:sp>
+        <p:nvSpPr>
+          <p:cNvPr id="3" name="Notes Placeholder 2"/>
+          <p:cNvSpPr>
+            <a:spLocks noGrp="1"/>
+          </p:cNvSpPr>
+          <p:nvPr>
+            <p:ph type="body" idx="1"/>
+          </p:nvPr>
+        </p:nvSpPr>
+        <p:spPr/>
+        <p:txBody>
+          <a:bodyPr/>
+          <a:lstStyle/>
+          <a:p>
+            <a:r>
+              <a:rPr lang="en-US" dirty="0"/>
+              <a:t>Our next lesson will be on Lesson 3: Great Circles and the International Date Line. Thank you for your attention, and see you next time.</a:t>
+            </a:r>
+            <a:endParaRPr lang="en-US" dirty="0"/>
+          </a:p>
+        </p:txBody>
+      </p:sp>
+      <p:sp>
+        <p:nvSpPr>
+          <p:cNvPr id="4" name="Slide Number Placeholder 3"/>
+          <p:cNvSpPr>
+            <a:spLocks noGrp="1"/>
+          </p:cNvSpPr>
+          <p:nvPr>
+            <p:ph type="sldNum" sz="quarter" idx="10"/>
+          </p:nvPr>
+        </p:nvSpPr>
+        <p:spPr/>
+        <p:txBody>
+          <a:bodyPr/>
+          <a:lstStyle/>
+          <a:p>
+            <a:fld id="{F7021451-1387-4CA6-816F-3879F97B5CBC}" type="slidenum">
+              <a:rPr lang="en-US"/>
+              <a:t>56</a:t>
+            </a:fld>
+            <a:endParaRPr lang="en-US"/>
+          </a:p>
+        </p:txBody>
+      </p:sp>
+    </p:spTree>
+    <p:extLst>
+      <p:ext uri="{BB962C8B-B14F-4D97-AF65-F5344CB8AC3E}">
+        <p14:creationId xmlns:p14="http://schemas.microsoft.com/office/powerpoint/2010/main" val="1024086991"/>
+      </p:ext>
+    </p:extLst>
+  </p:cSld>
+  <p:clrMapOvr>
+    <a:masterClrMapping/>
+  </p:clrMapOvr>
+</p:notes>
+</file>
+
+<file path=ppt/notesSlides/notesSlide57.xml><?xml version="1.0" encoding="utf-8"?>
+<p:notes xmlns:a="http://schemas.openxmlformats.org/drawingml/2006/main" xmlns:r="http://schemas.openxmlformats.org/officeDocument/2006/relationships" xmlns:p="http://schemas.openxmlformats.org/presentationml/2006/main">
+  <p:cSld>
+    <p:spTree>
+      <p:nvGrpSpPr>
+        <p:cNvPr id="1" name=""/>
+        <p:cNvGrpSpPr/>
+        <p:nvPr/>
+      </p:nvGrpSpPr>
+      <p:grpSpPr>
+        <a:xfrm>
+          <a:off x="0" y="0"/>
+          <a:ext cx="0" cy="0"/>
+          <a:chOff x="0" y="0"/>
+          <a:chExt cx="0" cy="0"/>
+        </a:xfrm>
+      </p:grpSpPr>
+      <p:sp>
+        <p:nvSpPr>
+          <p:cNvPr id="2" name="Slide Image Placeholder 1"/>
+          <p:cNvSpPr>
+            <a:spLocks noGrp="1" noRot="1" noChangeAspect="1"/>
+          </p:cNvSpPr>
+          <p:nvPr>
+            <p:ph type="sldImg"/>
+          </p:nvPr>
+        </p:nvSpPr>
+        <p:spPr/>
+      </p:sp>
+      <p:sp>
+        <p:nvSpPr>
+          <p:cNvPr id="3" name="Notes Placeholder 2"/>
+          <p:cNvSpPr>
+            <a:spLocks noGrp="1"/>
+          </p:cNvSpPr>
+          <p:nvPr>
+            <p:ph type="body" idx="1"/>
+          </p:nvPr>
+        </p:nvSpPr>
+        <p:spPr/>
+        <p:txBody>
+          <a:bodyPr/>
+          <a:lstStyle/>
+          <a:p>
+            <a:r>
+              <a:rPr lang="en-US" dirty="0"/>
+              <a:t>Let us play the bilingual game. I say a word in English, and you give me the French word. Then we do the reverse.</a:t>
+            </a:r>
+            <a:endParaRPr lang="en-US" dirty="0"/>
+          </a:p>
+        </p:txBody>
+      </p:sp>
+      <p:sp>
+        <p:nvSpPr>
+          <p:cNvPr id="4" name="Slide Number Placeholder 3"/>
+          <p:cNvSpPr>
+            <a:spLocks noGrp="1"/>
+          </p:cNvSpPr>
+          <p:nvPr>
+            <p:ph type="sldNum" sz="quarter" idx="10"/>
+          </p:nvPr>
+        </p:nvSpPr>
+        <p:spPr/>
+        <p:txBody>
+          <a:bodyPr/>
+          <a:lstStyle/>
+          <a:p>
+            <a:fld id="{F7021451-1387-4CA6-816F-3879F97B5CBC}" type="slidenum">
+              <a:rPr lang="en-US"/>
+              <a:t>57</a:t>
+            </a:fld>
+            <a:endParaRPr lang="en-US"/>
+          </a:p>
+        </p:txBody>
+      </p:sp>
+    </p:spTree>
+    <p:extLst>
+      <p:ext uri="{BB962C8B-B14F-4D97-AF65-F5344CB8AC3E}">
+        <p14:creationId xmlns:p14="http://schemas.microsoft.com/office/powerpoint/2010/main" val="1024086991"/>
+      </p:ext>
+    </p:extLst>
+  </p:cSld>
+  <p:clrMapOvr>
+    <a:masterClrMapping/>
+  </p:clrMapOvr>
+</p:notes>
+</file>
+
+<file path=ppt/notesSlides/notesSlide58.xml><?xml version="1.0" encoding="utf-8"?>
+<p:notes xmlns:a="http://schemas.openxmlformats.org/drawingml/2006/main" xmlns:r="http://schemas.openxmlformats.org/officeDocument/2006/relationships" xmlns:p="http://schemas.openxmlformats.org/presentationml/2006/main">
+  <p:cSld>
+    <p:spTree>
+      <p:nvGrpSpPr>
+        <p:cNvPr id="1" name=""/>
+        <p:cNvGrpSpPr/>
+        <p:nvPr/>
+      </p:nvGrpSpPr>
+      <p:grpSpPr>
+        <a:xfrm>
+          <a:off x="0" y="0"/>
+          <a:ext cx="0" cy="0"/>
+          <a:chOff x="0" y="0"/>
+          <a:chExt cx="0" cy="0"/>
+        </a:xfrm>
+      </p:grpSpPr>
+      <p:sp>
+        <p:nvSpPr>
+          <p:cNvPr id="2" name="Slide Image Placeholder 1"/>
+          <p:cNvSpPr>
+            <a:spLocks noGrp="1" noRot="1" noChangeAspect="1"/>
+          </p:cNvSpPr>
+          <p:nvPr>
+            <p:ph type="sldImg"/>
+          </p:nvPr>
+        </p:nvSpPr>
+        <p:spPr/>
+      </p:sp>
+      <p:sp>
+        <p:nvSpPr>
+          <p:cNvPr id="3" name="Notes Placeholder 2"/>
+          <p:cNvSpPr>
+            <a:spLocks noGrp="1"/>
+          </p:cNvSpPr>
+          <p:nvPr>
+            <p:ph type="body" idx="1"/>
+          </p:nvPr>
+        </p:nvSpPr>
+        <p:spPr/>
+        <p:txBody>
+          <a:bodyPr/>
+          <a:lstStyle/>
+          <a:p>
+            <a:r>
+              <a:rPr lang="en-US" dirty="0"/>
+              <a:t>I record this information in the official logbook of the class after the lesson.</a:t>
+            </a:r>
+            <a:endParaRPr lang="en-US" dirty="0"/>
+          </a:p>
+        </p:txBody>
+      </p:sp>
+      <p:sp>
+        <p:nvSpPr>
+          <p:cNvPr id="4" name="Slide Number Placeholder 3"/>
+          <p:cNvSpPr>
+            <a:spLocks noGrp="1"/>
+          </p:cNvSpPr>
+          <p:nvPr>
+            <p:ph type="sldNum" sz="quarter" idx="10"/>
+          </p:nvPr>
+        </p:nvSpPr>
+        <p:spPr/>
+        <p:txBody>
+          <a:bodyPr/>
+          <a:lstStyle/>
+          <a:p>
+            <a:fld id="{F7021451-1387-4CA6-816F-3879F97B5CBC}" type="slidenum">
+              <a:rPr lang="en-US"/>
+              <a:t>58</a:t>
+            </a:fld>
+            <a:endParaRPr lang="en-US"/>
+          </a:p>
+        </p:txBody>
+      </p:sp>
+    </p:spTree>
+    <p:extLst>
+      <p:ext uri="{BB962C8B-B14F-4D97-AF65-F5344CB8AC3E}">
+        <p14:creationId xmlns:p14="http://schemas.microsoft.com/office/powerpoint/2010/main" val="1024086991"/>
+      </p:ext>
+    </p:extLst>
+  </p:cSld>
+  <p:clrMapOvr>
+    <a:masterClrMapping/>
+  </p:clrMapOvr>
+</p:notes>
+</file>
+
+<file path=ppt/notesSlides/notesSlide59.xml><?xml version="1.0" encoding="utf-8"?>
+<p:notes xmlns:a="http://schemas.openxmlformats.org/drawingml/2006/main" xmlns:r="http://schemas.openxmlformats.org/officeDocument/2006/relationships" xmlns:p="http://schemas.openxmlformats.org/presentationml/2006/main">
+  <p:cSld>
+    <p:spTree>
+      <p:nvGrpSpPr>
+        <p:cNvPr id="1" name=""/>
+        <p:cNvGrpSpPr/>
+        <p:nvPr/>
+      </p:nvGrpSpPr>
+      <p:grpSpPr>
+        <a:xfrm>
+          <a:off x="0" y="0"/>
+          <a:ext cx="0" cy="0"/>
+          <a:chOff x="0" y="0"/>
+          <a:chExt cx="0" cy="0"/>
+        </a:xfrm>
+      </p:grpSpPr>
+      <p:sp>
+        <p:nvSpPr>
+          <p:cNvPr id="2" name="Slide Image Placeholder 1"/>
+          <p:cNvSpPr>
+            <a:spLocks noGrp="1" noRot="1" noChangeAspect="1"/>
+          </p:cNvSpPr>
+          <p:nvPr>
+            <p:ph type="sldImg"/>
+          </p:nvPr>
+        </p:nvSpPr>
+        <p:spPr/>
+      </p:sp>
+      <p:sp>
+        <p:nvSpPr>
+          <p:cNvPr id="3" name="Notes Placeholder 2"/>
+          <p:cNvSpPr>
+            <a:spLocks noGrp="1"/>
+          </p:cNvSpPr>
+          <p:nvPr>
+            <p:ph type="body" idx="1"/>
+          </p:nvPr>
+        </p:nvSpPr>
+        <p:spPr/>
+        <p:txBody>
+          <a:bodyPr/>
+          <a:lstStyle/>
+          <a:p>
+            <a:r>
+              <a:rPr lang="en-US" dirty="0"/>
+              <a:t>I complete the second page of the logbook: the matter taught, the evaluation, the homework and the attendance.</a:t>
+            </a:r>
+            <a:endParaRPr lang="en-US" dirty="0"/>
+          </a:p>
+        </p:txBody>
+      </p:sp>
+      <p:sp>
+        <p:nvSpPr>
+          <p:cNvPr id="4" name="Slide Number Placeholder 3"/>
+          <p:cNvSpPr>
+            <a:spLocks noGrp="1"/>
+          </p:cNvSpPr>
+          <p:nvPr>
+            <p:ph type="sldNum" sz="quarter" idx="10"/>
+          </p:nvPr>
+        </p:nvSpPr>
+        <p:spPr/>
+        <p:txBody>
+          <a:bodyPr/>
+          <a:lstStyle/>
+          <a:p>
+            <a:fld id="{F7021451-1387-4CA6-816F-3879F97B5CBC}" type="slidenum">
+              <a:rPr lang="en-US"/>
+              <a:t>59</a:t>
+            </a:fld>
+            <a:endParaRPr lang="en-US"/>
+          </a:p>
+        </p:txBody>
+      </p:sp>
+    </p:spTree>
+    <p:extLst>
+      <p:ext uri="{BB962C8B-B14F-4D97-AF65-F5344CB8AC3E}">
+        <p14:creationId xmlns:p14="http://schemas.microsoft.com/office/powerpoint/2010/main" val="1024086991"/>
+      </p:ext>
+    </p:extLst>
+  </p:cSld>
+  <p:clrMapOvr>
+    <a:masterClrMapping/>
+  </p:clrMapOvr>
+</p:notes>
+</file>
+
 <file path=ppt/notesSlides/notesSlide6.xml><?xml version="1.0" encoding="utf-8"?>
 <p:notes xmlns:a="http://schemas.openxmlformats.org/drawingml/2006/main" xmlns:r="http://schemas.openxmlformats.org/officeDocument/2006/relationships" xmlns:p="http://schemas.openxmlformats.org/presentationml/2006/main">
   <p:cSld>
@@ -4445,6 +5426,182 @@
             <a:fld id="{F7021451-1387-4CA6-816F-3879F97B5CBC}" type="slidenum">
               <a:rPr lang="en-US"/>
               <a:t>6</a:t>
+            </a:fld>
+            <a:endParaRPr lang="en-US"/>
+          </a:p>
+        </p:txBody>
+      </p:sp>
+    </p:spTree>
+    <p:extLst>
+      <p:ext uri="{BB962C8B-B14F-4D97-AF65-F5344CB8AC3E}">
+        <p14:creationId xmlns:p14="http://schemas.microsoft.com/office/powerpoint/2010/main" val="1024086991"/>
+      </p:ext>
+    </p:extLst>
+  </p:cSld>
+  <p:clrMapOvr>
+    <a:masterClrMapping/>
+  </p:clrMapOvr>
+</p:notes>
+</file>
+
+<file path=ppt/notesSlides/notesSlide60.xml><?xml version="1.0" encoding="utf-8"?>
+<p:notes xmlns:a="http://schemas.openxmlformats.org/drawingml/2006/main" xmlns:r="http://schemas.openxmlformats.org/officeDocument/2006/relationships" xmlns:p="http://schemas.openxmlformats.org/presentationml/2006/main">
+  <p:cSld>
+    <p:spTree>
+      <p:nvGrpSpPr>
+        <p:cNvPr id="1" name=""/>
+        <p:cNvGrpSpPr/>
+        <p:nvPr/>
+      </p:nvGrpSpPr>
+      <p:grpSpPr>
+        <a:xfrm>
+          <a:off x="0" y="0"/>
+          <a:ext cx="0" cy="0"/>
+          <a:chOff x="0" y="0"/>
+          <a:chExt cx="0" cy="0"/>
+        </a:xfrm>
+      </p:grpSpPr>
+      <p:sp>
+        <p:nvSpPr>
+          <p:cNvPr id="2" name="Slide Image Placeholder 1"/>
+          <p:cNvSpPr>
+            <a:spLocks noGrp="1" noRot="1" noChangeAspect="1"/>
+          </p:cNvSpPr>
+          <p:nvPr>
+            <p:ph type="sldImg"/>
+          </p:nvPr>
+        </p:nvSpPr>
+        <p:spPr/>
+      </p:sp>
+      <p:sp>
+        <p:nvSpPr>
+          <p:cNvPr id="3" name="Notes Placeholder 2"/>
+          <p:cNvSpPr>
+            <a:spLocks noGrp="1"/>
+          </p:cNvSpPr>
+          <p:nvPr>
+            <p:ph type="body" idx="1"/>
+          </p:nvPr>
+        </p:nvSpPr>
+        <p:spPr/>
+        <p:txBody>
+          <a:bodyPr/>
+          <a:lstStyle/>
+          <a:p>
+            <a:r>
+              <a:rPr lang="en-US" dirty="0"/>
+              <a:t>This slide is for me, the teacher: it gives the timing of the lesson and what to do if the projector is not available.</a:t>
+            </a:r>
+            <a:endParaRPr lang="en-US" dirty="0"/>
+          </a:p>
+        </p:txBody>
+      </p:sp>
+      <p:sp>
+        <p:nvSpPr>
+          <p:cNvPr id="4" name="Slide Number Placeholder 3"/>
+          <p:cNvSpPr>
+            <a:spLocks noGrp="1"/>
+          </p:cNvSpPr>
+          <p:nvPr>
+            <p:ph type="sldNum" sz="quarter" idx="10"/>
+          </p:nvPr>
+        </p:nvSpPr>
+        <p:spPr/>
+        <p:txBody>
+          <a:bodyPr/>
+          <a:lstStyle/>
+          <a:p>
+            <a:fld id="{F7021451-1387-4CA6-816F-3879F97B5CBC}" type="slidenum">
+              <a:rPr lang="en-US"/>
+              <a:t>60</a:t>
+            </a:fld>
+            <a:endParaRPr lang="en-US"/>
+          </a:p>
+        </p:txBody>
+      </p:sp>
+    </p:spTree>
+    <p:extLst>
+      <p:ext uri="{BB962C8B-B14F-4D97-AF65-F5344CB8AC3E}">
+        <p14:creationId xmlns:p14="http://schemas.microsoft.com/office/powerpoint/2010/main" val="1024086991"/>
+      </p:ext>
+    </p:extLst>
+  </p:cSld>
+  <p:clrMapOvr>
+    <a:masterClrMapping/>
+  </p:clrMapOvr>
+</p:notes>
+</file>
+
+<file path=ppt/notesSlides/notesSlide61.xml><?xml version="1.0" encoding="utf-8"?>
+<p:notes xmlns:a="http://schemas.openxmlformats.org/drawingml/2006/main" xmlns:r="http://schemas.openxmlformats.org/officeDocument/2006/relationships" xmlns:p="http://schemas.openxmlformats.org/presentationml/2006/main">
+  <p:cSld>
+    <p:spTree>
+      <p:nvGrpSpPr>
+        <p:cNvPr id="1" name=""/>
+        <p:cNvGrpSpPr/>
+        <p:nvPr/>
+      </p:nvGrpSpPr>
+      <p:grpSpPr>
+        <a:xfrm>
+          <a:off x="0" y="0"/>
+          <a:ext cx="0" cy="0"/>
+          <a:chOff x="0" y="0"/>
+          <a:chExt cx="0" cy="0"/>
+        </a:xfrm>
+      </p:grpSpPr>
+      <p:sp>
+        <p:nvSpPr>
+          <p:cNvPr id="2" name="Slide Image Placeholder 1"/>
+          <p:cNvSpPr>
+            <a:spLocks noGrp="1" noRot="1" noChangeAspect="1"/>
+          </p:cNvSpPr>
+          <p:nvPr>
+            <p:ph type="sldImg"/>
+          </p:nvPr>
+        </p:nvSpPr>
+        <p:spPr/>
+      </p:sp>
+      <p:sp>
+        <p:nvSpPr>
+          <p:cNvPr id="3" name="Notes Placeholder 2"/>
+          <p:cNvSpPr>
+            <a:spLocks noGrp="1"/>
+          </p:cNvSpPr>
+          <p:nvPr>
+            <p:ph type="body" idx="1"/>
+          </p:nvPr>
+        </p:nvSpPr>
+        <p:spPr/>
+        <p:txBody>
+          <a:bodyPr/>
+          <a:lstStyle/>
+          <a:p>
+            <a:r>
+              <a:rPr lang="en-US" dirty="0"/>
+              <a:t>These are the references and picture credits used to prepare this lesson.</a:t>
+            </a:r>
+            <a:endParaRPr lang="en-US" dirty="0"/>
+          </a:p>
+        </p:txBody>
+      </p:sp>
+      <p:sp>
+        <p:nvSpPr>
+          <p:cNvPr id="4" name="Slide Number Placeholder 3"/>
+          <p:cNvSpPr>
+            <a:spLocks noGrp="1"/>
+          </p:cNvSpPr>
+          <p:nvPr>
+            <p:ph type="sldNum" sz="quarter" idx="10"/>
+          </p:nvPr>
+        </p:nvSpPr>
+        <p:spPr/>
+        <p:txBody>
+          <a:bodyPr/>
+          <a:lstStyle/>
+          <a:p>
+            <a:fld id="{F7021451-1387-4CA6-816F-3879F97B5CBC}" type="slidenum">
+              <a:rPr lang="en-US"/>
+              <a:t>61</a:t>
             </a:fld>
             <a:endParaRPr lang="en-US"/>
           </a:p>
@@ -4597,7 +5754,7 @@
           <a:p>
             <a:r>
               <a:rPr lang="en-US" dirty="0"/>
-              <a:t>By the end of this lesson, you should be able to do three things. Number 1: define latitude and longitude. Number 2: name the major lines of latitude and longitude. Number 3: give the characteristics of latitudes and longitudes and their differences. Number 4: write the geographical coordinates of a place.</a:t>
+              <a:t>By the end of this lesson, you should be able to do four things. Number 1: define latitude and longitude. Number 2: name the major lines of latitude and longitude. Number 3: give the characteristics of latitudes and longitudes and their differences. Number 4: write the geographical coordinates of a place.</a:t>
             </a:r>
             <a:endParaRPr lang="en-US" dirty="0"/>
           </a:p>
@@ -6065,7 +7222,7 @@
         <p:spPr>
           <a:xfrm>
             <a:off x="0" y="658368"/>
-            <a:ext cx="5120640" cy="5833872"/>
+            <a:ext cx="3840480" cy="5833872"/>
           </a:xfrm>
           <a:prstGeom prst="rect">
             <a:avLst/>
@@ -6080,8 +7237,8 @@
         </p:nvSpPr>
         <p:spPr>
           <a:xfrm>
-            <a:off x="5349240" y="1005840"/>
-            <a:ext cx="6522415" cy="731520"/>
+            <a:off x="4069080" y="1005840"/>
+            <a:ext cx="7802575" cy="731520"/>
           </a:xfrm>
           <a:prstGeom prst="rect">
             <a:avLst/>
@@ -6121,8 +7278,8 @@
         </p:nvSpPr>
         <p:spPr>
           <a:xfrm>
-            <a:off x="5349240" y="1783080"/>
-            <a:ext cx="6522415" cy="4663440"/>
+            <a:off x="4069080" y="1783080"/>
+            <a:ext cx="7802575" cy="4663440"/>
           </a:xfrm>
           <a:prstGeom prst="rect">
             <a:avLst/>
@@ -6149,7 +7306,7 @@
                 <a:ea typeface="Times New Roman" pitchFamily="34" charset="-122"/>
                 <a:cs typeface="Times New Roman" pitchFamily="34" charset="-120"/>
               </a:rPr>
-              <a:t>Ibrahim's cousin in Douala sends a parcel to Japan. On his phone, he shows Tokyo: "35° N, 139° E". Ibrahim does not understand what these numbers mean.</a:t>
+              <a:t>Ibrahim's cousin in Douala sends a parcel to Japan. On his phone, he shows the position of Tokyo: "35° N, 139° E". Ibrahim asks: "What do these numbers mean, and how can they show exactly where a town is?"</a:t>
             </a:r>
             <a:endParaRPr lang="en-US" sz="4000" dirty="0"/>
           </a:p>
@@ -6587,7 +7744,7 @@
                 <a:ea typeface="Times New Roman" pitchFamily="34" charset="-122"/>
                 <a:cs typeface="Times New Roman" pitchFamily="34" charset="-120"/>
               </a:rPr>
-              <a:t>Ibrahim does not understand the numbers that show a place.</a:t>
+              <a:t>Ibrahim does not understand the numbers that give the position of a town.</a:t>
             </a:r>
             <a:endParaRPr lang="en-US" sz="4000" dirty="0"/>
           </a:p>
@@ -7463,7 +8620,7 @@
                 <a:ea typeface="Times New Roman" pitchFamily="34" charset="-122"/>
                 <a:cs typeface="Times New Roman" pitchFamily="34" charset="-120"/>
               </a:rPr>
-              <a:t>The latitude and the longitude.</a:t>
+              <a:t>The latitude and the longitude: the geographical coordinates.</a:t>
             </a:r>
             <a:endParaRPr lang="en-US" sz="4000" dirty="0"/>
           </a:p>
@@ -8115,7 +9272,7 @@
                 <a:ea typeface="Times New Roman" pitchFamily="34" charset="-122"/>
                 <a:cs typeface="Times New Roman" pitchFamily="34" charset="-120"/>
               </a:rPr>
-              <a:t>The main lines of latitude.</a:t>
+              <a:t>The major lines of latitude.</a:t>
             </a:r>
             <a:endParaRPr lang="en-US" sz="1800" dirty="0"/>
           </a:p>
@@ -8887,7 +10044,7 @@
                 <a:ea typeface="Times New Roman" pitchFamily="34" charset="-122"/>
                 <a:cs typeface="Times New Roman" pitchFamily="34" charset="-120"/>
               </a:rPr>
-              <a:t>Activity 1: Question</a:t>
+              <a:t>Activity 1: Question 1</a:t>
             </a:r>
             <a:endParaRPr lang="en-US" sz="3600" dirty="0"/>
           </a:p>
@@ -8929,7 +10086,7 @@
                 <a:ea typeface="Times New Roman" pitchFamily="34" charset="-122"/>
                 <a:cs typeface="Times New Roman" pitchFamily="34" charset="-120"/>
               </a:rPr>
-              <a:t>Name the line in the middle of the Earth. What is its value?</a:t>
+              <a:t>Which line is in the middle of the Earth?</a:t>
             </a:r>
             <a:endParaRPr lang="en-US" sz="4000" dirty="0"/>
           </a:p>
@@ -9106,7 +10263,7 @@
                 <a:ea typeface="Times New Roman" pitchFamily="34" charset="-122"/>
                 <a:cs typeface="Times New Roman" pitchFamily="34" charset="-120"/>
               </a:rPr>
-              <a:t>Activity 1: Answer</a:t>
+              <a:t>Activity 1: Answer 1</a:t>
             </a:r>
             <a:endParaRPr lang="en-US" sz="3600" dirty="0"/>
           </a:p>
@@ -9148,7 +10305,7 @@
                 <a:ea typeface="Times New Roman" pitchFamily="34" charset="-122"/>
                 <a:cs typeface="Times New Roman" pitchFamily="34" charset="-120"/>
               </a:rPr>
-              <a:t>The Equator. Its value is 0°.</a:t>
+              <a:t>The Equator.</a:t>
             </a:r>
             <a:endParaRPr lang="en-US" sz="4000" dirty="0"/>
           </a:p>
@@ -9260,54 +10417,15 @@
                 <a:ea typeface="Calibri" pitchFamily="34" charset="-122"/>
                 <a:cs typeface="Calibri" pitchFamily="34" charset="-120"/>
               </a:rPr>
-              <a:t>2. LONGITUDES</a:t>
+              <a:t>1. LATITUDES</a:t>
             </a:r>
             <a:endParaRPr lang="en-US" sz="1400" dirty="0"/>
-          </a:p>
-        </p:txBody>
-      </p:sp>
-      <p:sp>
-        <p:nvSpPr>
-          <p:cNvPr id="3" name="Text 1"/>
-          <p:cNvSpPr/>
-          <p:nvPr/>
-        </p:nvSpPr>
-        <p:spPr>
-          <a:xfrm>
-            <a:off x="457200" y="1005840"/>
-            <a:ext cx="11277295" cy="731520"/>
-          </a:xfrm>
-          <a:prstGeom prst="rect">
-            <a:avLst/>
-          </a:prstGeom>
-          <a:noFill/>
-          <a:ln/>
-        </p:spPr>
-        <p:txBody>
-          <a:bodyPr wrap="square" lIns="0" tIns="0" rIns="0" bIns="0" rtlCol="0" anchor="ctr"/>
-          <a:lstStyle/>
-          <a:p>
-            <a:pPr algn="ctr" indent="0" marL="0">
-              <a:buNone/>
-            </a:pPr>
-            <a:r>
-              <a:rPr lang="en-US" sz="3600" b="1" dirty="0">
-                <a:solidFill>
-                  <a:srgbClr val="990011"/>
-                </a:solidFill>
-                <a:latin typeface="Times New Roman" pitchFamily="34" charset="0"/>
-                <a:ea typeface="Times New Roman" pitchFamily="34" charset="-122"/>
-                <a:cs typeface="Times New Roman" pitchFamily="34" charset="-120"/>
-              </a:rPr>
-              <a:t>Activity 2</a:t>
-            </a:r>
-            <a:endParaRPr lang="en-US" sz="3600" dirty="0"/>
           </a:p>
         </p:txBody>
       </p:sp>
       <p:pic>
         <p:nvPicPr>
-          <p:cNvPr id="4" name="Image 0" descr="/home/claude/f4/img/v2/longitudes_big.png">    </p:cNvPr>
+          <p:cNvPr id="3" name="Image 0" descr="/home/claude/f4/img/minesec_sheet.png">    </p:cNvPr>
           <p:cNvPicPr>
             <a:picLocks noChangeAspect="1"/>
           </p:cNvPicPr>
@@ -9321,8 +10439,8 @@
         </p:blipFill>
         <p:spPr>
           <a:xfrm>
-            <a:off x="629930" y="1783080"/>
-            <a:ext cx="10931835" cy="4270248"/>
+            <a:off x="0" y="658368"/>
+            <a:ext cx="5120640" cy="5833872"/>
           </a:xfrm>
           <a:prstGeom prst="rect">
             <a:avLst/>
@@ -9331,14 +10449,14 @@
       </p:pic>
       <p:sp>
         <p:nvSpPr>
-          <p:cNvPr id="5" name="Text 2"/>
+          <p:cNvPr id="4" name="Text 1"/>
           <p:cNvSpPr/>
           <p:nvPr/>
         </p:nvSpPr>
         <p:spPr>
           <a:xfrm>
-            <a:off x="457200" y="6089904"/>
-            <a:ext cx="11277295" cy="347472"/>
+            <a:off x="5349240" y="1005840"/>
+            <a:ext cx="6522415" cy="731520"/>
           </a:xfrm>
           <a:prstGeom prst="rect">
             <a:avLst/>
@@ -9347,24 +10465,68 @@
           <a:ln/>
         </p:spPr>
         <p:txBody>
-          <a:bodyPr wrap="square" lIns="0" tIns="0" rIns="0" bIns="0" rtlCol="0" anchor="ctr"/>
+          <a:bodyPr wrap="square" lIns="0" tIns="0" rIns="0" bIns="0" rtlCol="0" anchor="ctr">
+            <a:normAutofit/>
+          </a:bodyPr>
           <a:lstStyle/>
           <a:p>
             <a:pPr algn="ctr" indent="0" marL="0">
               <a:buNone/>
             </a:pPr>
             <a:r>
-              <a:rPr lang="en-US" sz="1800" i="1" dirty="0">
-                <a:solidFill>
-                  <a:srgbClr val="555555"/>
+              <a:rPr lang="en-US" sz="3600" b="1" dirty="0">
+                <a:solidFill>
+                  <a:srgbClr val="990011"/>
                 </a:solidFill>
                 <a:latin typeface="Times New Roman" pitchFamily="34" charset="0"/>
                 <a:ea typeface="Times New Roman" pitchFamily="34" charset="-122"/>
                 <a:cs typeface="Times New Roman" pitchFamily="34" charset="-120"/>
               </a:rPr>
-              <a:t>Lines of longitude.</a:t>
-            </a:r>
-            <a:endParaRPr lang="en-US" sz="1800" dirty="0"/>
+              <a:t>Activity 1: Question 2</a:t>
+            </a:r>
+            <a:endParaRPr lang="en-US" sz="3600" dirty="0"/>
+          </a:p>
+        </p:txBody>
+      </p:sp>
+      <p:sp>
+        <p:nvSpPr>
+          <p:cNvPr id="5" name="Text 2"/>
+          <p:cNvSpPr/>
+          <p:nvPr/>
+        </p:nvSpPr>
+        <p:spPr>
+          <a:xfrm>
+            <a:off x="5349240" y="1783080"/>
+            <a:ext cx="6522415" cy="4663440"/>
+          </a:xfrm>
+          <a:prstGeom prst="rect">
+            <a:avLst/>
+          </a:prstGeom>
+          <a:noFill/>
+          <a:ln/>
+        </p:spPr>
+        <p:txBody>
+          <a:bodyPr wrap="square" lIns="0" tIns="0" rIns="0" bIns="0" rtlCol="0" anchor="t"/>
+          <a:lstStyle/>
+          <a:p>
+            <a:pPr algn="l" indent="0" marL="0">
+              <a:spcAft>
+                <a:spcPts val="800"/>
+              </a:spcAft>
+              <a:buNone/>
+            </a:pPr>
+            <a:r>
+              <a:rPr lang="en-US" sz="4000" dirty="0">
+                <a:solidFill>
+                  <a:srgbClr val="111111"/>
+                </a:solidFill>
+                <a:latin typeface="Times New Roman" pitchFamily="34" charset="0"/>
+                <a:ea typeface="Times New Roman" pitchFamily="34" charset="-122"/>
+                <a:cs typeface="Times New Roman" pitchFamily="34" charset="-120"/>
+              </a:rPr>
+              <a:t>What is its value?</a:t>
+            </a:r>
+            <a:endParaRPr lang="en-US" sz="4000" dirty="0"/>
           </a:p>
         </p:txBody>
       </p:sp>
@@ -9474,7 +10636,7 @@
                 <a:ea typeface="Calibri" pitchFamily="34" charset="-122"/>
                 <a:cs typeface="Calibri" pitchFamily="34" charset="-120"/>
               </a:rPr>
-              <a:t>2. LONGITUDES</a:t>
+              <a:t>1. LATITUDES</a:t>
             </a:r>
             <a:endParaRPr lang="en-US" sz="1400" dirty="0"/>
           </a:p>
@@ -9539,7 +10701,7 @@
                 <a:ea typeface="Times New Roman" pitchFamily="34" charset="-122"/>
                 <a:cs typeface="Times New Roman" pitchFamily="34" charset="-120"/>
               </a:rPr>
-              <a:t>Activity 2: Question</a:t>
+              <a:t>Activity 1: Answer 2</a:t>
             </a:r>
             <a:endParaRPr lang="en-US" sz="3600" dirty="0"/>
           </a:p>
@@ -9581,7 +10743,7 @@
                 <a:ea typeface="Times New Roman" pitchFamily="34" charset="-122"/>
                 <a:cs typeface="Times New Roman" pitchFamily="34" charset="-120"/>
               </a:rPr>
-              <a:t>Where do the lines of longitude meet? Name the line of 0°.</a:t>
+              <a:t>0°.</a:t>
             </a:r>
             <a:endParaRPr lang="en-US" sz="4000" dirty="0"/>
           </a:p>
@@ -9699,9 +10861,48 @@
           </a:p>
         </p:txBody>
       </p:sp>
+      <p:sp>
+        <p:nvSpPr>
+          <p:cNvPr id="3" name="Text 1"/>
+          <p:cNvSpPr/>
+          <p:nvPr/>
+        </p:nvSpPr>
+        <p:spPr>
+          <a:xfrm>
+            <a:off x="457200" y="1005840"/>
+            <a:ext cx="11277295" cy="731520"/>
+          </a:xfrm>
+          <a:prstGeom prst="rect">
+            <a:avLst/>
+          </a:prstGeom>
+          <a:noFill/>
+          <a:ln/>
+        </p:spPr>
+        <p:txBody>
+          <a:bodyPr wrap="square" lIns="0" tIns="0" rIns="0" bIns="0" rtlCol="0" anchor="ctr"/>
+          <a:lstStyle/>
+          <a:p>
+            <a:pPr algn="ctr" indent="0" marL="0">
+              <a:buNone/>
+            </a:pPr>
+            <a:r>
+              <a:rPr lang="en-US" sz="3600" b="1" dirty="0">
+                <a:solidFill>
+                  <a:srgbClr val="990011"/>
+                </a:solidFill>
+                <a:latin typeface="Times New Roman" pitchFamily="34" charset="0"/>
+                <a:ea typeface="Times New Roman" pitchFamily="34" charset="-122"/>
+                <a:cs typeface="Times New Roman" pitchFamily="34" charset="-120"/>
+              </a:rPr>
+              <a:t>Activity 2</a:t>
+            </a:r>
+            <a:endParaRPr lang="en-US" sz="3600" dirty="0"/>
+          </a:p>
+        </p:txBody>
+      </p:sp>
       <p:pic>
         <p:nvPicPr>
-          <p:cNvPr id="3" name="Image 0" descr="/home/claude/f4/img/minesec_sheet.png">    </p:cNvPr>
+          <p:cNvPr id="4" name="Image 0" descr="/home/claude/f4/img/v2/longitudes_big.png">    </p:cNvPr>
           <p:cNvPicPr>
             <a:picLocks noChangeAspect="1"/>
           </p:cNvPicPr>
@@ -9715,8 +10916,8 @@
         </p:blipFill>
         <p:spPr>
           <a:xfrm>
-            <a:off x="0" y="658368"/>
-            <a:ext cx="5120640" cy="5833872"/>
+            <a:off x="629930" y="1783080"/>
+            <a:ext cx="10931835" cy="4270248"/>
           </a:xfrm>
           <a:prstGeom prst="rect">
             <a:avLst/>
@@ -9725,14 +10926,14 @@
       </p:pic>
       <p:sp>
         <p:nvSpPr>
-          <p:cNvPr id="4" name="Text 1"/>
+          <p:cNvPr id="5" name="Text 2"/>
           <p:cNvSpPr/>
           <p:nvPr/>
         </p:nvSpPr>
         <p:spPr>
           <a:xfrm>
-            <a:off x="5349240" y="1005840"/>
-            <a:ext cx="6522415" cy="731520"/>
+            <a:off x="457200" y="6089904"/>
+            <a:ext cx="11277295" cy="347472"/>
           </a:xfrm>
           <a:prstGeom prst="rect">
             <a:avLst/>
@@ -9741,68 +10942,24 @@
           <a:ln/>
         </p:spPr>
         <p:txBody>
-          <a:bodyPr wrap="square" lIns="0" tIns="0" rIns="0" bIns="0" rtlCol="0" anchor="ctr">
-            <a:normAutofit/>
-          </a:bodyPr>
+          <a:bodyPr wrap="square" lIns="0" tIns="0" rIns="0" bIns="0" rtlCol="0" anchor="ctr"/>
           <a:lstStyle/>
           <a:p>
             <a:pPr algn="ctr" indent="0" marL="0">
               <a:buNone/>
             </a:pPr>
             <a:r>
-              <a:rPr lang="en-US" sz="3600" b="1" dirty="0">
-                <a:solidFill>
-                  <a:srgbClr val="990011"/>
+              <a:rPr lang="en-US" sz="1800" i="1" dirty="0">
+                <a:solidFill>
+                  <a:srgbClr val="555555"/>
                 </a:solidFill>
                 <a:latin typeface="Times New Roman" pitchFamily="34" charset="0"/>
                 <a:ea typeface="Times New Roman" pitchFamily="34" charset="-122"/>
                 <a:cs typeface="Times New Roman" pitchFamily="34" charset="-120"/>
               </a:rPr>
-              <a:t>Activity 2: Answer</a:t>
-            </a:r>
-            <a:endParaRPr lang="en-US" sz="3600" dirty="0"/>
-          </a:p>
-        </p:txBody>
-      </p:sp>
-      <p:sp>
-        <p:nvSpPr>
-          <p:cNvPr id="5" name="Text 2"/>
-          <p:cNvSpPr/>
-          <p:nvPr/>
-        </p:nvSpPr>
-        <p:spPr>
-          <a:xfrm>
-            <a:off x="5349240" y="1783080"/>
-            <a:ext cx="6522415" cy="4663440"/>
-          </a:xfrm>
-          <a:prstGeom prst="rect">
-            <a:avLst/>
-          </a:prstGeom>
-          <a:noFill/>
-          <a:ln/>
-        </p:spPr>
-        <p:txBody>
-          <a:bodyPr wrap="square" lIns="0" tIns="0" rIns="0" bIns="0" rtlCol="0" anchor="t"/>
-          <a:lstStyle/>
-          <a:p>
-            <a:pPr algn="l" indent="0" marL="0">
-              <a:spcAft>
-                <a:spcPts val="800"/>
-              </a:spcAft>
-              <a:buNone/>
-            </a:pPr>
-            <a:r>
-              <a:rPr lang="en-US" sz="4000" dirty="0">
-                <a:solidFill>
-                  <a:srgbClr val="111111"/>
-                </a:solidFill>
-                <a:latin typeface="Times New Roman" pitchFamily="34" charset="0"/>
-                <a:ea typeface="Times New Roman" pitchFamily="34" charset="-122"/>
-                <a:cs typeface="Times New Roman" pitchFamily="34" charset="-120"/>
-              </a:rPr>
-              <a:t>They meet at the poles. The line of 0° is the Greenwich Meridian.</a:t>
-            </a:r>
-            <a:endParaRPr lang="en-US" sz="4000" dirty="0"/>
+              <a:t>Lines of longitude.</a:t>
+            </a:r>
+            <a:endParaRPr lang="en-US" sz="1800" dirty="0"/>
           </a:p>
         </p:txBody>
       </p:sp>
@@ -9912,54 +11069,15 @@
                 <a:ea typeface="Calibri" pitchFamily="34" charset="-122"/>
                 <a:cs typeface="Calibri" pitchFamily="34" charset="-120"/>
               </a:rPr>
-              <a:t>3. GEOGRAPHICAL COORDINATES</a:t>
+              <a:t>2. LONGITUDES</a:t>
             </a:r>
             <a:endParaRPr lang="en-US" sz="1400" dirty="0"/>
-          </a:p>
-        </p:txBody>
-      </p:sp>
-      <p:sp>
-        <p:nvSpPr>
-          <p:cNvPr id="3" name="Text 1"/>
-          <p:cNvSpPr/>
-          <p:nvPr/>
-        </p:nvSpPr>
-        <p:spPr>
-          <a:xfrm>
-            <a:off x="457200" y="1005840"/>
-            <a:ext cx="11277295" cy="731520"/>
-          </a:xfrm>
-          <a:prstGeom prst="rect">
-            <a:avLst/>
-          </a:prstGeom>
-          <a:noFill/>
-          <a:ln/>
-        </p:spPr>
-        <p:txBody>
-          <a:bodyPr wrap="square" lIns="0" tIns="0" rIns="0" bIns="0" rtlCol="0" anchor="ctr"/>
-          <a:lstStyle/>
-          <a:p>
-            <a:pPr algn="ctr" indent="0" marL="0">
-              <a:buNone/>
-            </a:pPr>
-            <a:r>
-              <a:rPr lang="en-US" sz="3600" b="1" dirty="0">
-                <a:solidFill>
-                  <a:srgbClr val="990011"/>
-                </a:solidFill>
-                <a:latin typeface="Times New Roman" pitchFamily="34" charset="0"/>
-                <a:ea typeface="Times New Roman" pitchFamily="34" charset="-122"/>
-                <a:cs typeface="Times New Roman" pitchFamily="34" charset="-120"/>
-              </a:rPr>
-              <a:t>Activity 3</a:t>
-            </a:r>
-            <a:endParaRPr lang="en-US" sz="3600" dirty="0"/>
           </a:p>
         </p:txBody>
       </p:sp>
       <p:pic>
         <p:nvPicPr>
-          <p:cNvPr id="4" name="Image 0" descr="/home/claude/f4/img/v2/cameroon_grid_big.png">    </p:cNvPr>
+          <p:cNvPr id="3" name="Image 0" descr="/home/claude/f4/img/minesec_sheet.png">    </p:cNvPr>
           <p:cNvPicPr>
             <a:picLocks noChangeAspect="1"/>
           </p:cNvPicPr>
@@ -9973,8 +11091,8 @@
         </p:blipFill>
         <p:spPr>
           <a:xfrm>
-            <a:off x="2300072" y="1783080"/>
-            <a:ext cx="7591552" cy="4270248"/>
+            <a:off x="0" y="658368"/>
+            <a:ext cx="5120640" cy="5833872"/>
           </a:xfrm>
           <a:prstGeom prst="rect">
             <a:avLst/>
@@ -9983,14 +11101,14 @@
       </p:pic>
       <p:sp>
         <p:nvSpPr>
-          <p:cNvPr id="5" name="Text 2"/>
+          <p:cNvPr id="4" name="Text 1"/>
           <p:cNvSpPr/>
           <p:nvPr/>
         </p:nvSpPr>
         <p:spPr>
           <a:xfrm>
-            <a:off x="457200" y="6089904"/>
-            <a:ext cx="11277295" cy="347472"/>
+            <a:off x="5349240" y="1005840"/>
+            <a:ext cx="6522415" cy="731520"/>
           </a:xfrm>
           <a:prstGeom prst="rect">
             <a:avLst/>
@@ -9999,24 +11117,68 @@
           <a:ln/>
         </p:spPr>
         <p:txBody>
-          <a:bodyPr wrap="square" lIns="0" tIns="0" rIns="0" bIns="0" rtlCol="0" anchor="ctr"/>
+          <a:bodyPr wrap="square" lIns="0" tIns="0" rIns="0" bIns="0" rtlCol="0" anchor="ctr">
+            <a:normAutofit/>
+          </a:bodyPr>
           <a:lstStyle/>
           <a:p>
             <a:pPr algn="ctr" indent="0" marL="0">
               <a:buNone/>
             </a:pPr>
             <a:r>
-              <a:rPr lang="en-US" sz="1800" i="1" dirty="0">
-                <a:solidFill>
-                  <a:srgbClr val="555555"/>
+              <a:rPr lang="en-US" sz="3600" b="1" dirty="0">
+                <a:solidFill>
+                  <a:srgbClr val="990011"/>
                 </a:solidFill>
                 <a:latin typeface="Times New Roman" pitchFamily="34" charset="0"/>
                 <a:ea typeface="Times New Roman" pitchFamily="34" charset="-122"/>
                 <a:cs typeface="Times New Roman" pitchFamily="34" charset="-120"/>
               </a:rPr>
-              <a:t>Cameroon with lines of latitude and longitude.</a:t>
-            </a:r>
-            <a:endParaRPr lang="en-US" sz="1800" dirty="0"/>
+              <a:t>Activity 2: Question 1</a:t>
+            </a:r>
+            <a:endParaRPr lang="en-US" sz="3600" dirty="0"/>
+          </a:p>
+        </p:txBody>
+      </p:sp>
+      <p:sp>
+        <p:nvSpPr>
+          <p:cNvPr id="5" name="Text 2"/>
+          <p:cNvSpPr/>
+          <p:nvPr/>
+        </p:nvSpPr>
+        <p:spPr>
+          <a:xfrm>
+            <a:off x="5349240" y="1783080"/>
+            <a:ext cx="6522415" cy="4663440"/>
+          </a:xfrm>
+          <a:prstGeom prst="rect">
+            <a:avLst/>
+          </a:prstGeom>
+          <a:noFill/>
+          <a:ln/>
+        </p:spPr>
+        <p:txBody>
+          <a:bodyPr wrap="square" lIns="0" tIns="0" rIns="0" bIns="0" rtlCol="0" anchor="t"/>
+          <a:lstStyle/>
+          <a:p>
+            <a:pPr algn="l" indent="0" marL="0">
+              <a:spcAft>
+                <a:spcPts val="800"/>
+              </a:spcAft>
+              <a:buNone/>
+            </a:pPr>
+            <a:r>
+              <a:rPr lang="en-US" sz="4000" dirty="0">
+                <a:solidFill>
+                  <a:srgbClr val="111111"/>
+                </a:solidFill>
+                <a:latin typeface="Times New Roman" pitchFamily="34" charset="0"/>
+                <a:ea typeface="Times New Roman" pitchFamily="34" charset="-122"/>
+                <a:cs typeface="Times New Roman" pitchFamily="34" charset="-120"/>
+              </a:rPr>
+              <a:t>Where do the lines of longitude meet?</a:t>
+            </a:r>
+            <a:endParaRPr lang="en-US" sz="4000" dirty="0"/>
           </a:p>
         </p:txBody>
       </p:sp>
@@ -10126,7 +11288,7 @@
                 <a:ea typeface="Calibri" pitchFamily="34" charset="-122"/>
                 <a:cs typeface="Calibri" pitchFamily="34" charset="-120"/>
               </a:rPr>
-              <a:t>3. GEOGRAPHICAL COORDINATES</a:t>
+              <a:t>2. LONGITUDES</a:t>
             </a:r>
             <a:endParaRPr lang="en-US" sz="1400" dirty="0"/>
           </a:p>
@@ -10191,7 +11353,7 @@
                 <a:ea typeface="Times New Roman" pitchFamily="34" charset="-122"/>
                 <a:cs typeface="Times New Roman" pitchFamily="34" charset="-120"/>
               </a:rPr>
-              <a:t>Activity 3: Question</a:t>
+              <a:t>Activity 2: Answer 1</a:t>
             </a:r>
             <a:endParaRPr lang="en-US" sz="3600" dirty="0"/>
           </a:p>
@@ -10233,7 +11395,7 @@
                 <a:ea typeface="Times New Roman" pitchFamily="34" charset="-122"/>
                 <a:cs typeface="Times New Roman" pitchFamily="34" charset="-120"/>
               </a:rPr>
-              <a:t>Garoua is at about 9° N and 13° E. What do these numbers mean?</a:t>
+              <a:t>At the poles.</a:t>
             </a:r>
             <a:endParaRPr lang="en-US" sz="4000" dirty="0"/>
           </a:p>
@@ -10345,7 +11507,7 @@
                 <a:ea typeface="Calibri" pitchFamily="34" charset="-122"/>
                 <a:cs typeface="Calibri" pitchFamily="34" charset="-120"/>
               </a:rPr>
-              <a:t>3. GEOGRAPHICAL COORDINATES</a:t>
+              <a:t>2. LONGITUDES</a:t>
             </a:r>
             <a:endParaRPr lang="en-US" sz="1400" dirty="0"/>
           </a:p>
@@ -10410,7 +11572,7 @@
                 <a:ea typeface="Times New Roman" pitchFamily="34" charset="-122"/>
                 <a:cs typeface="Times New Roman" pitchFamily="34" charset="-120"/>
               </a:rPr>
-              <a:t>Activity 3: Answer</a:t>
+              <a:t>Activity 2: Question 2</a:t>
             </a:r>
             <a:endParaRPr lang="en-US" sz="3600" dirty="0"/>
           </a:p>
@@ -10452,7 +11614,7 @@
                 <a:ea typeface="Times New Roman" pitchFamily="34" charset="-122"/>
                 <a:cs typeface="Times New Roman" pitchFamily="34" charset="-120"/>
               </a:rPr>
-              <a:t>9° north of the Equator and 13° east of Greenwich.</a:t>
+              <a:t>What is the name of the line of 0°?</a:t>
             </a:r>
             <a:endParaRPr lang="en-US" sz="4000" dirty="0"/>
           </a:p>
@@ -10564,7 +11726,7 @@
                 <a:ea typeface="Calibri" pitchFamily="34" charset="-122"/>
                 <a:cs typeface="Calibri" pitchFamily="34" charset="-120"/>
               </a:rPr>
-              <a:t>BOARD SUMMARY</a:t>
+              <a:t>2. LONGITUDES</a:t>
             </a:r>
             <a:endParaRPr lang="en-US" sz="1400" dirty="0"/>
           </a:p>
@@ -10629,7 +11791,7 @@
                 <a:ea typeface="Times New Roman" pitchFamily="34" charset="-122"/>
                 <a:cs typeface="Times New Roman" pitchFamily="34" charset="-120"/>
               </a:rPr>
-              <a:t>Board Summary</a:t>
+              <a:t>Activity 2: Answer 2</a:t>
             </a:r>
             <a:endParaRPr lang="en-US" sz="3600" dirty="0"/>
           </a:p>
@@ -10663,7 +11825,7 @@
               <a:buNone/>
             </a:pPr>
             <a:r>
-              <a:rPr lang="en-US" sz="4000" b="1" dirty="0">
+              <a:rPr lang="en-US" sz="4000" dirty="0">
                 <a:solidFill>
                   <a:srgbClr val="111111"/>
                 </a:solidFill>
@@ -10671,47 +11833,7 @@
                 <a:ea typeface="Times New Roman" pitchFamily="34" charset="-122"/>
                 <a:cs typeface="Times New Roman" pitchFamily="34" charset="-120"/>
               </a:rPr>
-              <a:t>Topic: The Earth as a Planet in the Solar System</a:t>
-            </a:r>
-            <a:endParaRPr lang="en-US" sz="4000" dirty="0"/>
-          </a:p>
-          <a:p>
-            <a:pPr algn="l" indent="0" marL="0">
-              <a:spcAft>
-                <a:spcPts val="800"/>
-              </a:spcAft>
-              <a:buNone/>
-            </a:pPr>
-            <a:r>
-              <a:rPr lang="en-US" sz="4000" b="1" dirty="0">
-                <a:solidFill>
-                  <a:srgbClr val="111111"/>
-                </a:solidFill>
-                <a:latin typeface="Times New Roman" pitchFamily="34" charset="0"/>
-                <a:ea typeface="Times New Roman" pitchFamily="34" charset="-122"/>
-                <a:cs typeface="Times New Roman" pitchFamily="34" charset="-120"/>
-              </a:rPr>
-              <a:t>Sub-topic: Location and Time</a:t>
-            </a:r>
-            <a:endParaRPr lang="en-US" sz="4000" dirty="0"/>
-          </a:p>
-          <a:p>
-            <a:pPr algn="l" indent="0" marL="0">
-              <a:spcAft>
-                <a:spcPts val="800"/>
-              </a:spcAft>
-              <a:buNone/>
-            </a:pPr>
-            <a:r>
-              <a:rPr lang="en-US" sz="4000" b="1" dirty="0">
-                <a:solidFill>
-                  <a:srgbClr val="990011"/>
-                </a:solidFill>
-                <a:latin typeface="Times New Roman" pitchFamily="34" charset="0"/>
-                <a:ea typeface="Times New Roman" pitchFamily="34" charset="-122"/>
-                <a:cs typeface="Times New Roman" pitchFamily="34" charset="-120"/>
-              </a:rPr>
-              <a:t>Lesson 2: Earth Divisions: Latitudes and Longitudes</a:t>
+              <a:t>The Greenwich Meridian.</a:t>
             </a:r>
             <a:endParaRPr lang="en-US" sz="4000" dirty="0"/>
           </a:p>
@@ -10823,15 +11945,54 @@
                 <a:ea typeface="Calibri" pitchFamily="34" charset="-122"/>
                 <a:cs typeface="Calibri" pitchFamily="34" charset="-120"/>
               </a:rPr>
-              <a:t>BOARD SUMMARY</a:t>
+              <a:t>3. GEOGRAPHICAL COORDINATES</a:t>
             </a:r>
             <a:endParaRPr lang="en-US" sz="1400" dirty="0"/>
+          </a:p>
+        </p:txBody>
+      </p:sp>
+      <p:sp>
+        <p:nvSpPr>
+          <p:cNvPr id="3" name="Text 1"/>
+          <p:cNvSpPr/>
+          <p:nvPr/>
+        </p:nvSpPr>
+        <p:spPr>
+          <a:xfrm>
+            <a:off x="457200" y="1005840"/>
+            <a:ext cx="11277295" cy="731520"/>
+          </a:xfrm>
+          <a:prstGeom prst="rect">
+            <a:avLst/>
+          </a:prstGeom>
+          <a:noFill/>
+          <a:ln/>
+        </p:spPr>
+        <p:txBody>
+          <a:bodyPr wrap="square" lIns="0" tIns="0" rIns="0" bIns="0" rtlCol="0" anchor="ctr"/>
+          <a:lstStyle/>
+          <a:p>
+            <a:pPr algn="ctr" indent="0" marL="0">
+              <a:buNone/>
+            </a:pPr>
+            <a:r>
+              <a:rPr lang="en-US" sz="3600" b="1" dirty="0">
+                <a:solidFill>
+                  <a:srgbClr val="990011"/>
+                </a:solidFill>
+                <a:latin typeface="Times New Roman" pitchFamily="34" charset="0"/>
+                <a:ea typeface="Times New Roman" pitchFamily="34" charset="-122"/>
+                <a:cs typeface="Times New Roman" pitchFamily="34" charset="-120"/>
+              </a:rPr>
+              <a:t>Activity 3</a:t>
+            </a:r>
+            <a:endParaRPr lang="en-US" sz="3600" dirty="0"/>
           </a:p>
         </p:txBody>
       </p:sp>
       <p:pic>
         <p:nvPicPr>
-          <p:cNvPr id="3" name="Image 0" descr="/home/claude/f4/img/minesec_sheet.png">    </p:cNvPr>
+          <p:cNvPr id="4" name="Image 0" descr="/home/claude/f4/img/v2/cameroon_grid_big.png">    </p:cNvPr>
           <p:cNvPicPr>
             <a:picLocks noChangeAspect="1"/>
           </p:cNvPicPr>
@@ -10845,8 +12006,8 @@
         </p:blipFill>
         <p:spPr>
           <a:xfrm>
-            <a:off x="0" y="658368"/>
-            <a:ext cx="1463040" cy="5833872"/>
+            <a:off x="2300072" y="1783080"/>
+            <a:ext cx="7591552" cy="4270248"/>
           </a:xfrm>
           <a:prstGeom prst="rect">
             <a:avLst/>
@@ -10855,14 +12016,14 @@
       </p:pic>
       <p:sp>
         <p:nvSpPr>
-          <p:cNvPr id="4" name="Text 1"/>
+          <p:cNvPr id="5" name="Text 2"/>
           <p:cNvSpPr/>
           <p:nvPr/>
         </p:nvSpPr>
         <p:spPr>
           <a:xfrm>
-            <a:off x="1691640" y="1005840"/>
-            <a:ext cx="10180015" cy="731520"/>
+            <a:off x="457200" y="6089904"/>
+            <a:ext cx="11277295" cy="347472"/>
           </a:xfrm>
           <a:prstGeom prst="rect">
             <a:avLst/>
@@ -10871,181 +12032,24 @@
           <a:ln/>
         </p:spPr>
         <p:txBody>
-          <a:bodyPr wrap="square" lIns="0" tIns="0" rIns="0" bIns="0" rtlCol="0" anchor="ctr">
-            <a:normAutofit/>
-          </a:bodyPr>
+          <a:bodyPr wrap="square" lIns="0" tIns="0" rIns="0" bIns="0" rtlCol="0" anchor="ctr"/>
           <a:lstStyle/>
           <a:p>
             <a:pPr algn="ctr" indent="0" marL="0">
               <a:buNone/>
             </a:pPr>
             <a:r>
-              <a:rPr lang="en-US" sz="3600" b="1" dirty="0">
-                <a:solidFill>
-                  <a:srgbClr val="990011"/>
+              <a:rPr lang="en-US" sz="1800" i="1" dirty="0">
+                <a:solidFill>
+                  <a:srgbClr val="555555"/>
                 </a:solidFill>
                 <a:latin typeface="Times New Roman" pitchFamily="34" charset="0"/>
                 <a:ea typeface="Times New Roman" pitchFamily="34" charset="-122"/>
                 <a:cs typeface="Times New Roman" pitchFamily="34" charset="-120"/>
               </a:rPr>
-              <a:t>1. Latitudes</a:t>
-            </a:r>
-            <a:endParaRPr lang="en-US" sz="3600" dirty="0"/>
-          </a:p>
-        </p:txBody>
-      </p:sp>
-      <p:sp>
-        <p:nvSpPr>
-          <p:cNvPr id="5" name="Text 2"/>
-          <p:cNvSpPr/>
-          <p:nvPr/>
-        </p:nvSpPr>
-        <p:spPr>
-          <a:xfrm>
-            <a:off x="1691640" y="1737360"/>
-            <a:ext cx="10180015" cy="457200"/>
-          </a:xfrm>
-          <a:prstGeom prst="rect">
-            <a:avLst/>
-          </a:prstGeom>
-          <a:noFill/>
-          <a:ln/>
-        </p:spPr>
-        <p:txBody>
-          <a:bodyPr wrap="square" lIns="0" tIns="0" rIns="0" bIns="0" rtlCol="0" anchor="ctr"/>
-          <a:lstStyle/>
-          <a:p>
-            <a:pPr algn="l" indent="0" marL="0">
-              <a:buNone/>
-            </a:pPr>
-            <a:r>
-              <a:rPr lang="en-US" sz="3200" b="1" dirty="0">
-                <a:solidFill>
-                  <a:srgbClr val="990011"/>
-                </a:solidFill>
-                <a:latin typeface="Times New Roman" pitchFamily="34" charset="0"/>
-                <a:ea typeface="Times New Roman" pitchFamily="34" charset="-122"/>
-                <a:cs typeface="Times New Roman" pitchFamily="34" charset="-120"/>
-              </a:rPr>
-              <a:t>A) Meaning and Major Lines</a:t>
-            </a:r>
-            <a:endParaRPr lang="en-US" sz="3200" dirty="0"/>
-          </a:p>
-        </p:txBody>
-      </p:sp>
-      <p:sp>
-        <p:nvSpPr>
-          <p:cNvPr id="6" name="Text 3"/>
-          <p:cNvSpPr/>
-          <p:nvPr/>
-        </p:nvSpPr>
-        <p:spPr>
-          <a:xfrm>
-            <a:off x="1691640" y="2240280"/>
-            <a:ext cx="10180015" cy="4206240"/>
-          </a:xfrm>
-          <a:prstGeom prst="rect">
-            <a:avLst/>
-          </a:prstGeom>
-          <a:noFill/>
-          <a:ln/>
-        </p:spPr>
-        <p:txBody>
-          <a:bodyPr wrap="square" lIns="0" tIns="0" rIns="0" bIns="0" rtlCol="0" anchor="t"/>
-          <a:lstStyle/>
-          <a:p>
-            <a:pPr algn="l" indent="0" marL="0">
-              <a:spcAft>
-                <a:spcPts val="800"/>
-              </a:spcAft>
-              <a:buNone/>
-            </a:pPr>
-            <a:r>
-              <a:rPr lang="en-US" sz="4000" i="1" dirty="0">
-                <a:solidFill>
-                  <a:srgbClr val="111111"/>
-                </a:solidFill>
-                <a:latin typeface="Times New Roman" pitchFamily="34" charset="0"/>
-                <a:ea typeface="Times New Roman" pitchFamily="34" charset="-122"/>
-                <a:cs typeface="Times New Roman" pitchFamily="34" charset="-120"/>
-              </a:rPr>
-              <a:t>Latitudes are defined and named as follows:</a:t>
-            </a:r>
-            <a:endParaRPr lang="en-US" sz="4000" dirty="0"/>
-          </a:p>
-          <a:p>
-            <a:pPr algn="l" indent="0" marL="0">
-              <a:spcAft>
-                <a:spcPts val="800"/>
-              </a:spcAft>
-              <a:buNone/>
-            </a:pPr>
-            <a:r>
-              <a:rPr lang="en-US" sz="4000" b="1" dirty="0">
-                <a:solidFill>
-                  <a:srgbClr val="111111"/>
-                </a:solidFill>
-                <a:latin typeface="Times New Roman" pitchFamily="34" charset="0"/>
-                <a:ea typeface="Times New Roman" pitchFamily="34" charset="-122"/>
-                <a:cs typeface="Times New Roman" pitchFamily="34" charset="-120"/>
-              </a:rPr>
-              <a:t>Latitude: </a:t>
-            </a:r>
-            <a:pPr algn="l" indent="0" marL="0">
-              <a:spcAft>
-                <a:spcPts val="800"/>
-              </a:spcAft>
-              <a:buNone/>
-            </a:pPr>
-            <a:r>
-              <a:rPr lang="en-US" sz="4000" dirty="0">
-                <a:solidFill>
-                  <a:srgbClr val="111111"/>
-                </a:solidFill>
-                <a:latin typeface="Times New Roman" pitchFamily="34" charset="0"/>
-                <a:ea typeface="Times New Roman" pitchFamily="34" charset="-122"/>
-                <a:cs typeface="Times New Roman" pitchFamily="34" charset="-120"/>
-              </a:rPr>
-              <a:t>It is the angular distance of a place north or south of the Equator.</a:t>
-            </a:r>
-            <a:endParaRPr lang="en-US" sz="4000" dirty="0"/>
-          </a:p>
-          <a:p>
-            <a:pPr algn="l" indent="0" marL="0">
-              <a:spcAft>
-                <a:spcPts val="800"/>
-              </a:spcAft>
-              <a:buNone/>
-            </a:pPr>
-            <a:r>
-              <a:rPr lang="en-US" sz="4000" b="1" dirty="0">
-                <a:solidFill>
-                  <a:srgbClr val="111111"/>
-                </a:solidFill>
-                <a:latin typeface="Times New Roman" pitchFamily="34" charset="0"/>
-                <a:ea typeface="Times New Roman" pitchFamily="34" charset="-122"/>
-                <a:cs typeface="Times New Roman" pitchFamily="34" charset="-120"/>
-              </a:rPr>
-              <a:t>Equator: </a:t>
-            </a:r>
-            <a:pPr algn="l" indent="0" marL="0">
-              <a:spcAft>
-                <a:spcPts val="800"/>
-              </a:spcAft>
-              <a:buNone/>
-            </a:pPr>
-            <a:r>
-              <a:rPr lang="en-US" sz="4000" dirty="0">
-                <a:solidFill>
-                  <a:srgbClr val="111111"/>
-                </a:solidFill>
-                <a:latin typeface="Times New Roman" pitchFamily="34" charset="0"/>
-                <a:ea typeface="Times New Roman" pitchFamily="34" charset="-122"/>
-                <a:cs typeface="Times New Roman" pitchFamily="34" charset="-120"/>
-              </a:rPr>
-              <a:t>It is the line of latitude 0° that divides the Earth into two hemispheres.</a:t>
-            </a:r>
-            <a:endParaRPr lang="en-US" sz="4000" dirty="0"/>
+              <a:t>Cameroon with lines of latitude and longitude.</a:t>
+            </a:r>
+            <a:endParaRPr lang="en-US" sz="1800" dirty="0"/>
           </a:p>
         </p:txBody>
       </p:sp>
@@ -12164,7 +13168,7 @@
                 <a:ea typeface="Calibri" pitchFamily="34" charset="-122"/>
                 <a:cs typeface="Calibri" pitchFamily="34" charset="-120"/>
               </a:rPr>
-              <a:t>BOARD SUMMARY</a:t>
+              <a:t>3. GEOGRAPHICAL COORDINATES</a:t>
             </a:r>
             <a:endParaRPr lang="en-US" sz="1400" dirty="0"/>
           </a:p>
@@ -12187,7 +13191,7 @@
         <p:spPr>
           <a:xfrm>
             <a:off x="0" y="658368"/>
-            <a:ext cx="3840480" cy="5833872"/>
+            <a:ext cx="5120640" cy="5833872"/>
           </a:xfrm>
           <a:prstGeom prst="rect">
             <a:avLst/>
@@ -12202,8 +13206,8 @@
         </p:nvSpPr>
         <p:spPr>
           <a:xfrm>
-            <a:off x="4069080" y="1005840"/>
-            <a:ext cx="7802575" cy="731520"/>
+            <a:off x="5349240" y="1005840"/>
+            <a:ext cx="6522415" cy="731520"/>
           </a:xfrm>
           <a:prstGeom prst="rect">
             <a:avLst/>
@@ -12229,7 +13233,7 @@
                 <a:ea typeface="Times New Roman" pitchFamily="34" charset="-122"/>
                 <a:cs typeface="Times New Roman" pitchFamily="34" charset="-120"/>
               </a:rPr>
-              <a:t>1. Latitudes</a:t>
+              <a:t>Activity 3: Question</a:t>
             </a:r>
             <a:endParaRPr lang="en-US" sz="3600" dirty="0"/>
           </a:p>
@@ -12243,47 +13247,8 @@
         </p:nvSpPr>
         <p:spPr>
           <a:xfrm>
-            <a:off x="4069080" y="1737360"/>
-            <a:ext cx="7802575" cy="457200"/>
-          </a:xfrm>
-          <a:prstGeom prst="rect">
-            <a:avLst/>
-          </a:prstGeom>
-          <a:noFill/>
-          <a:ln/>
-        </p:spPr>
-        <p:txBody>
-          <a:bodyPr wrap="square" lIns="0" tIns="0" rIns="0" bIns="0" rtlCol="0" anchor="ctr"/>
-          <a:lstStyle/>
-          <a:p>
-            <a:pPr algn="l" indent="0" marL="0">
-              <a:buNone/>
-            </a:pPr>
-            <a:r>
-              <a:rPr lang="en-US" sz="3200" b="1" dirty="0">
-                <a:solidFill>
-                  <a:srgbClr val="990011"/>
-                </a:solidFill>
-                <a:latin typeface="Times New Roman" pitchFamily="34" charset="0"/>
-                <a:ea typeface="Times New Roman" pitchFamily="34" charset="-122"/>
-                <a:cs typeface="Times New Roman" pitchFamily="34" charset="-120"/>
-              </a:rPr>
-              <a:t>A) Meaning and Major Lines (continued)</a:t>
-            </a:r>
-            <a:endParaRPr lang="en-US" sz="3200" dirty="0"/>
-          </a:p>
-        </p:txBody>
-      </p:sp>
-      <p:sp>
-        <p:nvSpPr>
-          <p:cNvPr id="6" name="Text 3"/>
-          <p:cNvSpPr/>
-          <p:nvPr/>
-        </p:nvSpPr>
-        <p:spPr>
-          <a:xfrm>
-            <a:off x="4069080" y="2240280"/>
-            <a:ext cx="7802575" cy="4206240"/>
+            <a:off x="5349240" y="1783080"/>
+            <a:ext cx="6522415" cy="4663440"/>
           </a:xfrm>
           <a:prstGeom prst="rect">
             <a:avLst/>
@@ -12302,7 +13267,7 @@
               <a:buNone/>
             </a:pPr>
             <a:r>
-              <a:rPr lang="en-US" sz="4000" b="1" dirty="0">
+              <a:rPr lang="en-US" sz="4000" dirty="0">
                 <a:solidFill>
                   <a:srgbClr val="111111"/>
                 </a:solidFill>
@@ -12310,61 +13275,7 @@
                 <a:ea typeface="Times New Roman" pitchFamily="34" charset="-122"/>
                 <a:cs typeface="Times New Roman" pitchFamily="34" charset="-120"/>
               </a:rPr>
-              <a:t>Tropics: </a:t>
-            </a:r>
-            <a:pPr algn="l" indent="0" marL="0">
-              <a:spcAft>
-                <a:spcPts val="800"/>
-              </a:spcAft>
-              <a:buNone/>
-            </a:pPr>
-            <a:r>
-              <a:rPr lang="en-US" sz="4000" dirty="0">
-                <a:solidFill>
-                  <a:srgbClr val="111111"/>
-                </a:solidFill>
-                <a:latin typeface="Times New Roman" pitchFamily="34" charset="0"/>
-                <a:ea typeface="Times New Roman" pitchFamily="34" charset="-122"/>
-                <a:cs typeface="Times New Roman" pitchFamily="34" charset="-120"/>
-              </a:rPr>
-              <a:t>They are the Tropic of Cancer at 23½° N and the Tropic of Capricorn at 23½° S.</a:t>
-            </a:r>
-            <a:endParaRPr lang="en-US" sz="4000" dirty="0"/>
-          </a:p>
-          <a:p>
-            <a:pPr algn="l" indent="0" marL="0">
-              <a:spcAft>
-                <a:spcPts val="800"/>
-              </a:spcAft>
-              <a:buNone/>
-            </a:pPr>
-            <a:r>
-              <a:rPr lang="en-US" sz="4000" b="1" dirty="0">
-                <a:solidFill>
-                  <a:srgbClr val="111111"/>
-                </a:solidFill>
-                <a:latin typeface="Times New Roman" pitchFamily="34" charset="0"/>
-                <a:ea typeface="Times New Roman" pitchFamily="34" charset="-122"/>
-                <a:cs typeface="Times New Roman" pitchFamily="34" charset="-120"/>
-              </a:rPr>
-              <a:t>Polar circles: </a:t>
-            </a:r>
-            <a:pPr algn="l" indent="0" marL="0">
-              <a:spcAft>
-                <a:spcPts val="800"/>
-              </a:spcAft>
-              <a:buNone/>
-            </a:pPr>
-            <a:r>
-              <a:rPr lang="en-US" sz="4000" dirty="0">
-                <a:solidFill>
-                  <a:srgbClr val="111111"/>
-                </a:solidFill>
-                <a:latin typeface="Times New Roman" pitchFamily="34" charset="0"/>
-                <a:ea typeface="Times New Roman" pitchFamily="34" charset="-122"/>
-                <a:cs typeface="Times New Roman" pitchFamily="34" charset="-120"/>
-              </a:rPr>
-              <a:t>They are the Arctic Circle at 66½° N and the Antarctic Circle at 66½° S.</a:t>
+              <a:t>Garoua is at about 9° N, 13° E. What does each number tell us?</a:t>
             </a:r>
             <a:endParaRPr lang="en-US" sz="4000" dirty="0"/>
           </a:p>
@@ -12476,54 +13387,15 @@
                 <a:ea typeface="Calibri" pitchFamily="34" charset="-122"/>
                 <a:cs typeface="Calibri" pitchFamily="34" charset="-120"/>
               </a:rPr>
-              <a:t>BOARD SUMMARY</a:t>
+              <a:t>3. GEOGRAPHICAL COORDINATES</a:t>
             </a:r>
             <a:endParaRPr lang="en-US" sz="1400" dirty="0"/>
-          </a:p>
-        </p:txBody>
-      </p:sp>
-      <p:sp>
-        <p:nvSpPr>
-          <p:cNvPr id="3" name="Text 1"/>
-          <p:cNvSpPr/>
-          <p:nvPr/>
-        </p:nvSpPr>
-        <p:spPr>
-          <a:xfrm>
-            <a:off x="457200" y="1005840"/>
-            <a:ext cx="11277295" cy="731520"/>
-          </a:xfrm>
-          <a:prstGeom prst="rect">
-            <a:avLst/>
-          </a:prstGeom>
-          <a:noFill/>
-          <a:ln/>
-        </p:spPr>
-        <p:txBody>
-          <a:bodyPr wrap="square" lIns="0" tIns="0" rIns="0" bIns="0" rtlCol="0" anchor="ctr"/>
-          <a:lstStyle/>
-          <a:p>
-            <a:pPr algn="ctr" indent="0" marL="0">
-              <a:buNone/>
-            </a:pPr>
-            <a:r>
-              <a:rPr lang="en-US" sz="3600" b="1" dirty="0">
-                <a:solidFill>
-                  <a:srgbClr val="990011"/>
-                </a:solidFill>
-                <a:latin typeface="Times New Roman" pitchFamily="34" charset="0"/>
-                <a:ea typeface="Times New Roman" pitchFamily="34" charset="-122"/>
-                <a:cs typeface="Times New Roman" pitchFamily="34" charset="-120"/>
-              </a:rPr>
-              <a:t>1. Latitudes</a:t>
-            </a:r>
-            <a:endParaRPr lang="en-US" sz="3600" dirty="0"/>
           </a:p>
         </p:txBody>
       </p:sp>
       <p:pic>
         <p:nvPicPr>
-          <p:cNvPr id="4" name="Image 0" descr="/home/claude/f4/img/v2/latitudes_big.png">    </p:cNvPr>
+          <p:cNvPr id="3" name="Image 0" descr="/home/claude/f4/img/minesec_sheet.png">    </p:cNvPr>
           <p:cNvPicPr>
             <a:picLocks noChangeAspect="1"/>
           </p:cNvPicPr>
@@ -12537,8 +13409,8 @@
         </p:blipFill>
         <p:spPr>
           <a:xfrm>
-            <a:off x="629930" y="1783080"/>
-            <a:ext cx="10931835" cy="4270248"/>
+            <a:off x="0" y="658368"/>
+            <a:ext cx="5120640" cy="5833872"/>
           </a:xfrm>
           <a:prstGeom prst="rect">
             <a:avLst/>
@@ -12547,14 +13419,14 @@
       </p:pic>
       <p:sp>
         <p:nvSpPr>
-          <p:cNvPr id="5" name="Text 2"/>
+          <p:cNvPr id="4" name="Text 1"/>
           <p:cNvSpPr/>
           <p:nvPr/>
         </p:nvSpPr>
         <p:spPr>
           <a:xfrm>
-            <a:off x="457200" y="6089904"/>
-            <a:ext cx="11277295" cy="347472"/>
+            <a:off x="5349240" y="1005840"/>
+            <a:ext cx="6522415" cy="731520"/>
           </a:xfrm>
           <a:prstGeom prst="rect">
             <a:avLst/>
@@ -12563,24 +13435,68 @@
           <a:ln/>
         </p:spPr>
         <p:txBody>
-          <a:bodyPr wrap="square" lIns="0" tIns="0" rIns="0" bIns="0" rtlCol="0" anchor="ctr"/>
+          <a:bodyPr wrap="square" lIns="0" tIns="0" rIns="0" bIns="0" rtlCol="0" anchor="ctr">
+            <a:normAutofit/>
+          </a:bodyPr>
           <a:lstStyle/>
           <a:p>
             <a:pPr algn="ctr" indent="0" marL="0">
               <a:buNone/>
             </a:pPr>
             <a:r>
-              <a:rPr lang="en-US" sz="1800" i="1" dirty="0">
-                <a:solidFill>
-                  <a:srgbClr val="555555"/>
+              <a:rPr lang="en-US" sz="3600" b="1" dirty="0">
+                <a:solidFill>
+                  <a:srgbClr val="990011"/>
                 </a:solidFill>
                 <a:latin typeface="Times New Roman" pitchFamily="34" charset="0"/>
                 <a:ea typeface="Times New Roman" pitchFamily="34" charset="-122"/>
                 <a:cs typeface="Times New Roman" pitchFamily="34" charset="-120"/>
               </a:rPr>
-              <a:t>Illustration: the major lines of latitude</a:t>
-            </a:r>
-            <a:endParaRPr lang="en-US" sz="1800" dirty="0"/>
+              <a:t>Activity 3: Answer</a:t>
+            </a:r>
+            <a:endParaRPr lang="en-US" sz="3600" dirty="0"/>
+          </a:p>
+        </p:txBody>
+      </p:sp>
+      <p:sp>
+        <p:nvSpPr>
+          <p:cNvPr id="5" name="Text 2"/>
+          <p:cNvSpPr/>
+          <p:nvPr/>
+        </p:nvSpPr>
+        <p:spPr>
+          <a:xfrm>
+            <a:off x="5349240" y="1783080"/>
+            <a:ext cx="6522415" cy="4663440"/>
+          </a:xfrm>
+          <a:prstGeom prst="rect">
+            <a:avLst/>
+          </a:prstGeom>
+          <a:noFill/>
+          <a:ln/>
+        </p:spPr>
+        <p:txBody>
+          <a:bodyPr wrap="square" lIns="0" tIns="0" rIns="0" bIns="0" rtlCol="0" anchor="t"/>
+          <a:lstStyle/>
+          <a:p>
+            <a:pPr algn="l" indent="0" marL="0">
+              <a:spcAft>
+                <a:spcPts val="800"/>
+              </a:spcAft>
+              <a:buNone/>
+            </a:pPr>
+            <a:r>
+              <a:rPr lang="en-US" sz="4000" dirty="0">
+                <a:solidFill>
+                  <a:srgbClr val="111111"/>
+                </a:solidFill>
+                <a:latin typeface="Times New Roman" pitchFamily="34" charset="0"/>
+                <a:ea typeface="Times New Roman" pitchFamily="34" charset="-122"/>
+                <a:cs typeface="Times New Roman" pitchFamily="34" charset="-120"/>
+              </a:rPr>
+              <a:t>9° N: 9 degrees north of the Equator; 13° E: 13 degrees east of Greenwich.</a:t>
+            </a:r>
+            <a:endParaRPr lang="en-US" sz="4000" dirty="0"/>
           </a:p>
         </p:txBody>
       </p:sp>
@@ -12713,7 +13629,7 @@
         <p:spPr>
           <a:xfrm>
             <a:off x="0" y="658368"/>
-            <a:ext cx="2468880" cy="5833872"/>
+            <a:ext cx="5120640" cy="5833872"/>
           </a:xfrm>
           <a:prstGeom prst="rect">
             <a:avLst/>
@@ -12728,8 +13644,8 @@
         </p:nvSpPr>
         <p:spPr>
           <a:xfrm>
-            <a:off x="2697480" y="1005840"/>
-            <a:ext cx="9174175" cy="731520"/>
+            <a:off x="5349240" y="1005840"/>
+            <a:ext cx="6522415" cy="731520"/>
           </a:xfrm>
           <a:prstGeom prst="rect">
             <a:avLst/>
@@ -12755,7 +13671,7 @@
                 <a:ea typeface="Times New Roman" pitchFamily="34" charset="-122"/>
                 <a:cs typeface="Times New Roman" pitchFamily="34" charset="-120"/>
               </a:rPr>
-              <a:t>1. Latitudes</a:t>
+              <a:t>Board Summary</a:t>
             </a:r>
             <a:endParaRPr lang="en-US" sz="3600" dirty="0"/>
           </a:p>
@@ -12769,47 +13685,8 @@
         </p:nvSpPr>
         <p:spPr>
           <a:xfrm>
-            <a:off x="2697480" y="1737360"/>
-            <a:ext cx="9174175" cy="457200"/>
-          </a:xfrm>
-          <a:prstGeom prst="rect">
-            <a:avLst/>
-          </a:prstGeom>
-          <a:noFill/>
-          <a:ln/>
-        </p:spPr>
-        <p:txBody>
-          <a:bodyPr wrap="square" lIns="0" tIns="0" rIns="0" bIns="0" rtlCol="0" anchor="ctr"/>
-          <a:lstStyle/>
-          <a:p>
-            <a:pPr algn="l" indent="0" marL="0">
-              <a:buNone/>
-            </a:pPr>
-            <a:r>
-              <a:rPr lang="en-US" sz="3200" b="1" dirty="0">
-                <a:solidFill>
-                  <a:srgbClr val="990011"/>
-                </a:solidFill>
-                <a:latin typeface="Times New Roman" pitchFamily="34" charset="0"/>
-                <a:ea typeface="Times New Roman" pitchFamily="34" charset="-122"/>
-                <a:cs typeface="Times New Roman" pitchFamily="34" charset="-120"/>
-              </a:rPr>
-              <a:t>B) Characteristics</a:t>
-            </a:r>
-            <a:endParaRPr lang="en-US" sz="3200" dirty="0"/>
-          </a:p>
-        </p:txBody>
-      </p:sp>
-      <p:sp>
-        <p:nvSpPr>
-          <p:cNvPr id="6" name="Text 3"/>
-          <p:cNvSpPr/>
-          <p:nvPr/>
-        </p:nvSpPr>
-        <p:spPr>
-          <a:xfrm>
-            <a:off x="2697480" y="2240280"/>
-            <a:ext cx="9174175" cy="4206240"/>
+            <a:off x="5349240" y="1783080"/>
+            <a:ext cx="6522415" cy="4663440"/>
           </a:xfrm>
           <a:prstGeom prst="rect">
             <a:avLst/>
@@ -12828,7 +13705,7 @@
               <a:buNone/>
             </a:pPr>
             <a:r>
-              <a:rPr lang="en-US" sz="4000" i="1" dirty="0">
+              <a:rPr lang="en-US" sz="4000" b="1" dirty="0">
                 <a:solidFill>
                   <a:srgbClr val="111111"/>
                 </a:solidFill>
@@ -12836,7 +13713,7 @@
                 <a:ea typeface="Times New Roman" pitchFamily="34" charset="-122"/>
                 <a:cs typeface="Times New Roman" pitchFamily="34" charset="-120"/>
               </a:rPr>
-              <a:t>Lines of latitude have the following characteristics:</a:t>
+              <a:t>Topic: The Earth as a Planet in the Solar System</a:t>
             </a:r>
             <a:endParaRPr lang="en-US" sz="4000" dirty="0"/>
           </a:p>
@@ -12856,8 +13733,11 @@
                 <a:ea typeface="Times New Roman" pitchFamily="34" charset="-122"/>
                 <a:cs typeface="Times New Roman" pitchFamily="34" charset="-120"/>
               </a:rPr>
-              <a:t>Parallel lines: </a:t>
-            </a:r>
+              <a:t>Sub-topic: Location and Time</a:t>
+            </a:r>
+            <a:endParaRPr lang="en-US" sz="4000" dirty="0"/>
+          </a:p>
+          <a:p>
             <a:pPr algn="l" indent="0" marL="0">
               <a:spcAft>
                 <a:spcPts val="800"/>
@@ -12865,52 +13745,15 @@
               <a:buNone/>
             </a:pPr>
             <a:r>
-              <a:rPr lang="en-US" sz="4000" dirty="0">
-                <a:solidFill>
-                  <a:srgbClr val="111111"/>
+              <a:rPr lang="en-US" sz="4000" b="1" dirty="0">
+                <a:solidFill>
+                  <a:srgbClr val="990011"/>
                 </a:solidFill>
                 <a:latin typeface="Times New Roman" pitchFamily="34" charset="0"/>
                 <a:ea typeface="Times New Roman" pitchFamily="34" charset="-122"/>
                 <a:cs typeface="Times New Roman" pitchFamily="34" charset="-120"/>
               </a:rPr>
-              <a:t>Lines of latitude are parallel and never meet.</a:t>
-            </a:r>
-            <a:endParaRPr lang="en-US" sz="4000" dirty="0"/>
-          </a:p>
-          <a:p>
-            <a:pPr algn="l" indent="0" marL="0">
-              <a:spcAft>
-                <a:spcPts val="800"/>
-              </a:spcAft>
-              <a:buNone/>
-            </a:pPr>
-            <a:r>
-              <a:rPr lang="en-US" sz="4000" b="1" dirty="0">
-                <a:solidFill>
-                  <a:srgbClr val="111111"/>
-                </a:solidFill>
-                <a:latin typeface="Times New Roman" pitchFamily="34" charset="0"/>
-                <a:ea typeface="Times New Roman" pitchFamily="34" charset="-122"/>
-                <a:cs typeface="Times New Roman" pitchFamily="34" charset="-120"/>
-              </a:rPr>
-              <a:t>Unequal length: </a:t>
-            </a:r>
-            <a:pPr algn="l" indent="0" marL="0">
-              <a:spcAft>
-                <a:spcPts val="800"/>
-              </a:spcAft>
-              <a:buNone/>
-            </a:pPr>
-            <a:r>
-              <a:rPr lang="en-US" sz="4000" dirty="0">
-                <a:solidFill>
-                  <a:srgbClr val="111111"/>
-                </a:solidFill>
-                <a:latin typeface="Times New Roman" pitchFamily="34" charset="0"/>
-                <a:ea typeface="Times New Roman" pitchFamily="34" charset="-122"/>
-                <a:cs typeface="Times New Roman" pitchFamily="34" charset="-120"/>
-              </a:rPr>
-              <a:t>They become shorter from the Equator towards the poles.</a:t>
+              <a:t>Lesson 2: Earth Divisions: Latitudes and Longitudes</a:t>
             </a:r>
             <a:endParaRPr lang="en-US" sz="4000" dirty="0"/>
           </a:p>
@@ -13087,7 +13930,7 @@
                 <a:ea typeface="Times New Roman" pitchFamily="34" charset="-122"/>
                 <a:cs typeface="Times New Roman" pitchFamily="34" charset="-120"/>
               </a:rPr>
-              <a:t>2. Longitudes</a:t>
+              <a:t>DEFINITIONS</a:t>
             </a:r>
             <a:endParaRPr lang="en-US" sz="3600" dirty="0"/>
           </a:p>
@@ -13129,7 +13972,7 @@
                 <a:ea typeface="Times New Roman" pitchFamily="34" charset="-122"/>
                 <a:cs typeface="Times New Roman" pitchFamily="34" charset="-120"/>
               </a:rPr>
-              <a:t>Longitudes are defined and described as follows:</a:t>
+              <a:t>The key terms of this lesson are defined as follows:</a:t>
             </a:r>
             <a:endParaRPr lang="en-US" sz="4000" dirty="0"/>
           </a:p>
@@ -13149,7 +13992,7 @@
                 <a:ea typeface="Times New Roman" pitchFamily="34" charset="-122"/>
                 <a:cs typeface="Times New Roman" pitchFamily="34" charset="-120"/>
               </a:rPr>
-              <a:t>Longitude: </a:t>
+              <a:t>Latitude: </a:t>
             </a:r>
             <a:pPr algn="l" indent="0" marL="0">
               <a:spcAft>
@@ -13166,7 +14009,7 @@
                 <a:ea typeface="Times New Roman" pitchFamily="34" charset="-122"/>
                 <a:cs typeface="Times New Roman" pitchFamily="34" charset="-120"/>
               </a:rPr>
-              <a:t>It is the angular distance of a place east or west of the Greenwich Meridian.</a:t>
+              <a:t>It is the angular distance of a place north or south of the Equator, measured in degrees.</a:t>
             </a:r>
             <a:endParaRPr lang="en-US" sz="4000" dirty="0"/>
           </a:p>
@@ -13343,7 +14186,7 @@
                 <a:ea typeface="Times New Roman" pitchFamily="34" charset="-122"/>
                 <a:cs typeface="Times New Roman" pitchFamily="34" charset="-120"/>
               </a:rPr>
-              <a:t>2. Longitudes (continued)</a:t>
+              <a:t>DEFINITIONS (continued)</a:t>
             </a:r>
             <a:endParaRPr lang="en-US" sz="3600" dirty="0"/>
           </a:p>
@@ -13385,7 +14228,7 @@
                 <a:ea typeface="Times New Roman" pitchFamily="34" charset="-122"/>
                 <a:cs typeface="Times New Roman" pitchFamily="34" charset="-120"/>
               </a:rPr>
-              <a:t>Greenwich Meridian: </a:t>
+              <a:t>Longitude: </a:t>
             </a:r>
             <a:pPr algn="l" indent="0" marL="0">
               <a:spcAft>
@@ -13402,7 +14245,7 @@
                 <a:ea typeface="Times New Roman" pitchFamily="34" charset="-122"/>
                 <a:cs typeface="Times New Roman" pitchFamily="34" charset="-120"/>
               </a:rPr>
-              <a:t>It is the line of longitude 0°, and its opposite is the 180° line.</a:t>
+              <a:t>It is the angular distance of a place east or west of the Greenwich Meridian, measured in degrees.</a:t>
             </a:r>
             <a:endParaRPr lang="en-US" sz="4000" dirty="0"/>
           </a:p>
@@ -13422,7 +14265,7 @@
                 <a:ea typeface="Times New Roman" pitchFamily="34" charset="-122"/>
                 <a:cs typeface="Times New Roman" pitchFamily="34" charset="-120"/>
               </a:rPr>
-              <a:t>Characteristics: </a:t>
+              <a:t>Parallels: </a:t>
             </a:r>
             <a:pPr algn="l" indent="0" marL="0">
               <a:spcAft>
@@ -13439,7 +14282,7 @@
                 <a:ea typeface="Times New Roman" pitchFamily="34" charset="-122"/>
                 <a:cs typeface="Times New Roman" pitchFamily="34" charset="-120"/>
               </a:rPr>
-              <a:t>Lines of longitude are of equal length and they all meet at the poles.</a:t>
+              <a:t>They are the lines that join places with the same latitude.</a:t>
             </a:r>
             <a:endParaRPr lang="en-US" sz="4000" dirty="0"/>
           </a:p>
@@ -13557,48 +14400,9 @@
           </a:p>
         </p:txBody>
       </p:sp>
-      <p:sp>
-        <p:nvSpPr>
-          <p:cNvPr id="3" name="Text 1"/>
-          <p:cNvSpPr/>
-          <p:nvPr/>
-        </p:nvSpPr>
-        <p:spPr>
-          <a:xfrm>
-            <a:off x="457200" y="1005840"/>
-            <a:ext cx="11277295" cy="731520"/>
-          </a:xfrm>
-          <a:prstGeom prst="rect">
-            <a:avLst/>
-          </a:prstGeom>
-          <a:noFill/>
-          <a:ln/>
-        </p:spPr>
-        <p:txBody>
-          <a:bodyPr wrap="square" lIns="0" tIns="0" rIns="0" bIns="0" rtlCol="0" anchor="ctr"/>
-          <a:lstStyle/>
-          <a:p>
-            <a:pPr algn="ctr" indent="0" marL="0">
-              <a:buNone/>
-            </a:pPr>
-            <a:r>
-              <a:rPr lang="en-US" sz="3600" b="1" dirty="0">
-                <a:solidFill>
-                  <a:srgbClr val="990011"/>
-                </a:solidFill>
-                <a:latin typeface="Times New Roman" pitchFamily="34" charset="0"/>
-                <a:ea typeface="Times New Roman" pitchFamily="34" charset="-122"/>
-                <a:cs typeface="Times New Roman" pitchFamily="34" charset="-120"/>
-              </a:rPr>
-              <a:t>2. Longitudes</a:t>
-            </a:r>
-            <a:endParaRPr lang="en-US" sz="3600" dirty="0"/>
-          </a:p>
-        </p:txBody>
-      </p:sp>
       <p:pic>
         <p:nvPicPr>
-          <p:cNvPr id="4" name="Image 0" descr="/home/claude/f4/img/v2/longitudes_big.png">    </p:cNvPr>
+          <p:cNvPr id="3" name="Image 0" descr="/home/claude/f4/img/minesec_sheet.png">    </p:cNvPr>
           <p:cNvPicPr>
             <a:picLocks noChangeAspect="1"/>
           </p:cNvPicPr>
@@ -13612,8 +14416,8 @@
         </p:blipFill>
         <p:spPr>
           <a:xfrm>
-            <a:off x="629930" y="1783080"/>
-            <a:ext cx="10931835" cy="4270248"/>
+            <a:off x="0" y="658368"/>
+            <a:ext cx="3840480" cy="5833872"/>
           </a:xfrm>
           <a:prstGeom prst="rect">
             <a:avLst/>
@@ -13622,14 +14426,14 @@
       </p:pic>
       <p:sp>
         <p:nvSpPr>
-          <p:cNvPr id="5" name="Text 2"/>
+          <p:cNvPr id="4" name="Text 1"/>
           <p:cNvSpPr/>
           <p:nvPr/>
         </p:nvSpPr>
         <p:spPr>
           <a:xfrm>
-            <a:off x="457200" y="6089904"/>
-            <a:ext cx="11277295" cy="347472"/>
+            <a:off x="4069080" y="1005840"/>
+            <a:ext cx="7802575" cy="731520"/>
           </a:xfrm>
           <a:prstGeom prst="rect">
             <a:avLst/>
@@ -13638,24 +14442,122 @@
           <a:ln/>
         </p:spPr>
         <p:txBody>
-          <a:bodyPr wrap="square" lIns="0" tIns="0" rIns="0" bIns="0" rtlCol="0" anchor="ctr"/>
+          <a:bodyPr wrap="square" lIns="0" tIns="0" rIns="0" bIns="0" rtlCol="0" anchor="ctr">
+            <a:normAutofit/>
+          </a:bodyPr>
           <a:lstStyle/>
           <a:p>
             <a:pPr algn="ctr" indent="0" marL="0">
               <a:buNone/>
             </a:pPr>
             <a:r>
-              <a:rPr lang="en-US" sz="1800" i="1" dirty="0">
-                <a:solidFill>
-                  <a:srgbClr val="555555"/>
+              <a:rPr lang="en-US" sz="3600" b="1" dirty="0">
+                <a:solidFill>
+                  <a:srgbClr val="990011"/>
                 </a:solidFill>
                 <a:latin typeface="Times New Roman" pitchFamily="34" charset="0"/>
                 <a:ea typeface="Times New Roman" pitchFamily="34" charset="-122"/>
                 <a:cs typeface="Times New Roman" pitchFamily="34" charset="-120"/>
               </a:rPr>
-              <a:t>Illustration: lines of longitude</a:t>
-            </a:r>
-            <a:endParaRPr lang="en-US" sz="1800" dirty="0"/>
+              <a:t>DEFINITIONS (continued)</a:t>
+            </a:r>
+            <a:endParaRPr lang="en-US" sz="3600" dirty="0"/>
+          </a:p>
+        </p:txBody>
+      </p:sp>
+      <p:sp>
+        <p:nvSpPr>
+          <p:cNvPr id="5" name="Text 2"/>
+          <p:cNvSpPr/>
+          <p:nvPr/>
+        </p:nvSpPr>
+        <p:spPr>
+          <a:xfrm>
+            <a:off x="4069080" y="1783080"/>
+            <a:ext cx="7802575" cy="4663440"/>
+          </a:xfrm>
+          <a:prstGeom prst="rect">
+            <a:avLst/>
+          </a:prstGeom>
+          <a:noFill/>
+          <a:ln/>
+        </p:spPr>
+        <p:txBody>
+          <a:bodyPr wrap="square" lIns="0" tIns="0" rIns="0" bIns="0" rtlCol="0" anchor="t"/>
+          <a:lstStyle/>
+          <a:p>
+            <a:pPr algn="l" indent="0" marL="0">
+              <a:spcAft>
+                <a:spcPts val="800"/>
+              </a:spcAft>
+              <a:buNone/>
+            </a:pPr>
+            <a:r>
+              <a:rPr lang="en-US" sz="4000" b="1" dirty="0">
+                <a:solidFill>
+                  <a:srgbClr val="111111"/>
+                </a:solidFill>
+                <a:latin typeface="Times New Roman" pitchFamily="34" charset="0"/>
+                <a:ea typeface="Times New Roman" pitchFamily="34" charset="-122"/>
+                <a:cs typeface="Times New Roman" pitchFamily="34" charset="-120"/>
+              </a:rPr>
+              <a:t>Meridians: </a:t>
+            </a:r>
+            <a:pPr algn="l" indent="0" marL="0">
+              <a:spcAft>
+                <a:spcPts val="800"/>
+              </a:spcAft>
+              <a:buNone/>
+            </a:pPr>
+            <a:r>
+              <a:rPr lang="en-US" sz="4000" dirty="0">
+                <a:solidFill>
+                  <a:srgbClr val="111111"/>
+                </a:solidFill>
+                <a:latin typeface="Times New Roman" pitchFamily="34" charset="0"/>
+                <a:ea typeface="Times New Roman" pitchFamily="34" charset="-122"/>
+                <a:cs typeface="Times New Roman" pitchFamily="34" charset="-120"/>
+              </a:rPr>
+              <a:t>They are the lines that join places with the same longitude, from pole to pole.</a:t>
+            </a:r>
+            <a:endParaRPr lang="en-US" sz="4000" dirty="0"/>
+          </a:p>
+          <a:p>
+            <a:pPr algn="l" indent="0" marL="0">
+              <a:spcAft>
+                <a:spcPts val="800"/>
+              </a:spcAft>
+              <a:buNone/>
+            </a:pPr>
+            <a:r>
+              <a:rPr lang="en-US" sz="4000" b="1" dirty="0">
+                <a:solidFill>
+                  <a:srgbClr val="111111"/>
+                </a:solidFill>
+                <a:latin typeface="Times New Roman" pitchFamily="34" charset="0"/>
+                <a:ea typeface="Times New Roman" pitchFamily="34" charset="-122"/>
+                <a:cs typeface="Times New Roman" pitchFamily="34" charset="-120"/>
+              </a:rPr>
+              <a:t>Geographical coordinates: </a:t>
+            </a:r>
+            <a:pPr algn="l" indent="0" marL="0">
+              <a:spcAft>
+                <a:spcPts val="800"/>
+              </a:spcAft>
+              <a:buNone/>
+            </a:pPr>
+            <a:r>
+              <a:rPr lang="en-US" sz="4000" dirty="0">
+                <a:solidFill>
+                  <a:srgbClr val="111111"/>
+                </a:solidFill>
+                <a:latin typeface="Times New Roman" pitchFamily="34" charset="0"/>
+                <a:ea typeface="Times New Roman" pitchFamily="34" charset="-122"/>
+                <a:cs typeface="Times New Roman" pitchFamily="34" charset="-120"/>
+              </a:rPr>
+              <a:t>They are the latitude and the longitude that give the exact position of a place.</a:t>
+            </a:r>
+            <a:endParaRPr lang="en-US" sz="4000" dirty="0"/>
           </a:p>
         </p:txBody>
       </p:sp>
@@ -13771,9 +14673,170 @@
           </a:p>
         </p:txBody>
       </p:sp>
+      <p:sp>
+        <p:nvSpPr>
+          <p:cNvPr id="3" name="Text 1"/>
+          <p:cNvSpPr/>
+          <p:nvPr/>
+        </p:nvSpPr>
+        <p:spPr>
+          <a:xfrm>
+            <a:off x="365760" y="1005840"/>
+            <a:ext cx="11460175" cy="731520"/>
+          </a:xfrm>
+          <a:prstGeom prst="rect">
+            <a:avLst/>
+          </a:prstGeom>
+          <a:noFill/>
+          <a:ln/>
+        </p:spPr>
+        <p:txBody>
+          <a:bodyPr wrap="square" lIns="0" tIns="0" rIns="0" bIns="0" rtlCol="0" anchor="ctr">
+            <a:normAutofit/>
+          </a:bodyPr>
+          <a:lstStyle/>
+          <a:p>
+            <a:pPr algn="ctr" indent="0" marL="0">
+              <a:buNone/>
+            </a:pPr>
+            <a:r>
+              <a:rPr lang="en-US" sz="3600" b="1" dirty="0">
+                <a:solidFill>
+                  <a:srgbClr val="990011"/>
+                </a:solidFill>
+                <a:latin typeface="Times New Roman" pitchFamily="34" charset="0"/>
+                <a:ea typeface="Times New Roman" pitchFamily="34" charset="-122"/>
+                <a:cs typeface="Times New Roman" pitchFamily="34" charset="-120"/>
+              </a:rPr>
+              <a:t>1. Latitudes</a:t>
+            </a:r>
+            <a:endParaRPr lang="en-US" sz="3600" dirty="0"/>
+          </a:p>
+        </p:txBody>
+      </p:sp>
+      <p:sp>
+        <p:nvSpPr>
+          <p:cNvPr id="4" name="Text 2"/>
+          <p:cNvSpPr/>
+          <p:nvPr/>
+        </p:nvSpPr>
+        <p:spPr>
+          <a:xfrm>
+            <a:off x="365760" y="1737360"/>
+            <a:ext cx="5120640" cy="457200"/>
+          </a:xfrm>
+          <a:prstGeom prst="rect">
+            <a:avLst/>
+          </a:prstGeom>
+          <a:noFill/>
+          <a:ln/>
+        </p:spPr>
+        <p:txBody>
+          <a:bodyPr wrap="square" lIns="0" tIns="0" rIns="0" bIns="0" rtlCol="0" anchor="ctr">
+            <a:normAutofit/>
+          </a:bodyPr>
+          <a:lstStyle/>
+          <a:p>
+            <a:pPr algn="l" indent="0" marL="0">
+              <a:buNone/>
+            </a:pPr>
+            <a:r>
+              <a:rPr lang="en-US" sz="3000" b="1" dirty="0">
+                <a:solidFill>
+                  <a:srgbClr val="990011"/>
+                </a:solidFill>
+                <a:latin typeface="Times New Roman" pitchFamily="34" charset="0"/>
+                <a:ea typeface="Times New Roman" pitchFamily="34" charset="-122"/>
+                <a:cs typeface="Times New Roman" pitchFamily="34" charset="-120"/>
+              </a:rPr>
+              <a:t>A) Major Lines of Latitude</a:t>
+            </a:r>
+            <a:endParaRPr lang="en-US" sz="3000" dirty="0"/>
+          </a:p>
+        </p:txBody>
+      </p:sp>
+      <p:sp>
+        <p:nvSpPr>
+          <p:cNvPr id="5" name="Text 3"/>
+          <p:cNvSpPr/>
+          <p:nvPr/>
+        </p:nvSpPr>
+        <p:spPr>
+          <a:xfrm>
+            <a:off x="365760" y="2240280"/>
+            <a:ext cx="4846320" cy="4160520"/>
+          </a:xfrm>
+          <a:prstGeom prst="rect">
+            <a:avLst/>
+          </a:prstGeom>
+          <a:noFill/>
+          <a:ln/>
+        </p:spPr>
+        <p:txBody>
+          <a:bodyPr wrap="square" lIns="0" tIns="0" rIns="0" bIns="0" rtlCol="0" anchor="t"/>
+          <a:lstStyle/>
+          <a:p>
+            <a:pPr algn="l" indent="0" marL="0">
+              <a:spcAft>
+                <a:spcPts val="800"/>
+              </a:spcAft>
+              <a:buNone/>
+            </a:pPr>
+            <a:r>
+              <a:rPr lang="en-US" sz="3600" i="1" dirty="0">
+                <a:solidFill>
+                  <a:srgbClr val="111111"/>
+                </a:solidFill>
+                <a:latin typeface="Times New Roman" pitchFamily="34" charset="0"/>
+                <a:ea typeface="Times New Roman" pitchFamily="34" charset="-122"/>
+                <a:cs typeface="Times New Roman" pitchFamily="34" charset="-120"/>
+              </a:rPr>
+              <a:t>The major lines of latitude are the following:</a:t>
+            </a:r>
+            <a:endParaRPr lang="en-US" sz="3600" dirty="0"/>
+          </a:p>
+          <a:p>
+            <a:pPr algn="l" indent="0" marL="0">
+              <a:spcAft>
+                <a:spcPts val="800"/>
+              </a:spcAft>
+              <a:buNone/>
+            </a:pPr>
+            <a:r>
+              <a:rPr lang="en-US" sz="3600" b="1" dirty="0">
+                <a:solidFill>
+                  <a:srgbClr val="111111"/>
+                </a:solidFill>
+                <a:latin typeface="Times New Roman" pitchFamily="34" charset="0"/>
+                <a:ea typeface="Times New Roman" pitchFamily="34" charset="-122"/>
+                <a:cs typeface="Times New Roman" pitchFamily="34" charset="-120"/>
+              </a:rPr>
+              <a:t>The Equator (0°): </a:t>
+            </a:r>
+            <a:pPr algn="l" indent="0" marL="0">
+              <a:spcAft>
+                <a:spcPts val="800"/>
+              </a:spcAft>
+              <a:buNone/>
+            </a:pPr>
+            <a:r>
+              <a:rPr lang="en-US" sz="3600" dirty="0">
+                <a:solidFill>
+                  <a:srgbClr val="111111"/>
+                </a:solidFill>
+                <a:latin typeface="Times New Roman" pitchFamily="34" charset="0"/>
+                <a:ea typeface="Times New Roman" pitchFamily="34" charset="-122"/>
+                <a:cs typeface="Times New Roman" pitchFamily="34" charset="-120"/>
+              </a:rPr>
+              <a:t>It divides the Earth into the Northern and the Southern Hemispheres.</a:t>
+            </a:r>
+            <a:endParaRPr lang="en-US" sz="3600" dirty="0"/>
+          </a:p>
+        </p:txBody>
+      </p:sp>
       <p:pic>
         <p:nvPicPr>
-          <p:cNvPr id="3" name="Image 0" descr="/home/claude/f4/img/minesec_sheet.png">    </p:cNvPr>
+          <p:cNvPr id="6" name="Image 0" descr="/home/claude/f4/img/v2/latitudes_big.png">    </p:cNvPr>
           <p:cNvPicPr>
             <a:picLocks noChangeAspect="1"/>
           </p:cNvPicPr>
@@ -13787,8 +14850,8 @@
         </p:blipFill>
         <p:spPr>
           <a:xfrm>
-            <a:off x="0" y="658368"/>
-            <a:ext cx="2468880" cy="5833872"/>
+            <a:off x="5349240" y="2617506"/>
+            <a:ext cx="6659575" cy="2601397"/>
           </a:xfrm>
           <a:prstGeom prst="rect">
             <a:avLst/>
@@ -13797,14 +14860,14 @@
       </p:pic>
       <p:sp>
         <p:nvSpPr>
-          <p:cNvPr id="4" name="Text 1"/>
+          <p:cNvPr id="7" name="Text 4"/>
           <p:cNvSpPr/>
           <p:nvPr/>
         </p:nvSpPr>
         <p:spPr>
           <a:xfrm>
-            <a:off x="2697480" y="1005840"/>
-            <a:ext cx="9174175" cy="731520"/>
+            <a:off x="5349240" y="6089904"/>
+            <a:ext cx="6659575" cy="347472"/>
           </a:xfrm>
           <a:prstGeom prst="rect">
             <a:avLst/>
@@ -13813,142 +14876,24 @@
           <a:ln/>
         </p:spPr>
         <p:txBody>
-          <a:bodyPr wrap="square" lIns="0" tIns="0" rIns="0" bIns="0" rtlCol="0" anchor="ctr">
-            <a:normAutofit/>
-          </a:bodyPr>
+          <a:bodyPr wrap="square" lIns="0" tIns="0" rIns="0" bIns="0" rtlCol="0" anchor="ctr"/>
           <a:lstStyle/>
           <a:p>
             <a:pPr algn="ctr" indent="0" marL="0">
               <a:buNone/>
             </a:pPr>
             <a:r>
-              <a:rPr lang="en-US" sz="3600" b="1" dirty="0">
-                <a:solidFill>
-                  <a:srgbClr val="990011"/>
+              <a:rPr lang="en-US" sz="1600" i="1" dirty="0">
+                <a:solidFill>
+                  <a:srgbClr val="555555"/>
                 </a:solidFill>
                 <a:latin typeface="Times New Roman" pitchFamily="34" charset="0"/>
                 <a:ea typeface="Times New Roman" pitchFamily="34" charset="-122"/>
                 <a:cs typeface="Times New Roman" pitchFamily="34" charset="-120"/>
               </a:rPr>
-              <a:t>3. Geographical Coordinates</a:t>
-            </a:r>
-            <a:endParaRPr lang="en-US" sz="3600" dirty="0"/>
-          </a:p>
-        </p:txBody>
-      </p:sp>
-      <p:sp>
-        <p:nvSpPr>
-          <p:cNvPr id="5" name="Text 2"/>
-          <p:cNvSpPr/>
-          <p:nvPr/>
-        </p:nvSpPr>
-        <p:spPr>
-          <a:xfrm>
-            <a:off x="2697480" y="1783080"/>
-            <a:ext cx="9174175" cy="4663440"/>
-          </a:xfrm>
-          <a:prstGeom prst="rect">
-            <a:avLst/>
-          </a:prstGeom>
-          <a:noFill/>
-          <a:ln/>
-        </p:spPr>
-        <p:txBody>
-          <a:bodyPr wrap="square" lIns="0" tIns="0" rIns="0" bIns="0" rtlCol="0" anchor="t"/>
-          <a:lstStyle/>
-          <a:p>
-            <a:pPr algn="l" indent="0" marL="0">
-              <a:spcAft>
-                <a:spcPts val="800"/>
-              </a:spcAft>
-              <a:buNone/>
-            </a:pPr>
-            <a:r>
-              <a:rPr lang="en-US" sz="4000" i="1" dirty="0">
-                <a:solidFill>
-                  <a:srgbClr val="111111"/>
-                </a:solidFill>
-                <a:latin typeface="Times New Roman" pitchFamily="34" charset="0"/>
-                <a:ea typeface="Times New Roman" pitchFamily="34" charset="-122"/>
-                <a:cs typeface="Times New Roman" pitchFamily="34" charset="-120"/>
-              </a:rPr>
-              <a:t>Geographical coordinates are used as follows:</a:t>
-            </a:r>
-            <a:endParaRPr lang="en-US" sz="4000" dirty="0"/>
-          </a:p>
-          <a:p>
-            <a:pPr algn="l" indent="0" marL="0">
-              <a:spcAft>
-                <a:spcPts val="800"/>
-              </a:spcAft>
-              <a:buNone/>
-            </a:pPr>
-            <a:r>
-              <a:rPr lang="en-US" sz="4000" b="1" dirty="0">
-                <a:solidFill>
-                  <a:srgbClr val="111111"/>
-                </a:solidFill>
-                <a:latin typeface="Times New Roman" pitchFamily="34" charset="0"/>
-                <a:ea typeface="Times New Roman" pitchFamily="34" charset="-122"/>
-                <a:cs typeface="Times New Roman" pitchFamily="34" charset="-120"/>
-              </a:rPr>
-              <a:t>Coordinates: </a:t>
-            </a:r>
-            <a:pPr algn="l" indent="0" marL="0">
-              <a:spcAft>
-                <a:spcPts val="800"/>
-              </a:spcAft>
-              <a:buNone/>
-            </a:pPr>
-            <a:r>
-              <a:rPr lang="en-US" sz="4000" dirty="0">
-                <a:solidFill>
-                  <a:srgbClr val="111111"/>
-                </a:solidFill>
-                <a:latin typeface="Times New Roman" pitchFamily="34" charset="0"/>
-                <a:ea typeface="Times New Roman" pitchFamily="34" charset="-122"/>
-                <a:cs typeface="Times New Roman" pitchFamily="34" charset="-120"/>
-              </a:rPr>
-              <a:t>They are the latitude and the longitude that give the exact position of a place.</a:t>
-            </a:r>
-            <a:endParaRPr lang="en-US" sz="4000" dirty="0"/>
-          </a:p>
-          <a:p>
-            <a:pPr algn="l" indent="0" marL="0">
-              <a:spcAft>
-                <a:spcPts val="800"/>
-              </a:spcAft>
-              <a:buNone/>
-            </a:pPr>
-            <a:r>
-              <a:rPr lang="en-US" sz="4000" b="1" dirty="0">
-                <a:solidFill>
-                  <a:srgbClr val="111111"/>
-                </a:solidFill>
-                <a:latin typeface="Times New Roman" pitchFamily="34" charset="0"/>
-                <a:ea typeface="Times New Roman" pitchFamily="34" charset="-122"/>
-                <a:cs typeface="Times New Roman" pitchFamily="34" charset="-120"/>
-              </a:rPr>
-              <a:t>Example: </a:t>
-            </a:r>
-            <a:pPr algn="l" indent="0" marL="0">
-              <a:spcAft>
-                <a:spcPts val="800"/>
-              </a:spcAft>
-              <a:buNone/>
-            </a:pPr>
-            <a:r>
-              <a:rPr lang="en-US" sz="4000" dirty="0">
-                <a:solidFill>
-                  <a:srgbClr val="111111"/>
-                </a:solidFill>
-                <a:latin typeface="Times New Roman" pitchFamily="34" charset="0"/>
-                <a:ea typeface="Times New Roman" pitchFamily="34" charset="-122"/>
-                <a:cs typeface="Times New Roman" pitchFamily="34" charset="-120"/>
-              </a:rPr>
-              <a:t>We write the latitude first, so Garoua is at about 9° N, 13° E.</a:t>
-            </a:r>
-            <a:endParaRPr lang="en-US" sz="4000" dirty="0"/>
+              <a:t>Illustration: the major lines of latitude</a:t>
+            </a:r>
+            <a:endParaRPr lang="en-US" sz="1600" dirty="0"/>
           </a:p>
         </p:txBody>
       </p:sp>
@@ -14058,7 +15003,7 @@
                 <a:ea typeface="Calibri" pitchFamily="34" charset="-122"/>
                 <a:cs typeface="Calibri" pitchFamily="34" charset="-120"/>
               </a:rPr>
-              <a:t>FORMATIVE EVALUATION</a:t>
+              <a:t>BOARD SUMMARY</a:t>
             </a:r>
             <a:endParaRPr lang="en-US" sz="1400" dirty="0"/>
           </a:p>
@@ -14081,7 +15026,7 @@
         <p:spPr>
           <a:xfrm>
             <a:off x="0" y="658368"/>
-            <a:ext cx="5120640" cy="5833872"/>
+            <a:ext cx="3840480" cy="5833872"/>
           </a:xfrm>
           <a:prstGeom prst="rect">
             <a:avLst/>
@@ -14096,8 +15041,8 @@
         </p:nvSpPr>
         <p:spPr>
           <a:xfrm>
-            <a:off x="5349240" y="1005840"/>
-            <a:ext cx="6522415" cy="731520"/>
+            <a:off x="4069080" y="1005840"/>
+            <a:ext cx="7802575" cy="731520"/>
           </a:xfrm>
           <a:prstGeom prst="rect">
             <a:avLst/>
@@ -14123,7 +15068,7 @@
                 <a:ea typeface="Times New Roman" pitchFamily="34" charset="-122"/>
                 <a:cs typeface="Times New Roman" pitchFamily="34" charset="-120"/>
               </a:rPr>
-              <a:t>Evaluation 1</a:t>
+              <a:t>1. Latitudes</a:t>
             </a:r>
             <a:endParaRPr lang="en-US" sz="3600" dirty="0"/>
           </a:p>
@@ -14137,8 +15082,47 @@
         </p:nvSpPr>
         <p:spPr>
           <a:xfrm>
-            <a:off x="5349240" y="1783080"/>
-            <a:ext cx="6522415" cy="4663440"/>
+            <a:off x="4069080" y="1737360"/>
+            <a:ext cx="7802575" cy="457200"/>
+          </a:xfrm>
+          <a:prstGeom prst="rect">
+            <a:avLst/>
+          </a:prstGeom>
+          <a:noFill/>
+          <a:ln/>
+        </p:spPr>
+        <p:txBody>
+          <a:bodyPr wrap="square" lIns="0" tIns="0" rIns="0" bIns="0" rtlCol="0" anchor="ctr"/>
+          <a:lstStyle/>
+          <a:p>
+            <a:pPr algn="l" indent="0" marL="0">
+              <a:buNone/>
+            </a:pPr>
+            <a:r>
+              <a:rPr lang="en-US" sz="3200" b="1" dirty="0">
+                <a:solidFill>
+                  <a:srgbClr val="990011"/>
+                </a:solidFill>
+                <a:latin typeface="Times New Roman" pitchFamily="34" charset="0"/>
+                <a:ea typeface="Times New Roman" pitchFamily="34" charset="-122"/>
+                <a:cs typeface="Times New Roman" pitchFamily="34" charset="-120"/>
+              </a:rPr>
+              <a:t>A) Major Lines of Latitude</a:t>
+            </a:r>
+            <a:endParaRPr lang="en-US" sz="3200" dirty="0"/>
+          </a:p>
+        </p:txBody>
+      </p:sp>
+      <p:sp>
+        <p:nvSpPr>
+          <p:cNvPr id="6" name="Text 3"/>
+          <p:cNvSpPr/>
+          <p:nvPr/>
+        </p:nvSpPr>
+        <p:spPr>
+          <a:xfrm>
+            <a:off x="4069080" y="2240280"/>
+            <a:ext cx="7802575" cy="4206240"/>
           </a:xfrm>
           <a:prstGeom prst="rect">
             <a:avLst/>
@@ -14157,7 +15141,7 @@
               <a:buNone/>
             </a:pPr>
             <a:r>
-              <a:rPr lang="en-US" sz="4000" dirty="0">
+              <a:rPr lang="en-US" sz="4000" b="1" dirty="0">
                 <a:solidFill>
                   <a:srgbClr val="111111"/>
                 </a:solidFill>
@@ -14165,7 +15149,61 @@
                 <a:ea typeface="Times New Roman" pitchFamily="34" charset="-122"/>
                 <a:cs typeface="Times New Roman" pitchFamily="34" charset="-120"/>
               </a:rPr>
-              <a:t>What is the value of the Equator?</a:t>
+              <a:t>The Tropic of Cancer (23½° N): </a:t>
+            </a:r>
+            <a:pPr algn="l" indent="0" marL="0">
+              <a:spcAft>
+                <a:spcPts val="800"/>
+              </a:spcAft>
+              <a:buNone/>
+            </a:pPr>
+            <a:r>
+              <a:rPr lang="en-US" sz="4000" dirty="0">
+                <a:solidFill>
+                  <a:srgbClr val="111111"/>
+                </a:solidFill>
+                <a:latin typeface="Times New Roman" pitchFamily="34" charset="0"/>
+                <a:ea typeface="Times New Roman" pitchFamily="34" charset="-122"/>
+                <a:cs typeface="Times New Roman" pitchFamily="34" charset="-120"/>
+              </a:rPr>
+              <a:t>It is the most northerly line where the Sun can be overhead.</a:t>
+            </a:r>
+            <a:endParaRPr lang="en-US" sz="4000" dirty="0"/>
+          </a:p>
+          <a:p>
+            <a:pPr algn="l" indent="0" marL="0">
+              <a:spcAft>
+                <a:spcPts val="800"/>
+              </a:spcAft>
+              <a:buNone/>
+            </a:pPr>
+            <a:r>
+              <a:rPr lang="en-US" sz="4000" b="1" dirty="0">
+                <a:solidFill>
+                  <a:srgbClr val="111111"/>
+                </a:solidFill>
+                <a:latin typeface="Times New Roman" pitchFamily="34" charset="0"/>
+                <a:ea typeface="Times New Roman" pitchFamily="34" charset="-122"/>
+                <a:cs typeface="Times New Roman" pitchFamily="34" charset="-120"/>
+              </a:rPr>
+              <a:t>The Tropic of Capricorn (23½° S): </a:t>
+            </a:r>
+            <a:pPr algn="l" indent="0" marL="0">
+              <a:spcAft>
+                <a:spcPts val="800"/>
+              </a:spcAft>
+              <a:buNone/>
+            </a:pPr>
+            <a:r>
+              <a:rPr lang="en-US" sz="4000" dirty="0">
+                <a:solidFill>
+                  <a:srgbClr val="111111"/>
+                </a:solidFill>
+                <a:latin typeface="Times New Roman" pitchFamily="34" charset="0"/>
+                <a:ea typeface="Times New Roman" pitchFamily="34" charset="-122"/>
+                <a:cs typeface="Times New Roman" pitchFamily="34" charset="-120"/>
+              </a:rPr>
+              <a:t>It is the most southerly line where the Sun can be overhead.</a:t>
             </a:r>
             <a:endParaRPr lang="en-US" sz="4000" dirty="0"/>
           </a:p>
@@ -14277,7 +15315,7 @@
                 <a:ea typeface="Calibri" pitchFamily="34" charset="-122"/>
                 <a:cs typeface="Calibri" pitchFamily="34" charset="-120"/>
               </a:rPr>
-              <a:t>FORMATIVE EVALUATION</a:t>
+              <a:t>BOARD SUMMARY</a:t>
             </a:r>
             <a:endParaRPr lang="en-US" sz="1400" dirty="0"/>
           </a:p>
@@ -14342,7 +15380,7 @@
                 <a:ea typeface="Times New Roman" pitchFamily="34" charset="-122"/>
                 <a:cs typeface="Times New Roman" pitchFamily="34" charset="-120"/>
               </a:rPr>
-              <a:t>Expected Answer</a:t>
+              <a:t>1. Latitudes</a:t>
             </a:r>
             <a:endParaRPr lang="en-US" sz="3600" dirty="0"/>
           </a:p>
@@ -14356,8 +15394,47 @@
         </p:nvSpPr>
         <p:spPr>
           <a:xfrm>
-            <a:off x="5349240" y="1783080"/>
-            <a:ext cx="6522415" cy="4663440"/>
+            <a:off x="5349240" y="1737360"/>
+            <a:ext cx="6522415" cy="457200"/>
+          </a:xfrm>
+          <a:prstGeom prst="rect">
+            <a:avLst/>
+          </a:prstGeom>
+          <a:noFill/>
+          <a:ln/>
+        </p:spPr>
+        <p:txBody>
+          <a:bodyPr wrap="square" lIns="0" tIns="0" rIns="0" bIns="0" rtlCol="0" anchor="ctr"/>
+          <a:lstStyle/>
+          <a:p>
+            <a:pPr algn="l" indent="0" marL="0">
+              <a:buNone/>
+            </a:pPr>
+            <a:r>
+              <a:rPr lang="en-US" sz="2700" b="1" dirty="0">
+                <a:solidFill>
+                  <a:srgbClr val="990011"/>
+                </a:solidFill>
+                <a:latin typeface="Times New Roman" pitchFamily="34" charset="0"/>
+                <a:ea typeface="Times New Roman" pitchFamily="34" charset="-122"/>
+                <a:cs typeface="Times New Roman" pitchFamily="34" charset="-120"/>
+              </a:rPr>
+              <a:t>A) Major Lines of Latitude (continued)</a:t>
+            </a:r>
+            <a:endParaRPr lang="en-US" sz="2700" dirty="0"/>
+          </a:p>
+        </p:txBody>
+      </p:sp>
+      <p:sp>
+        <p:nvSpPr>
+          <p:cNvPr id="6" name="Text 3"/>
+          <p:cNvSpPr/>
+          <p:nvPr/>
+        </p:nvSpPr>
+        <p:spPr>
+          <a:xfrm>
+            <a:off x="5349240" y="2240280"/>
+            <a:ext cx="6522415" cy="4206240"/>
           </a:xfrm>
           <a:prstGeom prst="rect">
             <a:avLst/>
@@ -14376,7 +15453,7 @@
               <a:buNone/>
             </a:pPr>
             <a:r>
-              <a:rPr lang="en-US" sz="4000" dirty="0">
+              <a:rPr lang="en-US" sz="4000" b="1" dirty="0">
                 <a:solidFill>
                   <a:srgbClr val="111111"/>
                 </a:solidFill>
@@ -14384,7 +15461,61 @@
                 <a:ea typeface="Times New Roman" pitchFamily="34" charset="-122"/>
                 <a:cs typeface="Times New Roman" pitchFamily="34" charset="-120"/>
               </a:rPr>
-              <a:t>0°.</a:t>
+              <a:t>The Arctic Circle (66½° N): </a:t>
+            </a:r>
+            <a:pPr algn="l" indent="0" marL="0">
+              <a:spcAft>
+                <a:spcPts val="800"/>
+              </a:spcAft>
+              <a:buNone/>
+            </a:pPr>
+            <a:r>
+              <a:rPr lang="en-US" sz="4000" dirty="0">
+                <a:solidFill>
+                  <a:srgbClr val="111111"/>
+                </a:solidFill>
+                <a:latin typeface="Times New Roman" pitchFamily="34" charset="0"/>
+                <a:ea typeface="Times New Roman" pitchFamily="34" charset="-122"/>
+                <a:cs typeface="Times New Roman" pitchFamily="34" charset="-120"/>
+              </a:rPr>
+              <a:t>It limits the northern polar zone.</a:t>
+            </a:r>
+            <a:endParaRPr lang="en-US" sz="4000" dirty="0"/>
+          </a:p>
+          <a:p>
+            <a:pPr algn="l" indent="0" marL="0">
+              <a:spcAft>
+                <a:spcPts val="800"/>
+              </a:spcAft>
+              <a:buNone/>
+            </a:pPr>
+            <a:r>
+              <a:rPr lang="en-US" sz="4000" b="1" dirty="0">
+                <a:solidFill>
+                  <a:srgbClr val="111111"/>
+                </a:solidFill>
+                <a:latin typeface="Times New Roman" pitchFamily="34" charset="0"/>
+                <a:ea typeface="Times New Roman" pitchFamily="34" charset="-122"/>
+                <a:cs typeface="Times New Roman" pitchFamily="34" charset="-120"/>
+              </a:rPr>
+              <a:t>The Antarctic Circle (66½° S): </a:t>
+            </a:r>
+            <a:pPr algn="l" indent="0" marL="0">
+              <a:spcAft>
+                <a:spcPts val="800"/>
+              </a:spcAft>
+              <a:buNone/>
+            </a:pPr>
+            <a:r>
+              <a:rPr lang="en-US" sz="4000" dirty="0">
+                <a:solidFill>
+                  <a:srgbClr val="111111"/>
+                </a:solidFill>
+                <a:latin typeface="Times New Roman" pitchFamily="34" charset="0"/>
+                <a:ea typeface="Times New Roman" pitchFamily="34" charset="-122"/>
+                <a:cs typeface="Times New Roman" pitchFamily="34" charset="-120"/>
+              </a:rPr>
+              <a:t>It limits the southern polar zone.</a:t>
             </a:r>
             <a:endParaRPr lang="en-US" sz="4000" dirty="0"/>
           </a:p>
@@ -14496,7 +15627,7 @@
                 <a:ea typeface="Calibri" pitchFamily="34" charset="-122"/>
                 <a:cs typeface="Calibri" pitchFamily="34" charset="-120"/>
               </a:rPr>
-              <a:t>FORMATIVE EVALUATION</a:t>
+              <a:t>BOARD SUMMARY</a:t>
             </a:r>
             <a:endParaRPr lang="en-US" sz="1400" dirty="0"/>
           </a:p>
@@ -14561,7 +15692,7 @@
                 <a:ea typeface="Times New Roman" pitchFamily="34" charset="-122"/>
                 <a:cs typeface="Times New Roman" pitchFamily="34" charset="-120"/>
               </a:rPr>
-              <a:t>Evaluation 2</a:t>
+              <a:t>1. Latitudes</a:t>
             </a:r>
             <a:endParaRPr lang="en-US" sz="3600" dirty="0"/>
           </a:p>
@@ -14575,8 +15706,47 @@
         </p:nvSpPr>
         <p:spPr>
           <a:xfrm>
-            <a:off x="5349240" y="1783080"/>
-            <a:ext cx="6522415" cy="4663440"/>
+            <a:off x="5349240" y="1737360"/>
+            <a:ext cx="6522415" cy="457200"/>
+          </a:xfrm>
+          <a:prstGeom prst="rect">
+            <a:avLst/>
+          </a:prstGeom>
+          <a:noFill/>
+          <a:ln/>
+        </p:spPr>
+        <p:txBody>
+          <a:bodyPr wrap="square" lIns="0" tIns="0" rIns="0" bIns="0" rtlCol="0" anchor="ctr"/>
+          <a:lstStyle/>
+          <a:p>
+            <a:pPr algn="l" indent="0" marL="0">
+              <a:buNone/>
+            </a:pPr>
+            <a:r>
+              <a:rPr lang="en-US" sz="2700" b="1" dirty="0">
+                <a:solidFill>
+                  <a:srgbClr val="990011"/>
+                </a:solidFill>
+                <a:latin typeface="Times New Roman" pitchFamily="34" charset="0"/>
+                <a:ea typeface="Times New Roman" pitchFamily="34" charset="-122"/>
+                <a:cs typeface="Times New Roman" pitchFamily="34" charset="-120"/>
+              </a:rPr>
+              <a:t>A) Major Lines of Latitude (continued)</a:t>
+            </a:r>
+            <a:endParaRPr lang="en-US" sz="2700" dirty="0"/>
+          </a:p>
+        </p:txBody>
+      </p:sp>
+      <p:sp>
+        <p:nvSpPr>
+          <p:cNvPr id="6" name="Text 3"/>
+          <p:cNvSpPr/>
+          <p:nvPr/>
+        </p:nvSpPr>
+        <p:spPr>
+          <a:xfrm>
+            <a:off x="5349240" y="2240280"/>
+            <a:ext cx="6522415" cy="4206240"/>
           </a:xfrm>
           <a:prstGeom prst="rect">
             <a:avLst/>
@@ -14595,7 +15765,7 @@
               <a:buNone/>
             </a:pPr>
             <a:r>
-              <a:rPr lang="en-US" sz="4000" dirty="0">
+              <a:rPr lang="en-US" sz="4000" b="1" dirty="0">
                 <a:solidFill>
                   <a:srgbClr val="111111"/>
                 </a:solidFill>
@@ -14603,7 +15773,24 @@
                 <a:ea typeface="Times New Roman" pitchFamily="34" charset="-122"/>
                 <a:cs typeface="Times New Roman" pitchFamily="34" charset="-120"/>
               </a:rPr>
-              <a:t>Give one difference between latitudes and longitudes.</a:t>
+              <a:t>The poles (90° N and 90° S): </a:t>
+            </a:r>
+            <a:pPr algn="l" indent="0" marL="0">
+              <a:spcAft>
+                <a:spcPts val="800"/>
+              </a:spcAft>
+              <a:buNone/>
+            </a:pPr>
+            <a:r>
+              <a:rPr lang="en-US" sz="4000" dirty="0">
+                <a:solidFill>
+                  <a:srgbClr val="111111"/>
+                </a:solidFill>
+                <a:latin typeface="Times New Roman" pitchFamily="34" charset="0"/>
+                <a:ea typeface="Times New Roman" pitchFamily="34" charset="-122"/>
+                <a:cs typeface="Times New Roman" pitchFamily="34" charset="-120"/>
+              </a:rPr>
+              <a:t>They are points, not lines, at the ends of the axis of the Earth.</a:t>
             </a:r>
             <a:endParaRPr lang="en-US" sz="4000" dirty="0"/>
           </a:p>
@@ -14954,7 +16141,7 @@
                 <a:ea typeface="Calibri" pitchFamily="34" charset="-122"/>
                 <a:cs typeface="Calibri" pitchFamily="34" charset="-120"/>
               </a:rPr>
-              <a:t>FORMATIVE EVALUATION</a:t>
+              <a:t>BOARD SUMMARY</a:t>
             </a:r>
             <a:endParaRPr lang="en-US" sz="1400" dirty="0"/>
           </a:p>
@@ -14977,7 +16164,7 @@
         <p:spPr>
           <a:xfrm>
             <a:off x="0" y="658368"/>
-            <a:ext cx="5120640" cy="5833872"/>
+            <a:ext cx="2468880" cy="5833872"/>
           </a:xfrm>
           <a:prstGeom prst="rect">
             <a:avLst/>
@@ -14992,8 +16179,8 @@
         </p:nvSpPr>
         <p:spPr>
           <a:xfrm>
-            <a:off x="5349240" y="1005840"/>
-            <a:ext cx="6522415" cy="731520"/>
+            <a:off x="2697480" y="1005840"/>
+            <a:ext cx="9174175" cy="731520"/>
           </a:xfrm>
           <a:prstGeom prst="rect">
             <a:avLst/>
@@ -15019,7 +16206,7 @@
                 <a:ea typeface="Times New Roman" pitchFamily="34" charset="-122"/>
                 <a:cs typeface="Times New Roman" pitchFamily="34" charset="-120"/>
               </a:rPr>
-              <a:t>Expected Answer</a:t>
+              <a:t>1. Latitudes</a:t>
             </a:r>
             <a:endParaRPr lang="en-US" sz="3600" dirty="0"/>
           </a:p>
@@ -15033,8 +16220,47 @@
         </p:nvSpPr>
         <p:spPr>
           <a:xfrm>
-            <a:off x="5349240" y="1783080"/>
-            <a:ext cx="6522415" cy="4663440"/>
+            <a:off x="2697480" y="1737360"/>
+            <a:ext cx="9174175" cy="457200"/>
+          </a:xfrm>
+          <a:prstGeom prst="rect">
+            <a:avLst/>
+          </a:prstGeom>
+          <a:noFill/>
+          <a:ln/>
+        </p:spPr>
+        <p:txBody>
+          <a:bodyPr wrap="square" lIns="0" tIns="0" rIns="0" bIns="0" rtlCol="0" anchor="ctr"/>
+          <a:lstStyle/>
+          <a:p>
+            <a:pPr algn="l" indent="0" marL="0">
+              <a:buNone/>
+            </a:pPr>
+            <a:r>
+              <a:rPr lang="en-US" sz="3200" b="1" dirty="0">
+                <a:solidFill>
+                  <a:srgbClr val="990011"/>
+                </a:solidFill>
+                <a:latin typeface="Times New Roman" pitchFamily="34" charset="0"/>
+                <a:ea typeface="Times New Roman" pitchFamily="34" charset="-122"/>
+                <a:cs typeface="Times New Roman" pitchFamily="34" charset="-120"/>
+              </a:rPr>
+              <a:t>B) Characteristics of Latitudes</a:t>
+            </a:r>
+            <a:endParaRPr lang="en-US" sz="3200" dirty="0"/>
+          </a:p>
+        </p:txBody>
+      </p:sp>
+      <p:sp>
+        <p:nvSpPr>
+          <p:cNvPr id="6" name="Text 3"/>
+          <p:cNvSpPr/>
+          <p:nvPr/>
+        </p:nvSpPr>
+        <p:spPr>
+          <a:xfrm>
+            <a:off x="2697480" y="2240280"/>
+            <a:ext cx="9174175" cy="4206240"/>
           </a:xfrm>
           <a:prstGeom prst="rect">
             <a:avLst/>
@@ -15053,7 +16279,7 @@
               <a:buNone/>
             </a:pPr>
             <a:r>
-              <a:rPr lang="en-US" sz="4000" dirty="0">
+              <a:rPr lang="en-US" sz="4000" i="1" dirty="0">
                 <a:solidFill>
                   <a:srgbClr val="111111"/>
                 </a:solidFill>
@@ -15061,7 +16287,81 @@
                 <a:ea typeface="Times New Roman" pitchFamily="34" charset="-122"/>
                 <a:cs typeface="Times New Roman" pitchFamily="34" charset="-120"/>
               </a:rPr>
-              <a:t>Latitudes never meet; longitudes meet at the poles.</a:t>
+              <a:t>Lines of latitude have the following characteristics:</a:t>
+            </a:r>
+            <a:endParaRPr lang="en-US" sz="4000" dirty="0"/>
+          </a:p>
+          <a:p>
+            <a:pPr algn="l" indent="0" marL="0">
+              <a:spcAft>
+                <a:spcPts val="800"/>
+              </a:spcAft>
+              <a:buNone/>
+            </a:pPr>
+            <a:r>
+              <a:rPr lang="en-US" sz="4000" b="1" dirty="0">
+                <a:solidFill>
+                  <a:srgbClr val="111111"/>
+                </a:solidFill>
+                <a:latin typeface="Times New Roman" pitchFamily="34" charset="0"/>
+                <a:ea typeface="Times New Roman" pitchFamily="34" charset="-122"/>
+                <a:cs typeface="Times New Roman" pitchFamily="34" charset="-120"/>
+              </a:rPr>
+              <a:t>Parallel lines: </a:t>
+            </a:r>
+            <a:pPr algn="l" indent="0" marL="0">
+              <a:spcAft>
+                <a:spcPts val="800"/>
+              </a:spcAft>
+              <a:buNone/>
+            </a:pPr>
+            <a:r>
+              <a:rPr lang="en-US" sz="4000" dirty="0">
+                <a:solidFill>
+                  <a:srgbClr val="111111"/>
+                </a:solidFill>
+                <a:latin typeface="Times New Roman" pitchFamily="34" charset="0"/>
+                <a:ea typeface="Times New Roman" pitchFamily="34" charset="-122"/>
+                <a:cs typeface="Times New Roman" pitchFamily="34" charset="-120"/>
+              </a:rPr>
+              <a:t>They run from west to east, are parallel and never meet.</a:t>
+            </a:r>
+            <a:endParaRPr lang="en-US" sz="4000" dirty="0"/>
+          </a:p>
+          <a:p>
+            <a:pPr algn="l" indent="0" marL="0">
+              <a:spcAft>
+                <a:spcPts val="800"/>
+              </a:spcAft>
+              <a:buNone/>
+            </a:pPr>
+            <a:r>
+              <a:rPr lang="en-US" sz="4000" b="1" dirty="0">
+                <a:solidFill>
+                  <a:srgbClr val="111111"/>
+                </a:solidFill>
+                <a:latin typeface="Times New Roman" pitchFamily="34" charset="0"/>
+                <a:ea typeface="Times New Roman" pitchFamily="34" charset="-122"/>
+                <a:cs typeface="Times New Roman" pitchFamily="34" charset="-120"/>
+              </a:rPr>
+              <a:t>Unequal length: </a:t>
+            </a:r>
+            <a:pPr algn="l" indent="0" marL="0">
+              <a:spcAft>
+                <a:spcPts val="800"/>
+              </a:spcAft>
+              <a:buNone/>
+            </a:pPr>
+            <a:r>
+              <a:rPr lang="en-US" sz="4000" dirty="0">
+                <a:solidFill>
+                  <a:srgbClr val="111111"/>
+                </a:solidFill>
+                <a:latin typeface="Times New Roman" pitchFamily="34" charset="0"/>
+                <a:ea typeface="Times New Roman" pitchFamily="34" charset="-122"/>
+                <a:cs typeface="Times New Roman" pitchFamily="34" charset="-120"/>
+              </a:rPr>
+              <a:t>They become shorter from the Equator towards the poles.</a:t>
             </a:r>
             <a:endParaRPr lang="en-US" sz="4000" dirty="0"/>
           </a:p>
@@ -15173,7 +16473,7 @@
                 <a:ea typeface="Calibri" pitchFamily="34" charset="-122"/>
                 <a:cs typeface="Calibri" pitchFamily="34" charset="-120"/>
               </a:rPr>
-              <a:t>REMEDIATION</a:t>
+              <a:t>BOARD SUMMARY</a:t>
             </a:r>
             <a:endParaRPr lang="en-US" sz="1400" dirty="0"/>
           </a:p>
@@ -15196,7 +16496,7 @@
         <p:spPr>
           <a:xfrm>
             <a:off x="0" y="658368"/>
-            <a:ext cx="2468880" cy="5833872"/>
+            <a:ext cx="5120640" cy="5833872"/>
           </a:xfrm>
           <a:prstGeom prst="rect">
             <a:avLst/>
@@ -15211,8 +16511,8 @@
         </p:nvSpPr>
         <p:spPr>
           <a:xfrm>
-            <a:off x="2697480" y="1005840"/>
-            <a:ext cx="9174175" cy="731520"/>
+            <a:off x="5349240" y="1005840"/>
+            <a:ext cx="6522415" cy="731520"/>
           </a:xfrm>
           <a:prstGeom prst="rect">
             <a:avLst/>
@@ -15238,7 +16538,7 @@
                 <a:ea typeface="Times New Roman" pitchFamily="34" charset="-122"/>
                 <a:cs typeface="Times New Roman" pitchFamily="34" charset="-120"/>
               </a:rPr>
-              <a:t>Remediation</a:t>
+              <a:t>1. Latitudes</a:t>
             </a:r>
             <a:endParaRPr lang="en-US" sz="3600" dirty="0"/>
           </a:p>
@@ -15252,8 +16552,47 @@
         </p:nvSpPr>
         <p:spPr>
           <a:xfrm>
-            <a:off x="2697480" y="1783080"/>
-            <a:ext cx="9174175" cy="4663440"/>
+            <a:off x="5349240" y="1737360"/>
+            <a:ext cx="6522415" cy="457200"/>
+          </a:xfrm>
+          <a:prstGeom prst="rect">
+            <a:avLst/>
+          </a:prstGeom>
+          <a:noFill/>
+          <a:ln/>
+        </p:spPr>
+        <p:txBody>
+          <a:bodyPr wrap="square" lIns="0" tIns="0" rIns="0" bIns="0" rtlCol="0" anchor="ctr"/>
+          <a:lstStyle/>
+          <a:p>
+            <a:pPr algn="l" indent="0" marL="0">
+              <a:buNone/>
+            </a:pPr>
+            <a:r>
+              <a:rPr lang="en-US" sz="2300" b="1" dirty="0">
+                <a:solidFill>
+                  <a:srgbClr val="990011"/>
+                </a:solidFill>
+                <a:latin typeface="Times New Roman" pitchFamily="34" charset="0"/>
+                <a:ea typeface="Times New Roman" pitchFamily="34" charset="-122"/>
+                <a:cs typeface="Times New Roman" pitchFamily="34" charset="-120"/>
+              </a:rPr>
+              <a:t>B) Characteristics of Latitudes (continued)</a:t>
+            </a:r>
+            <a:endParaRPr lang="en-US" sz="2300" dirty="0"/>
+          </a:p>
+        </p:txBody>
+      </p:sp>
+      <p:sp>
+        <p:nvSpPr>
+          <p:cNvPr id="6" name="Text 3"/>
+          <p:cNvSpPr/>
+          <p:nvPr/>
+        </p:nvSpPr>
+        <p:spPr>
+          <a:xfrm>
+            <a:off x="5349240" y="2240280"/>
+            <a:ext cx="6522415" cy="4206240"/>
           </a:xfrm>
           <a:prstGeom prst="rect">
             <a:avLst/>
@@ -15280,18 +16619,13 @@
                 <a:ea typeface="Times New Roman" pitchFamily="34" charset="-122"/>
                 <a:cs typeface="Times New Roman" pitchFamily="34" charset="-120"/>
               </a:rPr>
-              <a:t>Fill in the blanks:</a:t>
-            </a:r>
-            <a:endParaRPr lang="en-US" sz="4000" dirty="0"/>
-          </a:p>
-          <a:p>
-            <a:pPr algn="l" marL="342900" indent="-342900">
+              <a:t>Values: </a:t>
+            </a:r>
+            <a:pPr algn="l" indent="0" marL="0">
               <a:spcAft>
                 <a:spcPts val="800"/>
               </a:spcAft>
-              <a:buSzPct val="100000"/>
-              <a:buFont typeface="+mj-lt"/>
-              <a:buAutoNum type="arabicPeriod" startAt="1"/>
+              <a:buNone/>
             </a:pPr>
             <a:r>
               <a:rPr lang="en-US" sz="4000" dirty="0">
@@ -15302,21 +16636,19 @@
                 <a:ea typeface="Times New Roman" pitchFamily="34" charset="-122"/>
                 <a:cs typeface="Times New Roman" pitchFamily="34" charset="-120"/>
               </a:rPr>
-              <a:t>The line of 0° latitude is the ______.</a:t>
+              <a:t>They go from 0° at the Equator to 90° at each pole, marked N or S.</a:t>
             </a:r>
             <a:endParaRPr lang="en-US" sz="4000" dirty="0"/>
           </a:p>
           <a:p>
-            <a:pPr algn="l" marL="342900" indent="-342900">
+            <a:pPr algn="l" indent="0" marL="0">
               <a:spcAft>
                 <a:spcPts val="800"/>
               </a:spcAft>
-              <a:buSzPct val="100000"/>
-              <a:buFont typeface="+mj-lt"/>
-              <a:buAutoNum type="arabicPeriod" startAt="1"/>
-            </a:pPr>
-            <a:r>
-              <a:rPr lang="en-US" sz="4000" dirty="0">
+              <a:buNone/>
+            </a:pPr>
+            <a:r>
+              <a:rPr lang="en-US" sz="4000" b="1" dirty="0">
                 <a:solidFill>
                   <a:srgbClr val="111111"/>
                 </a:solidFill>
@@ -15324,18 +16656,13 @@
                 <a:ea typeface="Times New Roman" pitchFamily="34" charset="-122"/>
                 <a:cs typeface="Times New Roman" pitchFamily="34" charset="-120"/>
               </a:rPr>
-              <a:t>The line of 0° longitude is the ______ Meridian.</a:t>
-            </a:r>
-            <a:endParaRPr lang="en-US" sz="4000" dirty="0"/>
-          </a:p>
-          <a:p>
-            <a:pPr algn="l" marL="342900" indent="-342900">
+              <a:t>Equal spacing: </a:t>
+            </a:r>
+            <a:pPr algn="l" indent="0" marL="0">
               <a:spcAft>
                 <a:spcPts val="800"/>
               </a:spcAft>
-              <a:buSzPct val="100000"/>
-              <a:buFont typeface="+mj-lt"/>
-              <a:buAutoNum type="arabicPeriod" startAt="1"/>
+              <a:buNone/>
             </a:pPr>
             <a:r>
               <a:rPr lang="en-US" sz="4000" dirty="0">
@@ -15346,7 +16673,7 @@
                 <a:ea typeface="Times New Roman" pitchFamily="34" charset="-122"/>
                 <a:cs typeface="Times New Roman" pitchFamily="34" charset="-120"/>
               </a:rPr>
-              <a:t>We write the ______ first, then the longitude.</a:t>
+              <a:t>One degree of latitude is always about 111 km.</a:t>
             </a:r>
             <a:endParaRPr lang="en-US" sz="4000" dirty="0"/>
           </a:p>
@@ -15458,15 +16785,176 @@
                 <a:ea typeface="Calibri" pitchFamily="34" charset="-122"/>
                 <a:cs typeface="Calibri" pitchFamily="34" charset="-120"/>
               </a:rPr>
-              <a:t>HOMEWORK</a:t>
+              <a:t>BOARD SUMMARY</a:t>
             </a:r>
             <a:endParaRPr lang="en-US" sz="1400" dirty="0"/>
+          </a:p>
+        </p:txBody>
+      </p:sp>
+      <p:sp>
+        <p:nvSpPr>
+          <p:cNvPr id="3" name="Text 1"/>
+          <p:cNvSpPr/>
+          <p:nvPr/>
+        </p:nvSpPr>
+        <p:spPr>
+          <a:xfrm>
+            <a:off x="365760" y="1005840"/>
+            <a:ext cx="11460175" cy="731520"/>
+          </a:xfrm>
+          <a:prstGeom prst="rect">
+            <a:avLst/>
+          </a:prstGeom>
+          <a:noFill/>
+          <a:ln/>
+        </p:spPr>
+        <p:txBody>
+          <a:bodyPr wrap="square" lIns="0" tIns="0" rIns="0" bIns="0" rtlCol="0" anchor="ctr">
+            <a:normAutofit/>
+          </a:bodyPr>
+          <a:lstStyle/>
+          <a:p>
+            <a:pPr algn="ctr" indent="0" marL="0">
+              <a:buNone/>
+            </a:pPr>
+            <a:r>
+              <a:rPr lang="en-US" sz="3600" b="1" dirty="0">
+                <a:solidFill>
+                  <a:srgbClr val="990011"/>
+                </a:solidFill>
+                <a:latin typeface="Times New Roman" pitchFamily="34" charset="0"/>
+                <a:ea typeface="Times New Roman" pitchFamily="34" charset="-122"/>
+                <a:cs typeface="Times New Roman" pitchFamily="34" charset="-120"/>
+              </a:rPr>
+              <a:t>2. Longitudes</a:t>
+            </a:r>
+            <a:endParaRPr lang="en-US" sz="3600" dirty="0"/>
+          </a:p>
+        </p:txBody>
+      </p:sp>
+      <p:sp>
+        <p:nvSpPr>
+          <p:cNvPr id="4" name="Text 2"/>
+          <p:cNvSpPr/>
+          <p:nvPr/>
+        </p:nvSpPr>
+        <p:spPr>
+          <a:xfrm>
+            <a:off x="365760" y="1737360"/>
+            <a:ext cx="5120640" cy="457200"/>
+          </a:xfrm>
+          <a:prstGeom prst="rect">
+            <a:avLst/>
+          </a:prstGeom>
+          <a:noFill/>
+          <a:ln/>
+        </p:spPr>
+        <p:txBody>
+          <a:bodyPr wrap="square" lIns="0" tIns="0" rIns="0" bIns="0" rtlCol="0" anchor="ctr">
+            <a:normAutofit/>
+          </a:bodyPr>
+          <a:lstStyle/>
+          <a:p>
+            <a:pPr algn="l" indent="0" marL="0">
+              <a:buNone/>
+            </a:pPr>
+            <a:r>
+              <a:rPr lang="en-US" sz="3000" b="1" dirty="0">
+                <a:solidFill>
+                  <a:srgbClr val="990011"/>
+                </a:solidFill>
+                <a:latin typeface="Times New Roman" pitchFamily="34" charset="0"/>
+                <a:ea typeface="Times New Roman" pitchFamily="34" charset="-122"/>
+                <a:cs typeface="Times New Roman" pitchFamily="34" charset="-120"/>
+              </a:rPr>
+              <a:t>A) Major Lines of Longitude</a:t>
+            </a:r>
+            <a:endParaRPr lang="en-US" sz="3000" dirty="0"/>
+          </a:p>
+        </p:txBody>
+      </p:sp>
+      <p:sp>
+        <p:nvSpPr>
+          <p:cNvPr id="5" name="Text 3"/>
+          <p:cNvSpPr/>
+          <p:nvPr/>
+        </p:nvSpPr>
+        <p:spPr>
+          <a:xfrm>
+            <a:off x="365760" y="2240280"/>
+            <a:ext cx="4846320" cy="4160520"/>
+          </a:xfrm>
+          <a:prstGeom prst="rect">
+            <a:avLst/>
+          </a:prstGeom>
+          <a:noFill/>
+          <a:ln/>
+        </p:spPr>
+        <p:txBody>
+          <a:bodyPr wrap="square" lIns="0" tIns="0" rIns="0" bIns="0" rtlCol="0" anchor="t"/>
+          <a:lstStyle/>
+          <a:p>
+            <a:pPr algn="l" indent="0" marL="0">
+              <a:spcAft>
+                <a:spcPts val="800"/>
+              </a:spcAft>
+              <a:buNone/>
+            </a:pPr>
+            <a:r>
+              <a:rPr lang="en-US" sz="3000" i="1" dirty="0">
+                <a:solidFill>
+                  <a:srgbClr val="111111"/>
+                </a:solidFill>
+                <a:latin typeface="Times New Roman" pitchFamily="34" charset="0"/>
+                <a:ea typeface="Times New Roman" pitchFamily="34" charset="-122"/>
+                <a:cs typeface="Times New Roman" pitchFamily="34" charset="-120"/>
+              </a:rPr>
+              <a:t>The major lines of longitude are the following:</a:t>
+            </a:r>
+            <a:endParaRPr lang="en-US" sz="3000" dirty="0"/>
+          </a:p>
+          <a:p>
+            <a:pPr algn="l" indent="0" marL="0">
+              <a:spcAft>
+                <a:spcPts val="800"/>
+              </a:spcAft>
+              <a:buNone/>
+            </a:pPr>
+            <a:r>
+              <a:rPr lang="en-US" sz="3000" b="1" dirty="0">
+                <a:solidFill>
+                  <a:srgbClr val="111111"/>
+                </a:solidFill>
+                <a:latin typeface="Times New Roman" pitchFamily="34" charset="0"/>
+                <a:ea typeface="Times New Roman" pitchFamily="34" charset="-122"/>
+                <a:cs typeface="Times New Roman" pitchFamily="34" charset="-120"/>
+              </a:rPr>
+              <a:t>The Greenwich (Prime) Meridian (0°): </a:t>
+            </a:r>
+            <a:pPr algn="l" indent="0" marL="0">
+              <a:spcAft>
+                <a:spcPts val="800"/>
+              </a:spcAft>
+              <a:buNone/>
+            </a:pPr>
+            <a:r>
+              <a:rPr lang="en-US" sz="3000" dirty="0">
+                <a:solidFill>
+                  <a:srgbClr val="111111"/>
+                </a:solidFill>
+                <a:latin typeface="Times New Roman" pitchFamily="34" charset="0"/>
+                <a:ea typeface="Times New Roman" pitchFamily="34" charset="-122"/>
+                <a:cs typeface="Times New Roman" pitchFamily="34" charset="-120"/>
+              </a:rPr>
+              <a:t>It passes through Greenwich in London and divides the Earth into the Eastern and Western Hemispheres.</a:t>
+            </a:r>
+            <a:endParaRPr lang="en-US" sz="3000" dirty="0"/>
           </a:p>
         </p:txBody>
       </p:sp>
       <p:pic>
         <p:nvPicPr>
-          <p:cNvPr id="3" name="Image 0" descr="/home/claude/f4/img/minesec_sheet.png">    </p:cNvPr>
+          <p:cNvPr id="6" name="Image 0" descr="/home/claude/f4/img/v2/longitudes_big.png">    </p:cNvPr>
           <p:cNvPicPr>
             <a:picLocks noChangeAspect="1"/>
           </p:cNvPicPr>
@@ -15480,8 +16968,8 @@
         </p:blipFill>
         <p:spPr>
           <a:xfrm>
-            <a:off x="0" y="658368"/>
-            <a:ext cx="5120640" cy="5833872"/>
+            <a:off x="5349240" y="2617506"/>
+            <a:ext cx="6659575" cy="2601397"/>
           </a:xfrm>
           <a:prstGeom prst="rect">
             <a:avLst/>
@@ -15490,14 +16978,14 @@
       </p:pic>
       <p:sp>
         <p:nvSpPr>
-          <p:cNvPr id="4" name="Text 1"/>
+          <p:cNvPr id="7" name="Text 4"/>
           <p:cNvSpPr/>
           <p:nvPr/>
         </p:nvSpPr>
         <p:spPr>
           <a:xfrm>
-            <a:off x="5349240" y="1005840"/>
-            <a:ext cx="6522415" cy="731520"/>
+            <a:off x="5349240" y="6089904"/>
+            <a:ext cx="6659575" cy="347472"/>
           </a:xfrm>
           <a:prstGeom prst="rect">
             <a:avLst/>
@@ -15506,68 +16994,24 @@
           <a:ln/>
         </p:spPr>
         <p:txBody>
-          <a:bodyPr wrap="square" lIns="0" tIns="0" rIns="0" bIns="0" rtlCol="0" anchor="ctr">
-            <a:normAutofit/>
-          </a:bodyPr>
+          <a:bodyPr wrap="square" lIns="0" tIns="0" rIns="0" bIns="0" rtlCol="0" anchor="ctr"/>
           <a:lstStyle/>
           <a:p>
             <a:pPr algn="ctr" indent="0" marL="0">
               <a:buNone/>
             </a:pPr>
             <a:r>
-              <a:rPr lang="en-US" sz="3600" b="1" dirty="0">
-                <a:solidFill>
-                  <a:srgbClr val="990011"/>
+              <a:rPr lang="en-US" sz="1600" i="1" dirty="0">
+                <a:solidFill>
+                  <a:srgbClr val="555555"/>
                 </a:solidFill>
                 <a:latin typeface="Times New Roman" pitchFamily="34" charset="0"/>
                 <a:ea typeface="Times New Roman" pitchFamily="34" charset="-122"/>
                 <a:cs typeface="Times New Roman" pitchFamily="34" charset="-120"/>
               </a:rPr>
-              <a:t>Homework</a:t>
-            </a:r>
-            <a:endParaRPr lang="en-US" sz="3600" dirty="0"/>
-          </a:p>
-        </p:txBody>
-      </p:sp>
-      <p:sp>
-        <p:nvSpPr>
-          <p:cNvPr id="5" name="Text 2"/>
-          <p:cNvSpPr/>
-          <p:nvPr/>
-        </p:nvSpPr>
-        <p:spPr>
-          <a:xfrm>
-            <a:off x="5349240" y="1783080"/>
-            <a:ext cx="6522415" cy="4663440"/>
-          </a:xfrm>
-          <a:prstGeom prst="rect">
-            <a:avLst/>
-          </a:prstGeom>
-          <a:noFill/>
-          <a:ln/>
-        </p:spPr>
-        <p:txBody>
-          <a:bodyPr wrap="square" lIns="0" tIns="0" rIns="0" bIns="0" rtlCol="0" anchor="t"/>
-          <a:lstStyle/>
-          <a:p>
-            <a:pPr algn="l" indent="0" marL="0">
-              <a:spcAft>
-                <a:spcPts val="800"/>
-              </a:spcAft>
-              <a:buNone/>
-            </a:pPr>
-            <a:r>
-              <a:rPr lang="en-US" sz="4000" dirty="0">
-                <a:solidFill>
-                  <a:srgbClr val="111111"/>
-                </a:solidFill>
-                <a:latin typeface="Times New Roman" pitchFamily="34" charset="0"/>
-                <a:ea typeface="Times New Roman" pitchFamily="34" charset="-122"/>
-                <a:cs typeface="Times New Roman" pitchFamily="34" charset="-120"/>
-              </a:rPr>
-              <a:t>Watch or listen to news about a flight from Douala to Paris or to Dubai. Write the name of the route and ask an adult why aeroplanes do not always fly in a straight line on a flat map.</a:t>
-            </a:r>
-            <a:endParaRPr lang="en-US" sz="4000" dirty="0"/>
+              <a:t>Illustration: lines of longitude</a:t>
+            </a:r>
+            <a:endParaRPr lang="en-US" sz="1600" dirty="0"/>
           </a:p>
         </p:txBody>
       </p:sp>
@@ -15677,7 +17121,7 @@
                 <a:ea typeface="Calibri" pitchFamily="34" charset="-122"/>
                 <a:cs typeface="Calibri" pitchFamily="34" charset="-120"/>
               </a:rPr>
-              <a:t>NEXT LESSON</a:t>
+              <a:t>BOARD SUMMARY</a:t>
             </a:r>
             <a:endParaRPr lang="en-US" sz="1400" dirty="0"/>
           </a:p>
@@ -15742,7 +17186,7 @@
                 <a:ea typeface="Times New Roman" pitchFamily="34" charset="-122"/>
                 <a:cs typeface="Times New Roman" pitchFamily="34" charset="-120"/>
               </a:rPr>
-              <a:t>Next Lesson</a:t>
+              <a:t>2. Longitudes</a:t>
             </a:r>
             <a:endParaRPr lang="en-US" sz="3600" dirty="0"/>
           </a:p>
@@ -15756,8 +17200,8 @@
         </p:nvSpPr>
         <p:spPr>
           <a:xfrm>
-            <a:off x="5349240" y="1783080"/>
-            <a:ext cx="6522415" cy="4663440"/>
+            <a:off x="5349240" y="1737360"/>
+            <a:ext cx="6522415" cy="457200"/>
           </a:xfrm>
           <a:prstGeom prst="rect">
             <a:avLst/>
@@ -15769,7 +17213,46 @@
           <a:bodyPr wrap="square" lIns="0" tIns="0" rIns="0" bIns="0" rtlCol="0" anchor="ctr"/>
           <a:lstStyle/>
           <a:p>
-            <a:pPr algn="ctr" indent="0" marL="0">
+            <a:pPr algn="l" indent="0" marL="0">
+              <a:buNone/>
+            </a:pPr>
+            <a:r>
+              <a:rPr lang="en-US" sz="3200" b="1" dirty="0">
+                <a:solidFill>
+                  <a:srgbClr val="990011"/>
+                </a:solidFill>
+                <a:latin typeface="Times New Roman" pitchFamily="34" charset="0"/>
+                <a:ea typeface="Times New Roman" pitchFamily="34" charset="-122"/>
+                <a:cs typeface="Times New Roman" pitchFamily="34" charset="-120"/>
+              </a:rPr>
+              <a:t>A) Major Lines of Longitude</a:t>
+            </a:r>
+            <a:endParaRPr lang="en-US" sz="3200" dirty="0"/>
+          </a:p>
+        </p:txBody>
+      </p:sp>
+      <p:sp>
+        <p:nvSpPr>
+          <p:cNvPr id="6" name="Text 3"/>
+          <p:cNvSpPr/>
+          <p:nvPr/>
+        </p:nvSpPr>
+        <p:spPr>
+          <a:xfrm>
+            <a:off x="5349240" y="2240280"/>
+            <a:ext cx="6522415" cy="4206240"/>
+          </a:xfrm>
+          <a:prstGeom prst="rect">
+            <a:avLst/>
+          </a:prstGeom>
+          <a:noFill/>
+          <a:ln/>
+        </p:spPr>
+        <p:txBody>
+          <a:bodyPr wrap="square" lIns="0" tIns="0" rIns="0" bIns="0" rtlCol="0" anchor="t"/>
+          <a:lstStyle/>
+          <a:p>
+            <a:pPr algn="l" indent="0" marL="0">
               <a:spcAft>
                 <a:spcPts val="800"/>
               </a:spcAft>
@@ -15784,27 +17267,24 @@
                 <a:ea typeface="Times New Roman" pitchFamily="34" charset="-122"/>
                 <a:cs typeface="Times New Roman" pitchFamily="34" charset="-120"/>
               </a:rPr>
-              <a:t>Our next lesson will be on:</a:t>
-            </a:r>
-            <a:endParaRPr lang="en-US" sz="4000" dirty="0"/>
-          </a:p>
-          <a:p>
-            <a:pPr algn="ctr" indent="0" marL="0">
+              <a:t>The 180° meridian: </a:t>
+            </a:r>
+            <a:pPr algn="l" indent="0" marL="0">
               <a:spcAft>
                 <a:spcPts val="800"/>
               </a:spcAft>
               <a:buNone/>
             </a:pPr>
             <a:r>
-              <a:rPr lang="en-US" sz="4000" b="1" dirty="0">
-                <a:solidFill>
-                  <a:srgbClr val="990011"/>
+              <a:rPr lang="en-US" sz="4000" dirty="0">
+                <a:solidFill>
+                  <a:srgbClr val="111111"/>
                 </a:solidFill>
                 <a:latin typeface="Times New Roman" pitchFamily="34" charset="0"/>
                 <a:ea typeface="Times New Roman" pitchFamily="34" charset="-122"/>
                 <a:cs typeface="Times New Roman" pitchFamily="34" charset="-120"/>
               </a:rPr>
-              <a:t>Lesson 3: Great Circles and the International Date Line</a:t>
+              <a:t>It is opposite the Greenwich Meridian, and the International Date Line follows it.</a:t>
             </a:r>
             <a:endParaRPr lang="en-US" sz="4000" dirty="0"/>
           </a:p>
@@ -15916,22 +17396,46 @@
                 <a:ea typeface="Calibri" pitchFamily="34" charset="-122"/>
                 <a:cs typeface="Calibri" pitchFamily="34" charset="-120"/>
               </a:rPr>
-              <a:t>BILINGUAL GAME</a:t>
+              <a:t>BOARD SUMMARY</a:t>
             </a:r>
             <a:endParaRPr lang="en-US" sz="1400" dirty="0"/>
           </a:p>
         </p:txBody>
       </p:sp>
-      <p:sp>
-        <p:nvSpPr>
-          <p:cNvPr id="3" name="Text 1"/>
+      <p:pic>
+        <p:nvPicPr>
+          <p:cNvPr id="3" name="Image 0" descr="/home/claude/f4/img/minesec_sheet.png">    </p:cNvPr>
+          <p:cNvPicPr>
+            <a:picLocks noChangeAspect="1"/>
+          </p:cNvPicPr>
+          <p:nvPr/>
+        </p:nvPicPr>
+        <p:blipFill>
+          <a:blip r:embed="rId1"/>
+          <a:stretch>
+            <a:fillRect/>
+          </a:stretch>
+        </p:blipFill>
+        <p:spPr>
+          <a:xfrm>
+            <a:off x="0" y="658368"/>
+            <a:ext cx="3840480" cy="5833872"/>
+          </a:xfrm>
+          <a:prstGeom prst="rect">
+            <a:avLst/>
+          </a:prstGeom>
+        </p:spPr>
+      </p:pic>
+      <p:sp>
+        <p:nvSpPr>
+          <p:cNvPr id="4" name="Text 1"/>
           <p:cNvSpPr/>
           <p:nvPr/>
         </p:nvSpPr>
         <p:spPr>
           <a:xfrm>
-            <a:off x="457200" y="1005840"/>
-            <a:ext cx="11277295" cy="731520"/>
+            <a:off x="4069080" y="1005840"/>
+            <a:ext cx="7802575" cy="731520"/>
           </a:xfrm>
           <a:prstGeom prst="rect">
             <a:avLst/>
@@ -15940,7 +17444,9 @@
           <a:ln/>
         </p:spPr>
         <p:txBody>
-          <a:bodyPr wrap="square" lIns="0" tIns="0" rIns="0" bIns="0" rtlCol="0" anchor="ctr"/>
+          <a:bodyPr wrap="square" lIns="0" tIns="0" rIns="0" bIns="0" rtlCol="0" anchor="ctr">
+            <a:normAutofit/>
+          </a:bodyPr>
           <a:lstStyle/>
           <a:p>
             <a:pPr algn="ctr" indent="0" marL="0">
@@ -15955,6 +17461,3633 @@
                 <a:ea typeface="Times New Roman" pitchFamily="34" charset="-122"/>
                 <a:cs typeface="Times New Roman" pitchFamily="34" charset="-120"/>
               </a:rPr>
+              <a:t>2. Longitudes</a:t>
+            </a:r>
+            <a:endParaRPr lang="en-US" sz="3600" dirty="0"/>
+          </a:p>
+        </p:txBody>
+      </p:sp>
+      <p:sp>
+        <p:nvSpPr>
+          <p:cNvPr id="5" name="Text 2"/>
+          <p:cNvSpPr/>
+          <p:nvPr/>
+        </p:nvSpPr>
+        <p:spPr>
+          <a:xfrm>
+            <a:off x="4069080" y="1737360"/>
+            <a:ext cx="7802575" cy="457200"/>
+          </a:xfrm>
+          <a:prstGeom prst="rect">
+            <a:avLst/>
+          </a:prstGeom>
+          <a:noFill/>
+          <a:ln/>
+        </p:spPr>
+        <p:txBody>
+          <a:bodyPr wrap="square" lIns="0" tIns="0" rIns="0" bIns="0" rtlCol="0" anchor="ctr"/>
+          <a:lstStyle/>
+          <a:p>
+            <a:pPr algn="l" indent="0" marL="0">
+              <a:buNone/>
+            </a:pPr>
+            <a:r>
+              <a:rPr lang="en-US" sz="3200" b="1" dirty="0">
+                <a:solidFill>
+                  <a:srgbClr val="990011"/>
+                </a:solidFill>
+                <a:latin typeface="Times New Roman" pitchFamily="34" charset="0"/>
+                <a:ea typeface="Times New Roman" pitchFamily="34" charset="-122"/>
+                <a:cs typeface="Times New Roman" pitchFamily="34" charset="-120"/>
+              </a:rPr>
+              <a:t>B) Characteristics of Longitudes</a:t>
+            </a:r>
+            <a:endParaRPr lang="en-US" sz="3200" dirty="0"/>
+          </a:p>
+        </p:txBody>
+      </p:sp>
+      <p:sp>
+        <p:nvSpPr>
+          <p:cNvPr id="6" name="Text 3"/>
+          <p:cNvSpPr/>
+          <p:nvPr/>
+        </p:nvSpPr>
+        <p:spPr>
+          <a:xfrm>
+            <a:off x="4069080" y="2240280"/>
+            <a:ext cx="7802575" cy="4206240"/>
+          </a:xfrm>
+          <a:prstGeom prst="rect">
+            <a:avLst/>
+          </a:prstGeom>
+          <a:noFill/>
+          <a:ln/>
+        </p:spPr>
+        <p:txBody>
+          <a:bodyPr wrap="square" lIns="0" tIns="0" rIns="0" bIns="0" rtlCol="0" anchor="t"/>
+          <a:lstStyle/>
+          <a:p>
+            <a:pPr algn="l" indent="0" marL="0">
+              <a:spcAft>
+                <a:spcPts val="800"/>
+              </a:spcAft>
+              <a:buNone/>
+            </a:pPr>
+            <a:r>
+              <a:rPr lang="en-US" sz="4000" i="1" dirty="0">
+                <a:solidFill>
+                  <a:srgbClr val="111111"/>
+                </a:solidFill>
+                <a:latin typeface="Times New Roman" pitchFamily="34" charset="0"/>
+                <a:ea typeface="Times New Roman" pitchFamily="34" charset="-122"/>
+                <a:cs typeface="Times New Roman" pitchFamily="34" charset="-120"/>
+              </a:rPr>
+              <a:t>Lines of longitude have the following characteristics:</a:t>
+            </a:r>
+            <a:endParaRPr lang="en-US" sz="4000" dirty="0"/>
+          </a:p>
+          <a:p>
+            <a:pPr algn="l" indent="0" marL="0">
+              <a:spcAft>
+                <a:spcPts val="800"/>
+              </a:spcAft>
+              <a:buNone/>
+            </a:pPr>
+            <a:r>
+              <a:rPr lang="en-US" sz="4000" b="1" dirty="0">
+                <a:solidFill>
+                  <a:srgbClr val="111111"/>
+                </a:solidFill>
+                <a:latin typeface="Times New Roman" pitchFamily="34" charset="0"/>
+                <a:ea typeface="Times New Roman" pitchFamily="34" charset="-122"/>
+                <a:cs typeface="Times New Roman" pitchFamily="34" charset="-120"/>
+              </a:rPr>
+              <a:t>Semi-circles: </a:t>
+            </a:r>
+            <a:pPr algn="l" indent="0" marL="0">
+              <a:spcAft>
+                <a:spcPts val="800"/>
+              </a:spcAft>
+              <a:buNone/>
+            </a:pPr>
+            <a:r>
+              <a:rPr lang="en-US" sz="4000" dirty="0">
+                <a:solidFill>
+                  <a:srgbClr val="111111"/>
+                </a:solidFill>
+                <a:latin typeface="Times New Roman" pitchFamily="34" charset="0"/>
+                <a:ea typeface="Times New Roman" pitchFamily="34" charset="-122"/>
+                <a:cs typeface="Times New Roman" pitchFamily="34" charset="-120"/>
+              </a:rPr>
+              <a:t>They run from the North Pole to the South Pole.</a:t>
+            </a:r>
+            <a:endParaRPr lang="en-US" sz="4000" dirty="0"/>
+          </a:p>
+          <a:p>
+            <a:pPr algn="l" indent="0" marL="0">
+              <a:spcAft>
+                <a:spcPts val="800"/>
+              </a:spcAft>
+              <a:buNone/>
+            </a:pPr>
+            <a:r>
+              <a:rPr lang="en-US" sz="4000" b="1" dirty="0">
+                <a:solidFill>
+                  <a:srgbClr val="111111"/>
+                </a:solidFill>
+                <a:latin typeface="Times New Roman" pitchFamily="34" charset="0"/>
+                <a:ea typeface="Times New Roman" pitchFamily="34" charset="-122"/>
+                <a:cs typeface="Times New Roman" pitchFamily="34" charset="-120"/>
+              </a:rPr>
+              <a:t>Equal length: </a:t>
+            </a:r>
+            <a:pPr algn="l" indent="0" marL="0">
+              <a:spcAft>
+                <a:spcPts val="800"/>
+              </a:spcAft>
+              <a:buNone/>
+            </a:pPr>
+            <a:r>
+              <a:rPr lang="en-US" sz="4000" dirty="0">
+                <a:solidFill>
+                  <a:srgbClr val="111111"/>
+                </a:solidFill>
+                <a:latin typeface="Times New Roman" pitchFamily="34" charset="0"/>
+                <a:ea typeface="Times New Roman" pitchFamily="34" charset="-122"/>
+                <a:cs typeface="Times New Roman" pitchFamily="34" charset="-120"/>
+              </a:rPr>
+              <a:t>All meridians have the same length.</a:t>
+            </a:r>
+            <a:endParaRPr lang="en-US" sz="4000" dirty="0"/>
+          </a:p>
+        </p:txBody>
+      </p:sp>
+      <p:sp>
+        <p:nvSpPr>
+          <p:cNvPr id="25" name="Slide Number Placeholder 0"/>
+          <p:cNvSpPr>
+            <a:spLocks noGrp="1"/>
+          </p:cNvSpPr>
+          <p:nvPr>
+            <p:ph type="sldNum" sz="quarter" idx="4294967295"/>
+          </p:nvPr>
+        </p:nvSpPr>
+        <p:spPr>
+          <a:xfrm>
+            <a:off x="27432" y="91440"/>
+            <a:ext cx="585216" cy="475488"/>
+          </a:xfrm>
+          <a:prstGeom prst="rect">
+            <a:avLst/>
+          </a:prstGeom>
+          <a:extLst>
+            <a:ext uri="{C572A759-6A51-4108-AA02-DFA0A04FC94B}">
+              <ma14:wrappingTextBoxFlag xmlns:ma14="http://schemas.microsoft.com/office/mac/drawingml/2011/main" val="0"/>
+            </a:ext>
+          </a:extLst>
+        </p:spPr>
+        <p:txBody>
+          <a:bodyPr/>
+          <a:lstStyle>
+            <a:lvl1pPr>
+              <a:defRPr sz="2000">
+                <a:solidFill>
+                  <a:srgbClr val="FFFFFF"/>
+                </a:solidFill>
+                <a:latin typeface="Calibri"/>
+                <a:ea typeface="Calibri"/>
+                <a:cs typeface="Calibri"/>
+              </a:defRPr>
+            </a:lvl1pPr>
+          </a:lstStyle>
+          <a:p>
+            <a:pPr algn="ctr"/>
+            <a:fld id="{F7021451-1387-4CA6-816F-3879F97B5CBC}" type="slidenum">
+              <a:rPr b="1" lang="en-US"/>
+              <a:t>44</a:t>
+            </a:fld>
+            <a:endParaRPr lang="en-US"/>
+          </a:p>
+        </p:txBody>
+      </p:sp>
+    </p:spTree>
+  </p:cSld>
+  <p:clrMapOvr>
+    <a:masterClrMapping/>
+  </p:clrMapOvr>
+</p:sld>
+</file>
+
+<file path=ppt/slides/slide45.xml><?xml version="1.0" encoding="utf-8"?>
+<p:sld xmlns:a="http://schemas.openxmlformats.org/drawingml/2006/main" xmlns:r="http://schemas.openxmlformats.org/officeDocument/2006/relationships" xmlns:p="http://schemas.openxmlformats.org/presentationml/2006/main">
+  <p:cSld name="Slide 45">
+    <p:spTree>
+      <p:nvGrpSpPr>
+        <p:cNvPr id="1" name=""/>
+        <p:cNvGrpSpPr/>
+        <p:nvPr/>
+      </p:nvGrpSpPr>
+      <p:grpSpPr>
+        <a:xfrm>
+          <a:off x="0" y="0"/>
+          <a:ext cx="0" cy="0"/>
+          <a:chOff x="0" y="0"/>
+          <a:chExt cx="0" cy="0"/>
+        </a:xfrm>
+      </p:grpSpPr>
+      <p:sp>
+        <p:nvSpPr>
+          <p:cNvPr id="2" name="Text 0"/>
+          <p:cNvSpPr/>
+          <p:nvPr/>
+        </p:nvSpPr>
+        <p:spPr>
+          <a:xfrm>
+            <a:off x="457200" y="713232"/>
+            <a:ext cx="11368735" cy="274320"/>
+          </a:xfrm>
+          <a:prstGeom prst="rect">
+            <a:avLst/>
+          </a:prstGeom>
+          <a:noFill/>
+          <a:ln/>
+        </p:spPr>
+        <p:txBody>
+          <a:bodyPr wrap="square" lIns="0" tIns="0" rIns="0" bIns="0" rtlCol="0" anchor="ctr"/>
+          <a:lstStyle/>
+          <a:p>
+            <a:pPr algn="r" indent="0" marL="0">
+              <a:buNone/>
+            </a:pPr>
+            <a:r>
+              <a:rPr lang="en-US" sz="1400" b="1" dirty="0">
+                <a:solidFill>
+                  <a:srgbClr val="1C3F6E"/>
+                </a:solidFill>
+                <a:latin typeface="Calibri" pitchFamily="34" charset="0"/>
+                <a:ea typeface="Calibri" pitchFamily="34" charset="-122"/>
+                <a:cs typeface="Calibri" pitchFamily="34" charset="-120"/>
+              </a:rPr>
+              <a:t>BOARD SUMMARY</a:t>
+            </a:r>
+            <a:endParaRPr lang="en-US" sz="1400" dirty="0"/>
+          </a:p>
+        </p:txBody>
+      </p:sp>
+      <p:pic>
+        <p:nvPicPr>
+          <p:cNvPr id="3" name="Image 0" descr="/home/claude/f4/img/minesec_sheet.png">    </p:cNvPr>
+          <p:cNvPicPr>
+            <a:picLocks noChangeAspect="1"/>
+          </p:cNvPicPr>
+          <p:nvPr/>
+        </p:nvPicPr>
+        <p:blipFill>
+          <a:blip r:embed="rId1"/>
+          <a:stretch>
+            <a:fillRect/>
+          </a:stretch>
+        </p:blipFill>
+        <p:spPr>
+          <a:xfrm>
+            <a:off x="0" y="658368"/>
+            <a:ext cx="5120640" cy="5833872"/>
+          </a:xfrm>
+          <a:prstGeom prst="rect">
+            <a:avLst/>
+          </a:prstGeom>
+        </p:spPr>
+      </p:pic>
+      <p:sp>
+        <p:nvSpPr>
+          <p:cNvPr id="4" name="Text 1"/>
+          <p:cNvSpPr/>
+          <p:nvPr/>
+        </p:nvSpPr>
+        <p:spPr>
+          <a:xfrm>
+            <a:off x="5349240" y="1005840"/>
+            <a:ext cx="6522415" cy="731520"/>
+          </a:xfrm>
+          <a:prstGeom prst="rect">
+            <a:avLst/>
+          </a:prstGeom>
+          <a:noFill/>
+          <a:ln/>
+        </p:spPr>
+        <p:txBody>
+          <a:bodyPr wrap="square" lIns="0" tIns="0" rIns="0" bIns="0" rtlCol="0" anchor="ctr">
+            <a:normAutofit/>
+          </a:bodyPr>
+          <a:lstStyle/>
+          <a:p>
+            <a:pPr algn="ctr" indent="0" marL="0">
+              <a:buNone/>
+            </a:pPr>
+            <a:r>
+              <a:rPr lang="en-US" sz="3600" b="1" dirty="0">
+                <a:solidFill>
+                  <a:srgbClr val="990011"/>
+                </a:solidFill>
+                <a:latin typeface="Times New Roman" pitchFamily="34" charset="0"/>
+                <a:ea typeface="Times New Roman" pitchFamily="34" charset="-122"/>
+                <a:cs typeface="Times New Roman" pitchFamily="34" charset="-120"/>
+              </a:rPr>
+              <a:t>2. Longitudes</a:t>
+            </a:r>
+            <a:endParaRPr lang="en-US" sz="3600" dirty="0"/>
+          </a:p>
+        </p:txBody>
+      </p:sp>
+      <p:sp>
+        <p:nvSpPr>
+          <p:cNvPr id="5" name="Text 2"/>
+          <p:cNvSpPr/>
+          <p:nvPr/>
+        </p:nvSpPr>
+        <p:spPr>
+          <a:xfrm>
+            <a:off x="5349240" y="1737360"/>
+            <a:ext cx="6522415" cy="457200"/>
+          </a:xfrm>
+          <a:prstGeom prst="rect">
+            <a:avLst/>
+          </a:prstGeom>
+          <a:noFill/>
+          <a:ln/>
+        </p:spPr>
+        <p:txBody>
+          <a:bodyPr wrap="square" lIns="0" tIns="0" rIns="0" bIns="0" rtlCol="0" anchor="ctr"/>
+          <a:lstStyle/>
+          <a:p>
+            <a:pPr algn="l" indent="0" marL="0">
+              <a:buNone/>
+            </a:pPr>
+            <a:r>
+              <a:rPr lang="en-US" sz="2300" b="1" dirty="0">
+                <a:solidFill>
+                  <a:srgbClr val="990011"/>
+                </a:solidFill>
+                <a:latin typeface="Times New Roman" pitchFamily="34" charset="0"/>
+                <a:ea typeface="Times New Roman" pitchFamily="34" charset="-122"/>
+                <a:cs typeface="Times New Roman" pitchFamily="34" charset="-120"/>
+              </a:rPr>
+              <a:t>B) Characteristics of Longitudes (continued)</a:t>
+            </a:r>
+            <a:endParaRPr lang="en-US" sz="2300" dirty="0"/>
+          </a:p>
+        </p:txBody>
+      </p:sp>
+      <p:sp>
+        <p:nvSpPr>
+          <p:cNvPr id="6" name="Text 3"/>
+          <p:cNvSpPr/>
+          <p:nvPr/>
+        </p:nvSpPr>
+        <p:spPr>
+          <a:xfrm>
+            <a:off x="5349240" y="2240280"/>
+            <a:ext cx="6522415" cy="4206240"/>
+          </a:xfrm>
+          <a:prstGeom prst="rect">
+            <a:avLst/>
+          </a:prstGeom>
+          <a:noFill/>
+          <a:ln/>
+        </p:spPr>
+        <p:txBody>
+          <a:bodyPr wrap="square" lIns="0" tIns="0" rIns="0" bIns="0" rtlCol="0" anchor="t"/>
+          <a:lstStyle/>
+          <a:p>
+            <a:pPr algn="l" indent="0" marL="0">
+              <a:spcAft>
+                <a:spcPts val="800"/>
+              </a:spcAft>
+              <a:buNone/>
+            </a:pPr>
+            <a:r>
+              <a:rPr lang="en-US" sz="4000" b="1" dirty="0">
+                <a:solidFill>
+                  <a:srgbClr val="111111"/>
+                </a:solidFill>
+                <a:latin typeface="Times New Roman" pitchFamily="34" charset="0"/>
+                <a:ea typeface="Times New Roman" pitchFamily="34" charset="-122"/>
+                <a:cs typeface="Times New Roman" pitchFamily="34" charset="-120"/>
+              </a:rPr>
+              <a:t>Meeting at the poles: </a:t>
+            </a:r>
+            <a:pPr algn="l" indent="0" marL="0">
+              <a:spcAft>
+                <a:spcPts val="800"/>
+              </a:spcAft>
+              <a:buNone/>
+            </a:pPr>
+            <a:r>
+              <a:rPr lang="en-US" sz="4000" dirty="0">
+                <a:solidFill>
+                  <a:srgbClr val="111111"/>
+                </a:solidFill>
+                <a:latin typeface="Times New Roman" pitchFamily="34" charset="0"/>
+                <a:ea typeface="Times New Roman" pitchFamily="34" charset="-122"/>
+                <a:cs typeface="Times New Roman" pitchFamily="34" charset="-120"/>
+              </a:rPr>
+              <a:t>They are far apart at the Equator and meet at the poles.</a:t>
+            </a:r>
+            <a:endParaRPr lang="en-US" sz="4000" dirty="0"/>
+          </a:p>
+          <a:p>
+            <a:pPr algn="l" indent="0" marL="0">
+              <a:spcAft>
+                <a:spcPts val="800"/>
+              </a:spcAft>
+              <a:buNone/>
+            </a:pPr>
+            <a:r>
+              <a:rPr lang="en-US" sz="4000" b="1" dirty="0">
+                <a:solidFill>
+                  <a:srgbClr val="111111"/>
+                </a:solidFill>
+                <a:latin typeface="Times New Roman" pitchFamily="34" charset="0"/>
+                <a:ea typeface="Times New Roman" pitchFamily="34" charset="-122"/>
+                <a:cs typeface="Times New Roman" pitchFamily="34" charset="-120"/>
+              </a:rPr>
+              <a:t>Values: </a:t>
+            </a:r>
+            <a:pPr algn="l" indent="0" marL="0">
+              <a:spcAft>
+                <a:spcPts val="800"/>
+              </a:spcAft>
+              <a:buNone/>
+            </a:pPr>
+            <a:r>
+              <a:rPr lang="en-US" sz="4000" dirty="0">
+                <a:solidFill>
+                  <a:srgbClr val="111111"/>
+                </a:solidFill>
+                <a:latin typeface="Times New Roman" pitchFamily="34" charset="0"/>
+                <a:ea typeface="Times New Roman" pitchFamily="34" charset="-122"/>
+                <a:cs typeface="Times New Roman" pitchFamily="34" charset="-120"/>
+              </a:rPr>
+              <a:t>They go from 0° to 180° east or west of Greenwich.</a:t>
+            </a:r>
+            <a:endParaRPr lang="en-US" sz="4000" dirty="0"/>
+          </a:p>
+        </p:txBody>
+      </p:sp>
+      <p:sp>
+        <p:nvSpPr>
+          <p:cNvPr id="25" name="Slide Number Placeholder 0"/>
+          <p:cNvSpPr>
+            <a:spLocks noGrp="1"/>
+          </p:cNvSpPr>
+          <p:nvPr>
+            <p:ph type="sldNum" sz="quarter" idx="4294967295"/>
+          </p:nvPr>
+        </p:nvSpPr>
+        <p:spPr>
+          <a:xfrm>
+            <a:off x="27432" y="91440"/>
+            <a:ext cx="585216" cy="475488"/>
+          </a:xfrm>
+          <a:prstGeom prst="rect">
+            <a:avLst/>
+          </a:prstGeom>
+          <a:extLst>
+            <a:ext uri="{C572A759-6A51-4108-AA02-DFA0A04FC94B}">
+              <ma14:wrappingTextBoxFlag xmlns:ma14="http://schemas.microsoft.com/office/mac/drawingml/2011/main" val="0"/>
+            </a:ext>
+          </a:extLst>
+        </p:spPr>
+        <p:txBody>
+          <a:bodyPr/>
+          <a:lstStyle>
+            <a:lvl1pPr>
+              <a:defRPr sz="2000">
+                <a:solidFill>
+                  <a:srgbClr val="FFFFFF"/>
+                </a:solidFill>
+                <a:latin typeface="Calibri"/>
+                <a:ea typeface="Calibri"/>
+                <a:cs typeface="Calibri"/>
+              </a:defRPr>
+            </a:lvl1pPr>
+          </a:lstStyle>
+          <a:p>
+            <a:pPr algn="ctr"/>
+            <a:fld id="{F7021451-1387-4CA6-816F-3879F97B5CBC}" type="slidenum">
+              <a:rPr b="1" lang="en-US"/>
+              <a:t>45</a:t>
+            </a:fld>
+            <a:endParaRPr lang="en-US"/>
+          </a:p>
+        </p:txBody>
+      </p:sp>
+    </p:spTree>
+  </p:cSld>
+  <p:clrMapOvr>
+    <a:masterClrMapping/>
+  </p:clrMapOvr>
+</p:sld>
+</file>
+
+<file path=ppt/slides/slide46.xml><?xml version="1.0" encoding="utf-8"?>
+<p:sld xmlns:a="http://schemas.openxmlformats.org/drawingml/2006/main" xmlns:r="http://schemas.openxmlformats.org/officeDocument/2006/relationships" xmlns:p="http://schemas.openxmlformats.org/presentationml/2006/main">
+  <p:cSld name="Slide 46">
+    <p:spTree>
+      <p:nvGrpSpPr>
+        <p:cNvPr id="1" name=""/>
+        <p:cNvGrpSpPr/>
+        <p:nvPr/>
+      </p:nvGrpSpPr>
+      <p:grpSpPr>
+        <a:xfrm>
+          <a:off x="0" y="0"/>
+          <a:ext cx="0" cy="0"/>
+          <a:chOff x="0" y="0"/>
+          <a:chExt cx="0" cy="0"/>
+        </a:xfrm>
+      </p:grpSpPr>
+      <p:sp>
+        <p:nvSpPr>
+          <p:cNvPr id="2" name="Text 0"/>
+          <p:cNvSpPr/>
+          <p:nvPr/>
+        </p:nvSpPr>
+        <p:spPr>
+          <a:xfrm>
+            <a:off x="457200" y="713232"/>
+            <a:ext cx="11368735" cy="274320"/>
+          </a:xfrm>
+          <a:prstGeom prst="rect">
+            <a:avLst/>
+          </a:prstGeom>
+          <a:noFill/>
+          <a:ln/>
+        </p:spPr>
+        <p:txBody>
+          <a:bodyPr wrap="square" lIns="0" tIns="0" rIns="0" bIns="0" rtlCol="0" anchor="ctr"/>
+          <a:lstStyle/>
+          <a:p>
+            <a:pPr algn="r" indent="0" marL="0">
+              <a:buNone/>
+            </a:pPr>
+            <a:r>
+              <a:rPr lang="en-US" sz="1400" b="1" dirty="0">
+                <a:solidFill>
+                  <a:srgbClr val="1C3F6E"/>
+                </a:solidFill>
+                <a:latin typeface="Calibri" pitchFamily="34" charset="0"/>
+                <a:ea typeface="Calibri" pitchFamily="34" charset="-122"/>
+                <a:cs typeface="Calibri" pitchFamily="34" charset="-120"/>
+              </a:rPr>
+              <a:t>BOARD SUMMARY</a:t>
+            </a:r>
+            <a:endParaRPr lang="en-US" sz="1400" dirty="0"/>
+          </a:p>
+        </p:txBody>
+      </p:sp>
+      <p:pic>
+        <p:nvPicPr>
+          <p:cNvPr id="3" name="Image 0" descr="/home/claude/f4/img/minesec_sheet.png">    </p:cNvPr>
+          <p:cNvPicPr>
+            <a:picLocks noChangeAspect="1"/>
+          </p:cNvPicPr>
+          <p:nvPr/>
+        </p:nvPicPr>
+        <p:blipFill>
+          <a:blip r:embed="rId1"/>
+          <a:stretch>
+            <a:fillRect/>
+          </a:stretch>
+        </p:blipFill>
+        <p:spPr>
+          <a:xfrm>
+            <a:off x="0" y="658368"/>
+            <a:ext cx="2468880" cy="5833872"/>
+          </a:xfrm>
+          <a:prstGeom prst="rect">
+            <a:avLst/>
+          </a:prstGeom>
+        </p:spPr>
+      </p:pic>
+      <p:sp>
+        <p:nvSpPr>
+          <p:cNvPr id="4" name="Text 1"/>
+          <p:cNvSpPr/>
+          <p:nvPr/>
+        </p:nvSpPr>
+        <p:spPr>
+          <a:xfrm>
+            <a:off x="2697480" y="1005840"/>
+            <a:ext cx="9174175" cy="731520"/>
+          </a:xfrm>
+          <a:prstGeom prst="rect">
+            <a:avLst/>
+          </a:prstGeom>
+          <a:noFill/>
+          <a:ln/>
+        </p:spPr>
+        <p:txBody>
+          <a:bodyPr wrap="square" lIns="0" tIns="0" rIns="0" bIns="0" rtlCol="0" anchor="ctr">
+            <a:normAutofit/>
+          </a:bodyPr>
+          <a:lstStyle/>
+          <a:p>
+            <a:pPr algn="ctr" indent="0" marL="0">
+              <a:buNone/>
+            </a:pPr>
+            <a:r>
+              <a:rPr lang="en-US" sz="3600" b="1" dirty="0">
+                <a:solidFill>
+                  <a:srgbClr val="990011"/>
+                </a:solidFill>
+                <a:latin typeface="Times New Roman" pitchFamily="34" charset="0"/>
+                <a:ea typeface="Times New Roman" pitchFamily="34" charset="-122"/>
+                <a:cs typeface="Times New Roman" pitchFamily="34" charset="-120"/>
+              </a:rPr>
+              <a:t>3. Differences between Latitudes and Longitudes</a:t>
+            </a:r>
+            <a:endParaRPr lang="en-US" sz="3600" dirty="0"/>
+          </a:p>
+        </p:txBody>
+      </p:sp>
+      <p:sp>
+        <p:nvSpPr>
+          <p:cNvPr id="5" name="Text 2"/>
+          <p:cNvSpPr/>
+          <p:nvPr/>
+        </p:nvSpPr>
+        <p:spPr>
+          <a:xfrm>
+            <a:off x="2697480" y="1783080"/>
+            <a:ext cx="9174175" cy="4663440"/>
+          </a:xfrm>
+          <a:prstGeom prst="rect">
+            <a:avLst/>
+          </a:prstGeom>
+          <a:noFill/>
+          <a:ln/>
+        </p:spPr>
+        <p:txBody>
+          <a:bodyPr wrap="square" lIns="0" tIns="0" rIns="0" bIns="0" rtlCol="0" anchor="t"/>
+          <a:lstStyle/>
+          <a:p>
+            <a:pPr algn="l" indent="0" marL="0">
+              <a:spcAft>
+                <a:spcPts val="800"/>
+              </a:spcAft>
+              <a:buNone/>
+            </a:pPr>
+            <a:r>
+              <a:rPr lang="en-US" sz="4000" i="1" dirty="0">
+                <a:solidFill>
+                  <a:srgbClr val="111111"/>
+                </a:solidFill>
+                <a:latin typeface="Times New Roman" pitchFamily="34" charset="0"/>
+                <a:ea typeface="Times New Roman" pitchFamily="34" charset="-122"/>
+                <a:cs typeface="Times New Roman" pitchFamily="34" charset="-120"/>
+              </a:rPr>
+              <a:t>Latitudes and longitudes differ in the following ways:</a:t>
+            </a:r>
+            <a:endParaRPr lang="en-US" sz="4000" dirty="0"/>
+          </a:p>
+          <a:p>
+            <a:pPr algn="l" indent="0" marL="0">
+              <a:spcAft>
+                <a:spcPts val="800"/>
+              </a:spcAft>
+              <a:buNone/>
+            </a:pPr>
+            <a:r>
+              <a:rPr lang="en-US" sz="4000" b="1" dirty="0">
+                <a:solidFill>
+                  <a:srgbClr val="111111"/>
+                </a:solidFill>
+                <a:latin typeface="Times New Roman" pitchFamily="34" charset="0"/>
+                <a:ea typeface="Times New Roman" pitchFamily="34" charset="-122"/>
+                <a:cs typeface="Times New Roman" pitchFamily="34" charset="-120"/>
+              </a:rPr>
+              <a:t>Direction: </a:t>
+            </a:r>
+            <a:pPr algn="l" indent="0" marL="0">
+              <a:spcAft>
+                <a:spcPts val="800"/>
+              </a:spcAft>
+              <a:buNone/>
+            </a:pPr>
+            <a:r>
+              <a:rPr lang="en-US" sz="4000" dirty="0">
+                <a:solidFill>
+                  <a:srgbClr val="111111"/>
+                </a:solidFill>
+                <a:latin typeface="Times New Roman" pitchFamily="34" charset="0"/>
+                <a:ea typeface="Times New Roman" pitchFamily="34" charset="-122"/>
+                <a:cs typeface="Times New Roman" pitchFamily="34" charset="-120"/>
+              </a:rPr>
+              <a:t>Latitudes run from west to east, while longitudes run from north to south.</a:t>
+            </a:r>
+            <a:endParaRPr lang="en-US" sz="4000" dirty="0"/>
+          </a:p>
+          <a:p>
+            <a:pPr algn="l" indent="0" marL="0">
+              <a:spcAft>
+                <a:spcPts val="800"/>
+              </a:spcAft>
+              <a:buNone/>
+            </a:pPr>
+            <a:r>
+              <a:rPr lang="en-US" sz="4000" b="1" dirty="0">
+                <a:solidFill>
+                  <a:srgbClr val="111111"/>
+                </a:solidFill>
+                <a:latin typeface="Times New Roman" pitchFamily="34" charset="0"/>
+                <a:ea typeface="Times New Roman" pitchFamily="34" charset="-122"/>
+                <a:cs typeface="Times New Roman" pitchFamily="34" charset="-120"/>
+              </a:rPr>
+              <a:t>Meeting: </a:t>
+            </a:r>
+            <a:pPr algn="l" indent="0" marL="0">
+              <a:spcAft>
+                <a:spcPts val="800"/>
+              </a:spcAft>
+              <a:buNone/>
+            </a:pPr>
+            <a:r>
+              <a:rPr lang="en-US" sz="4000" dirty="0">
+                <a:solidFill>
+                  <a:srgbClr val="111111"/>
+                </a:solidFill>
+                <a:latin typeface="Times New Roman" pitchFamily="34" charset="0"/>
+                <a:ea typeface="Times New Roman" pitchFamily="34" charset="-122"/>
+                <a:cs typeface="Times New Roman" pitchFamily="34" charset="-120"/>
+              </a:rPr>
+              <a:t>Latitudes never meet, while longitudes meet at the poles.</a:t>
+            </a:r>
+            <a:endParaRPr lang="en-US" sz="4000" dirty="0"/>
+          </a:p>
+        </p:txBody>
+      </p:sp>
+      <p:sp>
+        <p:nvSpPr>
+          <p:cNvPr id="25" name="Slide Number Placeholder 0"/>
+          <p:cNvSpPr>
+            <a:spLocks noGrp="1"/>
+          </p:cNvSpPr>
+          <p:nvPr>
+            <p:ph type="sldNum" sz="quarter" idx="4294967295"/>
+          </p:nvPr>
+        </p:nvSpPr>
+        <p:spPr>
+          <a:xfrm>
+            <a:off x="27432" y="91440"/>
+            <a:ext cx="585216" cy="475488"/>
+          </a:xfrm>
+          <a:prstGeom prst="rect">
+            <a:avLst/>
+          </a:prstGeom>
+          <a:extLst>
+            <a:ext uri="{C572A759-6A51-4108-AA02-DFA0A04FC94B}">
+              <ma14:wrappingTextBoxFlag xmlns:ma14="http://schemas.microsoft.com/office/mac/drawingml/2011/main" val="0"/>
+            </a:ext>
+          </a:extLst>
+        </p:spPr>
+        <p:txBody>
+          <a:bodyPr/>
+          <a:lstStyle>
+            <a:lvl1pPr>
+              <a:defRPr sz="2000">
+                <a:solidFill>
+                  <a:srgbClr val="FFFFFF"/>
+                </a:solidFill>
+                <a:latin typeface="Calibri"/>
+                <a:ea typeface="Calibri"/>
+                <a:cs typeface="Calibri"/>
+              </a:defRPr>
+            </a:lvl1pPr>
+          </a:lstStyle>
+          <a:p>
+            <a:pPr algn="ctr"/>
+            <a:fld id="{F7021451-1387-4CA6-816F-3879F97B5CBC}" type="slidenum">
+              <a:rPr b="1" lang="en-US"/>
+              <a:t>46</a:t>
+            </a:fld>
+            <a:endParaRPr lang="en-US"/>
+          </a:p>
+        </p:txBody>
+      </p:sp>
+    </p:spTree>
+  </p:cSld>
+  <p:clrMapOvr>
+    <a:masterClrMapping/>
+  </p:clrMapOvr>
+</p:sld>
+</file>
+
+<file path=ppt/slides/slide47.xml><?xml version="1.0" encoding="utf-8"?>
+<p:sld xmlns:a="http://schemas.openxmlformats.org/drawingml/2006/main" xmlns:r="http://schemas.openxmlformats.org/officeDocument/2006/relationships" xmlns:p="http://schemas.openxmlformats.org/presentationml/2006/main">
+  <p:cSld name="Slide 47">
+    <p:spTree>
+      <p:nvGrpSpPr>
+        <p:cNvPr id="1" name=""/>
+        <p:cNvGrpSpPr/>
+        <p:nvPr/>
+      </p:nvGrpSpPr>
+      <p:grpSpPr>
+        <a:xfrm>
+          <a:off x="0" y="0"/>
+          <a:ext cx="0" cy="0"/>
+          <a:chOff x="0" y="0"/>
+          <a:chExt cx="0" cy="0"/>
+        </a:xfrm>
+      </p:grpSpPr>
+      <p:sp>
+        <p:nvSpPr>
+          <p:cNvPr id="2" name="Text 0"/>
+          <p:cNvSpPr/>
+          <p:nvPr/>
+        </p:nvSpPr>
+        <p:spPr>
+          <a:xfrm>
+            <a:off x="457200" y="713232"/>
+            <a:ext cx="11368735" cy="274320"/>
+          </a:xfrm>
+          <a:prstGeom prst="rect">
+            <a:avLst/>
+          </a:prstGeom>
+          <a:noFill/>
+          <a:ln/>
+        </p:spPr>
+        <p:txBody>
+          <a:bodyPr wrap="square" lIns="0" tIns="0" rIns="0" bIns="0" rtlCol="0" anchor="ctr"/>
+          <a:lstStyle/>
+          <a:p>
+            <a:pPr algn="r" indent="0" marL="0">
+              <a:buNone/>
+            </a:pPr>
+            <a:r>
+              <a:rPr lang="en-US" sz="1400" b="1" dirty="0">
+                <a:solidFill>
+                  <a:srgbClr val="1C3F6E"/>
+                </a:solidFill>
+                <a:latin typeface="Calibri" pitchFamily="34" charset="0"/>
+                <a:ea typeface="Calibri" pitchFamily="34" charset="-122"/>
+                <a:cs typeface="Calibri" pitchFamily="34" charset="-120"/>
+              </a:rPr>
+              <a:t>BOARD SUMMARY</a:t>
+            </a:r>
+            <a:endParaRPr lang="en-US" sz="1400" dirty="0"/>
+          </a:p>
+        </p:txBody>
+      </p:sp>
+      <p:pic>
+        <p:nvPicPr>
+          <p:cNvPr id="3" name="Image 0" descr="/home/claude/f4/img/minesec_sheet.png">    </p:cNvPr>
+          <p:cNvPicPr>
+            <a:picLocks noChangeAspect="1"/>
+          </p:cNvPicPr>
+          <p:nvPr/>
+        </p:nvPicPr>
+        <p:blipFill>
+          <a:blip r:embed="rId1"/>
+          <a:stretch>
+            <a:fillRect/>
+          </a:stretch>
+        </p:blipFill>
+        <p:spPr>
+          <a:xfrm>
+            <a:off x="0" y="658368"/>
+            <a:ext cx="1463040" cy="5833872"/>
+          </a:xfrm>
+          <a:prstGeom prst="rect">
+            <a:avLst/>
+          </a:prstGeom>
+        </p:spPr>
+      </p:pic>
+      <p:sp>
+        <p:nvSpPr>
+          <p:cNvPr id="4" name="Text 1"/>
+          <p:cNvSpPr/>
+          <p:nvPr/>
+        </p:nvSpPr>
+        <p:spPr>
+          <a:xfrm>
+            <a:off x="1691640" y="1005840"/>
+            <a:ext cx="10180015" cy="731520"/>
+          </a:xfrm>
+          <a:prstGeom prst="rect">
+            <a:avLst/>
+          </a:prstGeom>
+          <a:noFill/>
+          <a:ln/>
+        </p:spPr>
+        <p:txBody>
+          <a:bodyPr wrap="square" lIns="0" tIns="0" rIns="0" bIns="0" rtlCol="0" anchor="ctr">
+            <a:normAutofit/>
+          </a:bodyPr>
+          <a:lstStyle/>
+          <a:p>
+            <a:pPr algn="ctr" indent="0" marL="0">
+              <a:buNone/>
+            </a:pPr>
+            <a:r>
+              <a:rPr lang="en-US" sz="3600" b="1" dirty="0">
+                <a:solidFill>
+                  <a:srgbClr val="990011"/>
+                </a:solidFill>
+                <a:latin typeface="Times New Roman" pitchFamily="34" charset="0"/>
+                <a:ea typeface="Times New Roman" pitchFamily="34" charset="-122"/>
+                <a:cs typeface="Times New Roman" pitchFamily="34" charset="-120"/>
+              </a:rPr>
+              <a:t>3. Differences between Latitudes and Longitudes (continued)</a:t>
+            </a:r>
+            <a:endParaRPr lang="en-US" sz="3600" dirty="0"/>
+          </a:p>
+        </p:txBody>
+      </p:sp>
+      <p:sp>
+        <p:nvSpPr>
+          <p:cNvPr id="5" name="Text 2"/>
+          <p:cNvSpPr/>
+          <p:nvPr/>
+        </p:nvSpPr>
+        <p:spPr>
+          <a:xfrm>
+            <a:off x="1691640" y="1783080"/>
+            <a:ext cx="10180015" cy="4663440"/>
+          </a:xfrm>
+          <a:prstGeom prst="rect">
+            <a:avLst/>
+          </a:prstGeom>
+          <a:noFill/>
+          <a:ln/>
+        </p:spPr>
+        <p:txBody>
+          <a:bodyPr wrap="square" lIns="0" tIns="0" rIns="0" bIns="0" rtlCol="0" anchor="t"/>
+          <a:lstStyle/>
+          <a:p>
+            <a:pPr algn="l" indent="0" marL="0">
+              <a:spcAft>
+                <a:spcPts val="800"/>
+              </a:spcAft>
+              <a:buNone/>
+            </a:pPr>
+            <a:r>
+              <a:rPr lang="en-US" sz="4000" b="1" dirty="0">
+                <a:solidFill>
+                  <a:srgbClr val="111111"/>
+                </a:solidFill>
+                <a:latin typeface="Times New Roman" pitchFamily="34" charset="0"/>
+                <a:ea typeface="Times New Roman" pitchFamily="34" charset="-122"/>
+                <a:cs typeface="Times New Roman" pitchFamily="34" charset="-120"/>
+              </a:rPr>
+              <a:t>Length: </a:t>
+            </a:r>
+            <a:pPr algn="l" indent="0" marL="0">
+              <a:spcAft>
+                <a:spcPts val="800"/>
+              </a:spcAft>
+              <a:buNone/>
+            </a:pPr>
+            <a:r>
+              <a:rPr lang="en-US" sz="4000" dirty="0">
+                <a:solidFill>
+                  <a:srgbClr val="111111"/>
+                </a:solidFill>
+                <a:latin typeface="Times New Roman" pitchFamily="34" charset="0"/>
+                <a:ea typeface="Times New Roman" pitchFamily="34" charset="-122"/>
+                <a:cs typeface="Times New Roman" pitchFamily="34" charset="-120"/>
+              </a:rPr>
+              <a:t>Latitudes have different lengths, while longitudes have equal lengths.</a:t>
+            </a:r>
+            <a:endParaRPr lang="en-US" sz="4000" dirty="0"/>
+          </a:p>
+          <a:p>
+            <a:pPr algn="l" indent="0" marL="0">
+              <a:spcAft>
+                <a:spcPts val="800"/>
+              </a:spcAft>
+              <a:buNone/>
+            </a:pPr>
+            <a:r>
+              <a:rPr lang="en-US" sz="4000" b="1" dirty="0">
+                <a:solidFill>
+                  <a:srgbClr val="111111"/>
+                </a:solidFill>
+                <a:latin typeface="Times New Roman" pitchFamily="34" charset="0"/>
+                <a:ea typeface="Times New Roman" pitchFamily="34" charset="-122"/>
+                <a:cs typeface="Times New Roman" pitchFamily="34" charset="-120"/>
+              </a:rPr>
+              <a:t>Values: </a:t>
+            </a:r>
+            <a:pPr algn="l" indent="0" marL="0">
+              <a:spcAft>
+                <a:spcPts val="800"/>
+              </a:spcAft>
+              <a:buNone/>
+            </a:pPr>
+            <a:r>
+              <a:rPr lang="en-US" sz="4000" dirty="0">
+                <a:solidFill>
+                  <a:srgbClr val="111111"/>
+                </a:solidFill>
+                <a:latin typeface="Times New Roman" pitchFamily="34" charset="0"/>
+                <a:ea typeface="Times New Roman" pitchFamily="34" charset="-122"/>
+                <a:cs typeface="Times New Roman" pitchFamily="34" charset="-120"/>
+              </a:rPr>
+              <a:t>Latitudes go up to 90°, while longitudes go up to 180°.</a:t>
+            </a:r>
+            <a:endParaRPr lang="en-US" sz="4000" dirty="0"/>
+          </a:p>
+          <a:p>
+            <a:pPr algn="l" indent="0" marL="0">
+              <a:spcAft>
+                <a:spcPts val="800"/>
+              </a:spcAft>
+              <a:buNone/>
+            </a:pPr>
+            <a:r>
+              <a:rPr lang="en-US" sz="4000" b="1" dirty="0">
+                <a:solidFill>
+                  <a:srgbClr val="111111"/>
+                </a:solidFill>
+                <a:latin typeface="Times New Roman" pitchFamily="34" charset="0"/>
+                <a:ea typeface="Times New Roman" pitchFamily="34" charset="-122"/>
+                <a:cs typeface="Times New Roman" pitchFamily="34" charset="-120"/>
+              </a:rPr>
+              <a:t>Use: </a:t>
+            </a:r>
+            <a:pPr algn="l" indent="0" marL="0">
+              <a:spcAft>
+                <a:spcPts val="800"/>
+              </a:spcAft>
+              <a:buNone/>
+            </a:pPr>
+            <a:r>
+              <a:rPr lang="en-US" sz="4000" dirty="0">
+                <a:solidFill>
+                  <a:srgbClr val="111111"/>
+                </a:solidFill>
+                <a:latin typeface="Times New Roman" pitchFamily="34" charset="0"/>
+                <a:ea typeface="Times New Roman" pitchFamily="34" charset="-122"/>
+                <a:cs typeface="Times New Roman" pitchFamily="34" charset="-120"/>
+              </a:rPr>
+              <a:t>Latitudes help to find climate zones, while longitudes help to calculate time.</a:t>
+            </a:r>
+            <a:endParaRPr lang="en-US" sz="4000" dirty="0"/>
+          </a:p>
+        </p:txBody>
+      </p:sp>
+      <p:sp>
+        <p:nvSpPr>
+          <p:cNvPr id="25" name="Slide Number Placeholder 0"/>
+          <p:cNvSpPr>
+            <a:spLocks noGrp="1"/>
+          </p:cNvSpPr>
+          <p:nvPr>
+            <p:ph type="sldNum" sz="quarter" idx="4294967295"/>
+          </p:nvPr>
+        </p:nvSpPr>
+        <p:spPr>
+          <a:xfrm>
+            <a:off x="27432" y="91440"/>
+            <a:ext cx="585216" cy="475488"/>
+          </a:xfrm>
+          <a:prstGeom prst="rect">
+            <a:avLst/>
+          </a:prstGeom>
+          <a:extLst>
+            <a:ext uri="{C572A759-6A51-4108-AA02-DFA0A04FC94B}">
+              <ma14:wrappingTextBoxFlag xmlns:ma14="http://schemas.microsoft.com/office/mac/drawingml/2011/main" val="0"/>
+            </a:ext>
+          </a:extLst>
+        </p:spPr>
+        <p:txBody>
+          <a:bodyPr/>
+          <a:lstStyle>
+            <a:lvl1pPr>
+              <a:defRPr sz="2000">
+                <a:solidFill>
+                  <a:srgbClr val="FFFFFF"/>
+                </a:solidFill>
+                <a:latin typeface="Calibri"/>
+                <a:ea typeface="Calibri"/>
+                <a:cs typeface="Calibri"/>
+              </a:defRPr>
+            </a:lvl1pPr>
+          </a:lstStyle>
+          <a:p>
+            <a:pPr algn="ctr"/>
+            <a:fld id="{F7021451-1387-4CA6-816F-3879F97B5CBC}" type="slidenum">
+              <a:rPr b="1" lang="en-US"/>
+              <a:t>47</a:t>
+            </a:fld>
+            <a:endParaRPr lang="en-US"/>
+          </a:p>
+        </p:txBody>
+      </p:sp>
+    </p:spTree>
+  </p:cSld>
+  <p:clrMapOvr>
+    <a:masterClrMapping/>
+  </p:clrMapOvr>
+</p:sld>
+</file>
+
+<file path=ppt/slides/slide48.xml><?xml version="1.0" encoding="utf-8"?>
+<p:sld xmlns:a="http://schemas.openxmlformats.org/drawingml/2006/main" xmlns:r="http://schemas.openxmlformats.org/officeDocument/2006/relationships" xmlns:p="http://schemas.openxmlformats.org/presentationml/2006/main">
+  <p:cSld name="Slide 48">
+    <p:spTree>
+      <p:nvGrpSpPr>
+        <p:cNvPr id="1" name=""/>
+        <p:cNvGrpSpPr/>
+        <p:nvPr/>
+      </p:nvGrpSpPr>
+      <p:grpSpPr>
+        <a:xfrm>
+          <a:off x="0" y="0"/>
+          <a:ext cx="0" cy="0"/>
+          <a:chOff x="0" y="0"/>
+          <a:chExt cx="0" cy="0"/>
+        </a:xfrm>
+      </p:grpSpPr>
+      <p:sp>
+        <p:nvSpPr>
+          <p:cNvPr id="2" name="Text 0"/>
+          <p:cNvSpPr/>
+          <p:nvPr/>
+        </p:nvSpPr>
+        <p:spPr>
+          <a:xfrm>
+            <a:off x="457200" y="713232"/>
+            <a:ext cx="11368735" cy="274320"/>
+          </a:xfrm>
+          <a:prstGeom prst="rect">
+            <a:avLst/>
+          </a:prstGeom>
+          <a:noFill/>
+          <a:ln/>
+        </p:spPr>
+        <p:txBody>
+          <a:bodyPr wrap="square" lIns="0" tIns="0" rIns="0" bIns="0" rtlCol="0" anchor="ctr"/>
+          <a:lstStyle/>
+          <a:p>
+            <a:pPr algn="r" indent="0" marL="0">
+              <a:buNone/>
+            </a:pPr>
+            <a:r>
+              <a:rPr lang="en-US" sz="1400" b="1" dirty="0">
+                <a:solidFill>
+                  <a:srgbClr val="1C3F6E"/>
+                </a:solidFill>
+                <a:latin typeface="Calibri" pitchFamily="34" charset="0"/>
+                <a:ea typeface="Calibri" pitchFamily="34" charset="-122"/>
+                <a:cs typeface="Calibri" pitchFamily="34" charset="-120"/>
+              </a:rPr>
+              <a:t>BOARD SUMMARY</a:t>
+            </a:r>
+            <a:endParaRPr lang="en-US" sz="1400" dirty="0"/>
+          </a:p>
+        </p:txBody>
+      </p:sp>
+      <p:sp>
+        <p:nvSpPr>
+          <p:cNvPr id="3" name="Text 1"/>
+          <p:cNvSpPr/>
+          <p:nvPr/>
+        </p:nvSpPr>
+        <p:spPr>
+          <a:xfrm>
+            <a:off x="365760" y="1005840"/>
+            <a:ext cx="11460175" cy="731520"/>
+          </a:xfrm>
+          <a:prstGeom prst="rect">
+            <a:avLst/>
+          </a:prstGeom>
+          <a:noFill/>
+          <a:ln/>
+        </p:spPr>
+        <p:txBody>
+          <a:bodyPr wrap="square" lIns="0" tIns="0" rIns="0" bIns="0" rtlCol="0" anchor="ctr">
+            <a:normAutofit/>
+          </a:bodyPr>
+          <a:lstStyle/>
+          <a:p>
+            <a:pPr algn="ctr" indent="0" marL="0">
+              <a:buNone/>
+            </a:pPr>
+            <a:r>
+              <a:rPr lang="en-US" sz="3600" b="1" dirty="0">
+                <a:solidFill>
+                  <a:srgbClr val="990011"/>
+                </a:solidFill>
+                <a:latin typeface="Times New Roman" pitchFamily="34" charset="0"/>
+                <a:ea typeface="Times New Roman" pitchFamily="34" charset="-122"/>
+                <a:cs typeface="Times New Roman" pitchFamily="34" charset="-120"/>
+              </a:rPr>
+              <a:t>4. Geographical Coordinates</a:t>
+            </a:r>
+            <a:endParaRPr lang="en-US" sz="3600" dirty="0"/>
+          </a:p>
+        </p:txBody>
+      </p:sp>
+      <p:sp>
+        <p:nvSpPr>
+          <p:cNvPr id="4" name="Text 2"/>
+          <p:cNvSpPr/>
+          <p:nvPr/>
+        </p:nvSpPr>
+        <p:spPr>
+          <a:xfrm>
+            <a:off x="365760" y="1783080"/>
+            <a:ext cx="4846320" cy="4617720"/>
+          </a:xfrm>
+          <a:prstGeom prst="rect">
+            <a:avLst/>
+          </a:prstGeom>
+          <a:noFill/>
+          <a:ln/>
+        </p:spPr>
+        <p:txBody>
+          <a:bodyPr wrap="square" lIns="0" tIns="0" rIns="0" bIns="0" rtlCol="0" anchor="t"/>
+          <a:lstStyle/>
+          <a:p>
+            <a:pPr algn="l" indent="0" marL="0">
+              <a:spcAft>
+                <a:spcPts val="800"/>
+              </a:spcAft>
+              <a:buNone/>
+            </a:pPr>
+            <a:r>
+              <a:rPr lang="en-US" sz="3600" i="1" dirty="0">
+                <a:solidFill>
+                  <a:srgbClr val="111111"/>
+                </a:solidFill>
+                <a:latin typeface="Times New Roman" pitchFamily="34" charset="0"/>
+                <a:ea typeface="Times New Roman" pitchFamily="34" charset="-122"/>
+                <a:cs typeface="Times New Roman" pitchFamily="34" charset="-120"/>
+              </a:rPr>
+              <a:t>Geographical coordinates are written as follows:</a:t>
+            </a:r>
+            <a:endParaRPr lang="en-US" sz="3600" dirty="0"/>
+          </a:p>
+          <a:p>
+            <a:pPr algn="l" indent="0" marL="0">
+              <a:spcAft>
+                <a:spcPts val="800"/>
+              </a:spcAft>
+              <a:buNone/>
+            </a:pPr>
+            <a:r>
+              <a:rPr lang="en-US" sz="3600" b="1" dirty="0">
+                <a:solidFill>
+                  <a:srgbClr val="111111"/>
+                </a:solidFill>
+                <a:latin typeface="Times New Roman" pitchFamily="34" charset="0"/>
+                <a:ea typeface="Times New Roman" pitchFamily="34" charset="-122"/>
+                <a:cs typeface="Times New Roman" pitchFamily="34" charset="-120"/>
+              </a:rPr>
+              <a:t>Order: </a:t>
+            </a:r>
+            <a:pPr algn="l" indent="0" marL="0">
+              <a:spcAft>
+                <a:spcPts val="800"/>
+              </a:spcAft>
+              <a:buNone/>
+            </a:pPr>
+            <a:r>
+              <a:rPr lang="en-US" sz="3600" dirty="0">
+                <a:solidFill>
+                  <a:srgbClr val="111111"/>
+                </a:solidFill>
+                <a:latin typeface="Times New Roman" pitchFamily="34" charset="0"/>
+                <a:ea typeface="Times New Roman" pitchFamily="34" charset="-122"/>
+                <a:cs typeface="Times New Roman" pitchFamily="34" charset="-120"/>
+              </a:rPr>
+              <a:t>We write the latitude first and the longitude second.</a:t>
+            </a:r>
+            <a:endParaRPr lang="en-US" sz="3600" dirty="0"/>
+          </a:p>
+        </p:txBody>
+      </p:sp>
+      <p:pic>
+        <p:nvPicPr>
+          <p:cNvPr id="5" name="Image 0" descr="/home/claude/f4/img/v2/cameroon_grid_big.png">    </p:cNvPr>
+          <p:cNvPicPr>
+            <a:picLocks noChangeAspect="1"/>
+          </p:cNvPicPr>
+          <p:nvPr/>
+        </p:nvPicPr>
+        <p:blipFill>
+          <a:blip r:embed="rId1"/>
+          <a:stretch>
+            <a:fillRect/>
+          </a:stretch>
+        </p:blipFill>
+        <p:spPr>
+          <a:xfrm>
+            <a:off x="5349240" y="2045198"/>
+            <a:ext cx="6659575" cy="3746011"/>
+          </a:xfrm>
+          <a:prstGeom prst="rect">
+            <a:avLst/>
+          </a:prstGeom>
+        </p:spPr>
+      </p:pic>
+      <p:sp>
+        <p:nvSpPr>
+          <p:cNvPr id="6" name="Text 3"/>
+          <p:cNvSpPr/>
+          <p:nvPr/>
+        </p:nvSpPr>
+        <p:spPr>
+          <a:xfrm>
+            <a:off x="5349240" y="6089904"/>
+            <a:ext cx="6659575" cy="347472"/>
+          </a:xfrm>
+          <a:prstGeom prst="rect">
+            <a:avLst/>
+          </a:prstGeom>
+          <a:noFill/>
+          <a:ln/>
+        </p:spPr>
+        <p:txBody>
+          <a:bodyPr wrap="square" lIns="0" tIns="0" rIns="0" bIns="0" rtlCol="0" anchor="ctr"/>
+          <a:lstStyle/>
+          <a:p>
+            <a:pPr algn="ctr" indent="0" marL="0">
+              <a:buNone/>
+            </a:pPr>
+            <a:r>
+              <a:rPr lang="en-US" sz="1600" i="1" dirty="0">
+                <a:solidFill>
+                  <a:srgbClr val="555555"/>
+                </a:solidFill>
+                <a:latin typeface="Times New Roman" pitchFamily="34" charset="0"/>
+                <a:ea typeface="Times New Roman" pitchFamily="34" charset="-122"/>
+                <a:cs typeface="Times New Roman" pitchFamily="34" charset="-120"/>
+              </a:rPr>
+              <a:t>Illustration: Cameroon with its grid</a:t>
+            </a:r>
+            <a:endParaRPr lang="en-US" sz="1600" dirty="0"/>
+          </a:p>
+        </p:txBody>
+      </p:sp>
+      <p:sp>
+        <p:nvSpPr>
+          <p:cNvPr id="25" name="Slide Number Placeholder 0"/>
+          <p:cNvSpPr>
+            <a:spLocks noGrp="1"/>
+          </p:cNvSpPr>
+          <p:nvPr>
+            <p:ph type="sldNum" sz="quarter" idx="4294967295"/>
+          </p:nvPr>
+        </p:nvSpPr>
+        <p:spPr>
+          <a:xfrm>
+            <a:off x="27432" y="91440"/>
+            <a:ext cx="585216" cy="475488"/>
+          </a:xfrm>
+          <a:prstGeom prst="rect">
+            <a:avLst/>
+          </a:prstGeom>
+          <a:extLst>
+            <a:ext uri="{C572A759-6A51-4108-AA02-DFA0A04FC94B}">
+              <ma14:wrappingTextBoxFlag xmlns:ma14="http://schemas.microsoft.com/office/mac/drawingml/2011/main" val="0"/>
+            </a:ext>
+          </a:extLst>
+        </p:spPr>
+        <p:txBody>
+          <a:bodyPr/>
+          <a:lstStyle>
+            <a:lvl1pPr>
+              <a:defRPr sz="2000">
+                <a:solidFill>
+                  <a:srgbClr val="FFFFFF"/>
+                </a:solidFill>
+                <a:latin typeface="Calibri"/>
+                <a:ea typeface="Calibri"/>
+                <a:cs typeface="Calibri"/>
+              </a:defRPr>
+            </a:lvl1pPr>
+          </a:lstStyle>
+          <a:p>
+            <a:pPr algn="ctr"/>
+            <a:fld id="{F7021451-1387-4CA6-816F-3879F97B5CBC}" type="slidenum">
+              <a:rPr b="1" lang="en-US"/>
+              <a:t>48</a:t>
+            </a:fld>
+            <a:endParaRPr lang="en-US"/>
+          </a:p>
+        </p:txBody>
+      </p:sp>
+    </p:spTree>
+  </p:cSld>
+  <p:clrMapOvr>
+    <a:masterClrMapping/>
+  </p:clrMapOvr>
+</p:sld>
+</file>
+
+<file path=ppt/slides/slide49.xml><?xml version="1.0" encoding="utf-8"?>
+<p:sld xmlns:a="http://schemas.openxmlformats.org/drawingml/2006/main" xmlns:r="http://schemas.openxmlformats.org/officeDocument/2006/relationships" xmlns:p="http://schemas.openxmlformats.org/presentationml/2006/main">
+  <p:cSld name="Slide 49">
+    <p:spTree>
+      <p:nvGrpSpPr>
+        <p:cNvPr id="1" name=""/>
+        <p:cNvGrpSpPr/>
+        <p:nvPr/>
+      </p:nvGrpSpPr>
+      <p:grpSpPr>
+        <a:xfrm>
+          <a:off x="0" y="0"/>
+          <a:ext cx="0" cy="0"/>
+          <a:chOff x="0" y="0"/>
+          <a:chExt cx="0" cy="0"/>
+        </a:xfrm>
+      </p:grpSpPr>
+      <p:sp>
+        <p:nvSpPr>
+          <p:cNvPr id="2" name="Text 0"/>
+          <p:cNvSpPr/>
+          <p:nvPr/>
+        </p:nvSpPr>
+        <p:spPr>
+          <a:xfrm>
+            <a:off x="457200" y="713232"/>
+            <a:ext cx="11368735" cy="274320"/>
+          </a:xfrm>
+          <a:prstGeom prst="rect">
+            <a:avLst/>
+          </a:prstGeom>
+          <a:noFill/>
+          <a:ln/>
+        </p:spPr>
+        <p:txBody>
+          <a:bodyPr wrap="square" lIns="0" tIns="0" rIns="0" bIns="0" rtlCol="0" anchor="ctr"/>
+          <a:lstStyle/>
+          <a:p>
+            <a:pPr algn="r" indent="0" marL="0">
+              <a:buNone/>
+            </a:pPr>
+            <a:r>
+              <a:rPr lang="en-US" sz="1400" b="1" dirty="0">
+                <a:solidFill>
+                  <a:srgbClr val="1C3F6E"/>
+                </a:solidFill>
+                <a:latin typeface="Calibri" pitchFamily="34" charset="0"/>
+                <a:ea typeface="Calibri" pitchFamily="34" charset="-122"/>
+                <a:cs typeface="Calibri" pitchFamily="34" charset="-120"/>
+              </a:rPr>
+              <a:t>BOARD SUMMARY</a:t>
+            </a:r>
+            <a:endParaRPr lang="en-US" sz="1400" dirty="0"/>
+          </a:p>
+        </p:txBody>
+      </p:sp>
+      <p:pic>
+        <p:nvPicPr>
+          <p:cNvPr id="3" name="Image 0" descr="/home/claude/f4/img/minesec_sheet.png">    </p:cNvPr>
+          <p:cNvPicPr>
+            <a:picLocks noChangeAspect="1"/>
+          </p:cNvPicPr>
+          <p:nvPr/>
+        </p:nvPicPr>
+        <p:blipFill>
+          <a:blip r:embed="rId1"/>
+          <a:stretch>
+            <a:fillRect/>
+          </a:stretch>
+        </p:blipFill>
+        <p:spPr>
+          <a:xfrm>
+            <a:off x="0" y="658368"/>
+            <a:ext cx="5120640" cy="5833872"/>
+          </a:xfrm>
+          <a:prstGeom prst="rect">
+            <a:avLst/>
+          </a:prstGeom>
+        </p:spPr>
+      </p:pic>
+      <p:sp>
+        <p:nvSpPr>
+          <p:cNvPr id="4" name="Text 1"/>
+          <p:cNvSpPr/>
+          <p:nvPr/>
+        </p:nvSpPr>
+        <p:spPr>
+          <a:xfrm>
+            <a:off x="5349240" y="1005840"/>
+            <a:ext cx="6522415" cy="731520"/>
+          </a:xfrm>
+          <a:prstGeom prst="rect">
+            <a:avLst/>
+          </a:prstGeom>
+          <a:noFill/>
+          <a:ln/>
+        </p:spPr>
+        <p:txBody>
+          <a:bodyPr wrap="square" lIns="0" tIns="0" rIns="0" bIns="0" rtlCol="0" anchor="ctr">
+            <a:normAutofit/>
+          </a:bodyPr>
+          <a:lstStyle/>
+          <a:p>
+            <a:pPr algn="ctr" indent="0" marL="0">
+              <a:buNone/>
+            </a:pPr>
+            <a:r>
+              <a:rPr lang="en-US" sz="3600" b="1" dirty="0">
+                <a:solidFill>
+                  <a:srgbClr val="990011"/>
+                </a:solidFill>
+                <a:latin typeface="Times New Roman" pitchFamily="34" charset="0"/>
+                <a:ea typeface="Times New Roman" pitchFamily="34" charset="-122"/>
+                <a:cs typeface="Times New Roman" pitchFamily="34" charset="-120"/>
+              </a:rPr>
+              <a:t>4. Geographical Coordinates</a:t>
+            </a:r>
+            <a:endParaRPr lang="en-US" sz="3600" dirty="0"/>
+          </a:p>
+        </p:txBody>
+      </p:sp>
+      <p:sp>
+        <p:nvSpPr>
+          <p:cNvPr id="5" name="Text 2"/>
+          <p:cNvSpPr/>
+          <p:nvPr/>
+        </p:nvSpPr>
+        <p:spPr>
+          <a:xfrm>
+            <a:off x="5349240" y="1783080"/>
+            <a:ext cx="6522415" cy="4663440"/>
+          </a:xfrm>
+          <a:prstGeom prst="rect">
+            <a:avLst/>
+          </a:prstGeom>
+          <a:noFill/>
+          <a:ln/>
+        </p:spPr>
+        <p:txBody>
+          <a:bodyPr wrap="square" lIns="0" tIns="0" rIns="0" bIns="0" rtlCol="0" anchor="t"/>
+          <a:lstStyle/>
+          <a:p>
+            <a:pPr algn="l" indent="0" marL="0">
+              <a:spcAft>
+                <a:spcPts val="800"/>
+              </a:spcAft>
+              <a:buNone/>
+            </a:pPr>
+            <a:r>
+              <a:rPr lang="en-US" sz="4000" b="1" dirty="0">
+                <a:solidFill>
+                  <a:srgbClr val="111111"/>
+                </a:solidFill>
+                <a:latin typeface="Times New Roman" pitchFamily="34" charset="0"/>
+                <a:ea typeface="Times New Roman" pitchFamily="34" charset="-122"/>
+                <a:cs typeface="Times New Roman" pitchFamily="34" charset="-120"/>
+              </a:rPr>
+              <a:t>Directions: </a:t>
+            </a:r>
+            <a:pPr algn="l" indent="0" marL="0">
+              <a:spcAft>
+                <a:spcPts val="800"/>
+              </a:spcAft>
+              <a:buNone/>
+            </a:pPr>
+            <a:r>
+              <a:rPr lang="en-US" sz="4000" dirty="0">
+                <a:solidFill>
+                  <a:srgbClr val="111111"/>
+                </a:solidFill>
+                <a:latin typeface="Times New Roman" pitchFamily="34" charset="0"/>
+                <a:ea typeface="Times New Roman" pitchFamily="34" charset="-122"/>
+                <a:cs typeface="Times New Roman" pitchFamily="34" charset="-120"/>
+              </a:rPr>
+              <a:t>We add N or S to the latitude and E or W to the longitude.</a:t>
+            </a:r>
+            <a:endParaRPr lang="en-US" sz="4000" dirty="0"/>
+          </a:p>
+          <a:p>
+            <a:pPr algn="l" indent="0" marL="0">
+              <a:spcAft>
+                <a:spcPts val="800"/>
+              </a:spcAft>
+              <a:buNone/>
+            </a:pPr>
+            <a:r>
+              <a:rPr lang="en-US" sz="4000" b="1" dirty="0">
+                <a:solidFill>
+                  <a:srgbClr val="111111"/>
+                </a:solidFill>
+                <a:latin typeface="Times New Roman" pitchFamily="34" charset="0"/>
+                <a:ea typeface="Times New Roman" pitchFamily="34" charset="-122"/>
+                <a:cs typeface="Times New Roman" pitchFamily="34" charset="-120"/>
+              </a:rPr>
+              <a:t>Example: </a:t>
+            </a:r>
+            <a:pPr algn="l" indent="0" marL="0">
+              <a:spcAft>
+                <a:spcPts val="800"/>
+              </a:spcAft>
+              <a:buNone/>
+            </a:pPr>
+            <a:r>
+              <a:rPr lang="en-US" sz="4000" dirty="0">
+                <a:solidFill>
+                  <a:srgbClr val="111111"/>
+                </a:solidFill>
+                <a:latin typeface="Times New Roman" pitchFamily="34" charset="0"/>
+                <a:ea typeface="Times New Roman" pitchFamily="34" charset="-122"/>
+                <a:cs typeface="Times New Roman" pitchFamily="34" charset="-120"/>
+              </a:rPr>
+              <a:t>Garoua is at about 9° N, 13° E.</a:t>
+            </a:r>
+            <a:endParaRPr lang="en-US" sz="4000" dirty="0"/>
+          </a:p>
+        </p:txBody>
+      </p:sp>
+      <p:sp>
+        <p:nvSpPr>
+          <p:cNvPr id="25" name="Slide Number Placeholder 0"/>
+          <p:cNvSpPr>
+            <a:spLocks noGrp="1"/>
+          </p:cNvSpPr>
+          <p:nvPr>
+            <p:ph type="sldNum" sz="quarter" idx="4294967295"/>
+          </p:nvPr>
+        </p:nvSpPr>
+        <p:spPr>
+          <a:xfrm>
+            <a:off x="27432" y="91440"/>
+            <a:ext cx="585216" cy="475488"/>
+          </a:xfrm>
+          <a:prstGeom prst="rect">
+            <a:avLst/>
+          </a:prstGeom>
+          <a:extLst>
+            <a:ext uri="{C572A759-6A51-4108-AA02-DFA0A04FC94B}">
+              <ma14:wrappingTextBoxFlag xmlns:ma14="http://schemas.microsoft.com/office/mac/drawingml/2011/main" val="0"/>
+            </a:ext>
+          </a:extLst>
+        </p:spPr>
+        <p:txBody>
+          <a:bodyPr/>
+          <a:lstStyle>
+            <a:lvl1pPr>
+              <a:defRPr sz="2000">
+                <a:solidFill>
+                  <a:srgbClr val="FFFFFF"/>
+                </a:solidFill>
+                <a:latin typeface="Calibri"/>
+                <a:ea typeface="Calibri"/>
+                <a:cs typeface="Calibri"/>
+              </a:defRPr>
+            </a:lvl1pPr>
+          </a:lstStyle>
+          <a:p>
+            <a:pPr algn="ctr"/>
+            <a:fld id="{F7021451-1387-4CA6-816F-3879F97B5CBC}" type="slidenum">
+              <a:rPr b="1" lang="en-US"/>
+              <a:t>49</a:t>
+            </a:fld>
+            <a:endParaRPr lang="en-US"/>
+          </a:p>
+        </p:txBody>
+      </p:sp>
+    </p:spTree>
+  </p:cSld>
+  <p:clrMapOvr>
+    <a:masterClrMapping/>
+  </p:clrMapOvr>
+</p:sld>
+</file>
+
+<file path=ppt/slides/slide5.xml><?xml version="1.0" encoding="utf-8"?>
+<p:sld xmlns:a="http://schemas.openxmlformats.org/drawingml/2006/main" xmlns:r="http://schemas.openxmlformats.org/officeDocument/2006/relationships" xmlns:p="http://schemas.openxmlformats.org/presentationml/2006/main">
+  <p:cSld name="Slide 5">
+    <p:spTree>
+      <p:nvGrpSpPr>
+        <p:cNvPr id="1" name=""/>
+        <p:cNvGrpSpPr/>
+        <p:nvPr/>
+      </p:nvGrpSpPr>
+      <p:grpSpPr>
+        <a:xfrm>
+          <a:off x="0" y="0"/>
+          <a:ext cx="0" cy="0"/>
+          <a:chOff x="0" y="0"/>
+          <a:chExt cx="0" cy="0"/>
+        </a:xfrm>
+      </p:grpSpPr>
+      <p:sp>
+        <p:nvSpPr>
+          <p:cNvPr id="2" name="Text 0"/>
+          <p:cNvSpPr/>
+          <p:nvPr/>
+        </p:nvSpPr>
+        <p:spPr>
+          <a:xfrm>
+            <a:off x="457200" y="713232"/>
+            <a:ext cx="11368735" cy="274320"/>
+          </a:xfrm>
+          <a:prstGeom prst="rect">
+            <a:avLst/>
+          </a:prstGeom>
+          <a:noFill/>
+          <a:ln/>
+        </p:spPr>
+        <p:txBody>
+          <a:bodyPr wrap="square" lIns="0" tIns="0" rIns="0" bIns="0" rtlCol="0" anchor="ctr"/>
+          <a:lstStyle/>
+          <a:p>
+            <a:pPr algn="r" indent="0" marL="0">
+              <a:buNone/>
+            </a:pPr>
+            <a:r>
+              <a:rPr lang="en-US" sz="1400" b="1" dirty="0">
+                <a:solidFill>
+                  <a:srgbClr val="1C3F6E"/>
+                </a:solidFill>
+                <a:latin typeface="Calibri" pitchFamily="34" charset="0"/>
+                <a:ea typeface="Calibri" pitchFamily="34" charset="-122"/>
+                <a:cs typeface="Calibri" pitchFamily="34" charset="-120"/>
+              </a:rPr>
+              <a:t>HOMEWORK CORRECTION</a:t>
+            </a:r>
+            <a:endParaRPr lang="en-US" sz="1400" dirty="0"/>
+          </a:p>
+        </p:txBody>
+      </p:sp>
+      <p:pic>
+        <p:nvPicPr>
+          <p:cNvPr id="3" name="Image 0" descr="/home/claude/f4/img/minesec_sheet.png">    </p:cNvPr>
+          <p:cNvPicPr>
+            <a:picLocks noChangeAspect="1"/>
+          </p:cNvPicPr>
+          <p:nvPr/>
+        </p:nvPicPr>
+        <p:blipFill>
+          <a:blip r:embed="rId1"/>
+          <a:stretch>
+            <a:fillRect/>
+          </a:stretch>
+        </p:blipFill>
+        <p:spPr>
+          <a:xfrm>
+            <a:off x="0" y="658368"/>
+            <a:ext cx="5120640" cy="5833872"/>
+          </a:xfrm>
+          <a:prstGeom prst="rect">
+            <a:avLst/>
+          </a:prstGeom>
+        </p:spPr>
+      </p:pic>
+      <p:sp>
+        <p:nvSpPr>
+          <p:cNvPr id="4" name="Text 1"/>
+          <p:cNvSpPr/>
+          <p:nvPr/>
+        </p:nvSpPr>
+        <p:spPr>
+          <a:xfrm>
+            <a:off x="5349240" y="1005840"/>
+            <a:ext cx="6522415" cy="731520"/>
+          </a:xfrm>
+          <a:prstGeom prst="rect">
+            <a:avLst/>
+          </a:prstGeom>
+          <a:noFill/>
+          <a:ln/>
+        </p:spPr>
+        <p:txBody>
+          <a:bodyPr wrap="square" lIns="0" tIns="0" rIns="0" bIns="0" rtlCol="0" anchor="ctr">
+            <a:normAutofit/>
+          </a:bodyPr>
+          <a:lstStyle/>
+          <a:p>
+            <a:pPr algn="ctr" indent="0" marL="0">
+              <a:buNone/>
+            </a:pPr>
+            <a:r>
+              <a:rPr lang="en-US" sz="3600" b="1" dirty="0">
+                <a:solidFill>
+                  <a:srgbClr val="990011"/>
+                </a:solidFill>
+                <a:latin typeface="Times New Roman" pitchFamily="34" charset="0"/>
+                <a:ea typeface="Times New Roman" pitchFamily="34" charset="-122"/>
+                <a:cs typeface="Times New Roman" pitchFamily="34" charset="-120"/>
+              </a:rPr>
+              <a:t>Correction: Possible Answer</a:t>
+            </a:r>
+            <a:endParaRPr lang="en-US" sz="3600" dirty="0"/>
+          </a:p>
+        </p:txBody>
+      </p:sp>
+      <p:sp>
+        <p:nvSpPr>
+          <p:cNvPr id="5" name="Text 2"/>
+          <p:cNvSpPr/>
+          <p:nvPr/>
+        </p:nvSpPr>
+        <p:spPr>
+          <a:xfrm>
+            <a:off x="5349240" y="1783080"/>
+            <a:ext cx="6522415" cy="4663440"/>
+          </a:xfrm>
+          <a:prstGeom prst="rect">
+            <a:avLst/>
+          </a:prstGeom>
+          <a:noFill/>
+          <a:ln/>
+        </p:spPr>
+        <p:txBody>
+          <a:bodyPr wrap="square" lIns="0" tIns="0" rIns="0" bIns="0" rtlCol="0" anchor="t"/>
+          <a:lstStyle/>
+          <a:p>
+            <a:pPr algn="l" indent="0" marL="0">
+              <a:spcAft>
+                <a:spcPts val="800"/>
+              </a:spcAft>
+              <a:buNone/>
+            </a:pPr>
+            <a:r>
+              <a:rPr lang="en-US" sz="4000" dirty="0">
+                <a:solidFill>
+                  <a:srgbClr val="111111"/>
+                </a:solidFill>
+                <a:latin typeface="Times New Roman" pitchFamily="34" charset="0"/>
+                <a:ea typeface="Times New Roman" pitchFamily="34" charset="-122"/>
+                <a:cs typeface="Times New Roman" pitchFamily="34" charset="-120"/>
+              </a:rPr>
+              <a:t>The numbers on the edges are latitudes (left and right) and longitudes (top and bottom). Near Garoua we read about 9° N and 13° E.</a:t>
+            </a:r>
+            <a:endParaRPr lang="en-US" sz="4000" dirty="0"/>
+          </a:p>
+        </p:txBody>
+      </p:sp>
+      <p:sp>
+        <p:nvSpPr>
+          <p:cNvPr id="25" name="Slide Number Placeholder 0"/>
+          <p:cNvSpPr>
+            <a:spLocks noGrp="1"/>
+          </p:cNvSpPr>
+          <p:nvPr>
+            <p:ph type="sldNum" sz="quarter" idx="4294967295"/>
+          </p:nvPr>
+        </p:nvSpPr>
+        <p:spPr>
+          <a:xfrm>
+            <a:off x="27432" y="91440"/>
+            <a:ext cx="585216" cy="475488"/>
+          </a:xfrm>
+          <a:prstGeom prst="rect">
+            <a:avLst/>
+          </a:prstGeom>
+          <a:extLst>
+            <a:ext uri="{C572A759-6A51-4108-AA02-DFA0A04FC94B}">
+              <ma14:wrappingTextBoxFlag xmlns:ma14="http://schemas.microsoft.com/office/mac/drawingml/2011/main" val="0"/>
+            </a:ext>
+          </a:extLst>
+        </p:spPr>
+        <p:txBody>
+          <a:bodyPr/>
+          <a:lstStyle>
+            <a:lvl1pPr>
+              <a:defRPr sz="2000">
+                <a:solidFill>
+                  <a:srgbClr val="FFFFFF"/>
+                </a:solidFill>
+                <a:latin typeface="Calibri"/>
+                <a:ea typeface="Calibri"/>
+                <a:cs typeface="Calibri"/>
+              </a:defRPr>
+            </a:lvl1pPr>
+          </a:lstStyle>
+          <a:p>
+            <a:pPr algn="ctr"/>
+            <a:fld id="{F7021451-1387-4CA6-816F-3879F97B5CBC}" type="slidenum">
+              <a:rPr b="1" lang="en-US"/>
+              <a:t>5</a:t>
+            </a:fld>
+            <a:endParaRPr lang="en-US"/>
+          </a:p>
+        </p:txBody>
+      </p:sp>
+    </p:spTree>
+  </p:cSld>
+  <p:clrMapOvr>
+    <a:masterClrMapping/>
+  </p:clrMapOvr>
+</p:sld>
+</file>
+
+<file path=ppt/slides/slide50.xml><?xml version="1.0" encoding="utf-8"?>
+<p:sld xmlns:a="http://schemas.openxmlformats.org/drawingml/2006/main" xmlns:r="http://schemas.openxmlformats.org/officeDocument/2006/relationships" xmlns:p="http://schemas.openxmlformats.org/presentationml/2006/main">
+  <p:cSld name="Slide 50">
+    <p:spTree>
+      <p:nvGrpSpPr>
+        <p:cNvPr id="1" name=""/>
+        <p:cNvGrpSpPr/>
+        <p:nvPr/>
+      </p:nvGrpSpPr>
+      <p:grpSpPr>
+        <a:xfrm>
+          <a:off x="0" y="0"/>
+          <a:ext cx="0" cy="0"/>
+          <a:chOff x="0" y="0"/>
+          <a:chExt cx="0" cy="0"/>
+        </a:xfrm>
+      </p:grpSpPr>
+      <p:sp>
+        <p:nvSpPr>
+          <p:cNvPr id="2" name="Text 0"/>
+          <p:cNvSpPr/>
+          <p:nvPr/>
+        </p:nvSpPr>
+        <p:spPr>
+          <a:xfrm>
+            <a:off x="457200" y="713232"/>
+            <a:ext cx="11368735" cy="274320"/>
+          </a:xfrm>
+          <a:prstGeom prst="rect">
+            <a:avLst/>
+          </a:prstGeom>
+          <a:noFill/>
+          <a:ln/>
+        </p:spPr>
+        <p:txBody>
+          <a:bodyPr wrap="square" lIns="0" tIns="0" rIns="0" bIns="0" rtlCol="0" anchor="ctr"/>
+          <a:lstStyle/>
+          <a:p>
+            <a:pPr algn="r" indent="0" marL="0">
+              <a:buNone/>
+            </a:pPr>
+            <a:r>
+              <a:rPr lang="en-US" sz="1400" b="1" dirty="0">
+                <a:solidFill>
+                  <a:srgbClr val="1C3F6E"/>
+                </a:solidFill>
+                <a:latin typeface="Calibri" pitchFamily="34" charset="0"/>
+                <a:ea typeface="Calibri" pitchFamily="34" charset="-122"/>
+                <a:cs typeface="Calibri" pitchFamily="34" charset="-120"/>
+              </a:rPr>
+              <a:t>FORMATIVE EVALUATION</a:t>
+            </a:r>
+            <a:endParaRPr lang="en-US" sz="1400" dirty="0"/>
+          </a:p>
+        </p:txBody>
+      </p:sp>
+      <p:pic>
+        <p:nvPicPr>
+          <p:cNvPr id="3" name="Image 0" descr="/home/claude/f4/img/minesec_sheet.png">    </p:cNvPr>
+          <p:cNvPicPr>
+            <a:picLocks noChangeAspect="1"/>
+          </p:cNvPicPr>
+          <p:nvPr/>
+        </p:nvPicPr>
+        <p:blipFill>
+          <a:blip r:embed="rId1"/>
+          <a:stretch>
+            <a:fillRect/>
+          </a:stretch>
+        </p:blipFill>
+        <p:spPr>
+          <a:xfrm>
+            <a:off x="0" y="658368"/>
+            <a:ext cx="5120640" cy="5833872"/>
+          </a:xfrm>
+          <a:prstGeom prst="rect">
+            <a:avLst/>
+          </a:prstGeom>
+        </p:spPr>
+      </p:pic>
+      <p:sp>
+        <p:nvSpPr>
+          <p:cNvPr id="4" name="Text 1"/>
+          <p:cNvSpPr/>
+          <p:nvPr/>
+        </p:nvSpPr>
+        <p:spPr>
+          <a:xfrm>
+            <a:off x="5349240" y="1005840"/>
+            <a:ext cx="6522415" cy="731520"/>
+          </a:xfrm>
+          <a:prstGeom prst="rect">
+            <a:avLst/>
+          </a:prstGeom>
+          <a:noFill/>
+          <a:ln/>
+        </p:spPr>
+        <p:txBody>
+          <a:bodyPr wrap="square" lIns="0" tIns="0" rIns="0" bIns="0" rtlCol="0" anchor="ctr">
+            <a:normAutofit/>
+          </a:bodyPr>
+          <a:lstStyle/>
+          <a:p>
+            <a:pPr algn="ctr" indent="0" marL="0">
+              <a:buNone/>
+            </a:pPr>
+            <a:r>
+              <a:rPr lang="en-US" sz="3600" b="1" dirty="0">
+                <a:solidFill>
+                  <a:srgbClr val="990011"/>
+                </a:solidFill>
+                <a:latin typeface="Times New Roman" pitchFamily="34" charset="0"/>
+                <a:ea typeface="Times New Roman" pitchFamily="34" charset="-122"/>
+                <a:cs typeface="Times New Roman" pitchFamily="34" charset="-120"/>
+              </a:rPr>
+              <a:t>Evaluation 1</a:t>
+            </a:r>
+            <a:endParaRPr lang="en-US" sz="3600" dirty="0"/>
+          </a:p>
+        </p:txBody>
+      </p:sp>
+      <p:sp>
+        <p:nvSpPr>
+          <p:cNvPr id="5" name="Text 2"/>
+          <p:cNvSpPr/>
+          <p:nvPr/>
+        </p:nvSpPr>
+        <p:spPr>
+          <a:xfrm>
+            <a:off x="5349240" y="1783080"/>
+            <a:ext cx="6522415" cy="4663440"/>
+          </a:xfrm>
+          <a:prstGeom prst="rect">
+            <a:avLst/>
+          </a:prstGeom>
+          <a:noFill/>
+          <a:ln/>
+        </p:spPr>
+        <p:txBody>
+          <a:bodyPr wrap="square" lIns="0" tIns="0" rIns="0" bIns="0" rtlCol="0" anchor="t"/>
+          <a:lstStyle/>
+          <a:p>
+            <a:pPr algn="l" indent="0" marL="0">
+              <a:spcAft>
+                <a:spcPts val="800"/>
+              </a:spcAft>
+              <a:buNone/>
+            </a:pPr>
+            <a:r>
+              <a:rPr lang="en-US" sz="4000" dirty="0">
+                <a:solidFill>
+                  <a:srgbClr val="111111"/>
+                </a:solidFill>
+                <a:latin typeface="Times New Roman" pitchFamily="34" charset="0"/>
+                <a:ea typeface="Times New Roman" pitchFamily="34" charset="-122"/>
+                <a:cs typeface="Times New Roman" pitchFamily="34" charset="-120"/>
+              </a:rPr>
+              <a:t>What is the value of the Equator?</a:t>
+            </a:r>
+            <a:endParaRPr lang="en-US" sz="4000" dirty="0"/>
+          </a:p>
+        </p:txBody>
+      </p:sp>
+      <p:sp>
+        <p:nvSpPr>
+          <p:cNvPr id="25" name="Slide Number Placeholder 0"/>
+          <p:cNvSpPr>
+            <a:spLocks noGrp="1"/>
+          </p:cNvSpPr>
+          <p:nvPr>
+            <p:ph type="sldNum" sz="quarter" idx="4294967295"/>
+          </p:nvPr>
+        </p:nvSpPr>
+        <p:spPr>
+          <a:xfrm>
+            <a:off x="27432" y="91440"/>
+            <a:ext cx="585216" cy="475488"/>
+          </a:xfrm>
+          <a:prstGeom prst="rect">
+            <a:avLst/>
+          </a:prstGeom>
+          <a:extLst>
+            <a:ext uri="{C572A759-6A51-4108-AA02-DFA0A04FC94B}">
+              <ma14:wrappingTextBoxFlag xmlns:ma14="http://schemas.microsoft.com/office/mac/drawingml/2011/main" val="0"/>
+            </a:ext>
+          </a:extLst>
+        </p:spPr>
+        <p:txBody>
+          <a:bodyPr/>
+          <a:lstStyle>
+            <a:lvl1pPr>
+              <a:defRPr sz="2000">
+                <a:solidFill>
+                  <a:srgbClr val="FFFFFF"/>
+                </a:solidFill>
+                <a:latin typeface="Calibri"/>
+                <a:ea typeface="Calibri"/>
+                <a:cs typeface="Calibri"/>
+              </a:defRPr>
+            </a:lvl1pPr>
+          </a:lstStyle>
+          <a:p>
+            <a:pPr algn="ctr"/>
+            <a:fld id="{F7021451-1387-4CA6-816F-3879F97B5CBC}" type="slidenum">
+              <a:rPr b="1" lang="en-US"/>
+              <a:t>50</a:t>
+            </a:fld>
+            <a:endParaRPr lang="en-US"/>
+          </a:p>
+        </p:txBody>
+      </p:sp>
+    </p:spTree>
+  </p:cSld>
+  <p:clrMapOvr>
+    <a:masterClrMapping/>
+  </p:clrMapOvr>
+</p:sld>
+</file>
+
+<file path=ppt/slides/slide51.xml><?xml version="1.0" encoding="utf-8"?>
+<p:sld xmlns:a="http://schemas.openxmlformats.org/drawingml/2006/main" xmlns:r="http://schemas.openxmlformats.org/officeDocument/2006/relationships" xmlns:p="http://schemas.openxmlformats.org/presentationml/2006/main">
+  <p:cSld name="Slide 51">
+    <p:spTree>
+      <p:nvGrpSpPr>
+        <p:cNvPr id="1" name=""/>
+        <p:cNvGrpSpPr/>
+        <p:nvPr/>
+      </p:nvGrpSpPr>
+      <p:grpSpPr>
+        <a:xfrm>
+          <a:off x="0" y="0"/>
+          <a:ext cx="0" cy="0"/>
+          <a:chOff x="0" y="0"/>
+          <a:chExt cx="0" cy="0"/>
+        </a:xfrm>
+      </p:grpSpPr>
+      <p:sp>
+        <p:nvSpPr>
+          <p:cNvPr id="2" name="Text 0"/>
+          <p:cNvSpPr/>
+          <p:nvPr/>
+        </p:nvSpPr>
+        <p:spPr>
+          <a:xfrm>
+            <a:off x="457200" y="713232"/>
+            <a:ext cx="11368735" cy="274320"/>
+          </a:xfrm>
+          <a:prstGeom prst="rect">
+            <a:avLst/>
+          </a:prstGeom>
+          <a:noFill/>
+          <a:ln/>
+        </p:spPr>
+        <p:txBody>
+          <a:bodyPr wrap="square" lIns="0" tIns="0" rIns="0" bIns="0" rtlCol="0" anchor="ctr"/>
+          <a:lstStyle/>
+          <a:p>
+            <a:pPr algn="r" indent="0" marL="0">
+              <a:buNone/>
+            </a:pPr>
+            <a:r>
+              <a:rPr lang="en-US" sz="1400" b="1" dirty="0">
+                <a:solidFill>
+                  <a:srgbClr val="1C3F6E"/>
+                </a:solidFill>
+                <a:latin typeface="Calibri" pitchFamily="34" charset="0"/>
+                <a:ea typeface="Calibri" pitchFamily="34" charset="-122"/>
+                <a:cs typeface="Calibri" pitchFamily="34" charset="-120"/>
+              </a:rPr>
+              <a:t>FORMATIVE EVALUATION</a:t>
+            </a:r>
+            <a:endParaRPr lang="en-US" sz="1400" dirty="0"/>
+          </a:p>
+        </p:txBody>
+      </p:sp>
+      <p:pic>
+        <p:nvPicPr>
+          <p:cNvPr id="3" name="Image 0" descr="/home/claude/f4/img/minesec_sheet.png">    </p:cNvPr>
+          <p:cNvPicPr>
+            <a:picLocks noChangeAspect="1"/>
+          </p:cNvPicPr>
+          <p:nvPr/>
+        </p:nvPicPr>
+        <p:blipFill>
+          <a:blip r:embed="rId1"/>
+          <a:stretch>
+            <a:fillRect/>
+          </a:stretch>
+        </p:blipFill>
+        <p:spPr>
+          <a:xfrm>
+            <a:off x="0" y="658368"/>
+            <a:ext cx="5120640" cy="5833872"/>
+          </a:xfrm>
+          <a:prstGeom prst="rect">
+            <a:avLst/>
+          </a:prstGeom>
+        </p:spPr>
+      </p:pic>
+      <p:sp>
+        <p:nvSpPr>
+          <p:cNvPr id="4" name="Text 1"/>
+          <p:cNvSpPr/>
+          <p:nvPr/>
+        </p:nvSpPr>
+        <p:spPr>
+          <a:xfrm>
+            <a:off x="5349240" y="1005840"/>
+            <a:ext cx="6522415" cy="731520"/>
+          </a:xfrm>
+          <a:prstGeom prst="rect">
+            <a:avLst/>
+          </a:prstGeom>
+          <a:noFill/>
+          <a:ln/>
+        </p:spPr>
+        <p:txBody>
+          <a:bodyPr wrap="square" lIns="0" tIns="0" rIns="0" bIns="0" rtlCol="0" anchor="ctr">
+            <a:normAutofit/>
+          </a:bodyPr>
+          <a:lstStyle/>
+          <a:p>
+            <a:pPr algn="ctr" indent="0" marL="0">
+              <a:buNone/>
+            </a:pPr>
+            <a:r>
+              <a:rPr lang="en-US" sz="3600" b="1" dirty="0">
+                <a:solidFill>
+                  <a:srgbClr val="990011"/>
+                </a:solidFill>
+                <a:latin typeface="Times New Roman" pitchFamily="34" charset="0"/>
+                <a:ea typeface="Times New Roman" pitchFamily="34" charset="-122"/>
+                <a:cs typeface="Times New Roman" pitchFamily="34" charset="-120"/>
+              </a:rPr>
+              <a:t>Expected Answer</a:t>
+            </a:r>
+            <a:endParaRPr lang="en-US" sz="3600" dirty="0"/>
+          </a:p>
+        </p:txBody>
+      </p:sp>
+      <p:sp>
+        <p:nvSpPr>
+          <p:cNvPr id="5" name="Text 2"/>
+          <p:cNvSpPr/>
+          <p:nvPr/>
+        </p:nvSpPr>
+        <p:spPr>
+          <a:xfrm>
+            <a:off x="5349240" y="1783080"/>
+            <a:ext cx="6522415" cy="4663440"/>
+          </a:xfrm>
+          <a:prstGeom prst="rect">
+            <a:avLst/>
+          </a:prstGeom>
+          <a:noFill/>
+          <a:ln/>
+        </p:spPr>
+        <p:txBody>
+          <a:bodyPr wrap="square" lIns="0" tIns="0" rIns="0" bIns="0" rtlCol="0" anchor="t"/>
+          <a:lstStyle/>
+          <a:p>
+            <a:pPr algn="l" indent="0" marL="0">
+              <a:spcAft>
+                <a:spcPts val="800"/>
+              </a:spcAft>
+              <a:buNone/>
+            </a:pPr>
+            <a:r>
+              <a:rPr lang="en-US" sz="4000" dirty="0">
+                <a:solidFill>
+                  <a:srgbClr val="111111"/>
+                </a:solidFill>
+                <a:latin typeface="Times New Roman" pitchFamily="34" charset="0"/>
+                <a:ea typeface="Times New Roman" pitchFamily="34" charset="-122"/>
+                <a:cs typeface="Times New Roman" pitchFamily="34" charset="-120"/>
+              </a:rPr>
+              <a:t>0°.</a:t>
+            </a:r>
+            <a:endParaRPr lang="en-US" sz="4000" dirty="0"/>
+          </a:p>
+        </p:txBody>
+      </p:sp>
+      <p:sp>
+        <p:nvSpPr>
+          <p:cNvPr id="25" name="Slide Number Placeholder 0"/>
+          <p:cNvSpPr>
+            <a:spLocks noGrp="1"/>
+          </p:cNvSpPr>
+          <p:nvPr>
+            <p:ph type="sldNum" sz="quarter" idx="4294967295"/>
+          </p:nvPr>
+        </p:nvSpPr>
+        <p:spPr>
+          <a:xfrm>
+            <a:off x="27432" y="91440"/>
+            <a:ext cx="585216" cy="475488"/>
+          </a:xfrm>
+          <a:prstGeom prst="rect">
+            <a:avLst/>
+          </a:prstGeom>
+          <a:extLst>
+            <a:ext uri="{C572A759-6A51-4108-AA02-DFA0A04FC94B}">
+              <ma14:wrappingTextBoxFlag xmlns:ma14="http://schemas.microsoft.com/office/mac/drawingml/2011/main" val="0"/>
+            </a:ext>
+          </a:extLst>
+        </p:spPr>
+        <p:txBody>
+          <a:bodyPr/>
+          <a:lstStyle>
+            <a:lvl1pPr>
+              <a:defRPr sz="2000">
+                <a:solidFill>
+                  <a:srgbClr val="FFFFFF"/>
+                </a:solidFill>
+                <a:latin typeface="Calibri"/>
+                <a:ea typeface="Calibri"/>
+                <a:cs typeface="Calibri"/>
+              </a:defRPr>
+            </a:lvl1pPr>
+          </a:lstStyle>
+          <a:p>
+            <a:pPr algn="ctr"/>
+            <a:fld id="{F7021451-1387-4CA6-816F-3879F97B5CBC}" type="slidenum">
+              <a:rPr b="1" lang="en-US"/>
+              <a:t>51</a:t>
+            </a:fld>
+            <a:endParaRPr lang="en-US"/>
+          </a:p>
+        </p:txBody>
+      </p:sp>
+    </p:spTree>
+  </p:cSld>
+  <p:clrMapOvr>
+    <a:masterClrMapping/>
+  </p:clrMapOvr>
+</p:sld>
+</file>
+
+<file path=ppt/slides/slide52.xml><?xml version="1.0" encoding="utf-8"?>
+<p:sld xmlns:a="http://schemas.openxmlformats.org/drawingml/2006/main" xmlns:r="http://schemas.openxmlformats.org/officeDocument/2006/relationships" xmlns:p="http://schemas.openxmlformats.org/presentationml/2006/main">
+  <p:cSld name="Slide 52">
+    <p:spTree>
+      <p:nvGrpSpPr>
+        <p:cNvPr id="1" name=""/>
+        <p:cNvGrpSpPr/>
+        <p:nvPr/>
+      </p:nvGrpSpPr>
+      <p:grpSpPr>
+        <a:xfrm>
+          <a:off x="0" y="0"/>
+          <a:ext cx="0" cy="0"/>
+          <a:chOff x="0" y="0"/>
+          <a:chExt cx="0" cy="0"/>
+        </a:xfrm>
+      </p:grpSpPr>
+      <p:sp>
+        <p:nvSpPr>
+          <p:cNvPr id="2" name="Text 0"/>
+          <p:cNvSpPr/>
+          <p:nvPr/>
+        </p:nvSpPr>
+        <p:spPr>
+          <a:xfrm>
+            <a:off x="457200" y="713232"/>
+            <a:ext cx="11368735" cy="274320"/>
+          </a:xfrm>
+          <a:prstGeom prst="rect">
+            <a:avLst/>
+          </a:prstGeom>
+          <a:noFill/>
+          <a:ln/>
+        </p:spPr>
+        <p:txBody>
+          <a:bodyPr wrap="square" lIns="0" tIns="0" rIns="0" bIns="0" rtlCol="0" anchor="ctr"/>
+          <a:lstStyle/>
+          <a:p>
+            <a:pPr algn="r" indent="0" marL="0">
+              <a:buNone/>
+            </a:pPr>
+            <a:r>
+              <a:rPr lang="en-US" sz="1400" b="1" dirty="0">
+                <a:solidFill>
+                  <a:srgbClr val="1C3F6E"/>
+                </a:solidFill>
+                <a:latin typeface="Calibri" pitchFamily="34" charset="0"/>
+                <a:ea typeface="Calibri" pitchFamily="34" charset="-122"/>
+                <a:cs typeface="Calibri" pitchFamily="34" charset="-120"/>
+              </a:rPr>
+              <a:t>FORMATIVE EVALUATION</a:t>
+            </a:r>
+            <a:endParaRPr lang="en-US" sz="1400" dirty="0"/>
+          </a:p>
+        </p:txBody>
+      </p:sp>
+      <p:pic>
+        <p:nvPicPr>
+          <p:cNvPr id="3" name="Image 0" descr="/home/claude/f4/img/minesec_sheet.png">    </p:cNvPr>
+          <p:cNvPicPr>
+            <a:picLocks noChangeAspect="1"/>
+          </p:cNvPicPr>
+          <p:nvPr/>
+        </p:nvPicPr>
+        <p:blipFill>
+          <a:blip r:embed="rId1"/>
+          <a:stretch>
+            <a:fillRect/>
+          </a:stretch>
+        </p:blipFill>
+        <p:spPr>
+          <a:xfrm>
+            <a:off x="0" y="658368"/>
+            <a:ext cx="5120640" cy="5833872"/>
+          </a:xfrm>
+          <a:prstGeom prst="rect">
+            <a:avLst/>
+          </a:prstGeom>
+        </p:spPr>
+      </p:pic>
+      <p:sp>
+        <p:nvSpPr>
+          <p:cNvPr id="4" name="Text 1"/>
+          <p:cNvSpPr/>
+          <p:nvPr/>
+        </p:nvSpPr>
+        <p:spPr>
+          <a:xfrm>
+            <a:off x="5349240" y="1005840"/>
+            <a:ext cx="6522415" cy="731520"/>
+          </a:xfrm>
+          <a:prstGeom prst="rect">
+            <a:avLst/>
+          </a:prstGeom>
+          <a:noFill/>
+          <a:ln/>
+        </p:spPr>
+        <p:txBody>
+          <a:bodyPr wrap="square" lIns="0" tIns="0" rIns="0" bIns="0" rtlCol="0" anchor="ctr">
+            <a:normAutofit/>
+          </a:bodyPr>
+          <a:lstStyle/>
+          <a:p>
+            <a:pPr algn="ctr" indent="0" marL="0">
+              <a:buNone/>
+            </a:pPr>
+            <a:r>
+              <a:rPr lang="en-US" sz="3600" b="1" dirty="0">
+                <a:solidFill>
+                  <a:srgbClr val="990011"/>
+                </a:solidFill>
+                <a:latin typeface="Times New Roman" pitchFamily="34" charset="0"/>
+                <a:ea typeface="Times New Roman" pitchFamily="34" charset="-122"/>
+                <a:cs typeface="Times New Roman" pitchFamily="34" charset="-120"/>
+              </a:rPr>
+              <a:t>Evaluation 2</a:t>
+            </a:r>
+            <a:endParaRPr lang="en-US" sz="3600" dirty="0"/>
+          </a:p>
+        </p:txBody>
+      </p:sp>
+      <p:sp>
+        <p:nvSpPr>
+          <p:cNvPr id="5" name="Text 2"/>
+          <p:cNvSpPr/>
+          <p:nvPr/>
+        </p:nvSpPr>
+        <p:spPr>
+          <a:xfrm>
+            <a:off x="5349240" y="1783080"/>
+            <a:ext cx="6522415" cy="4663440"/>
+          </a:xfrm>
+          <a:prstGeom prst="rect">
+            <a:avLst/>
+          </a:prstGeom>
+          <a:noFill/>
+          <a:ln/>
+        </p:spPr>
+        <p:txBody>
+          <a:bodyPr wrap="square" lIns="0" tIns="0" rIns="0" bIns="0" rtlCol="0" anchor="t"/>
+          <a:lstStyle/>
+          <a:p>
+            <a:pPr algn="l" indent="0" marL="0">
+              <a:spcAft>
+                <a:spcPts val="800"/>
+              </a:spcAft>
+              <a:buNone/>
+            </a:pPr>
+            <a:r>
+              <a:rPr lang="en-US" sz="4000" dirty="0">
+                <a:solidFill>
+                  <a:srgbClr val="111111"/>
+                </a:solidFill>
+                <a:latin typeface="Times New Roman" pitchFamily="34" charset="0"/>
+                <a:ea typeface="Times New Roman" pitchFamily="34" charset="-122"/>
+                <a:cs typeface="Times New Roman" pitchFamily="34" charset="-120"/>
+              </a:rPr>
+              <a:t>Give one difference between latitudes and longitudes.</a:t>
+            </a:r>
+            <a:endParaRPr lang="en-US" sz="4000" dirty="0"/>
+          </a:p>
+        </p:txBody>
+      </p:sp>
+      <p:sp>
+        <p:nvSpPr>
+          <p:cNvPr id="25" name="Slide Number Placeholder 0"/>
+          <p:cNvSpPr>
+            <a:spLocks noGrp="1"/>
+          </p:cNvSpPr>
+          <p:nvPr>
+            <p:ph type="sldNum" sz="quarter" idx="4294967295"/>
+          </p:nvPr>
+        </p:nvSpPr>
+        <p:spPr>
+          <a:xfrm>
+            <a:off x="27432" y="91440"/>
+            <a:ext cx="585216" cy="475488"/>
+          </a:xfrm>
+          <a:prstGeom prst="rect">
+            <a:avLst/>
+          </a:prstGeom>
+          <a:extLst>
+            <a:ext uri="{C572A759-6A51-4108-AA02-DFA0A04FC94B}">
+              <ma14:wrappingTextBoxFlag xmlns:ma14="http://schemas.microsoft.com/office/mac/drawingml/2011/main" val="0"/>
+            </a:ext>
+          </a:extLst>
+        </p:spPr>
+        <p:txBody>
+          <a:bodyPr/>
+          <a:lstStyle>
+            <a:lvl1pPr>
+              <a:defRPr sz="2000">
+                <a:solidFill>
+                  <a:srgbClr val="FFFFFF"/>
+                </a:solidFill>
+                <a:latin typeface="Calibri"/>
+                <a:ea typeface="Calibri"/>
+                <a:cs typeface="Calibri"/>
+              </a:defRPr>
+            </a:lvl1pPr>
+          </a:lstStyle>
+          <a:p>
+            <a:pPr algn="ctr"/>
+            <a:fld id="{F7021451-1387-4CA6-816F-3879F97B5CBC}" type="slidenum">
+              <a:rPr b="1" lang="en-US"/>
+              <a:t>52</a:t>
+            </a:fld>
+            <a:endParaRPr lang="en-US"/>
+          </a:p>
+        </p:txBody>
+      </p:sp>
+    </p:spTree>
+  </p:cSld>
+  <p:clrMapOvr>
+    <a:masterClrMapping/>
+  </p:clrMapOvr>
+</p:sld>
+</file>
+
+<file path=ppt/slides/slide53.xml><?xml version="1.0" encoding="utf-8"?>
+<p:sld xmlns:a="http://schemas.openxmlformats.org/drawingml/2006/main" xmlns:r="http://schemas.openxmlformats.org/officeDocument/2006/relationships" xmlns:p="http://schemas.openxmlformats.org/presentationml/2006/main">
+  <p:cSld name="Slide 53">
+    <p:spTree>
+      <p:nvGrpSpPr>
+        <p:cNvPr id="1" name=""/>
+        <p:cNvGrpSpPr/>
+        <p:nvPr/>
+      </p:nvGrpSpPr>
+      <p:grpSpPr>
+        <a:xfrm>
+          <a:off x="0" y="0"/>
+          <a:ext cx="0" cy="0"/>
+          <a:chOff x="0" y="0"/>
+          <a:chExt cx="0" cy="0"/>
+        </a:xfrm>
+      </p:grpSpPr>
+      <p:sp>
+        <p:nvSpPr>
+          <p:cNvPr id="2" name="Text 0"/>
+          <p:cNvSpPr/>
+          <p:nvPr/>
+        </p:nvSpPr>
+        <p:spPr>
+          <a:xfrm>
+            <a:off x="457200" y="713232"/>
+            <a:ext cx="11368735" cy="274320"/>
+          </a:xfrm>
+          <a:prstGeom prst="rect">
+            <a:avLst/>
+          </a:prstGeom>
+          <a:noFill/>
+          <a:ln/>
+        </p:spPr>
+        <p:txBody>
+          <a:bodyPr wrap="square" lIns="0" tIns="0" rIns="0" bIns="0" rtlCol="0" anchor="ctr"/>
+          <a:lstStyle/>
+          <a:p>
+            <a:pPr algn="r" indent="0" marL="0">
+              <a:buNone/>
+            </a:pPr>
+            <a:r>
+              <a:rPr lang="en-US" sz="1400" b="1" dirty="0">
+                <a:solidFill>
+                  <a:srgbClr val="1C3F6E"/>
+                </a:solidFill>
+                <a:latin typeface="Calibri" pitchFamily="34" charset="0"/>
+                <a:ea typeface="Calibri" pitchFamily="34" charset="-122"/>
+                <a:cs typeface="Calibri" pitchFamily="34" charset="-120"/>
+              </a:rPr>
+              <a:t>FORMATIVE EVALUATION</a:t>
+            </a:r>
+            <a:endParaRPr lang="en-US" sz="1400" dirty="0"/>
+          </a:p>
+        </p:txBody>
+      </p:sp>
+      <p:pic>
+        <p:nvPicPr>
+          <p:cNvPr id="3" name="Image 0" descr="/home/claude/f4/img/minesec_sheet.png">    </p:cNvPr>
+          <p:cNvPicPr>
+            <a:picLocks noChangeAspect="1"/>
+          </p:cNvPicPr>
+          <p:nvPr/>
+        </p:nvPicPr>
+        <p:blipFill>
+          <a:blip r:embed="rId1"/>
+          <a:stretch>
+            <a:fillRect/>
+          </a:stretch>
+        </p:blipFill>
+        <p:spPr>
+          <a:xfrm>
+            <a:off x="0" y="658368"/>
+            <a:ext cx="5120640" cy="5833872"/>
+          </a:xfrm>
+          <a:prstGeom prst="rect">
+            <a:avLst/>
+          </a:prstGeom>
+        </p:spPr>
+      </p:pic>
+      <p:sp>
+        <p:nvSpPr>
+          <p:cNvPr id="4" name="Text 1"/>
+          <p:cNvSpPr/>
+          <p:nvPr/>
+        </p:nvSpPr>
+        <p:spPr>
+          <a:xfrm>
+            <a:off x="5349240" y="1005840"/>
+            <a:ext cx="6522415" cy="731520"/>
+          </a:xfrm>
+          <a:prstGeom prst="rect">
+            <a:avLst/>
+          </a:prstGeom>
+          <a:noFill/>
+          <a:ln/>
+        </p:spPr>
+        <p:txBody>
+          <a:bodyPr wrap="square" lIns="0" tIns="0" rIns="0" bIns="0" rtlCol="0" anchor="ctr">
+            <a:normAutofit/>
+          </a:bodyPr>
+          <a:lstStyle/>
+          <a:p>
+            <a:pPr algn="ctr" indent="0" marL="0">
+              <a:buNone/>
+            </a:pPr>
+            <a:r>
+              <a:rPr lang="en-US" sz="3600" b="1" dirty="0">
+                <a:solidFill>
+                  <a:srgbClr val="990011"/>
+                </a:solidFill>
+                <a:latin typeface="Times New Roman" pitchFamily="34" charset="0"/>
+                <a:ea typeface="Times New Roman" pitchFamily="34" charset="-122"/>
+                <a:cs typeface="Times New Roman" pitchFamily="34" charset="-120"/>
+              </a:rPr>
+              <a:t>Expected Answer</a:t>
+            </a:r>
+            <a:endParaRPr lang="en-US" sz="3600" dirty="0"/>
+          </a:p>
+        </p:txBody>
+      </p:sp>
+      <p:sp>
+        <p:nvSpPr>
+          <p:cNvPr id="5" name="Text 2"/>
+          <p:cNvSpPr/>
+          <p:nvPr/>
+        </p:nvSpPr>
+        <p:spPr>
+          <a:xfrm>
+            <a:off x="5349240" y="1783080"/>
+            <a:ext cx="6522415" cy="4663440"/>
+          </a:xfrm>
+          <a:prstGeom prst="rect">
+            <a:avLst/>
+          </a:prstGeom>
+          <a:noFill/>
+          <a:ln/>
+        </p:spPr>
+        <p:txBody>
+          <a:bodyPr wrap="square" lIns="0" tIns="0" rIns="0" bIns="0" rtlCol="0" anchor="t"/>
+          <a:lstStyle/>
+          <a:p>
+            <a:pPr algn="l" indent="0" marL="0">
+              <a:spcAft>
+                <a:spcPts val="800"/>
+              </a:spcAft>
+              <a:buNone/>
+            </a:pPr>
+            <a:r>
+              <a:rPr lang="en-US" sz="4000" dirty="0">
+                <a:solidFill>
+                  <a:srgbClr val="111111"/>
+                </a:solidFill>
+                <a:latin typeface="Times New Roman" pitchFamily="34" charset="0"/>
+                <a:ea typeface="Times New Roman" pitchFamily="34" charset="-122"/>
+                <a:cs typeface="Times New Roman" pitchFamily="34" charset="-120"/>
+              </a:rPr>
+              <a:t>Latitudes never meet; longitudes meet at the poles.</a:t>
+            </a:r>
+            <a:endParaRPr lang="en-US" sz="4000" dirty="0"/>
+          </a:p>
+        </p:txBody>
+      </p:sp>
+      <p:sp>
+        <p:nvSpPr>
+          <p:cNvPr id="25" name="Slide Number Placeholder 0"/>
+          <p:cNvSpPr>
+            <a:spLocks noGrp="1"/>
+          </p:cNvSpPr>
+          <p:nvPr>
+            <p:ph type="sldNum" sz="quarter" idx="4294967295"/>
+          </p:nvPr>
+        </p:nvSpPr>
+        <p:spPr>
+          <a:xfrm>
+            <a:off x="27432" y="91440"/>
+            <a:ext cx="585216" cy="475488"/>
+          </a:xfrm>
+          <a:prstGeom prst="rect">
+            <a:avLst/>
+          </a:prstGeom>
+          <a:extLst>
+            <a:ext uri="{C572A759-6A51-4108-AA02-DFA0A04FC94B}">
+              <ma14:wrappingTextBoxFlag xmlns:ma14="http://schemas.microsoft.com/office/mac/drawingml/2011/main" val="0"/>
+            </a:ext>
+          </a:extLst>
+        </p:spPr>
+        <p:txBody>
+          <a:bodyPr/>
+          <a:lstStyle>
+            <a:lvl1pPr>
+              <a:defRPr sz="2000">
+                <a:solidFill>
+                  <a:srgbClr val="FFFFFF"/>
+                </a:solidFill>
+                <a:latin typeface="Calibri"/>
+                <a:ea typeface="Calibri"/>
+                <a:cs typeface="Calibri"/>
+              </a:defRPr>
+            </a:lvl1pPr>
+          </a:lstStyle>
+          <a:p>
+            <a:pPr algn="ctr"/>
+            <a:fld id="{F7021451-1387-4CA6-816F-3879F97B5CBC}" type="slidenum">
+              <a:rPr b="1" lang="en-US"/>
+              <a:t>53</a:t>
+            </a:fld>
+            <a:endParaRPr lang="en-US"/>
+          </a:p>
+        </p:txBody>
+      </p:sp>
+    </p:spTree>
+  </p:cSld>
+  <p:clrMapOvr>
+    <a:masterClrMapping/>
+  </p:clrMapOvr>
+</p:sld>
+</file>
+
+<file path=ppt/slides/slide54.xml><?xml version="1.0" encoding="utf-8"?>
+<p:sld xmlns:a="http://schemas.openxmlformats.org/drawingml/2006/main" xmlns:r="http://schemas.openxmlformats.org/officeDocument/2006/relationships" xmlns:p="http://schemas.openxmlformats.org/presentationml/2006/main">
+  <p:cSld name="Slide 54">
+    <p:spTree>
+      <p:nvGrpSpPr>
+        <p:cNvPr id="1" name=""/>
+        <p:cNvGrpSpPr/>
+        <p:nvPr/>
+      </p:nvGrpSpPr>
+      <p:grpSpPr>
+        <a:xfrm>
+          <a:off x="0" y="0"/>
+          <a:ext cx="0" cy="0"/>
+          <a:chOff x="0" y="0"/>
+          <a:chExt cx="0" cy="0"/>
+        </a:xfrm>
+      </p:grpSpPr>
+      <p:sp>
+        <p:nvSpPr>
+          <p:cNvPr id="2" name="Text 0"/>
+          <p:cNvSpPr/>
+          <p:nvPr/>
+        </p:nvSpPr>
+        <p:spPr>
+          <a:xfrm>
+            <a:off x="457200" y="713232"/>
+            <a:ext cx="11368735" cy="274320"/>
+          </a:xfrm>
+          <a:prstGeom prst="rect">
+            <a:avLst/>
+          </a:prstGeom>
+          <a:noFill/>
+          <a:ln/>
+        </p:spPr>
+        <p:txBody>
+          <a:bodyPr wrap="square" lIns="0" tIns="0" rIns="0" bIns="0" rtlCol="0" anchor="ctr"/>
+          <a:lstStyle/>
+          <a:p>
+            <a:pPr algn="r" indent="0" marL="0">
+              <a:buNone/>
+            </a:pPr>
+            <a:r>
+              <a:rPr lang="en-US" sz="1400" b="1" dirty="0">
+                <a:solidFill>
+                  <a:srgbClr val="1C3F6E"/>
+                </a:solidFill>
+                <a:latin typeface="Calibri" pitchFamily="34" charset="0"/>
+                <a:ea typeface="Calibri" pitchFamily="34" charset="-122"/>
+                <a:cs typeface="Calibri" pitchFamily="34" charset="-120"/>
+              </a:rPr>
+              <a:t>REMEDIATION</a:t>
+            </a:r>
+            <a:endParaRPr lang="en-US" sz="1400" dirty="0"/>
+          </a:p>
+        </p:txBody>
+      </p:sp>
+      <p:pic>
+        <p:nvPicPr>
+          <p:cNvPr id="3" name="Image 0" descr="/home/claude/f4/img/minesec_sheet.png">    </p:cNvPr>
+          <p:cNvPicPr>
+            <a:picLocks noChangeAspect="1"/>
+          </p:cNvPicPr>
+          <p:nvPr/>
+        </p:nvPicPr>
+        <p:blipFill>
+          <a:blip r:embed="rId1"/>
+          <a:stretch>
+            <a:fillRect/>
+          </a:stretch>
+        </p:blipFill>
+        <p:spPr>
+          <a:xfrm>
+            <a:off x="0" y="658368"/>
+            <a:ext cx="2468880" cy="5833872"/>
+          </a:xfrm>
+          <a:prstGeom prst="rect">
+            <a:avLst/>
+          </a:prstGeom>
+        </p:spPr>
+      </p:pic>
+      <p:sp>
+        <p:nvSpPr>
+          <p:cNvPr id="4" name="Text 1"/>
+          <p:cNvSpPr/>
+          <p:nvPr/>
+        </p:nvSpPr>
+        <p:spPr>
+          <a:xfrm>
+            <a:off x="2697480" y="1005840"/>
+            <a:ext cx="9174175" cy="731520"/>
+          </a:xfrm>
+          <a:prstGeom prst="rect">
+            <a:avLst/>
+          </a:prstGeom>
+          <a:noFill/>
+          <a:ln/>
+        </p:spPr>
+        <p:txBody>
+          <a:bodyPr wrap="square" lIns="0" tIns="0" rIns="0" bIns="0" rtlCol="0" anchor="ctr">
+            <a:normAutofit/>
+          </a:bodyPr>
+          <a:lstStyle/>
+          <a:p>
+            <a:pPr algn="ctr" indent="0" marL="0">
+              <a:buNone/>
+            </a:pPr>
+            <a:r>
+              <a:rPr lang="en-US" sz="3600" b="1" dirty="0">
+                <a:solidFill>
+                  <a:srgbClr val="990011"/>
+                </a:solidFill>
+                <a:latin typeface="Times New Roman" pitchFamily="34" charset="0"/>
+                <a:ea typeface="Times New Roman" pitchFamily="34" charset="-122"/>
+                <a:cs typeface="Times New Roman" pitchFamily="34" charset="-120"/>
+              </a:rPr>
+              <a:t>Remediation</a:t>
+            </a:r>
+            <a:endParaRPr lang="en-US" sz="3600" dirty="0"/>
+          </a:p>
+        </p:txBody>
+      </p:sp>
+      <p:sp>
+        <p:nvSpPr>
+          <p:cNvPr id="5" name="Text 2"/>
+          <p:cNvSpPr/>
+          <p:nvPr/>
+        </p:nvSpPr>
+        <p:spPr>
+          <a:xfrm>
+            <a:off x="2697480" y="1783080"/>
+            <a:ext cx="9174175" cy="4663440"/>
+          </a:xfrm>
+          <a:prstGeom prst="rect">
+            <a:avLst/>
+          </a:prstGeom>
+          <a:noFill/>
+          <a:ln/>
+        </p:spPr>
+        <p:txBody>
+          <a:bodyPr wrap="square" lIns="0" tIns="0" rIns="0" bIns="0" rtlCol="0" anchor="t"/>
+          <a:lstStyle/>
+          <a:p>
+            <a:pPr algn="l" indent="0" marL="0">
+              <a:spcAft>
+                <a:spcPts val="800"/>
+              </a:spcAft>
+              <a:buNone/>
+            </a:pPr>
+            <a:r>
+              <a:rPr lang="en-US" sz="4000" b="1" dirty="0">
+                <a:solidFill>
+                  <a:srgbClr val="111111"/>
+                </a:solidFill>
+                <a:latin typeface="Times New Roman" pitchFamily="34" charset="0"/>
+                <a:ea typeface="Times New Roman" pitchFamily="34" charset="-122"/>
+                <a:cs typeface="Times New Roman" pitchFamily="34" charset="-120"/>
+              </a:rPr>
+              <a:t>Fill in the blanks:</a:t>
+            </a:r>
+            <a:endParaRPr lang="en-US" sz="4000" dirty="0"/>
+          </a:p>
+          <a:p>
+            <a:pPr algn="l" marL="342900" indent="-342900">
+              <a:spcAft>
+                <a:spcPts val="800"/>
+              </a:spcAft>
+              <a:buSzPct val="100000"/>
+              <a:buFont typeface="+mj-lt"/>
+              <a:buAutoNum type="arabicPeriod" startAt="1"/>
+            </a:pPr>
+            <a:r>
+              <a:rPr lang="en-US" sz="4000" dirty="0">
+                <a:solidFill>
+                  <a:srgbClr val="111111"/>
+                </a:solidFill>
+                <a:latin typeface="Times New Roman" pitchFamily="34" charset="0"/>
+                <a:ea typeface="Times New Roman" pitchFamily="34" charset="-122"/>
+                <a:cs typeface="Times New Roman" pitchFamily="34" charset="-120"/>
+              </a:rPr>
+              <a:t>The line of 0° latitude is the ______.</a:t>
+            </a:r>
+            <a:endParaRPr lang="en-US" sz="4000" dirty="0"/>
+          </a:p>
+          <a:p>
+            <a:pPr algn="l" marL="342900" indent="-342900">
+              <a:spcAft>
+                <a:spcPts val="800"/>
+              </a:spcAft>
+              <a:buSzPct val="100000"/>
+              <a:buFont typeface="+mj-lt"/>
+              <a:buAutoNum type="arabicPeriod" startAt="1"/>
+            </a:pPr>
+            <a:r>
+              <a:rPr lang="en-US" sz="4000" dirty="0">
+                <a:solidFill>
+                  <a:srgbClr val="111111"/>
+                </a:solidFill>
+                <a:latin typeface="Times New Roman" pitchFamily="34" charset="0"/>
+                <a:ea typeface="Times New Roman" pitchFamily="34" charset="-122"/>
+                <a:cs typeface="Times New Roman" pitchFamily="34" charset="-120"/>
+              </a:rPr>
+              <a:t>The line of 0° longitude is the ______ Meridian.</a:t>
+            </a:r>
+            <a:endParaRPr lang="en-US" sz="4000" dirty="0"/>
+          </a:p>
+          <a:p>
+            <a:pPr algn="l" marL="342900" indent="-342900">
+              <a:spcAft>
+                <a:spcPts val="800"/>
+              </a:spcAft>
+              <a:buSzPct val="100000"/>
+              <a:buFont typeface="+mj-lt"/>
+              <a:buAutoNum type="arabicPeriod" startAt="1"/>
+            </a:pPr>
+            <a:r>
+              <a:rPr lang="en-US" sz="4000" dirty="0">
+                <a:solidFill>
+                  <a:srgbClr val="111111"/>
+                </a:solidFill>
+                <a:latin typeface="Times New Roman" pitchFamily="34" charset="0"/>
+                <a:ea typeface="Times New Roman" pitchFamily="34" charset="-122"/>
+                <a:cs typeface="Times New Roman" pitchFamily="34" charset="-120"/>
+              </a:rPr>
+              <a:t>We write the ______ first, then the longitude.</a:t>
+            </a:r>
+            <a:endParaRPr lang="en-US" sz="4000" dirty="0"/>
+          </a:p>
+        </p:txBody>
+      </p:sp>
+      <p:sp>
+        <p:nvSpPr>
+          <p:cNvPr id="25" name="Slide Number Placeholder 0"/>
+          <p:cNvSpPr>
+            <a:spLocks noGrp="1"/>
+          </p:cNvSpPr>
+          <p:nvPr>
+            <p:ph type="sldNum" sz="quarter" idx="4294967295"/>
+          </p:nvPr>
+        </p:nvSpPr>
+        <p:spPr>
+          <a:xfrm>
+            <a:off x="27432" y="91440"/>
+            <a:ext cx="585216" cy="475488"/>
+          </a:xfrm>
+          <a:prstGeom prst="rect">
+            <a:avLst/>
+          </a:prstGeom>
+          <a:extLst>
+            <a:ext uri="{C572A759-6A51-4108-AA02-DFA0A04FC94B}">
+              <ma14:wrappingTextBoxFlag xmlns:ma14="http://schemas.microsoft.com/office/mac/drawingml/2011/main" val="0"/>
+            </a:ext>
+          </a:extLst>
+        </p:spPr>
+        <p:txBody>
+          <a:bodyPr/>
+          <a:lstStyle>
+            <a:lvl1pPr>
+              <a:defRPr sz="2000">
+                <a:solidFill>
+                  <a:srgbClr val="FFFFFF"/>
+                </a:solidFill>
+                <a:latin typeface="Calibri"/>
+                <a:ea typeface="Calibri"/>
+                <a:cs typeface="Calibri"/>
+              </a:defRPr>
+            </a:lvl1pPr>
+          </a:lstStyle>
+          <a:p>
+            <a:pPr algn="ctr"/>
+            <a:fld id="{F7021451-1387-4CA6-816F-3879F97B5CBC}" type="slidenum">
+              <a:rPr b="1" lang="en-US"/>
+              <a:t>54</a:t>
+            </a:fld>
+            <a:endParaRPr lang="en-US"/>
+          </a:p>
+        </p:txBody>
+      </p:sp>
+    </p:spTree>
+  </p:cSld>
+  <p:clrMapOvr>
+    <a:masterClrMapping/>
+  </p:clrMapOvr>
+</p:sld>
+</file>
+
+<file path=ppt/slides/slide55.xml><?xml version="1.0" encoding="utf-8"?>
+<p:sld xmlns:a="http://schemas.openxmlformats.org/drawingml/2006/main" xmlns:r="http://schemas.openxmlformats.org/officeDocument/2006/relationships" xmlns:p="http://schemas.openxmlformats.org/presentationml/2006/main">
+  <p:cSld name="Slide 55">
+    <p:spTree>
+      <p:nvGrpSpPr>
+        <p:cNvPr id="1" name=""/>
+        <p:cNvGrpSpPr/>
+        <p:nvPr/>
+      </p:nvGrpSpPr>
+      <p:grpSpPr>
+        <a:xfrm>
+          <a:off x="0" y="0"/>
+          <a:ext cx="0" cy="0"/>
+          <a:chOff x="0" y="0"/>
+          <a:chExt cx="0" cy="0"/>
+        </a:xfrm>
+      </p:grpSpPr>
+      <p:sp>
+        <p:nvSpPr>
+          <p:cNvPr id="2" name="Text 0"/>
+          <p:cNvSpPr/>
+          <p:nvPr/>
+        </p:nvSpPr>
+        <p:spPr>
+          <a:xfrm>
+            <a:off x="457200" y="713232"/>
+            <a:ext cx="11368735" cy="274320"/>
+          </a:xfrm>
+          <a:prstGeom prst="rect">
+            <a:avLst/>
+          </a:prstGeom>
+          <a:noFill/>
+          <a:ln/>
+        </p:spPr>
+        <p:txBody>
+          <a:bodyPr wrap="square" lIns="0" tIns="0" rIns="0" bIns="0" rtlCol="0" anchor="ctr"/>
+          <a:lstStyle/>
+          <a:p>
+            <a:pPr algn="r" indent="0" marL="0">
+              <a:buNone/>
+            </a:pPr>
+            <a:r>
+              <a:rPr lang="en-US" sz="1400" b="1" dirty="0">
+                <a:solidFill>
+                  <a:srgbClr val="1C3F6E"/>
+                </a:solidFill>
+                <a:latin typeface="Calibri" pitchFamily="34" charset="0"/>
+                <a:ea typeface="Calibri" pitchFamily="34" charset="-122"/>
+                <a:cs typeface="Calibri" pitchFamily="34" charset="-120"/>
+              </a:rPr>
+              <a:t>HOMEWORK</a:t>
+            </a:r>
+            <a:endParaRPr lang="en-US" sz="1400" dirty="0"/>
+          </a:p>
+        </p:txBody>
+      </p:sp>
+      <p:pic>
+        <p:nvPicPr>
+          <p:cNvPr id="3" name="Image 0" descr="/home/claude/f4/img/minesec_sheet.png">    </p:cNvPr>
+          <p:cNvPicPr>
+            <a:picLocks noChangeAspect="1"/>
+          </p:cNvPicPr>
+          <p:nvPr/>
+        </p:nvPicPr>
+        <p:blipFill>
+          <a:blip r:embed="rId1"/>
+          <a:stretch>
+            <a:fillRect/>
+          </a:stretch>
+        </p:blipFill>
+        <p:spPr>
+          <a:xfrm>
+            <a:off x="0" y="658368"/>
+            <a:ext cx="5120640" cy="5833872"/>
+          </a:xfrm>
+          <a:prstGeom prst="rect">
+            <a:avLst/>
+          </a:prstGeom>
+        </p:spPr>
+      </p:pic>
+      <p:sp>
+        <p:nvSpPr>
+          <p:cNvPr id="4" name="Text 1"/>
+          <p:cNvSpPr/>
+          <p:nvPr/>
+        </p:nvSpPr>
+        <p:spPr>
+          <a:xfrm>
+            <a:off x="5349240" y="1005840"/>
+            <a:ext cx="6522415" cy="731520"/>
+          </a:xfrm>
+          <a:prstGeom prst="rect">
+            <a:avLst/>
+          </a:prstGeom>
+          <a:noFill/>
+          <a:ln/>
+        </p:spPr>
+        <p:txBody>
+          <a:bodyPr wrap="square" lIns="0" tIns="0" rIns="0" bIns="0" rtlCol="0" anchor="ctr">
+            <a:normAutofit/>
+          </a:bodyPr>
+          <a:lstStyle/>
+          <a:p>
+            <a:pPr algn="ctr" indent="0" marL="0">
+              <a:buNone/>
+            </a:pPr>
+            <a:r>
+              <a:rPr lang="en-US" sz="3600" b="1" dirty="0">
+                <a:solidFill>
+                  <a:srgbClr val="990011"/>
+                </a:solidFill>
+                <a:latin typeface="Times New Roman" pitchFamily="34" charset="0"/>
+                <a:ea typeface="Times New Roman" pitchFamily="34" charset="-122"/>
+                <a:cs typeface="Times New Roman" pitchFamily="34" charset="-120"/>
+              </a:rPr>
+              <a:t>Homework</a:t>
+            </a:r>
+            <a:endParaRPr lang="en-US" sz="3600" dirty="0"/>
+          </a:p>
+        </p:txBody>
+      </p:sp>
+      <p:sp>
+        <p:nvSpPr>
+          <p:cNvPr id="5" name="Text 2"/>
+          <p:cNvSpPr/>
+          <p:nvPr/>
+        </p:nvSpPr>
+        <p:spPr>
+          <a:xfrm>
+            <a:off x="5349240" y="1783080"/>
+            <a:ext cx="6522415" cy="4663440"/>
+          </a:xfrm>
+          <a:prstGeom prst="rect">
+            <a:avLst/>
+          </a:prstGeom>
+          <a:noFill/>
+          <a:ln/>
+        </p:spPr>
+        <p:txBody>
+          <a:bodyPr wrap="square" lIns="0" tIns="0" rIns="0" bIns="0" rtlCol="0" anchor="t"/>
+          <a:lstStyle/>
+          <a:p>
+            <a:pPr algn="l" indent="0" marL="0">
+              <a:spcAft>
+                <a:spcPts val="800"/>
+              </a:spcAft>
+              <a:buNone/>
+            </a:pPr>
+            <a:r>
+              <a:rPr lang="en-US" sz="4000" dirty="0">
+                <a:solidFill>
+                  <a:srgbClr val="111111"/>
+                </a:solidFill>
+                <a:latin typeface="Times New Roman" pitchFamily="34" charset="0"/>
+                <a:ea typeface="Times New Roman" pitchFamily="34" charset="-122"/>
+                <a:cs typeface="Times New Roman" pitchFamily="34" charset="-120"/>
+              </a:rPr>
+              <a:t>Watch or listen to news about a flight from Douala to Paris or to Dubai. Write the name of the route and ask an adult why aeroplanes do not always fly in a straight line on a flat map.</a:t>
+            </a:r>
+            <a:endParaRPr lang="en-US" sz="4000" dirty="0"/>
+          </a:p>
+        </p:txBody>
+      </p:sp>
+      <p:sp>
+        <p:nvSpPr>
+          <p:cNvPr id="25" name="Slide Number Placeholder 0"/>
+          <p:cNvSpPr>
+            <a:spLocks noGrp="1"/>
+          </p:cNvSpPr>
+          <p:nvPr>
+            <p:ph type="sldNum" sz="quarter" idx="4294967295"/>
+          </p:nvPr>
+        </p:nvSpPr>
+        <p:spPr>
+          <a:xfrm>
+            <a:off x="27432" y="91440"/>
+            <a:ext cx="585216" cy="475488"/>
+          </a:xfrm>
+          <a:prstGeom prst="rect">
+            <a:avLst/>
+          </a:prstGeom>
+          <a:extLst>
+            <a:ext uri="{C572A759-6A51-4108-AA02-DFA0A04FC94B}">
+              <ma14:wrappingTextBoxFlag xmlns:ma14="http://schemas.microsoft.com/office/mac/drawingml/2011/main" val="0"/>
+            </a:ext>
+          </a:extLst>
+        </p:spPr>
+        <p:txBody>
+          <a:bodyPr/>
+          <a:lstStyle>
+            <a:lvl1pPr>
+              <a:defRPr sz="2000">
+                <a:solidFill>
+                  <a:srgbClr val="FFFFFF"/>
+                </a:solidFill>
+                <a:latin typeface="Calibri"/>
+                <a:ea typeface="Calibri"/>
+                <a:cs typeface="Calibri"/>
+              </a:defRPr>
+            </a:lvl1pPr>
+          </a:lstStyle>
+          <a:p>
+            <a:pPr algn="ctr"/>
+            <a:fld id="{F7021451-1387-4CA6-816F-3879F97B5CBC}" type="slidenum">
+              <a:rPr b="1" lang="en-US"/>
+              <a:t>55</a:t>
+            </a:fld>
+            <a:endParaRPr lang="en-US"/>
+          </a:p>
+        </p:txBody>
+      </p:sp>
+    </p:spTree>
+  </p:cSld>
+  <p:clrMapOvr>
+    <a:masterClrMapping/>
+  </p:clrMapOvr>
+</p:sld>
+</file>
+
+<file path=ppt/slides/slide56.xml><?xml version="1.0" encoding="utf-8"?>
+<p:sld xmlns:a="http://schemas.openxmlformats.org/drawingml/2006/main" xmlns:r="http://schemas.openxmlformats.org/officeDocument/2006/relationships" xmlns:p="http://schemas.openxmlformats.org/presentationml/2006/main">
+  <p:cSld name="Slide 56">
+    <p:spTree>
+      <p:nvGrpSpPr>
+        <p:cNvPr id="1" name=""/>
+        <p:cNvGrpSpPr/>
+        <p:nvPr/>
+      </p:nvGrpSpPr>
+      <p:grpSpPr>
+        <a:xfrm>
+          <a:off x="0" y="0"/>
+          <a:ext cx="0" cy="0"/>
+          <a:chOff x="0" y="0"/>
+          <a:chExt cx="0" cy="0"/>
+        </a:xfrm>
+      </p:grpSpPr>
+      <p:sp>
+        <p:nvSpPr>
+          <p:cNvPr id="2" name="Text 0"/>
+          <p:cNvSpPr/>
+          <p:nvPr/>
+        </p:nvSpPr>
+        <p:spPr>
+          <a:xfrm>
+            <a:off x="457200" y="713232"/>
+            <a:ext cx="11368735" cy="274320"/>
+          </a:xfrm>
+          <a:prstGeom prst="rect">
+            <a:avLst/>
+          </a:prstGeom>
+          <a:noFill/>
+          <a:ln/>
+        </p:spPr>
+        <p:txBody>
+          <a:bodyPr wrap="square" lIns="0" tIns="0" rIns="0" bIns="0" rtlCol="0" anchor="ctr"/>
+          <a:lstStyle/>
+          <a:p>
+            <a:pPr algn="r" indent="0" marL="0">
+              <a:buNone/>
+            </a:pPr>
+            <a:r>
+              <a:rPr lang="en-US" sz="1400" b="1" dirty="0">
+                <a:solidFill>
+                  <a:srgbClr val="1C3F6E"/>
+                </a:solidFill>
+                <a:latin typeface="Calibri" pitchFamily="34" charset="0"/>
+                <a:ea typeface="Calibri" pitchFamily="34" charset="-122"/>
+                <a:cs typeface="Calibri" pitchFamily="34" charset="-120"/>
+              </a:rPr>
+              <a:t>NEXT LESSON</a:t>
+            </a:r>
+            <a:endParaRPr lang="en-US" sz="1400" dirty="0"/>
+          </a:p>
+        </p:txBody>
+      </p:sp>
+      <p:pic>
+        <p:nvPicPr>
+          <p:cNvPr id="3" name="Image 0" descr="/home/claude/f4/img/minesec_sheet.png">    </p:cNvPr>
+          <p:cNvPicPr>
+            <a:picLocks noChangeAspect="1"/>
+          </p:cNvPicPr>
+          <p:nvPr/>
+        </p:nvPicPr>
+        <p:blipFill>
+          <a:blip r:embed="rId1"/>
+          <a:stretch>
+            <a:fillRect/>
+          </a:stretch>
+        </p:blipFill>
+        <p:spPr>
+          <a:xfrm>
+            <a:off x="0" y="658368"/>
+            <a:ext cx="5120640" cy="5833872"/>
+          </a:xfrm>
+          <a:prstGeom prst="rect">
+            <a:avLst/>
+          </a:prstGeom>
+        </p:spPr>
+      </p:pic>
+      <p:sp>
+        <p:nvSpPr>
+          <p:cNvPr id="4" name="Text 1"/>
+          <p:cNvSpPr/>
+          <p:nvPr/>
+        </p:nvSpPr>
+        <p:spPr>
+          <a:xfrm>
+            <a:off x="5349240" y="1005840"/>
+            <a:ext cx="6522415" cy="731520"/>
+          </a:xfrm>
+          <a:prstGeom prst="rect">
+            <a:avLst/>
+          </a:prstGeom>
+          <a:noFill/>
+          <a:ln/>
+        </p:spPr>
+        <p:txBody>
+          <a:bodyPr wrap="square" lIns="0" tIns="0" rIns="0" bIns="0" rtlCol="0" anchor="ctr">
+            <a:normAutofit/>
+          </a:bodyPr>
+          <a:lstStyle/>
+          <a:p>
+            <a:pPr algn="ctr" indent="0" marL="0">
+              <a:buNone/>
+            </a:pPr>
+            <a:r>
+              <a:rPr lang="en-US" sz="3600" b="1" dirty="0">
+                <a:solidFill>
+                  <a:srgbClr val="990011"/>
+                </a:solidFill>
+                <a:latin typeface="Times New Roman" pitchFamily="34" charset="0"/>
+                <a:ea typeface="Times New Roman" pitchFamily="34" charset="-122"/>
+                <a:cs typeface="Times New Roman" pitchFamily="34" charset="-120"/>
+              </a:rPr>
+              <a:t>Next Lesson</a:t>
+            </a:r>
+            <a:endParaRPr lang="en-US" sz="3600" dirty="0"/>
+          </a:p>
+        </p:txBody>
+      </p:sp>
+      <p:sp>
+        <p:nvSpPr>
+          <p:cNvPr id="5" name="Text 2"/>
+          <p:cNvSpPr/>
+          <p:nvPr/>
+        </p:nvSpPr>
+        <p:spPr>
+          <a:xfrm>
+            <a:off x="5349240" y="1783080"/>
+            <a:ext cx="6522415" cy="4663440"/>
+          </a:xfrm>
+          <a:prstGeom prst="rect">
+            <a:avLst/>
+          </a:prstGeom>
+          <a:noFill/>
+          <a:ln/>
+        </p:spPr>
+        <p:txBody>
+          <a:bodyPr wrap="square" lIns="0" tIns="0" rIns="0" bIns="0" rtlCol="0" anchor="ctr"/>
+          <a:lstStyle/>
+          <a:p>
+            <a:pPr algn="ctr" indent="0" marL="0">
+              <a:spcAft>
+                <a:spcPts val="800"/>
+              </a:spcAft>
+              <a:buNone/>
+            </a:pPr>
+            <a:r>
+              <a:rPr lang="en-US" sz="4000" b="1" dirty="0">
+                <a:solidFill>
+                  <a:srgbClr val="111111"/>
+                </a:solidFill>
+                <a:latin typeface="Times New Roman" pitchFamily="34" charset="0"/>
+                <a:ea typeface="Times New Roman" pitchFamily="34" charset="-122"/>
+                <a:cs typeface="Times New Roman" pitchFamily="34" charset="-120"/>
+              </a:rPr>
+              <a:t>Our next lesson will be on:</a:t>
+            </a:r>
+            <a:endParaRPr lang="en-US" sz="4000" dirty="0"/>
+          </a:p>
+          <a:p>
+            <a:pPr algn="ctr" indent="0" marL="0">
+              <a:spcAft>
+                <a:spcPts val="800"/>
+              </a:spcAft>
+              <a:buNone/>
+            </a:pPr>
+            <a:r>
+              <a:rPr lang="en-US" sz="4000" b="1" dirty="0">
+                <a:solidFill>
+                  <a:srgbClr val="990011"/>
+                </a:solidFill>
+                <a:latin typeface="Times New Roman" pitchFamily="34" charset="0"/>
+                <a:ea typeface="Times New Roman" pitchFamily="34" charset="-122"/>
+                <a:cs typeface="Times New Roman" pitchFamily="34" charset="-120"/>
+              </a:rPr>
+              <a:t>Lesson 3: Great Circles and the International Date Line</a:t>
+            </a:r>
+            <a:endParaRPr lang="en-US" sz="4000" dirty="0"/>
+          </a:p>
+        </p:txBody>
+      </p:sp>
+      <p:sp>
+        <p:nvSpPr>
+          <p:cNvPr id="25" name="Slide Number Placeholder 0"/>
+          <p:cNvSpPr>
+            <a:spLocks noGrp="1"/>
+          </p:cNvSpPr>
+          <p:nvPr>
+            <p:ph type="sldNum" sz="quarter" idx="4294967295"/>
+          </p:nvPr>
+        </p:nvSpPr>
+        <p:spPr>
+          <a:xfrm>
+            <a:off x="27432" y="91440"/>
+            <a:ext cx="585216" cy="475488"/>
+          </a:xfrm>
+          <a:prstGeom prst="rect">
+            <a:avLst/>
+          </a:prstGeom>
+          <a:extLst>
+            <a:ext uri="{C572A759-6A51-4108-AA02-DFA0A04FC94B}">
+              <ma14:wrappingTextBoxFlag xmlns:ma14="http://schemas.microsoft.com/office/mac/drawingml/2011/main" val="0"/>
+            </a:ext>
+          </a:extLst>
+        </p:spPr>
+        <p:txBody>
+          <a:bodyPr/>
+          <a:lstStyle>
+            <a:lvl1pPr>
+              <a:defRPr sz="2000">
+                <a:solidFill>
+                  <a:srgbClr val="FFFFFF"/>
+                </a:solidFill>
+                <a:latin typeface="Calibri"/>
+                <a:ea typeface="Calibri"/>
+                <a:cs typeface="Calibri"/>
+              </a:defRPr>
+            </a:lvl1pPr>
+          </a:lstStyle>
+          <a:p>
+            <a:pPr algn="ctr"/>
+            <a:fld id="{F7021451-1387-4CA6-816F-3879F97B5CBC}" type="slidenum">
+              <a:rPr b="1" lang="en-US"/>
+              <a:t>56</a:t>
+            </a:fld>
+            <a:endParaRPr lang="en-US"/>
+          </a:p>
+        </p:txBody>
+      </p:sp>
+    </p:spTree>
+  </p:cSld>
+  <p:clrMapOvr>
+    <a:masterClrMapping/>
+  </p:clrMapOvr>
+</p:sld>
+</file>
+
+<file path=ppt/slides/slide57.xml><?xml version="1.0" encoding="utf-8"?>
+<p:sld xmlns:a="http://schemas.openxmlformats.org/drawingml/2006/main" xmlns:r="http://schemas.openxmlformats.org/officeDocument/2006/relationships" xmlns:p="http://schemas.openxmlformats.org/presentationml/2006/main">
+  <p:cSld name="Slide 57">
+    <p:spTree>
+      <p:nvGrpSpPr>
+        <p:cNvPr id="1" name=""/>
+        <p:cNvGrpSpPr/>
+        <p:nvPr/>
+      </p:nvGrpSpPr>
+      <p:grpSpPr>
+        <a:xfrm>
+          <a:off x="0" y="0"/>
+          <a:ext cx="0" cy="0"/>
+          <a:chOff x="0" y="0"/>
+          <a:chExt cx="0" cy="0"/>
+        </a:xfrm>
+      </p:grpSpPr>
+      <p:sp>
+        <p:nvSpPr>
+          <p:cNvPr id="2" name="Text 0"/>
+          <p:cNvSpPr/>
+          <p:nvPr/>
+        </p:nvSpPr>
+        <p:spPr>
+          <a:xfrm>
+            <a:off x="457200" y="713232"/>
+            <a:ext cx="11368735" cy="274320"/>
+          </a:xfrm>
+          <a:prstGeom prst="rect">
+            <a:avLst/>
+          </a:prstGeom>
+          <a:noFill/>
+          <a:ln/>
+        </p:spPr>
+        <p:txBody>
+          <a:bodyPr wrap="square" lIns="0" tIns="0" rIns="0" bIns="0" rtlCol="0" anchor="ctr"/>
+          <a:lstStyle/>
+          <a:p>
+            <a:pPr algn="r" indent="0" marL="0">
+              <a:buNone/>
+            </a:pPr>
+            <a:r>
+              <a:rPr lang="en-US" sz="1400" b="1" dirty="0">
+                <a:solidFill>
+                  <a:srgbClr val="1C3F6E"/>
+                </a:solidFill>
+                <a:latin typeface="Calibri" pitchFamily="34" charset="0"/>
+                <a:ea typeface="Calibri" pitchFamily="34" charset="-122"/>
+                <a:cs typeface="Calibri" pitchFamily="34" charset="-120"/>
+              </a:rPr>
+              <a:t>BILINGUAL GAME</a:t>
+            </a:r>
+            <a:endParaRPr lang="en-US" sz="1400" dirty="0"/>
+          </a:p>
+        </p:txBody>
+      </p:sp>
+      <p:sp>
+        <p:nvSpPr>
+          <p:cNvPr id="3" name="Text 1"/>
+          <p:cNvSpPr/>
+          <p:nvPr/>
+        </p:nvSpPr>
+        <p:spPr>
+          <a:xfrm>
+            <a:off x="457200" y="1005840"/>
+            <a:ext cx="11277295" cy="731520"/>
+          </a:xfrm>
+          <a:prstGeom prst="rect">
+            <a:avLst/>
+          </a:prstGeom>
+          <a:noFill/>
+          <a:ln/>
+        </p:spPr>
+        <p:txBody>
+          <a:bodyPr wrap="square" lIns="0" tIns="0" rIns="0" bIns="0" rtlCol="0" anchor="ctr"/>
+          <a:lstStyle/>
+          <a:p>
+            <a:pPr algn="ctr" indent="0" marL="0">
+              <a:buNone/>
+            </a:pPr>
+            <a:r>
+              <a:rPr lang="en-US" sz="3600" b="1" dirty="0">
+                <a:solidFill>
+                  <a:srgbClr val="990011"/>
+                </a:solidFill>
+                <a:latin typeface="Times New Roman" pitchFamily="34" charset="0"/>
+                <a:ea typeface="Times New Roman" pitchFamily="34" charset="-122"/>
+                <a:cs typeface="Times New Roman" pitchFamily="34" charset="-120"/>
+              </a:rPr>
               <a:t>Bilingual Game (Jeu Bilingue)</a:t>
             </a:r>
             <a:endParaRPr lang="en-US" sz="3600" dirty="0"/>
@@ -15963,7 +21096,7 @@
       </p:sp>
       <p:graphicFrame>
         <p:nvGraphicFramePr>
-          <p:cNvPr id="45" name="Table 0"/>
+          <p:cNvPr id="58" name="Table 0"/>
           <p:cNvGraphicFramePr>
             <a:graphicFrameLocks noGrp="1"/>
           </p:cNvGraphicFramePr>
@@ -17275,7 +22408,7 @@
             <a:pPr algn="ctr"/>
             <a:fld id="{F7021451-1387-4CA6-816F-3879F97B5CBC}" type="slidenum">
               <a:rPr b="1" lang="en-US"/>
-              <a:t>44</a:t>
+              <a:t>57</a:t>
             </a:fld>
             <a:endParaRPr lang="en-US"/>
           </a:p>
@@ -17289,9 +22422,9 @@
 </p:sld>
 </file>
 
-<file path=ppt/slides/slide45.xml><?xml version="1.0" encoding="utf-8"?>
+<file path=ppt/slides/slide58.xml><?xml version="1.0" encoding="utf-8"?>
 <p:sld xmlns:a="http://schemas.openxmlformats.org/drawingml/2006/main" xmlns:r="http://schemas.openxmlformats.org/officeDocument/2006/relationships" xmlns:p="http://schemas.openxmlformats.org/presentationml/2006/main">
-  <p:cSld name="Slide 45">
+  <p:cSld name="Slide 58">
     <p:spTree>
       <p:nvGrpSpPr>
         <p:cNvPr id="1" name=""/>
@@ -17386,7 +22519,7 @@
       </p:sp>
       <p:graphicFrame>
         <p:nvGraphicFramePr>
-          <p:cNvPr id="46" name="Table 0"/>
+          <p:cNvPr id="59" name="Table 0"/>
           <p:cNvGraphicFramePr>
             <a:graphicFrameLocks noGrp="1"/>
           </p:cNvGraphicFramePr>
@@ -18008,7 +23141,7 @@
             <a:pPr algn="ctr"/>
             <a:fld id="{F7021451-1387-4CA6-816F-3879F97B5CBC}" type="slidenum">
               <a:rPr b="1" lang="en-US"/>
-              <a:t>45</a:t>
+              <a:t>58</a:t>
             </a:fld>
             <a:endParaRPr lang="en-US"/>
           </a:p>
@@ -18022,9 +23155,9 @@
 </p:sld>
 </file>
 
-<file path=ppt/slides/slide46.xml><?xml version="1.0" encoding="utf-8"?>
+<file path=ppt/slides/slide59.xml><?xml version="1.0" encoding="utf-8"?>
 <p:sld xmlns:a="http://schemas.openxmlformats.org/drawingml/2006/main" xmlns:r="http://schemas.openxmlformats.org/officeDocument/2006/relationships" xmlns:p="http://schemas.openxmlformats.org/presentationml/2006/main">
-  <p:cSld name="Slide 46">
+  <p:cSld name="Slide 59">
     <p:spTree>
       <p:nvGrpSpPr>
         <p:cNvPr id="1" name=""/>
@@ -18119,7 +23252,7 @@
       </p:sp>
       <p:graphicFrame>
         <p:nvGraphicFramePr>
-          <p:cNvPr id="47" name="Table 0"/>
+          <p:cNvPr id="60" name="Table 0"/>
           <p:cNvGraphicFramePr>
             <a:graphicFrameLocks noGrp="1"/>
           </p:cNvGraphicFramePr>
@@ -18229,7 +23362,7 @@
                           <a:ea typeface="Calibri" pitchFamily="34" charset="-122"/>
                           <a:cs typeface="Calibri" pitchFamily="34" charset="-120"/>
                         </a:rPr>
-                        <a:t>Meaning and Major Lines; Characteristics; Longitudes; Geographical Coordinates.</a:t>
+                        <a:t>DEFINITIONS; Major Lines of Latitude; Characteristics of Latitudes; Major Lines of Longitude; Characteristics of Longitudes; Differences between Latitudes and Longitudes; Geographical Coordinates.</a:t>
                       </a:r>
                       <a:endParaRPr lang="en-US" sz="1600" dirty="0">
                         <a:latin typeface="Calibri" charset="0"/>
@@ -18879,771 +24012,7 @@
             <a:pPr algn="ctr"/>
             <a:fld id="{F7021451-1387-4CA6-816F-3879F97B5CBC}" type="slidenum">
               <a:rPr b="1" lang="en-US"/>
-              <a:t>46</a:t>
-            </a:fld>
-            <a:endParaRPr lang="en-US"/>
-          </a:p>
-        </p:txBody>
-      </p:sp>
-    </p:spTree>
-  </p:cSld>
-  <p:clrMapOvr>
-    <a:masterClrMapping/>
-  </p:clrMapOvr>
-</p:sld>
-</file>
-
-<file path=ppt/slides/slide47.xml><?xml version="1.0" encoding="utf-8"?>
-<p:sld xmlns:a="http://schemas.openxmlformats.org/drawingml/2006/main" xmlns:r="http://schemas.openxmlformats.org/officeDocument/2006/relationships" xmlns:p="http://schemas.openxmlformats.org/presentationml/2006/main">
-  <p:cSld name="Slide 47">
-    <p:spTree>
-      <p:nvGrpSpPr>
-        <p:cNvPr id="1" name=""/>
-        <p:cNvGrpSpPr/>
-        <p:nvPr/>
-      </p:nvGrpSpPr>
-      <p:grpSpPr>
-        <a:xfrm>
-          <a:off x="0" y="0"/>
-          <a:ext cx="0" cy="0"/>
-          <a:chOff x="0" y="0"/>
-          <a:chExt cx="0" cy="0"/>
-        </a:xfrm>
-      </p:grpSpPr>
-      <p:sp>
-        <p:nvSpPr>
-          <p:cNvPr id="2" name="Text 0"/>
-          <p:cNvSpPr/>
-          <p:nvPr/>
-        </p:nvSpPr>
-        <p:spPr>
-          <a:xfrm>
-            <a:off x="457200" y="713232"/>
-            <a:ext cx="11368735" cy="274320"/>
-          </a:xfrm>
-          <a:prstGeom prst="rect">
-            <a:avLst/>
-          </a:prstGeom>
-          <a:noFill/>
-          <a:ln/>
-        </p:spPr>
-        <p:txBody>
-          <a:bodyPr wrap="square" lIns="0" tIns="0" rIns="0" bIns="0" rtlCol="0" anchor="ctr"/>
-          <a:lstStyle/>
-          <a:p>
-            <a:pPr algn="r" indent="0" marL="0">
-              <a:buNone/>
-            </a:pPr>
-            <a:r>
-              <a:rPr lang="en-US" sz="1400" b="1" dirty="0">
-                <a:solidFill>
-                  <a:srgbClr val="1C3F6E"/>
-                </a:solidFill>
-                <a:latin typeface="Calibri" pitchFamily="34" charset="0"/>
-                <a:ea typeface="Calibri" pitchFamily="34" charset="-122"/>
-                <a:cs typeface="Calibri" pitchFamily="34" charset="-120"/>
-              </a:rPr>
-              <a:t>TEACHER'S NOTE</a:t>
-            </a:r>
-            <a:endParaRPr lang="en-US" sz="1400" dirty="0"/>
-          </a:p>
-        </p:txBody>
-      </p:sp>
-      <p:pic>
-        <p:nvPicPr>
-          <p:cNvPr id="3" name="Image 0" descr="/home/claude/f4/img/minesec_sheet.png">    </p:cNvPr>
-          <p:cNvPicPr>
-            <a:picLocks noChangeAspect="1"/>
-          </p:cNvPicPr>
-          <p:nvPr/>
-        </p:nvPicPr>
-        <p:blipFill>
-          <a:blip r:embed="rId1"/>
-          <a:stretch>
-            <a:fillRect/>
-          </a:stretch>
-        </p:blipFill>
-        <p:spPr>
-          <a:xfrm>
-            <a:off x="0" y="658368"/>
-            <a:ext cx="5120640" cy="5833872"/>
-          </a:xfrm>
-          <a:prstGeom prst="rect">
-            <a:avLst/>
-          </a:prstGeom>
-        </p:spPr>
-      </p:pic>
-      <p:sp>
-        <p:nvSpPr>
-          <p:cNvPr id="4" name="Text 1"/>
-          <p:cNvSpPr/>
-          <p:nvPr/>
-        </p:nvSpPr>
-        <p:spPr>
-          <a:xfrm>
-            <a:off x="5349240" y="1005840"/>
-            <a:ext cx="6522415" cy="731520"/>
-          </a:xfrm>
-          <a:prstGeom prst="rect">
-            <a:avLst/>
-          </a:prstGeom>
-          <a:noFill/>
-          <a:ln/>
-        </p:spPr>
-        <p:txBody>
-          <a:bodyPr wrap="square" lIns="0" tIns="0" rIns="0" bIns="0" rtlCol="0" anchor="ctr">
-            <a:normAutofit/>
-          </a:bodyPr>
-          <a:lstStyle/>
-          <a:p>
-            <a:pPr algn="ctr" indent="0" marL="0">
-              <a:buNone/>
-            </a:pPr>
-            <a:r>
-              <a:rPr lang="en-US" sz="3600" b="1" dirty="0">
-                <a:solidFill>
-                  <a:srgbClr val="990011"/>
-                </a:solidFill>
-                <a:latin typeface="Times New Roman" pitchFamily="34" charset="0"/>
-                <a:ea typeface="Times New Roman" pitchFamily="34" charset="-122"/>
-                <a:cs typeface="Times New Roman" pitchFamily="34" charset="-120"/>
-              </a:rPr>
-              <a:t>Teacher's Note</a:t>
-            </a:r>
-            <a:endParaRPr lang="en-US" sz="3600" dirty="0"/>
-          </a:p>
-        </p:txBody>
-      </p:sp>
-      <p:sp>
-        <p:nvSpPr>
-          <p:cNvPr id="5" name="Text 2"/>
-          <p:cNvSpPr/>
-          <p:nvPr/>
-        </p:nvSpPr>
-        <p:spPr>
-          <a:xfrm>
-            <a:off x="5349240" y="1783080"/>
-            <a:ext cx="6522415" cy="4663440"/>
-          </a:xfrm>
-          <a:prstGeom prst="rect">
-            <a:avLst/>
-          </a:prstGeom>
-          <a:noFill/>
-          <a:ln/>
-        </p:spPr>
-        <p:txBody>
-          <a:bodyPr wrap="square" lIns="0" tIns="0" rIns="0" bIns="0" rtlCol="0" anchor="t"/>
-          <a:lstStyle/>
-          <a:p>
-            <a:pPr algn="l" marL="342900" indent="-342900">
-              <a:spcAft>
-                <a:spcPts val="800"/>
-              </a:spcAft>
-              <a:buSzPct val="100000"/>
-              <a:buChar char="•"/>
-            </a:pPr>
-            <a:r>
-              <a:rPr lang="en-US" sz="2000" dirty="0">
-                <a:solidFill>
-                  <a:srgbClr val="111111"/>
-                </a:solidFill>
-                <a:latin typeface="Calibri" pitchFamily="34" charset="0"/>
-                <a:ea typeface="Calibri" pitchFamily="34" charset="-122"/>
-                <a:cs typeface="Calibri" pitchFamily="34" charset="-120"/>
-              </a:rPr>
-              <a:t>Timing: Homework correction, plan, objectives 4 min | Recall, situation, action 6 min | 3 activities 12 min | Board summary (copying) 15 min | Evaluation, remediation 5 min | Homework, next lesson 3 min | Logbook 5 min</a:t>
-            </a:r>
-            <a:endParaRPr lang="en-US" sz="2000" dirty="0"/>
-          </a:p>
-          <a:p>
-            <a:pPr algn="l" marL="342900" indent="-342900">
-              <a:spcAft>
-                <a:spcPts val="800"/>
-              </a:spcAft>
-              <a:buSzPct val="100000"/>
-              <a:buChar char="•"/>
-            </a:pPr>
-            <a:r>
-              <a:rPr lang="en-US" sz="2000" dirty="0">
-                <a:solidFill>
-                  <a:srgbClr val="111111"/>
-                </a:solidFill>
-                <a:latin typeface="Calibri" pitchFamily="34" charset="0"/>
-                <a:ea typeface="Calibri" pitchFamily="34" charset="-122"/>
-                <a:cs typeface="Calibri" pitchFamily="34" charset="-120"/>
-              </a:rPr>
-              <a:t>Without the projector (Activity 1): draw a circle with five lines across it on the board.</a:t>
-            </a:r>
-            <a:endParaRPr lang="en-US" sz="2000" dirty="0"/>
-          </a:p>
-          <a:p>
-            <a:pPr algn="l" marL="342900" indent="-342900">
-              <a:spcAft>
-                <a:spcPts val="800"/>
-              </a:spcAft>
-              <a:buSzPct val="100000"/>
-              <a:buChar char="•"/>
-            </a:pPr>
-            <a:r>
-              <a:rPr lang="en-US" sz="2000" dirty="0">
-                <a:solidFill>
-                  <a:srgbClr val="111111"/>
-                </a:solidFill>
-                <a:latin typeface="Calibri" pitchFamily="34" charset="0"/>
-                <a:ea typeface="Calibri" pitchFamily="34" charset="-122"/>
-                <a:cs typeface="Calibri" pitchFamily="34" charset="-120"/>
-              </a:rPr>
-              <a:t>Without the projector (Activity 2): draw lines from the top to the bottom of a circle.</a:t>
-            </a:r>
-            <a:endParaRPr lang="en-US" sz="2000" dirty="0"/>
-          </a:p>
-          <a:p>
-            <a:pPr algn="l" marL="342900" indent="-342900">
-              <a:spcAft>
-                <a:spcPts val="800"/>
-              </a:spcAft>
-              <a:buSzPct val="100000"/>
-              <a:buChar char="•"/>
-            </a:pPr>
-            <a:r>
-              <a:rPr lang="en-US" sz="2000" dirty="0">
-                <a:solidFill>
-                  <a:srgbClr val="111111"/>
-                </a:solidFill>
-                <a:latin typeface="Calibri" pitchFamily="34" charset="0"/>
-                <a:ea typeface="Calibri" pitchFamily="34" charset="-122"/>
-                <a:cs typeface="Calibri" pitchFamily="34" charset="-120"/>
-              </a:rPr>
-              <a:t>Without the projector (Activity 3): draw a grid on the board and place a dot for Garoua.</a:t>
-            </a:r>
-            <a:endParaRPr lang="en-US" sz="2000" dirty="0"/>
-          </a:p>
-        </p:txBody>
-      </p:sp>
-      <p:sp>
-        <p:nvSpPr>
-          <p:cNvPr id="25" name="Slide Number Placeholder 0"/>
-          <p:cNvSpPr>
-            <a:spLocks noGrp="1"/>
-          </p:cNvSpPr>
-          <p:nvPr>
-            <p:ph type="sldNum" sz="quarter" idx="4294967295"/>
-          </p:nvPr>
-        </p:nvSpPr>
-        <p:spPr>
-          <a:xfrm>
-            <a:off x="27432" y="91440"/>
-            <a:ext cx="585216" cy="475488"/>
-          </a:xfrm>
-          <a:prstGeom prst="rect">
-            <a:avLst/>
-          </a:prstGeom>
-          <a:extLst>
-            <a:ext uri="{C572A759-6A51-4108-AA02-DFA0A04FC94B}">
-              <ma14:wrappingTextBoxFlag xmlns:ma14="http://schemas.microsoft.com/office/mac/drawingml/2011/main" val="0"/>
-            </a:ext>
-          </a:extLst>
-        </p:spPr>
-        <p:txBody>
-          <a:bodyPr/>
-          <a:lstStyle>
-            <a:lvl1pPr>
-              <a:defRPr sz="2000">
-                <a:solidFill>
-                  <a:srgbClr val="FFFFFF"/>
-                </a:solidFill>
-                <a:latin typeface="Calibri"/>
-                <a:ea typeface="Calibri"/>
-                <a:cs typeface="Calibri"/>
-              </a:defRPr>
-            </a:lvl1pPr>
-          </a:lstStyle>
-          <a:p>
-            <a:pPr algn="ctr"/>
-            <a:fld id="{F7021451-1387-4CA6-816F-3879F97B5CBC}" type="slidenum">
-              <a:rPr b="1" lang="en-US"/>
-              <a:t>47</a:t>
-            </a:fld>
-            <a:endParaRPr lang="en-US"/>
-          </a:p>
-        </p:txBody>
-      </p:sp>
-    </p:spTree>
-  </p:cSld>
-  <p:clrMapOvr>
-    <a:masterClrMapping/>
-  </p:clrMapOvr>
-</p:sld>
-</file>
-
-<file path=ppt/slides/slide48.xml><?xml version="1.0" encoding="utf-8"?>
-<p:sld xmlns:a="http://schemas.openxmlformats.org/drawingml/2006/main" xmlns:r="http://schemas.openxmlformats.org/officeDocument/2006/relationships" xmlns:p="http://schemas.openxmlformats.org/presentationml/2006/main">
-  <p:cSld name="Slide 48">
-    <p:spTree>
-      <p:nvGrpSpPr>
-        <p:cNvPr id="1" name=""/>
-        <p:cNvGrpSpPr/>
-        <p:nvPr/>
-      </p:nvGrpSpPr>
-      <p:grpSpPr>
-        <a:xfrm>
-          <a:off x="0" y="0"/>
-          <a:ext cx="0" cy="0"/>
-          <a:chOff x="0" y="0"/>
-          <a:chExt cx="0" cy="0"/>
-        </a:xfrm>
-      </p:grpSpPr>
-      <p:sp>
-        <p:nvSpPr>
-          <p:cNvPr id="2" name="Text 0"/>
-          <p:cNvSpPr/>
-          <p:nvPr/>
-        </p:nvSpPr>
-        <p:spPr>
-          <a:xfrm>
-            <a:off x="457200" y="713232"/>
-            <a:ext cx="11368735" cy="274320"/>
-          </a:xfrm>
-          <a:prstGeom prst="rect">
-            <a:avLst/>
-          </a:prstGeom>
-          <a:noFill/>
-          <a:ln/>
-        </p:spPr>
-        <p:txBody>
-          <a:bodyPr wrap="square" lIns="0" tIns="0" rIns="0" bIns="0" rtlCol="0" anchor="ctr"/>
-          <a:lstStyle/>
-          <a:p>
-            <a:pPr algn="r" indent="0" marL="0">
-              <a:buNone/>
-            </a:pPr>
-            <a:r>
-              <a:rPr lang="en-US" sz="1400" b="1" dirty="0">
-                <a:solidFill>
-                  <a:srgbClr val="1C3F6E"/>
-                </a:solidFill>
-                <a:latin typeface="Calibri" pitchFamily="34" charset="0"/>
-                <a:ea typeface="Calibri" pitchFamily="34" charset="-122"/>
-                <a:cs typeface="Calibri" pitchFamily="34" charset="-120"/>
-              </a:rPr>
-              <a:t>REFERENCES</a:t>
-            </a:r>
-            <a:endParaRPr lang="en-US" sz="1400" dirty="0"/>
-          </a:p>
-        </p:txBody>
-      </p:sp>
-      <p:pic>
-        <p:nvPicPr>
-          <p:cNvPr id="3" name="Image 0" descr="/home/claude/f4/img/minesec_sheet.png">    </p:cNvPr>
-          <p:cNvPicPr>
-            <a:picLocks noChangeAspect="1"/>
-          </p:cNvPicPr>
-          <p:nvPr/>
-        </p:nvPicPr>
-        <p:blipFill>
-          <a:blip r:embed="rId1"/>
-          <a:stretch>
-            <a:fillRect/>
-          </a:stretch>
-        </p:blipFill>
-        <p:spPr>
-          <a:xfrm>
-            <a:off x="0" y="658368"/>
-            <a:ext cx="5120640" cy="5833872"/>
-          </a:xfrm>
-          <a:prstGeom prst="rect">
-            <a:avLst/>
-          </a:prstGeom>
-        </p:spPr>
-      </p:pic>
-      <p:sp>
-        <p:nvSpPr>
-          <p:cNvPr id="4" name="Text 1"/>
-          <p:cNvSpPr/>
-          <p:nvPr/>
-        </p:nvSpPr>
-        <p:spPr>
-          <a:xfrm>
-            <a:off x="5349240" y="1005840"/>
-            <a:ext cx="6522415" cy="731520"/>
-          </a:xfrm>
-          <a:prstGeom prst="rect">
-            <a:avLst/>
-          </a:prstGeom>
-          <a:noFill/>
-          <a:ln/>
-        </p:spPr>
-        <p:txBody>
-          <a:bodyPr wrap="square" lIns="0" tIns="0" rIns="0" bIns="0" rtlCol="0" anchor="ctr">
-            <a:normAutofit/>
-          </a:bodyPr>
-          <a:lstStyle/>
-          <a:p>
-            <a:pPr algn="ctr" indent="0" marL="0">
-              <a:buNone/>
-            </a:pPr>
-            <a:r>
-              <a:rPr lang="en-US" sz="3600" b="1" dirty="0">
-                <a:solidFill>
-                  <a:srgbClr val="990011"/>
-                </a:solidFill>
-                <a:latin typeface="Times New Roman" pitchFamily="34" charset="0"/>
-                <a:ea typeface="Times New Roman" pitchFamily="34" charset="-122"/>
-                <a:cs typeface="Times New Roman" pitchFamily="34" charset="-120"/>
-              </a:rPr>
-              <a:t>References</a:t>
-            </a:r>
-            <a:endParaRPr lang="en-US" sz="3600" dirty="0"/>
-          </a:p>
-        </p:txBody>
-      </p:sp>
-      <p:sp>
-        <p:nvSpPr>
-          <p:cNvPr id="5" name="Text 2"/>
-          <p:cNvSpPr/>
-          <p:nvPr/>
-        </p:nvSpPr>
-        <p:spPr>
-          <a:xfrm>
-            <a:off x="5349240" y="1783080"/>
-            <a:ext cx="6522415" cy="4663440"/>
-          </a:xfrm>
-          <a:prstGeom prst="rect">
-            <a:avLst/>
-          </a:prstGeom>
-          <a:noFill/>
-          <a:ln/>
-        </p:spPr>
-        <p:txBody>
-          <a:bodyPr wrap="square" lIns="0" tIns="0" rIns="0" bIns="0" rtlCol="0" anchor="t"/>
-          <a:lstStyle/>
-          <a:p>
-            <a:pPr algn="l" marL="342900" indent="-342900">
-              <a:spcAft>
-                <a:spcPts val="800"/>
-              </a:spcAft>
-              <a:buSzPct val="100000"/>
-              <a:buChar char="•"/>
-            </a:pPr>
-            <a:r>
-              <a:rPr lang="en-US" sz="1800" dirty="0">
-                <a:solidFill>
-                  <a:srgbClr val="111111"/>
-                </a:solidFill>
-                <a:latin typeface="Calibri" pitchFamily="34" charset="0"/>
-                <a:ea typeface="Calibri" pitchFamily="34" charset="-122"/>
-                <a:cs typeface="Calibri" pitchFamily="34" charset="-120"/>
-              </a:rPr>
-              <a:t>National Geography Syllabus (MINESEC), Form 4 — The Earth as a Planet in the Solar System.</a:t>
-            </a:r>
-            <a:endParaRPr lang="en-US" sz="1800" dirty="0"/>
-          </a:p>
-          <a:p>
-            <a:pPr algn="l" marL="342900" indent="-342900">
-              <a:spcAft>
-                <a:spcPts val="800"/>
-              </a:spcAft>
-              <a:buSzPct val="100000"/>
-              <a:buChar char="•"/>
-            </a:pPr>
-            <a:r>
-              <a:rPr lang="en-US" sz="1800" dirty="0">
-                <a:solidFill>
-                  <a:srgbClr val="111111"/>
-                </a:solidFill>
-                <a:latin typeface="Calibri" pitchFamily="34" charset="0"/>
-                <a:ea typeface="Calibri" pitchFamily="34" charset="-122"/>
-                <a:cs typeface="Calibri" pitchFamily="34" charset="-120"/>
-              </a:rPr>
-              <a:t>Teacher's lesson notes (Form 4), checked and corrected where necessary.</a:t>
-            </a:r>
-            <a:endParaRPr lang="en-US" sz="1800" dirty="0"/>
-          </a:p>
-          <a:p>
-            <a:pPr algn="l" marL="342900" indent="-342900">
-              <a:spcAft>
-                <a:spcPts val="800"/>
-              </a:spcAft>
-              <a:buSzPct val="100000"/>
-              <a:buChar char="•"/>
-            </a:pPr>
-            <a:r>
-              <a:rPr lang="en-US" sz="1800" dirty="0">
-                <a:solidFill>
-                  <a:srgbClr val="111111"/>
-                </a:solidFill>
-                <a:latin typeface="Calibri" pitchFamily="34" charset="0"/>
-                <a:ea typeface="Calibri" pitchFamily="34" charset="-122"/>
-                <a:cs typeface="Calibri" pitchFamily="34" charset="-120"/>
-              </a:rPr>
-              <a:t>Diagrams and animations: drawn for this lesson (Geography Department).</a:t>
-            </a:r>
-            <a:endParaRPr lang="en-US" sz="1800" dirty="0"/>
-          </a:p>
-        </p:txBody>
-      </p:sp>
-      <p:sp>
-        <p:nvSpPr>
-          <p:cNvPr id="25" name="Slide Number Placeholder 0"/>
-          <p:cNvSpPr>
-            <a:spLocks noGrp="1"/>
-          </p:cNvSpPr>
-          <p:nvPr>
-            <p:ph type="sldNum" sz="quarter" idx="4294967295"/>
-          </p:nvPr>
-        </p:nvSpPr>
-        <p:spPr>
-          <a:xfrm>
-            <a:off x="27432" y="91440"/>
-            <a:ext cx="585216" cy="475488"/>
-          </a:xfrm>
-          <a:prstGeom prst="rect">
-            <a:avLst/>
-          </a:prstGeom>
-          <a:extLst>
-            <a:ext uri="{C572A759-6A51-4108-AA02-DFA0A04FC94B}">
-              <ma14:wrappingTextBoxFlag xmlns:ma14="http://schemas.microsoft.com/office/mac/drawingml/2011/main" val="0"/>
-            </a:ext>
-          </a:extLst>
-        </p:spPr>
-        <p:txBody>
-          <a:bodyPr/>
-          <a:lstStyle>
-            <a:lvl1pPr>
-              <a:defRPr sz="2000">
-                <a:solidFill>
-                  <a:srgbClr val="FFFFFF"/>
-                </a:solidFill>
-                <a:latin typeface="Calibri"/>
-                <a:ea typeface="Calibri"/>
-                <a:cs typeface="Calibri"/>
-              </a:defRPr>
-            </a:lvl1pPr>
-          </a:lstStyle>
-          <a:p>
-            <a:pPr algn="ctr"/>
-            <a:fld id="{F7021451-1387-4CA6-816F-3879F97B5CBC}" type="slidenum">
-              <a:rPr b="1" lang="en-US"/>
-              <a:t>48</a:t>
-            </a:fld>
-            <a:endParaRPr lang="en-US"/>
-          </a:p>
-        </p:txBody>
-      </p:sp>
-    </p:spTree>
-  </p:cSld>
-  <p:clrMapOvr>
-    <a:masterClrMapping/>
-  </p:clrMapOvr>
-</p:sld>
-</file>
-
-<file path=ppt/slides/slide5.xml><?xml version="1.0" encoding="utf-8"?>
-<p:sld xmlns:a="http://schemas.openxmlformats.org/drawingml/2006/main" xmlns:r="http://schemas.openxmlformats.org/officeDocument/2006/relationships" xmlns:p="http://schemas.openxmlformats.org/presentationml/2006/main">
-  <p:cSld name="Slide 5">
-    <p:spTree>
-      <p:nvGrpSpPr>
-        <p:cNvPr id="1" name=""/>
-        <p:cNvGrpSpPr/>
-        <p:nvPr/>
-      </p:nvGrpSpPr>
-      <p:grpSpPr>
-        <a:xfrm>
-          <a:off x="0" y="0"/>
-          <a:ext cx="0" cy="0"/>
-          <a:chOff x="0" y="0"/>
-          <a:chExt cx="0" cy="0"/>
-        </a:xfrm>
-      </p:grpSpPr>
-      <p:sp>
-        <p:nvSpPr>
-          <p:cNvPr id="2" name="Text 0"/>
-          <p:cNvSpPr/>
-          <p:nvPr/>
-        </p:nvSpPr>
-        <p:spPr>
-          <a:xfrm>
-            <a:off x="457200" y="713232"/>
-            <a:ext cx="11368735" cy="274320"/>
-          </a:xfrm>
-          <a:prstGeom prst="rect">
-            <a:avLst/>
-          </a:prstGeom>
-          <a:noFill/>
-          <a:ln/>
-        </p:spPr>
-        <p:txBody>
-          <a:bodyPr wrap="square" lIns="0" tIns="0" rIns="0" bIns="0" rtlCol="0" anchor="ctr"/>
-          <a:lstStyle/>
-          <a:p>
-            <a:pPr algn="r" indent="0" marL="0">
-              <a:buNone/>
-            </a:pPr>
-            <a:r>
-              <a:rPr lang="en-US" sz="1400" b="1" dirty="0">
-                <a:solidFill>
-                  <a:srgbClr val="1C3F6E"/>
-                </a:solidFill>
-                <a:latin typeface="Calibri" pitchFamily="34" charset="0"/>
-                <a:ea typeface="Calibri" pitchFamily="34" charset="-122"/>
-                <a:cs typeface="Calibri" pitchFamily="34" charset="-120"/>
-              </a:rPr>
-              <a:t>HOMEWORK CORRECTION</a:t>
-            </a:r>
-            <a:endParaRPr lang="en-US" sz="1400" dirty="0"/>
-          </a:p>
-        </p:txBody>
-      </p:sp>
-      <p:pic>
-        <p:nvPicPr>
-          <p:cNvPr id="3" name="Image 0" descr="/home/claude/f4/img/minesec_sheet.png">    </p:cNvPr>
-          <p:cNvPicPr>
-            <a:picLocks noChangeAspect="1"/>
-          </p:cNvPicPr>
-          <p:nvPr/>
-        </p:nvPicPr>
-        <p:blipFill>
-          <a:blip r:embed="rId1"/>
-          <a:stretch>
-            <a:fillRect/>
-          </a:stretch>
-        </p:blipFill>
-        <p:spPr>
-          <a:xfrm>
-            <a:off x="0" y="658368"/>
-            <a:ext cx="5120640" cy="5833872"/>
-          </a:xfrm>
-          <a:prstGeom prst="rect">
-            <a:avLst/>
-          </a:prstGeom>
-        </p:spPr>
-      </p:pic>
-      <p:sp>
-        <p:nvSpPr>
-          <p:cNvPr id="4" name="Text 1"/>
-          <p:cNvSpPr/>
-          <p:nvPr/>
-        </p:nvSpPr>
-        <p:spPr>
-          <a:xfrm>
-            <a:off x="5349240" y="1005840"/>
-            <a:ext cx="6522415" cy="731520"/>
-          </a:xfrm>
-          <a:prstGeom prst="rect">
-            <a:avLst/>
-          </a:prstGeom>
-          <a:noFill/>
-          <a:ln/>
-        </p:spPr>
-        <p:txBody>
-          <a:bodyPr wrap="square" lIns="0" tIns="0" rIns="0" bIns="0" rtlCol="0" anchor="ctr">
-            <a:normAutofit/>
-          </a:bodyPr>
-          <a:lstStyle/>
-          <a:p>
-            <a:pPr algn="ctr" indent="0" marL="0">
-              <a:buNone/>
-            </a:pPr>
-            <a:r>
-              <a:rPr lang="en-US" sz="3600" b="1" dirty="0">
-                <a:solidFill>
-                  <a:srgbClr val="990011"/>
-                </a:solidFill>
-                <a:latin typeface="Times New Roman" pitchFamily="34" charset="0"/>
-                <a:ea typeface="Times New Roman" pitchFamily="34" charset="-122"/>
-                <a:cs typeface="Times New Roman" pitchFamily="34" charset="-120"/>
-              </a:rPr>
-              <a:t>Correction: Possible Answer</a:t>
-            </a:r>
-            <a:endParaRPr lang="en-US" sz="3600" dirty="0"/>
-          </a:p>
-        </p:txBody>
-      </p:sp>
-      <p:sp>
-        <p:nvSpPr>
-          <p:cNvPr id="5" name="Text 2"/>
-          <p:cNvSpPr/>
-          <p:nvPr/>
-        </p:nvSpPr>
-        <p:spPr>
-          <a:xfrm>
-            <a:off x="5349240" y="1783080"/>
-            <a:ext cx="6522415" cy="4663440"/>
-          </a:xfrm>
-          <a:prstGeom prst="rect">
-            <a:avLst/>
-          </a:prstGeom>
-          <a:noFill/>
-          <a:ln/>
-        </p:spPr>
-        <p:txBody>
-          <a:bodyPr wrap="square" lIns="0" tIns="0" rIns="0" bIns="0" rtlCol="0" anchor="t"/>
-          <a:lstStyle/>
-          <a:p>
-            <a:pPr algn="l" indent="0" marL="0">
-              <a:spcAft>
-                <a:spcPts val="800"/>
-              </a:spcAft>
-              <a:buNone/>
-            </a:pPr>
-            <a:r>
-              <a:rPr lang="en-US" sz="4000" dirty="0">
-                <a:solidFill>
-                  <a:srgbClr val="111111"/>
-                </a:solidFill>
-                <a:latin typeface="Times New Roman" pitchFamily="34" charset="0"/>
-                <a:ea typeface="Times New Roman" pitchFamily="34" charset="-122"/>
-                <a:cs typeface="Times New Roman" pitchFamily="34" charset="-120"/>
-              </a:rPr>
-              <a:t>The numbers on the edges are latitudes (left and right) and longitudes (top and bottom). Near Garoua we read about 9° N and 13° E.</a:t>
-            </a:r>
-            <a:endParaRPr lang="en-US" sz="4000" dirty="0"/>
-          </a:p>
-        </p:txBody>
-      </p:sp>
-      <p:sp>
-        <p:nvSpPr>
-          <p:cNvPr id="25" name="Slide Number Placeholder 0"/>
-          <p:cNvSpPr>
-            <a:spLocks noGrp="1"/>
-          </p:cNvSpPr>
-          <p:nvPr>
-            <p:ph type="sldNum" sz="quarter" idx="4294967295"/>
-          </p:nvPr>
-        </p:nvSpPr>
-        <p:spPr>
-          <a:xfrm>
-            <a:off x="27432" y="91440"/>
-            <a:ext cx="585216" cy="475488"/>
-          </a:xfrm>
-          <a:prstGeom prst="rect">
-            <a:avLst/>
-          </a:prstGeom>
-          <a:extLst>
-            <a:ext uri="{C572A759-6A51-4108-AA02-DFA0A04FC94B}">
-              <ma14:wrappingTextBoxFlag xmlns:ma14="http://schemas.microsoft.com/office/mac/drawingml/2011/main" val="0"/>
-            </a:ext>
-          </a:extLst>
-        </p:spPr>
-        <p:txBody>
-          <a:bodyPr/>
-          <a:lstStyle>
-            <a:lvl1pPr>
-              <a:defRPr sz="2000">
-                <a:solidFill>
-                  <a:srgbClr val="FFFFFF"/>
-                </a:solidFill>
-                <a:latin typeface="Calibri"/>
-                <a:ea typeface="Calibri"/>
-                <a:cs typeface="Calibri"/>
-              </a:defRPr>
-            </a:lvl1pPr>
-          </a:lstStyle>
-          <a:p>
-            <a:pPr algn="ctr"/>
-            <a:fld id="{F7021451-1387-4CA6-816F-3879F97B5CBC}" type="slidenum">
-              <a:rPr b="1" lang="en-US"/>
-              <a:t>5</a:t>
+              <a:t>59</a:t>
             </a:fld>
             <a:endParaRPr lang="en-US"/>
           </a:p>
@@ -19975,6 +24344,551 @@
             <a:fld id="{F7021451-1387-4CA6-816F-3879F97B5CBC}" type="slidenum">
               <a:rPr b="1" lang="en-US"/>
               <a:t>6</a:t>
+            </a:fld>
+            <a:endParaRPr lang="en-US"/>
+          </a:p>
+        </p:txBody>
+      </p:sp>
+    </p:spTree>
+  </p:cSld>
+  <p:clrMapOvr>
+    <a:masterClrMapping/>
+  </p:clrMapOvr>
+</p:sld>
+</file>
+
+<file path=ppt/slides/slide60.xml><?xml version="1.0" encoding="utf-8"?>
+<p:sld xmlns:a="http://schemas.openxmlformats.org/drawingml/2006/main" xmlns:r="http://schemas.openxmlformats.org/officeDocument/2006/relationships" xmlns:p="http://schemas.openxmlformats.org/presentationml/2006/main">
+  <p:cSld name="Slide 60">
+    <p:spTree>
+      <p:nvGrpSpPr>
+        <p:cNvPr id="1" name=""/>
+        <p:cNvGrpSpPr/>
+        <p:nvPr/>
+      </p:nvGrpSpPr>
+      <p:grpSpPr>
+        <a:xfrm>
+          <a:off x="0" y="0"/>
+          <a:ext cx="0" cy="0"/>
+          <a:chOff x="0" y="0"/>
+          <a:chExt cx="0" cy="0"/>
+        </a:xfrm>
+      </p:grpSpPr>
+      <p:sp>
+        <p:nvSpPr>
+          <p:cNvPr id="2" name="Text 0"/>
+          <p:cNvSpPr/>
+          <p:nvPr/>
+        </p:nvSpPr>
+        <p:spPr>
+          <a:xfrm>
+            <a:off x="457200" y="713232"/>
+            <a:ext cx="11368735" cy="274320"/>
+          </a:xfrm>
+          <a:prstGeom prst="rect">
+            <a:avLst/>
+          </a:prstGeom>
+          <a:noFill/>
+          <a:ln/>
+        </p:spPr>
+        <p:txBody>
+          <a:bodyPr wrap="square" lIns="0" tIns="0" rIns="0" bIns="0" rtlCol="0" anchor="ctr"/>
+          <a:lstStyle/>
+          <a:p>
+            <a:pPr algn="r" indent="0" marL="0">
+              <a:buNone/>
+            </a:pPr>
+            <a:r>
+              <a:rPr lang="en-US" sz="1400" b="1" dirty="0">
+                <a:solidFill>
+                  <a:srgbClr val="1C3F6E"/>
+                </a:solidFill>
+                <a:latin typeface="Calibri" pitchFamily="34" charset="0"/>
+                <a:ea typeface="Calibri" pitchFamily="34" charset="-122"/>
+                <a:cs typeface="Calibri" pitchFamily="34" charset="-120"/>
+              </a:rPr>
+              <a:t>TEACHER'S NOTE</a:t>
+            </a:r>
+            <a:endParaRPr lang="en-US" sz="1400" dirty="0"/>
+          </a:p>
+        </p:txBody>
+      </p:sp>
+      <p:pic>
+        <p:nvPicPr>
+          <p:cNvPr id="3" name="Image 0" descr="/home/claude/f4/img/minesec_sheet.png">    </p:cNvPr>
+          <p:cNvPicPr>
+            <a:picLocks noChangeAspect="1"/>
+          </p:cNvPicPr>
+          <p:nvPr/>
+        </p:nvPicPr>
+        <p:blipFill>
+          <a:blip r:embed="rId1"/>
+          <a:stretch>
+            <a:fillRect/>
+          </a:stretch>
+        </p:blipFill>
+        <p:spPr>
+          <a:xfrm>
+            <a:off x="0" y="658368"/>
+            <a:ext cx="5120640" cy="5833872"/>
+          </a:xfrm>
+          <a:prstGeom prst="rect">
+            <a:avLst/>
+          </a:prstGeom>
+        </p:spPr>
+      </p:pic>
+      <p:sp>
+        <p:nvSpPr>
+          <p:cNvPr id="4" name="Text 1"/>
+          <p:cNvSpPr/>
+          <p:nvPr/>
+        </p:nvSpPr>
+        <p:spPr>
+          <a:xfrm>
+            <a:off x="5349240" y="1005840"/>
+            <a:ext cx="6522415" cy="731520"/>
+          </a:xfrm>
+          <a:prstGeom prst="rect">
+            <a:avLst/>
+          </a:prstGeom>
+          <a:noFill/>
+          <a:ln/>
+        </p:spPr>
+        <p:txBody>
+          <a:bodyPr wrap="square" lIns="0" tIns="0" rIns="0" bIns="0" rtlCol="0" anchor="ctr">
+            <a:normAutofit/>
+          </a:bodyPr>
+          <a:lstStyle/>
+          <a:p>
+            <a:pPr algn="ctr" indent="0" marL="0">
+              <a:buNone/>
+            </a:pPr>
+            <a:r>
+              <a:rPr lang="en-US" sz="3600" b="1" dirty="0">
+                <a:solidFill>
+                  <a:srgbClr val="990011"/>
+                </a:solidFill>
+                <a:latin typeface="Times New Roman" pitchFamily="34" charset="0"/>
+                <a:ea typeface="Times New Roman" pitchFamily="34" charset="-122"/>
+                <a:cs typeface="Times New Roman" pitchFamily="34" charset="-120"/>
+              </a:rPr>
+              <a:t>Teacher's Note</a:t>
+            </a:r>
+            <a:endParaRPr lang="en-US" sz="3600" dirty="0"/>
+          </a:p>
+        </p:txBody>
+      </p:sp>
+      <p:sp>
+        <p:nvSpPr>
+          <p:cNvPr id="5" name="Text 2"/>
+          <p:cNvSpPr/>
+          <p:nvPr/>
+        </p:nvSpPr>
+        <p:spPr>
+          <a:xfrm>
+            <a:off x="5349240" y="1783080"/>
+            <a:ext cx="6522415" cy="4663440"/>
+          </a:xfrm>
+          <a:prstGeom prst="rect">
+            <a:avLst/>
+          </a:prstGeom>
+          <a:noFill/>
+          <a:ln/>
+        </p:spPr>
+        <p:txBody>
+          <a:bodyPr wrap="square" lIns="0" tIns="0" rIns="0" bIns="0" rtlCol="0" anchor="t"/>
+          <a:lstStyle/>
+          <a:p>
+            <a:pPr algn="l" marL="342900" indent="-342900">
+              <a:spcAft>
+                <a:spcPts val="800"/>
+              </a:spcAft>
+              <a:buSzPct val="100000"/>
+              <a:buChar char="•"/>
+            </a:pPr>
+            <a:r>
+              <a:rPr lang="en-US" sz="2000" dirty="0">
+                <a:solidFill>
+                  <a:srgbClr val="111111"/>
+                </a:solidFill>
+                <a:latin typeface="Calibri" pitchFamily="34" charset="0"/>
+                <a:ea typeface="Calibri" pitchFamily="34" charset="-122"/>
+                <a:cs typeface="Calibri" pitchFamily="34" charset="-120"/>
+              </a:rPr>
+              <a:t>Timing: Homework correction, plan, objectives 4 min | Recall, situation, action 6 min | 3 activities 12 min | Board summary (copying) 15 min | Evaluation, remediation 5 min | Homework, next lesson 3 min | Logbook 5 min</a:t>
+            </a:r>
+            <a:endParaRPr lang="en-US" sz="2000" dirty="0"/>
+          </a:p>
+          <a:p>
+            <a:pPr algn="l" marL="342900" indent="-342900">
+              <a:spcAft>
+                <a:spcPts val="800"/>
+              </a:spcAft>
+              <a:buSzPct val="100000"/>
+              <a:buChar char="•"/>
+            </a:pPr>
+            <a:r>
+              <a:rPr lang="en-US" sz="2000" dirty="0">
+                <a:solidFill>
+                  <a:srgbClr val="111111"/>
+                </a:solidFill>
+                <a:latin typeface="Calibri" pitchFamily="34" charset="0"/>
+                <a:ea typeface="Calibri" pitchFamily="34" charset="-122"/>
+                <a:cs typeface="Calibri" pitchFamily="34" charset="-120"/>
+              </a:rPr>
+              <a:t>Without the projector (Activity 1): draw a circle with five lines across it on the board.</a:t>
+            </a:r>
+            <a:endParaRPr lang="en-US" sz="2000" dirty="0"/>
+          </a:p>
+          <a:p>
+            <a:pPr algn="l" marL="342900" indent="-342900">
+              <a:spcAft>
+                <a:spcPts val="800"/>
+              </a:spcAft>
+              <a:buSzPct val="100000"/>
+              <a:buChar char="•"/>
+            </a:pPr>
+            <a:r>
+              <a:rPr lang="en-US" sz="2000" dirty="0">
+                <a:solidFill>
+                  <a:srgbClr val="111111"/>
+                </a:solidFill>
+                <a:latin typeface="Calibri" pitchFamily="34" charset="0"/>
+                <a:ea typeface="Calibri" pitchFamily="34" charset="-122"/>
+                <a:cs typeface="Calibri" pitchFamily="34" charset="-120"/>
+              </a:rPr>
+              <a:t>Without the projector (Activity 2): draw lines from the top to the bottom of a circle.</a:t>
+            </a:r>
+            <a:endParaRPr lang="en-US" sz="2000" dirty="0"/>
+          </a:p>
+          <a:p>
+            <a:pPr algn="l" marL="342900" indent="-342900">
+              <a:spcAft>
+                <a:spcPts val="800"/>
+              </a:spcAft>
+              <a:buSzPct val="100000"/>
+              <a:buChar char="•"/>
+            </a:pPr>
+            <a:r>
+              <a:rPr lang="en-US" sz="2000" dirty="0">
+                <a:solidFill>
+                  <a:srgbClr val="111111"/>
+                </a:solidFill>
+                <a:latin typeface="Calibri" pitchFamily="34" charset="0"/>
+                <a:ea typeface="Calibri" pitchFamily="34" charset="-122"/>
+                <a:cs typeface="Calibri" pitchFamily="34" charset="-120"/>
+              </a:rPr>
+              <a:t>Without the projector (Activity 3): draw a grid on the board and place a dot for Garoua.</a:t>
+            </a:r>
+            <a:endParaRPr lang="en-US" sz="2000" dirty="0"/>
+          </a:p>
+        </p:txBody>
+      </p:sp>
+      <p:sp>
+        <p:nvSpPr>
+          <p:cNvPr id="25" name="Slide Number Placeholder 0"/>
+          <p:cNvSpPr>
+            <a:spLocks noGrp="1"/>
+          </p:cNvSpPr>
+          <p:nvPr>
+            <p:ph type="sldNum" sz="quarter" idx="4294967295"/>
+          </p:nvPr>
+        </p:nvSpPr>
+        <p:spPr>
+          <a:xfrm>
+            <a:off x="27432" y="91440"/>
+            <a:ext cx="585216" cy="475488"/>
+          </a:xfrm>
+          <a:prstGeom prst="rect">
+            <a:avLst/>
+          </a:prstGeom>
+          <a:extLst>
+            <a:ext uri="{C572A759-6A51-4108-AA02-DFA0A04FC94B}">
+              <ma14:wrappingTextBoxFlag xmlns:ma14="http://schemas.microsoft.com/office/mac/drawingml/2011/main" val="0"/>
+            </a:ext>
+          </a:extLst>
+        </p:spPr>
+        <p:txBody>
+          <a:bodyPr/>
+          <a:lstStyle>
+            <a:lvl1pPr>
+              <a:defRPr sz="2000">
+                <a:solidFill>
+                  <a:srgbClr val="FFFFFF"/>
+                </a:solidFill>
+                <a:latin typeface="Calibri"/>
+                <a:ea typeface="Calibri"/>
+                <a:cs typeface="Calibri"/>
+              </a:defRPr>
+            </a:lvl1pPr>
+          </a:lstStyle>
+          <a:p>
+            <a:pPr algn="ctr"/>
+            <a:fld id="{F7021451-1387-4CA6-816F-3879F97B5CBC}" type="slidenum">
+              <a:rPr b="1" lang="en-US"/>
+              <a:t>60</a:t>
+            </a:fld>
+            <a:endParaRPr lang="en-US"/>
+          </a:p>
+        </p:txBody>
+      </p:sp>
+    </p:spTree>
+  </p:cSld>
+  <p:clrMapOvr>
+    <a:masterClrMapping/>
+  </p:clrMapOvr>
+</p:sld>
+</file>
+
+<file path=ppt/slides/slide61.xml><?xml version="1.0" encoding="utf-8"?>
+<p:sld xmlns:a="http://schemas.openxmlformats.org/drawingml/2006/main" xmlns:r="http://schemas.openxmlformats.org/officeDocument/2006/relationships" xmlns:p="http://schemas.openxmlformats.org/presentationml/2006/main">
+  <p:cSld name="Slide 61">
+    <p:spTree>
+      <p:nvGrpSpPr>
+        <p:cNvPr id="1" name=""/>
+        <p:cNvGrpSpPr/>
+        <p:nvPr/>
+      </p:nvGrpSpPr>
+      <p:grpSpPr>
+        <a:xfrm>
+          <a:off x="0" y="0"/>
+          <a:ext cx="0" cy="0"/>
+          <a:chOff x="0" y="0"/>
+          <a:chExt cx="0" cy="0"/>
+        </a:xfrm>
+      </p:grpSpPr>
+      <p:sp>
+        <p:nvSpPr>
+          <p:cNvPr id="2" name="Text 0"/>
+          <p:cNvSpPr/>
+          <p:nvPr/>
+        </p:nvSpPr>
+        <p:spPr>
+          <a:xfrm>
+            <a:off x="457200" y="713232"/>
+            <a:ext cx="11368735" cy="274320"/>
+          </a:xfrm>
+          <a:prstGeom prst="rect">
+            <a:avLst/>
+          </a:prstGeom>
+          <a:noFill/>
+          <a:ln/>
+        </p:spPr>
+        <p:txBody>
+          <a:bodyPr wrap="square" lIns="0" tIns="0" rIns="0" bIns="0" rtlCol="0" anchor="ctr"/>
+          <a:lstStyle/>
+          <a:p>
+            <a:pPr algn="r" indent="0" marL="0">
+              <a:buNone/>
+            </a:pPr>
+            <a:r>
+              <a:rPr lang="en-US" sz="1400" b="1" dirty="0">
+                <a:solidFill>
+                  <a:srgbClr val="1C3F6E"/>
+                </a:solidFill>
+                <a:latin typeface="Calibri" pitchFamily="34" charset="0"/>
+                <a:ea typeface="Calibri" pitchFamily="34" charset="-122"/>
+                <a:cs typeface="Calibri" pitchFamily="34" charset="-120"/>
+              </a:rPr>
+              <a:t>REFERENCES</a:t>
+            </a:r>
+            <a:endParaRPr lang="en-US" sz="1400" dirty="0"/>
+          </a:p>
+        </p:txBody>
+      </p:sp>
+      <p:pic>
+        <p:nvPicPr>
+          <p:cNvPr id="3" name="Image 0" descr="/home/claude/f4/img/minesec_sheet.png">    </p:cNvPr>
+          <p:cNvPicPr>
+            <a:picLocks noChangeAspect="1"/>
+          </p:cNvPicPr>
+          <p:nvPr/>
+        </p:nvPicPr>
+        <p:blipFill>
+          <a:blip r:embed="rId1"/>
+          <a:stretch>
+            <a:fillRect/>
+          </a:stretch>
+        </p:blipFill>
+        <p:spPr>
+          <a:xfrm>
+            <a:off x="0" y="658368"/>
+            <a:ext cx="5120640" cy="5833872"/>
+          </a:xfrm>
+          <a:prstGeom prst="rect">
+            <a:avLst/>
+          </a:prstGeom>
+        </p:spPr>
+      </p:pic>
+      <p:sp>
+        <p:nvSpPr>
+          <p:cNvPr id="4" name="Text 1"/>
+          <p:cNvSpPr/>
+          <p:nvPr/>
+        </p:nvSpPr>
+        <p:spPr>
+          <a:xfrm>
+            <a:off x="5349240" y="1005840"/>
+            <a:ext cx="6522415" cy="731520"/>
+          </a:xfrm>
+          <a:prstGeom prst="rect">
+            <a:avLst/>
+          </a:prstGeom>
+          <a:noFill/>
+          <a:ln/>
+        </p:spPr>
+        <p:txBody>
+          <a:bodyPr wrap="square" lIns="0" tIns="0" rIns="0" bIns="0" rtlCol="0" anchor="ctr">
+            <a:normAutofit/>
+          </a:bodyPr>
+          <a:lstStyle/>
+          <a:p>
+            <a:pPr algn="ctr" indent="0" marL="0">
+              <a:buNone/>
+            </a:pPr>
+            <a:r>
+              <a:rPr lang="en-US" sz="3600" b="1" dirty="0">
+                <a:solidFill>
+                  <a:srgbClr val="990011"/>
+                </a:solidFill>
+                <a:latin typeface="Times New Roman" pitchFamily="34" charset="0"/>
+                <a:ea typeface="Times New Roman" pitchFamily="34" charset="-122"/>
+                <a:cs typeface="Times New Roman" pitchFamily="34" charset="-120"/>
+              </a:rPr>
+              <a:t>References</a:t>
+            </a:r>
+            <a:endParaRPr lang="en-US" sz="3600" dirty="0"/>
+          </a:p>
+        </p:txBody>
+      </p:sp>
+      <p:sp>
+        <p:nvSpPr>
+          <p:cNvPr id="5" name="Text 2"/>
+          <p:cNvSpPr/>
+          <p:nvPr/>
+        </p:nvSpPr>
+        <p:spPr>
+          <a:xfrm>
+            <a:off x="5349240" y="1783080"/>
+            <a:ext cx="6522415" cy="4663440"/>
+          </a:xfrm>
+          <a:prstGeom prst="rect">
+            <a:avLst/>
+          </a:prstGeom>
+          <a:noFill/>
+          <a:ln/>
+        </p:spPr>
+        <p:txBody>
+          <a:bodyPr wrap="square" lIns="0" tIns="0" rIns="0" bIns="0" rtlCol="0" anchor="t"/>
+          <a:lstStyle/>
+          <a:p>
+            <a:pPr algn="l" marL="342900" indent="-342900">
+              <a:spcAft>
+                <a:spcPts val="800"/>
+              </a:spcAft>
+              <a:buSzPct val="100000"/>
+              <a:buChar char="•"/>
+            </a:pPr>
+            <a:r>
+              <a:rPr lang="en-US" sz="1800" dirty="0">
+                <a:solidFill>
+                  <a:srgbClr val="111111"/>
+                </a:solidFill>
+                <a:latin typeface="Calibri" pitchFamily="34" charset="0"/>
+                <a:ea typeface="Calibri" pitchFamily="34" charset="-122"/>
+                <a:cs typeface="Calibri" pitchFamily="34" charset="-120"/>
+              </a:rPr>
+              <a:t>National Geography Syllabus (MINESEC), Form 4 — The Earth as a Planet in the Solar System.</a:t>
+            </a:r>
+            <a:endParaRPr lang="en-US" sz="1800" dirty="0"/>
+          </a:p>
+          <a:p>
+            <a:pPr algn="l" marL="342900" indent="-342900">
+              <a:spcAft>
+                <a:spcPts val="800"/>
+              </a:spcAft>
+              <a:buSzPct val="100000"/>
+              <a:buChar char="•"/>
+            </a:pPr>
+            <a:r>
+              <a:rPr lang="en-US" sz="1800" dirty="0">
+                <a:solidFill>
+                  <a:srgbClr val="111111"/>
+                </a:solidFill>
+                <a:latin typeface="Calibri" pitchFamily="34" charset="0"/>
+                <a:ea typeface="Calibri" pitchFamily="34" charset="-122"/>
+                <a:cs typeface="Calibri" pitchFamily="34" charset="-120"/>
+              </a:rPr>
+              <a:t>Teacher's lesson notes (Form 4), checked and corrected where necessary.</a:t>
+            </a:r>
+            <a:endParaRPr lang="en-US" sz="1800" dirty="0"/>
+          </a:p>
+          <a:p>
+            <a:pPr algn="l" marL="342900" indent="-342900">
+              <a:spcAft>
+                <a:spcPts val="800"/>
+              </a:spcAft>
+              <a:buSzPct val="100000"/>
+              <a:buChar char="•"/>
+            </a:pPr>
+            <a:r>
+              <a:rPr lang="en-US" sz="1800" dirty="0">
+                <a:solidFill>
+                  <a:srgbClr val="111111"/>
+                </a:solidFill>
+                <a:latin typeface="Calibri" pitchFamily="34" charset="0"/>
+                <a:ea typeface="Calibri" pitchFamily="34" charset="-122"/>
+                <a:cs typeface="Calibri" pitchFamily="34" charset="-120"/>
+              </a:rPr>
+              <a:t>Diagrams and animations: drawn for this lesson (Geography Department).</a:t>
+            </a:r>
+            <a:endParaRPr lang="en-US" sz="1800" dirty="0"/>
+          </a:p>
+        </p:txBody>
+      </p:sp>
+      <p:sp>
+        <p:nvSpPr>
+          <p:cNvPr id="25" name="Slide Number Placeholder 0"/>
+          <p:cNvSpPr>
+            <a:spLocks noGrp="1"/>
+          </p:cNvSpPr>
+          <p:nvPr>
+            <p:ph type="sldNum" sz="quarter" idx="4294967295"/>
+          </p:nvPr>
+        </p:nvSpPr>
+        <p:spPr>
+          <a:xfrm>
+            <a:off x="27432" y="91440"/>
+            <a:ext cx="585216" cy="475488"/>
+          </a:xfrm>
+          <a:prstGeom prst="rect">
+            <a:avLst/>
+          </a:prstGeom>
+          <a:extLst>
+            <a:ext uri="{C572A759-6A51-4108-AA02-DFA0A04FC94B}">
+              <ma14:wrappingTextBoxFlag xmlns:ma14="http://schemas.microsoft.com/office/mac/drawingml/2011/main" val="0"/>
+            </a:ext>
+          </a:extLst>
+        </p:spPr>
+        <p:txBody>
+          <a:bodyPr/>
+          <a:lstStyle>
+            <a:lvl1pPr>
+              <a:defRPr sz="2000">
+                <a:solidFill>
+                  <a:srgbClr val="FFFFFF"/>
+                </a:solidFill>
+                <a:latin typeface="Calibri"/>
+                <a:ea typeface="Calibri"/>
+                <a:cs typeface="Calibri"/>
+              </a:defRPr>
+            </a:lvl1pPr>
+          </a:lstStyle>
+          <a:p>
+            <a:pPr algn="ctr"/>
+            <a:fld id="{F7021451-1387-4CA6-816F-3879F97B5CBC}" type="slidenum">
+              <a:rPr b="1" lang="en-US"/>
+              <a:t>61</a:t>
             </a:fld>
             <a:endParaRPr lang="en-US"/>
           </a:p>

--- a/lecons/F3/03_FORM4_LESSON02_Latitudes_and_Longitudes.pptx
+++ b/lecons/F3/03_FORM4_LESSON02_Latitudes_and_Longitudes.pptx
@@ -3466,7 +3466,7 @@
           <a:p>
             <a:r>
               <a:rPr lang="en-US" dirty="0"/>
-              <a:t>Before we start the new lesson, let us correct the homework I gave you at the end of Further Study 1: The Universe and the Moon. The question was: Look at a map of Cameroon in your atlas. Find the numbers written on the edges of the map and copy the numbers written near Garoua. Take out your exercise books.</a:t>
+              <a:t>Before we start the new lesson, let us correct the homework I gave you at the end of Further Study 1: The Universe and the Moon. The question was: Give the value of the Equator and of the Greenwich Meridian. Take out your exercise books.</a:t>
             </a:r>
             <a:endParaRPr lang="en-US" dirty="0"/>
           </a:p>
@@ -4434,7 +4434,7 @@
           <a:p>
             <a:r>
               <a:rPr lang="en-US" dirty="0"/>
-              <a:t>Here is a good answer. The numbers on the edges are latitudes (left and right) and longitudes (top and bottom). Near Garoua we read about 9° N and 13° E. Compare it with your own answer and correct your work in red.</a:t>
+              <a:t>Here is a good answer. Both are 0°. Compare it with your own answer and correct your work in red.</a:t>
             </a:r>
             <a:endParaRPr lang="en-US" dirty="0"/>
           </a:p>
@@ -4962,7 +4962,7 @@
           <a:p>
             <a:r>
               <a:rPr lang="en-US" dirty="0"/>
-              <a:t>For your homework: Watch or listen to news about a flight from Douala to Paris or to Dubai. Write the name of the route and ask an adult why aeroplanes do not always fly in a straight line on a flat map. We shall correct it at the beginning of our next lesson.</a:t>
+              <a:t>For your homework: Define a great circle. We shall correct it at the beginning of our next lesson.</a:t>
             </a:r>
             <a:endParaRPr lang="en-US" dirty="0"/>
           </a:p>
@@ -16029,7 +16029,7 @@
                 <a:ea typeface="Times New Roman" pitchFamily="34" charset="-122"/>
                 <a:cs typeface="Times New Roman" pitchFamily="34" charset="-120"/>
               </a:rPr>
-              <a:t>Look at a map of Cameroon in your atlas. Find the numbers written on the edges of the map and copy the numbers written near Garoua.</a:t>
+              <a:t>Give the value of the Equator and of the Greenwich Meridian.</a:t>
             </a:r>
             <a:endParaRPr lang="en-US" sz="4000" dirty="0"/>
           </a:p>
@@ -19318,7 +19318,7 @@
                 <a:ea typeface="Times New Roman" pitchFamily="34" charset="-122"/>
                 <a:cs typeface="Times New Roman" pitchFamily="34" charset="-120"/>
               </a:rPr>
-              <a:t>The numbers on the edges are latitudes (left and right) and longitudes (top and bottom). Near Garoua we read about 9° N and 13° E.</a:t>
+              <a:t>Both are 0°.</a:t>
             </a:r>
             <a:endParaRPr lang="en-US" sz="4000" dirty="0"/>
           </a:p>
@@ -20698,7 +20698,7 @@
                 <a:ea typeface="Times New Roman" pitchFamily="34" charset="-122"/>
                 <a:cs typeface="Times New Roman" pitchFamily="34" charset="-120"/>
               </a:rPr>
-              <a:t>Watch or listen to news about a flight from Douala to Paris or to Dubai. Write the name of the route and ask an adult why aeroplanes do not always fly in a straight line on a flat map.</a:t>
+              <a:t>Define a great circle.</a:t>
             </a:r>
             <a:endParaRPr lang="en-US" sz="4000" dirty="0"/>
           </a:p>
@@ -23638,7 +23638,7 @@
                           <a:ea typeface="Calibri" pitchFamily="34" charset="-122"/>
                           <a:cs typeface="Calibri" pitchFamily="34" charset="-120"/>
                         </a:rPr>
-                        <a:t>Watch or listen to news about a flight from Douala to Paris or to Dubai. Write the name of the route and ask an adult why aeroplanes do not always fly in a straight line on a flat map.</a:t>
+                        <a:t>Define a great circle.</a:t>
                       </a:r>
                       <a:endParaRPr lang="en-US" sz="1600" dirty="0">
                         <a:latin typeface="Calibri" charset="0"/>
